--- a/assets/TRUST-AI-template.pptx
+++ b/assets/TRUST-AI-template.pptx
@@ -4,6 +4,9 @@
   <p:sldMasterIdLst>
     <p:sldMasterId id="2147483648" r:id="rId1"/>
   </p:sldMasterIdLst>
+  <p:notesMasterIdLst>
+    <p:notesMasterId r:id="rId11"/>
+  </p:notesMasterIdLst>
   <p:sldIdLst>
     <p:sldId id="256" r:id="rId2"/>
     <p:sldId id="257" r:id="rId3"/>
@@ -15,20 +18,17 @@
     <p:sldId id="263" r:id="rId9"/>
     <p:sldId id="264" r:id="rId10"/>
   </p:sldIdLst>
-  <p:notesMasterIdLst>
-    <p:notesMasterId r:id="rId11"/>
-  </p:notesMasterIdLst>
   <p:sldSz cx="12192000" cy="6858000"/>
   <p:notesSz cx="6858000" cy="12192000"/>
   <p:embeddedFontLst>
     <p:embeddedFont>
-      <p:font typeface="Space Grotesk"/>
-      <p:regular r:id="rId16"/>
-      <p:bold r:id="rId17"/>
+      <p:font typeface="JetBrains Mono" panose="02000009000000000000" pitchFamily="49" charset="0"/>
+      <p:regular r:id="rId12"/>
     </p:embeddedFont>
     <p:embeddedFont>
-      <p:font typeface="JetBrains Mono"/>
-      <p:regular r:id="rId18"/>
+      <p:font typeface="Space Grotesk" pitchFamily="2" charset="77"/>
+      <p:regular r:id="rId13"/>
+      <p:bold r:id="rId14"/>
     </p:embeddedFont>
   </p:embeddedFontLst>
   <p:defaultTextStyle>
@@ -126,13 +126,13 @@
   <p:extLst>
     <p:ext uri="{521415D9-36F7-43E2-AB2F-B90AF26B5E84}">
       <p14:sectionLst xmlns:p14="http://schemas.microsoft.com/office/powerpoint/2010/main">
-        <p14:section name="Opening" id="{408726c3-65c3-8016-a8c8-40aaa0c794c5}">
+        <p14:section name="Opening" id="{408726C3-65C3-8016-A8C8-40AAA0C794C5}">
           <p14:sldIdLst>
             <p14:sldId id="256"/>
             <p14:sldId id="257"/>
           </p14:sldIdLst>
         </p14:section>
-        <p14:section name="Content" id="{29f36c71-1815-ed0b-653f-2f54f9d84468}">
+        <p14:section name="Content" id="{29F36C71-1815-ED0B-653F-2F54F9D84468}">
           <p14:sldIdLst>
             <p14:sldId id="258"/>
             <p14:sldId id="259"/>
@@ -142,7 +142,7 @@
             <p14:sldId id="263"/>
           </p14:sldIdLst>
         </p14:section>
-        <p14:section name="Closing" id="{d06208c0-9364-1c16-4148-e7768ac95279}">
+        <p14:section name="Closing" id="{D06208C0-9364-1C16-4148-E7768AC95279}">
           <p14:sldIdLst>
             <p14:sldId id="264"/>
           </p14:sldIdLst>
@@ -157,9 +157,11 @@
 </file>
 
 <file path=ppt/charts/chart1.xml><?xml version="1.0" encoding="utf-8"?>
-<c:chartSpace xmlns:c="http://schemas.openxmlformats.org/drawingml/2006/chart" xmlns:a="http://schemas.openxmlformats.org/drawingml/2006/main" xmlns:r="http://schemas.openxmlformats.org/officeDocument/2006/relationships">
+<c:chartSpace xmlns:c="http://schemas.openxmlformats.org/drawingml/2006/chart" xmlns:a="http://schemas.openxmlformats.org/drawingml/2006/main" xmlns:r="http://schemas.openxmlformats.org/officeDocument/2006/relationships" xmlns:c16r2="http://schemas.microsoft.com/office/drawing/2015/06/chart">
   <c:date1904 val="0"/>
+  <c:lang val="it-IT"/>
   <c:roundedCorners val="1"/>
+  <c:style val="2"/>
   <c:chart>
     <c:autoTitleDeleted val="1"/>
     <c:plotArea>
@@ -191,18 +193,26 @@
           <c:invertIfNegative val="0"/>
           <c:dLbls>
             <c:numFmt formatCode="#,##0" sourceLinked="0"/>
+            <c:spPr>
+              <a:noFill/>
+              <a:ln>
+                <a:noFill/>
+              </a:ln>
+              <a:effectLst/>
+            </c:spPr>
             <c:txPr>
               <a:bodyPr/>
               <a:lstStyle/>
               <a:p>
                 <a:pPr>
-                  <a:defRPr b="0" i="0" strike="noStrike" sz="1100" u="none">
+                  <a:defRPr sz="1100" b="0" i="0" u="none" strike="noStrike">
                     <a:solidFill>
                       <a:srgbClr val="262628"/>
                     </a:solidFill>
                     <a:latin typeface="+mn-lt"/>
                   </a:defRPr>
                 </a:pPr>
+                <a:endParaRPr lang="it-IT"/>
               </a:p>
             </c:txPr>
             <c:showLegendKey val="0"/>
@@ -212,28 +222,31 @@
             <c:showPercent val="0"/>
             <c:showBubbleSize val="0"/>
             <c:showLeaderLines val="0"/>
+            <c:extLst>
+              <c:ext xmlns:c15="http://schemas.microsoft.com/office/drawing/2012/chart" uri="{CE6537A1-D6FC-4f65-9D91-7224C49458BB}">
+                <c15:showLeaderLines val="0"/>
+              </c:ext>
+            </c:extLst>
           </c:dLbls>
           <c:cat>
-            <c:multiLvlStrRef>
+            <c:strRef>
               <c:f>Sheet1!$A$2:$A$5</c:f>
-              <c:multiLvlStrCache>
+              <c:strCache>
                 <c:ptCount val="4"/>
-                <c:lvl>
-                  <c:pt idx="0">
-                    <c:v>Research</c:v>
-                  </c:pt>
-                  <c:pt idx="1">
-                    <c:v>Training</c:v>
-                  </c:pt>
-                  <c:pt idx="2">
-                    <c:v>Policy</c:v>
-                  </c:pt>
-                  <c:pt idx="3">
-                    <c:v>Outreach</c:v>
-                  </c:pt>
-                </c:lvl>
-              </c:multiLvlStrCache>
-            </c:multiLvlStrRef>
+                <c:pt idx="0">
+                  <c:v>Research</c:v>
+                </c:pt>
+                <c:pt idx="1">
+                  <c:v>Training</c:v>
+                </c:pt>
+                <c:pt idx="2">
+                  <c:v>Policy</c:v>
+                </c:pt>
+                <c:pt idx="3">
+                  <c:v>Outreach</c:v>
+                </c:pt>
+              </c:strCache>
+            </c:strRef>
           </c:cat>
           <c:val>
             <c:numRef>
@@ -256,6 +269,11 @@
               </c:numCache>
             </c:numRef>
           </c:val>
+          <c:extLst>
+            <c:ext xmlns:c16="http://schemas.microsoft.com/office/drawing/2014/chart" uri="{C3380CC4-5D6E-409C-BE32-E72D297353CC}">
+              <c16:uniqueId val="{00000000-87B4-CE44-AFD5-A90B171C4B6F}"/>
+            </c:ext>
+          </c:extLst>
         </c:ser>
         <c:ser>
           <c:idx val="1"/>
@@ -280,18 +298,26 @@
           <c:invertIfNegative val="0"/>
           <c:dLbls>
             <c:numFmt formatCode="#,##0" sourceLinked="0"/>
+            <c:spPr>
+              <a:noFill/>
+              <a:ln>
+                <a:noFill/>
+              </a:ln>
+              <a:effectLst/>
+            </c:spPr>
             <c:txPr>
               <a:bodyPr/>
               <a:lstStyle/>
               <a:p>
                 <a:pPr>
-                  <a:defRPr b="0" i="0" strike="noStrike" sz="1100" u="none">
+                  <a:defRPr sz="1100" b="0" i="0" u="none" strike="noStrike">
                     <a:solidFill>
                       <a:srgbClr val="262628"/>
                     </a:solidFill>
                     <a:latin typeface="+mn-lt"/>
                   </a:defRPr>
                 </a:pPr>
+                <a:endParaRPr lang="it-IT"/>
               </a:p>
             </c:txPr>
             <c:showLegendKey val="0"/>
@@ -301,28 +327,31 @@
             <c:showPercent val="0"/>
             <c:showBubbleSize val="0"/>
             <c:showLeaderLines val="0"/>
+            <c:extLst>
+              <c:ext xmlns:c15="http://schemas.microsoft.com/office/drawing/2012/chart" uri="{CE6537A1-D6FC-4f65-9D91-7224C49458BB}">
+                <c15:showLeaderLines val="0"/>
+              </c:ext>
+            </c:extLst>
           </c:dLbls>
           <c:cat>
-            <c:multiLvlStrRef>
+            <c:strRef>
               <c:f>Sheet1!$A$2:$A$5</c:f>
-              <c:multiLvlStrCache>
+              <c:strCache>
                 <c:ptCount val="4"/>
-                <c:lvl>
-                  <c:pt idx="0">
-                    <c:v>Research</c:v>
-                  </c:pt>
-                  <c:pt idx="1">
-                    <c:v>Training</c:v>
-                  </c:pt>
-                  <c:pt idx="2">
-                    <c:v>Policy</c:v>
-                  </c:pt>
-                  <c:pt idx="3">
-                    <c:v>Outreach</c:v>
-                  </c:pt>
-                </c:lvl>
-              </c:multiLvlStrCache>
-            </c:multiLvlStrRef>
+                <c:pt idx="0">
+                  <c:v>Research</c:v>
+                </c:pt>
+                <c:pt idx="1">
+                  <c:v>Training</c:v>
+                </c:pt>
+                <c:pt idx="2">
+                  <c:v>Policy</c:v>
+                </c:pt>
+                <c:pt idx="3">
+                  <c:v>Outreach</c:v>
+                </c:pt>
+              </c:strCache>
+            </c:strRef>
           </c:cat>
           <c:val>
             <c:numRef>
@@ -345,36 +374,23 @@
               </c:numCache>
             </c:numRef>
           </c:val>
+          <c:extLst>
+            <c:ext xmlns:c16="http://schemas.microsoft.com/office/drawing/2014/chart" uri="{C3380CC4-5D6E-409C-BE32-E72D297353CC}">
+              <c16:uniqueId val="{00000001-87B4-CE44-AFD5-A90B171C4B6F}"/>
+            </c:ext>
+          </c:extLst>
         </c:ser>
         <c:dLbls>
-          <c:numFmt formatCode="#,##0" sourceLinked="0"/>
-          <c:txPr>
-            <a:bodyPr/>
-            <a:lstStyle/>
-            <a:p>
-              <a:pPr>
-                <a:defRPr b="0" i="0" strike="noStrike" sz="1100" u="none">
-                  <a:solidFill>
-                    <a:srgbClr val="262628"/>
-                  </a:solidFill>
-                  <a:latin typeface="+mn-lt"/>
-                </a:defRPr>
-              </a:pPr>
-            </a:p>
-          </c:txPr>
           <c:showLegendKey val="0"/>
           <c:showVal val="1"/>
           <c:showCatName val="0"/>
           <c:showSerName val="0"/>
           <c:showPercent val="0"/>
           <c:showBubbleSize val="0"/>
-          <c:showLeaderLines val="0"/>
         </c:dLbls>
         <c:gapWidth val="60"/>
-        <c:overlap val="0"/>
         <c:axId val="2094734554"/>
         <c:axId val="2094734552"/>
-        <c:axId val="2094734556"/>
       </c:barChart>
       <c:catAx>
         <c:axId val="2094734554"/>
@@ -415,6 +431,7 @@
         <c:crosses val="autoZero"/>
         <c:auto val="1"/>
         <c:lblAlgn val="ctr"/>
+        <c:lblOffset val="100"/>
         <c:noMultiLvlLbl val="1"/>
       </c:catAx>
       <c:valAx>
@@ -495,6 +512,7 @@
     </c:legend>
     <c:plotVisOnly val="1"/>
     <c:dispBlanksAs val="span"/>
+    <c:showDLblsOverMax val="1"/>
   </c:chart>
   <c:spPr>
     <a:noFill/>
@@ -531,234 +549,10 @@
           <a:chExt cx="0" cy="0"/>
         </a:xfrm>
       </p:grpSpPr>
-      <p:sp>
-        <p:nvSpPr>
-          <p:cNvPr id="2" name="Header Placeholder 1"/>
-          <p:cNvSpPr>
-            <a:spLocks noGrp="1"/>
-          </p:cNvSpPr>
-          <p:nvPr>
-            <p:ph type="hdr" sz="quarter"/>
-          </p:nvPr>
-        </p:nvSpPr>
-        <p:spPr>
-          <a:xfrm>
-            <a:off x="0" y="0"/>
-            <a:ext cx="2971800" cy="458788"/>
-          </a:xfrm>
-          <a:prstGeom prst="rect">
-            <a:avLst/>
-          </a:prstGeom>
-        </p:spPr>
-        <p:txBody>
-          <a:bodyPr vert="horz" lIns="91440" tIns="45720" rIns="91440" bIns="45720" rtlCol="0"/>
-          <a:lstStyle>
-            <a:lvl1pPr algn="l">
-              <a:defRPr sz="1200"/>
-            </a:lvl1pPr>
-          </a:lstStyle>
-          <a:p>
-            <a:endParaRPr lang="en-US"/>
-          </a:p>
-        </p:txBody>
-      </p:sp>
-      <p:sp>
-        <p:nvSpPr>
-          <p:cNvPr id="3" name="Date Placeholder 2"/>
-          <p:cNvSpPr>
-            <a:spLocks noGrp="1"/>
-          </p:cNvSpPr>
-          <p:nvPr>
-            <p:ph type="dt" idx="1"/>
-          </p:nvPr>
-        </p:nvSpPr>
-        <p:spPr>
-          <a:xfrm>
-            <a:off x="3884613" y="0"/>
-            <a:ext cx="2971800" cy="458788"/>
-          </a:xfrm>
-          <a:prstGeom prst="rect">
-            <a:avLst/>
-          </a:prstGeom>
-        </p:spPr>
-        <p:txBody>
-          <a:bodyPr vert="horz" lIns="91440" tIns="45720" rIns="91440" bIns="45720" rtlCol="0"/>
-          <a:lstStyle>
-            <a:lvl1pPr algn="r">
-              <a:defRPr sz="1200"/>
-            </a:lvl1pPr>
-          </a:lstStyle>
-          <a:p>
-            <a:fld id="{5282F153-3F37-0F45-9E97-73ACFA13230C}" type="datetimeFigureOut">
-              <a:rPr lang="en-US"/>
-              <a:t>7/23/19</a:t>
-            </a:fld>
-            <a:endParaRPr lang="en-US"/>
-          </a:p>
-        </p:txBody>
-      </p:sp>
-      <p:sp>
-        <p:nvSpPr>
-          <p:cNvPr id="4" name="Slide Image Placeholder 3"/>
-          <p:cNvSpPr>
-            <a:spLocks noGrp="1" noRot="1" noChangeAspect="1"/>
-          </p:cNvSpPr>
-          <p:nvPr>
-            <p:ph type="sldImg" idx="2"/>
-          </p:nvPr>
-        </p:nvSpPr>
-        <p:spPr>
-          <a:xfrm>
-            <a:off x="685800" y="1143000"/>
-            <a:ext cx="5486400" cy="3086100"/>
-          </a:xfrm>
-          <a:prstGeom prst="rect">
-            <a:avLst/>
-          </a:prstGeom>
-          <a:noFill/>
-          <a:ln w="12700">
-            <a:solidFill>
-              <a:prstClr val="black"/>
-            </a:solidFill>
-          </a:ln>
-        </p:spPr>
-        <p:txBody>
-          <a:bodyPr vert="horz" lIns="91440" tIns="45720" rIns="91440" bIns="45720" rtlCol="0" anchor="ctr"/>
-          <a:lstStyle/>
-          <a:p>
-            <a:endParaRPr lang="en-US"/>
-          </a:p>
-        </p:txBody>
-      </p:sp>
-      <p:sp>
-        <p:nvSpPr>
-          <p:cNvPr id="5" name="Notes Placeholder 4"/>
-          <p:cNvSpPr>
-            <a:spLocks noGrp="1"/>
-          </p:cNvSpPr>
-          <p:nvPr>
-            <p:ph type="body" sz="quarter" idx="3"/>
-          </p:nvPr>
-        </p:nvSpPr>
-        <p:spPr>
-          <a:xfrm>
-            <a:off x="685800" y="4400550"/>
-            <a:ext cx="5486400" cy="3600450"/>
-          </a:xfrm>
-          <a:prstGeom prst="rect">
-            <a:avLst/>
-          </a:prstGeom>
-        </p:spPr>
-        <p:txBody>
-          <a:bodyPr vert="horz" lIns="91440" tIns="45720" rIns="91440" bIns="45720" rtlCol="0"/>
-          <a:lstStyle/>
-          <a:p>
-            <a:pPr lvl="0"/>
-            <a:r>
-              <a:rPr lang="en-US"/>
-              <a:t>Click to edit Master text styles</a:t>
-            </a:r>
-          </a:p>
-          <a:p>
-            <a:pPr lvl="1"/>
-            <a:r>
-              <a:rPr lang="en-US"/>
-              <a:t>Second level</a:t>
-            </a:r>
-          </a:p>
-          <a:p>
-            <a:pPr lvl="2"/>
-            <a:r>
-              <a:rPr lang="en-US"/>
-              <a:t>Third level</a:t>
-            </a:r>
-          </a:p>
-          <a:p>
-            <a:pPr lvl="3"/>
-            <a:r>
-              <a:rPr lang="en-US"/>
-              <a:t>Fourth level</a:t>
-            </a:r>
-          </a:p>
-          <a:p>
-            <a:pPr lvl="4"/>
-            <a:r>
-              <a:rPr lang="en-US"/>
-              <a:t>Fifth level</a:t>
-            </a:r>
-          </a:p>
-        </p:txBody>
-      </p:sp>
-      <p:sp>
-        <p:nvSpPr>
-          <p:cNvPr id="6" name="Footer Placeholder 5"/>
-          <p:cNvSpPr>
-            <a:spLocks noGrp="1"/>
-          </p:cNvSpPr>
-          <p:nvPr>
-            <p:ph type="ftr" sz="quarter" idx="4"/>
-          </p:nvPr>
-        </p:nvSpPr>
-        <p:spPr>
-          <a:xfrm>
-            <a:off x="0" y="8685213"/>
-            <a:ext cx="2971800" cy="458787"/>
-          </a:xfrm>
-          <a:prstGeom prst="rect">
-            <a:avLst/>
-          </a:prstGeom>
-        </p:spPr>
-        <p:txBody>
-          <a:bodyPr vert="horz" lIns="91440" tIns="45720" rIns="91440" bIns="45720" rtlCol="0" anchor="b"/>
-          <a:lstStyle>
-            <a:lvl1pPr algn="l">
-              <a:defRPr sz="1200"/>
-            </a:lvl1pPr>
-          </a:lstStyle>
-          <a:p>
-            <a:endParaRPr lang="en-US"/>
-          </a:p>
-        </p:txBody>
-      </p:sp>
-      <p:sp>
-        <p:nvSpPr>
-          <p:cNvPr id="7" name="Slide Number Placeholder 6"/>
-          <p:cNvSpPr>
-            <a:spLocks noGrp="1"/>
-          </p:cNvSpPr>
-          <p:nvPr>
-            <p:ph type="sldNum" sz="quarter" idx="5"/>
-          </p:nvPr>
-        </p:nvSpPr>
-        <p:spPr>
-          <a:xfrm>
-            <a:off x="3884613" y="8685213"/>
-            <a:ext cx="2971800" cy="458787"/>
-          </a:xfrm>
-          <a:prstGeom prst="rect">
-            <a:avLst/>
-          </a:prstGeom>
-        </p:spPr>
-        <p:txBody>
-          <a:bodyPr vert="horz" lIns="91440" tIns="45720" rIns="91440" bIns="45720" rtlCol="0" anchor="b"/>
-          <a:lstStyle>
-            <a:lvl1pPr algn="r">
-              <a:defRPr sz="1200"/>
-            </a:lvl1pPr>
-          </a:lstStyle>
-          <a:p>
-            <a:fld id="{CE5E9CC1-C706-0F49-92D6-E571CC5EEA8F}" type="slidenum">
-              <a:rPr lang="en-US"/>
-              <a:t>‹#›</a:t>
-            </a:fld>
-            <a:endParaRPr lang="en-US"/>
-          </a:p>
-        </p:txBody>
-      </p:sp>
     </p:spTree>
     <p:extLst>
       <p:ext uri="{BB962C8B-B14F-4D97-AF65-F5344CB8AC3E}">
-        <p14:creationId xmlns:p14="http://schemas.microsoft.com/office/powerpoint/2010/main" val="1024086991"/>
+        <p14:creationId xmlns:p14="http://schemas.microsoft.com/office/powerpoint/2010/main" val="4195607950"/>
       </p:ext>
     </p:extLst>
   </p:cSld>
@@ -902,10 +696,6 @@
           <a:bodyPr/>
           <a:lstStyle/>
           <a:p>
-            <a:r>
-              <a:rPr lang="en-US" dirty="0"/>
-              <a:t/>
-            </a:r>
             <a:endParaRPr lang="en-US" dirty="0"/>
           </a:p>
         </p:txBody>
@@ -990,10 +780,6 @@
           <a:bodyPr/>
           <a:lstStyle/>
           <a:p>
-            <a:r>
-              <a:rPr lang="en-US" dirty="0"/>
-              <a:t/>
-            </a:r>
             <a:endParaRPr lang="en-US" dirty="0"/>
           </a:p>
         </p:txBody>
@@ -1078,10 +864,6 @@
           <a:bodyPr/>
           <a:lstStyle/>
           <a:p>
-            <a:r>
-              <a:rPr lang="en-US" dirty="0"/>
-              <a:t/>
-            </a:r>
             <a:endParaRPr lang="en-US" dirty="0"/>
           </a:p>
         </p:txBody>
@@ -1166,10 +948,6 @@
           <a:bodyPr/>
           <a:lstStyle/>
           <a:p>
-            <a:r>
-              <a:rPr lang="en-US" dirty="0"/>
-              <a:t/>
-            </a:r>
             <a:endParaRPr lang="en-US" dirty="0"/>
           </a:p>
         </p:txBody>
@@ -1254,10 +1032,6 @@
           <a:bodyPr/>
           <a:lstStyle/>
           <a:p>
-            <a:r>
-              <a:rPr lang="en-US" dirty="0"/>
-              <a:t/>
-            </a:r>
             <a:endParaRPr lang="en-US" dirty="0"/>
           </a:p>
         </p:txBody>
@@ -1342,10 +1116,6 @@
           <a:bodyPr/>
           <a:lstStyle/>
           <a:p>
-            <a:r>
-              <a:rPr lang="en-US" dirty="0"/>
-              <a:t/>
-            </a:r>
             <a:endParaRPr lang="en-US" dirty="0"/>
           </a:p>
         </p:txBody>
@@ -1430,10 +1200,6 @@
           <a:bodyPr/>
           <a:lstStyle/>
           <a:p>
-            <a:r>
-              <a:rPr lang="en-US" dirty="0"/>
-              <a:t/>
-            </a:r>
             <a:endParaRPr lang="en-US" dirty="0"/>
           </a:p>
         </p:txBody>
@@ -1518,10 +1284,6 @@
           <a:bodyPr/>
           <a:lstStyle/>
           <a:p>
-            <a:r>
-              <a:rPr lang="en-US" dirty="0"/>
-              <a:t/>
-            </a:r>
             <a:endParaRPr lang="en-US" dirty="0"/>
           </a:p>
         </p:txBody>
@@ -1606,10 +1368,6 @@
           <a:bodyPr/>
           <a:lstStyle/>
           <a:p>
-            <a:r>
-              <a:rPr lang="en-US" dirty="0"/>
-              <a:t/>
-            </a:r>
             <a:endParaRPr lang="en-US" dirty="0"/>
           </a:p>
         </p:txBody>
@@ -1688,6 +1446,7 @@
         <a:solidFill>
           <a:schemeClr val="bg2"/>
         </a:solidFill>
+        <a:effectLst/>
       </p:bgPr>
     </p:bg>
     <p:spTree>
@@ -1706,104 +1465,7 @@
       </p:grpSpPr>
       <p:pic>
         <p:nvPicPr>
-          <p:cNvPr id="2" name="Image 0" descr="/tmp/tmp.CzRxgXMluS/grid.png">    </p:cNvPr>
-          <p:cNvPicPr>
-            <a:picLocks noChangeAspect="1"/>
-          </p:cNvPicPr>
-          <p:nvPr/>
-        </p:nvPicPr>
-        <p:blipFill>
-          <a:blip r:embed="rId1"/>
-          <a:stretch>
-            <a:fillRect/>
-          </a:stretch>
-        </p:blipFill>
-        <p:spPr>
-          <a:xfrm>
-            <a:off x="0" y="0"/>
-            <a:ext cx="12191695" cy="6858000"/>
-          </a:xfrm>
-          <a:prstGeom prst="rect">
-            <a:avLst/>
-          </a:prstGeom>
-        </p:spPr>
-      </p:pic>
-      <p:sp>
-        <p:nvSpPr>
-          <p:cNvPr id="3" name="Shape 0"/>
-          <p:cNvSpPr/>
-          <p:nvPr/>
-        </p:nvSpPr>
-        <p:spPr>
-          <a:xfrm>
-            <a:off x="548640" y="1527048"/>
-            <a:ext cx="292608" cy="27432"/>
-          </a:xfrm>
-          <a:prstGeom prst="rect">
-            <a:avLst/>
-          </a:prstGeom>
-          <a:solidFill>
-            <a:schemeClr val="accent1"/>
-          </a:solidFill>
-          <a:ln/>
-        </p:spPr>
-      </p:sp>
-      <p:sp>
-        <p:nvSpPr>
-          <p:cNvPr id="4" name="Text 1"/>
-          <p:cNvSpPr/>
-          <p:nvPr>
-            <p:ph idx="102" type="body" hasCustomPrompt="1"/>
-          </p:nvPr>
-        </p:nvSpPr>
-        <p:spPr>
-          <a:xfrm>
-            <a:off x="960120" y="1417320"/>
-            <a:ext cx="7315200" cy="256032"/>
-          </a:xfrm>
-          <a:prstGeom prst="rect">
-            <a:avLst/>
-          </a:prstGeom>
-          <a:noFill/>
-          <a:ln/>
-        </p:spPr>
-        <p:txBody>
-          <a:bodyPr wrap="square" rtlCol="0"/>
-          <a:lstStyle>
-            <a:lvl1pPr indent="0" marL="0">
-              <a:buNone/>
-              <a:defRPr lang="en-US" sz="1000" spc="300" kern="0" dirty="0">
-                <a:solidFill>
-                  <a:schemeClr val="accent4"/>
-                </a:solidFill>
-                <a:latin typeface="JetBrains Mono" pitchFamily="34" charset="0"/>
-                <a:ea typeface="JetBrains Mono" pitchFamily="34" charset="-122"/>
-                <a:cs typeface="JetBrains Mono" pitchFamily="34" charset="-120"/>
-              </a:defRPr>
-            </a:lvl1pPr>
-          </a:lstStyle>
-          <a:p>
-            <a:pPr indent="0" marL="0">
-              <a:buNone/>
-            </a:pPr>
-            <a:r>
-              <a:rPr lang="en-US" sz="1000" spc="300" kern="0" dirty="0">
-                <a:solidFill>
-                  <a:schemeClr val="accent4"/>
-                </a:solidFill>
-                <a:latin typeface="JetBrains Mono" pitchFamily="34" charset="0"/>
-                <a:ea typeface="JetBrains Mono" pitchFamily="34" charset="-122"/>
-                <a:cs typeface="JetBrains Mono" pitchFamily="34" charset="-120"/>
-              </a:rPr>
-              <a:t>SECTION LABEL</a:t>
-            </a:r>
-            <a:endParaRPr lang="en-US" sz="1000" dirty="0"/>
-          </a:p>
-        </p:txBody>
-      </p:sp>
-      <p:pic>
-        <p:nvPicPr>
-          <p:cNvPr id="5" name="Image 1" descr="/tmp/tmp.CzRxgXMluS/logo.png">    </p:cNvPr>
+          <p:cNvPr id="2" name="Image 0" descr="/tmp/tmp.CzRxgXMluS/grid.png"/>
           <p:cNvPicPr>
             <a:picLocks noChangeAspect="1"/>
           </p:cNvPicPr>
@@ -1817,8 +1479,8 @@
         </p:blipFill>
         <p:spPr>
           <a:xfrm>
-            <a:off x="8001000" y="1325880"/>
-            <a:ext cx="3566160" cy="3566160"/>
+            <a:off x="0" y="0"/>
+            <a:ext cx="12191695" cy="6858000"/>
           </a:xfrm>
           <a:prstGeom prst="rect">
             <a:avLst/>
@@ -1827,16 +1489,45 @@
       </p:pic>
       <p:sp>
         <p:nvSpPr>
-          <p:cNvPr id="6" name="Text 1"/>
+          <p:cNvPr id="3" name="Shape 0"/>
           <p:cNvSpPr/>
-          <p:nvPr>
-            <p:ph idx="104" type="title" hasCustomPrompt="1"/>
-          </p:nvPr>
-        </p:nvSpPr>
-        <p:spPr>
-          <a:xfrm>
-            <a:off x="548640" y="1874520"/>
-            <a:ext cx="7132320" cy="2194560"/>
+          <p:nvPr/>
+        </p:nvSpPr>
+        <p:spPr>
+          <a:xfrm>
+            <a:off x="548640" y="1527048"/>
+            <a:ext cx="292608" cy="27432"/>
+          </a:xfrm>
+          <a:prstGeom prst="rect">
+            <a:avLst/>
+          </a:prstGeom>
+          <a:solidFill>
+            <a:schemeClr val="accent1"/>
+          </a:solidFill>
+          <a:ln/>
+        </p:spPr>
+        <p:txBody>
+          <a:bodyPr/>
+          <a:lstStyle/>
+          <a:p>
+            <a:endParaRPr lang="it-IT"/>
+          </a:p>
+        </p:txBody>
+      </p:sp>
+      <p:sp>
+        <p:nvSpPr>
+          <p:cNvPr id="4" name="Text 1"/>
+          <p:cNvSpPr>
+            <a:spLocks noGrp="1"/>
+          </p:cNvSpPr>
+          <p:nvPr>
+            <p:ph type="body" idx="102" hasCustomPrompt="1"/>
+          </p:nvPr>
+        </p:nvSpPr>
+        <p:spPr>
+          <a:xfrm>
+            <a:off x="960120" y="1417320"/>
+            <a:ext cx="7315200" cy="256032"/>
           </a:xfrm>
           <a:prstGeom prst="rect">
             <a:avLst/>
@@ -1847,111 +1538,11 @@
         <p:txBody>
           <a:bodyPr wrap="square" rtlCol="0"/>
           <a:lstStyle>
-            <a:lvl1pPr algn="l" indent="0" marL="0">
-              <a:lnSpc>
-                <a:spcPct val="85000"/>
-              </a:lnSpc>
-              <a:buNone/>
-              <a:defRPr lang="en-US" sz="5400" b="1" spc="-150" kern="0" dirty="0">
-                <a:solidFill>
-                  <a:schemeClr val="tx1"/>
-                </a:solidFill>
-              </a:defRPr>
-            </a:lvl1pPr>
-          </a:lstStyle>
-          <a:p>
-            <a:pPr algn="l" indent="0" marL="0">
-              <a:lnSpc>
-                <a:spcPct val="85000"/>
-              </a:lnSpc>
-              <a:buNone/>
-            </a:pPr>
-            <a:r>
-              <a:rPr lang="en-US" sz="5400" b="1" spc="-150" kern="0" dirty="0">
-                <a:solidFill>
-                  <a:schemeClr val="tx1"/>
-                </a:solidFill>
-              </a:rPr>
-              <a:t>PRESENTATION TITLE</a:t>
-            </a:r>
-            <a:endParaRPr lang="en-US" sz="5400" dirty="0"/>
-          </a:p>
-        </p:txBody>
-      </p:sp>
-      <p:sp>
-        <p:nvSpPr>
-          <p:cNvPr id="7" name="Text 1"/>
-          <p:cNvSpPr/>
-          <p:nvPr>
-            <p:ph idx="105" type="body" hasCustomPrompt="1"/>
-          </p:nvPr>
-        </p:nvSpPr>
-        <p:spPr>
-          <a:xfrm>
-            <a:off x="548640" y="4206240"/>
-            <a:ext cx="6583680" cy="822960"/>
-          </a:xfrm>
-          <a:prstGeom prst="rect">
-            <a:avLst/>
-          </a:prstGeom>
-          <a:noFill/>
-          <a:ln/>
-        </p:spPr>
-        <p:txBody>
-          <a:bodyPr wrap="square" rtlCol="0"/>
-          <a:lstStyle>
-            <a:lvl1pPr indent="0" marL="0">
-              <a:buNone/>
-              <a:defRPr lang="en-US" sz="1600" dirty="0">
-                <a:solidFill>
-                  <a:schemeClr val="tx2"/>
-                </a:solidFill>
-              </a:defRPr>
-            </a:lvl1pPr>
-          </a:lstStyle>
-          <a:p>
-            <a:pPr indent="0" marL="0">
-              <a:buNone/>
-            </a:pPr>
-            <a:r>
-              <a:rPr lang="en-US" sz="1600" dirty="0">
-                <a:solidFill>
-                  <a:schemeClr val="tx2"/>
-                </a:solidFill>
-              </a:rPr>
-              <a:t>Subtitle or one-line summary</a:t>
-            </a:r>
-            <a:endParaRPr lang="en-US" sz="1600" dirty="0"/>
-          </a:p>
-        </p:txBody>
-      </p:sp>
-      <p:sp>
-        <p:nvSpPr>
-          <p:cNvPr id="8" name="Text 1"/>
-          <p:cNvSpPr/>
-          <p:nvPr>
-            <p:ph idx="106" type="body" hasCustomPrompt="1"/>
-          </p:nvPr>
-        </p:nvSpPr>
-        <p:spPr>
-          <a:xfrm>
-            <a:off x="548640" y="5760720"/>
-            <a:ext cx="7315200" cy="365760"/>
-          </a:xfrm>
-          <a:prstGeom prst="rect">
-            <a:avLst/>
-          </a:prstGeom>
-          <a:noFill/>
-          <a:ln/>
-        </p:spPr>
-        <p:txBody>
-          <a:bodyPr wrap="square" rtlCol="0"/>
-          <a:lstStyle>
-            <a:lvl1pPr indent="0" marL="0">
-              <a:buNone/>
-              <a:defRPr lang="en-US" sz="1000" spc="200" kern="0" dirty="0">
-                <a:solidFill>
-                  <a:schemeClr val="tx1"/>
+            <a:lvl1pPr marL="0" indent="0">
+              <a:buNone/>
+              <a:defRPr lang="en-US" sz="1000" kern="0" spc="300" dirty="0">
+                <a:solidFill>
+                  <a:schemeClr val="accent4"/>
                 </a:solidFill>
                 <a:latin typeface="JetBrains Mono" pitchFamily="34" charset="0"/>
                 <a:ea typeface="JetBrains Mono" pitchFamily="34" charset="-122"/>
@@ -1960,11 +1551,194 @@
             </a:lvl1pPr>
           </a:lstStyle>
           <a:p>
-            <a:pPr indent="0" marL="0">
-              <a:buNone/>
-            </a:pPr>
-            <a:r>
-              <a:rPr lang="en-US" sz="1000" spc="200" kern="0" dirty="0">
+            <a:pPr marL="0" indent="0">
+              <a:buNone/>
+            </a:pPr>
+            <a:r>
+              <a:rPr lang="en-US" sz="1000" kern="0" spc="300" dirty="0">
+                <a:solidFill>
+                  <a:schemeClr val="accent4"/>
+                </a:solidFill>
+                <a:latin typeface="JetBrains Mono" pitchFamily="34" charset="0"/>
+                <a:ea typeface="JetBrains Mono" pitchFamily="34" charset="-122"/>
+                <a:cs typeface="JetBrains Mono" pitchFamily="34" charset="-120"/>
+              </a:rPr>
+              <a:t>SECTION LABEL</a:t>
+            </a:r>
+            <a:endParaRPr lang="en-US" sz="1000" dirty="0"/>
+          </a:p>
+        </p:txBody>
+      </p:sp>
+      <p:pic>
+        <p:nvPicPr>
+          <p:cNvPr id="5" name="Image 1" descr="/tmp/tmp.CzRxgXMluS/logo.png"/>
+          <p:cNvPicPr>
+            <a:picLocks noChangeAspect="1"/>
+          </p:cNvPicPr>
+          <p:nvPr/>
+        </p:nvPicPr>
+        <p:blipFill>
+          <a:blip r:embed="rId3"/>
+          <a:stretch>
+            <a:fillRect/>
+          </a:stretch>
+        </p:blipFill>
+        <p:spPr>
+          <a:xfrm>
+            <a:off x="8001000" y="1325880"/>
+            <a:ext cx="3566160" cy="3566160"/>
+          </a:xfrm>
+          <a:prstGeom prst="rect">
+            <a:avLst/>
+          </a:prstGeom>
+        </p:spPr>
+      </p:pic>
+      <p:sp>
+        <p:nvSpPr>
+          <p:cNvPr id="6" name="Text 1"/>
+          <p:cNvSpPr>
+            <a:spLocks noGrp="1"/>
+          </p:cNvSpPr>
+          <p:nvPr>
+            <p:ph type="title" idx="104" hasCustomPrompt="1"/>
+          </p:nvPr>
+        </p:nvSpPr>
+        <p:spPr>
+          <a:xfrm>
+            <a:off x="548640" y="1874520"/>
+            <a:ext cx="7132320" cy="2194560"/>
+          </a:xfrm>
+          <a:prstGeom prst="rect">
+            <a:avLst/>
+          </a:prstGeom>
+          <a:noFill/>
+          <a:ln/>
+        </p:spPr>
+        <p:txBody>
+          <a:bodyPr wrap="square" rtlCol="0"/>
+          <a:lstStyle>
+            <a:lvl1pPr marL="0" indent="0" algn="l">
+              <a:lnSpc>
+                <a:spcPct val="85000"/>
+              </a:lnSpc>
+              <a:buNone/>
+              <a:defRPr lang="en-US" sz="5400" b="1" kern="0" spc="-150" dirty="0">
+                <a:solidFill>
+                  <a:schemeClr val="tx1"/>
+                </a:solidFill>
+              </a:defRPr>
+            </a:lvl1pPr>
+          </a:lstStyle>
+          <a:p>
+            <a:pPr marL="0" indent="0" algn="l">
+              <a:lnSpc>
+                <a:spcPct val="85000"/>
+              </a:lnSpc>
+              <a:buNone/>
+            </a:pPr>
+            <a:r>
+              <a:rPr lang="en-US" sz="5400" b="1" kern="0" spc="-150" dirty="0">
+                <a:solidFill>
+                  <a:schemeClr val="tx1"/>
+                </a:solidFill>
+              </a:rPr>
+              <a:t>PRESENTATION TITLE</a:t>
+            </a:r>
+            <a:endParaRPr lang="en-US" sz="5400" dirty="0"/>
+          </a:p>
+        </p:txBody>
+      </p:sp>
+      <p:sp>
+        <p:nvSpPr>
+          <p:cNvPr id="7" name="Text 1"/>
+          <p:cNvSpPr>
+            <a:spLocks noGrp="1"/>
+          </p:cNvSpPr>
+          <p:nvPr>
+            <p:ph type="body" idx="105" hasCustomPrompt="1"/>
+          </p:nvPr>
+        </p:nvSpPr>
+        <p:spPr>
+          <a:xfrm>
+            <a:off x="548640" y="4206240"/>
+            <a:ext cx="6583680" cy="822960"/>
+          </a:xfrm>
+          <a:prstGeom prst="rect">
+            <a:avLst/>
+          </a:prstGeom>
+          <a:noFill/>
+          <a:ln/>
+        </p:spPr>
+        <p:txBody>
+          <a:bodyPr wrap="square" rtlCol="0"/>
+          <a:lstStyle>
+            <a:lvl1pPr marL="0" indent="0">
+              <a:buNone/>
+              <a:defRPr lang="en-US" sz="1600" dirty="0">
+                <a:solidFill>
+                  <a:schemeClr val="tx2"/>
+                </a:solidFill>
+              </a:defRPr>
+            </a:lvl1pPr>
+          </a:lstStyle>
+          <a:p>
+            <a:pPr marL="0" indent="0">
+              <a:buNone/>
+            </a:pPr>
+            <a:r>
+              <a:rPr lang="en-US" sz="1600" dirty="0">
+                <a:solidFill>
+                  <a:schemeClr val="tx2"/>
+                </a:solidFill>
+              </a:rPr>
+              <a:t>Subtitle or one-line summary</a:t>
+            </a:r>
+            <a:endParaRPr lang="en-US" sz="1600" dirty="0"/>
+          </a:p>
+        </p:txBody>
+      </p:sp>
+      <p:sp>
+        <p:nvSpPr>
+          <p:cNvPr id="8" name="Text 1"/>
+          <p:cNvSpPr>
+            <a:spLocks noGrp="1"/>
+          </p:cNvSpPr>
+          <p:nvPr>
+            <p:ph type="body" idx="106" hasCustomPrompt="1"/>
+          </p:nvPr>
+        </p:nvSpPr>
+        <p:spPr>
+          <a:xfrm>
+            <a:off x="548640" y="5760720"/>
+            <a:ext cx="7315200" cy="365760"/>
+          </a:xfrm>
+          <a:prstGeom prst="rect">
+            <a:avLst/>
+          </a:prstGeom>
+          <a:noFill/>
+          <a:ln/>
+        </p:spPr>
+        <p:txBody>
+          <a:bodyPr wrap="square" rtlCol="0"/>
+          <a:lstStyle>
+            <a:lvl1pPr marL="0" indent="0">
+              <a:buNone/>
+              <a:defRPr lang="en-US" sz="1000" kern="0" spc="200" dirty="0">
+                <a:solidFill>
+                  <a:schemeClr val="tx1"/>
+                </a:solidFill>
+                <a:latin typeface="JetBrains Mono" pitchFamily="34" charset="0"/>
+                <a:ea typeface="JetBrains Mono" pitchFamily="34" charset="-122"/>
+                <a:cs typeface="JetBrains Mono" pitchFamily="34" charset="-120"/>
+              </a:defRPr>
+            </a:lvl1pPr>
+          </a:lstStyle>
+          <a:p>
+            <a:pPr marL="0" indent="0">
+              <a:buNone/>
+            </a:pPr>
+            <a:r>
+              <a:rPr lang="en-US" sz="1000" kern="0" spc="200" dirty="0">
                 <a:solidFill>
                   <a:schemeClr val="tx1"/>
                 </a:solidFill>
@@ -1994,6 +1768,7 @@
         <a:solidFill>
           <a:schemeClr val="accent5"/>
         </a:solidFill>
+        <a:effectLst/>
       </p:bgPr>
     </p:bg>
     <p:spTree>
@@ -2012,172 +1787,7 @@
       </p:grpSpPr>
       <p:pic>
         <p:nvPicPr>
-          <p:cNvPr id="2" name="Image 0" descr="/tmp/tmp.CzRxgXMluS/grid.png">    </p:cNvPr>
-          <p:cNvPicPr>
-            <a:picLocks noChangeAspect="1"/>
-          </p:cNvPicPr>
-          <p:nvPr/>
-        </p:nvPicPr>
-        <p:blipFill>
-          <a:blip r:embed="rId1"/>
-          <a:stretch>
-            <a:fillRect/>
-          </a:stretch>
-        </p:blipFill>
-        <p:spPr>
-          <a:xfrm>
-            <a:off x="0" y="0"/>
-            <a:ext cx="12191695" cy="6858000"/>
-          </a:xfrm>
-          <a:prstGeom prst="rect">
-            <a:avLst/>
-          </a:prstGeom>
-        </p:spPr>
-      </p:pic>
-      <p:sp>
-        <p:nvSpPr>
-          <p:cNvPr id="3" name="Text 0"/>
-          <p:cNvSpPr/>
-          <p:nvPr>
-            <p:ph idx="101" type="body" hasCustomPrompt="1"/>
-          </p:nvPr>
-        </p:nvSpPr>
-        <p:spPr>
-          <a:xfrm>
-            <a:off x="548640" y="1554480"/>
-            <a:ext cx="3657600" cy="1463040"/>
-          </a:xfrm>
-          <a:prstGeom prst="rect">
-            <a:avLst/>
-          </a:prstGeom>
-          <a:noFill/>
-          <a:ln/>
-        </p:spPr>
-        <p:txBody>
-          <a:bodyPr wrap="square" rtlCol="0"/>
-          <a:lstStyle>
-            <a:lvl1pPr indent="0" marL="0">
-              <a:buNone/>
-              <a:defRPr lang="en-US" sz="9600" b="1" spc="-300" kern="0" dirty="0">
-                <a:solidFill>
-                  <a:schemeClr val="accent1"/>
-                </a:solidFill>
-              </a:defRPr>
-            </a:lvl1pPr>
-          </a:lstStyle>
-          <a:p>
-            <a:pPr indent="0" marL="0">
-              <a:buNone/>
-            </a:pPr>
-            <a:r>
-              <a:rPr lang="en-US" sz="9600" b="1" spc="-300" kern="0" dirty="0">
-                <a:solidFill>
-                  <a:schemeClr val="accent1"/>
-                </a:solidFill>
-              </a:rPr>
-              <a:t>01</a:t>
-            </a:r>
-            <a:endParaRPr lang="en-US" sz="9600" dirty="0"/>
-          </a:p>
-        </p:txBody>
-      </p:sp>
-      <p:sp>
-        <p:nvSpPr>
-          <p:cNvPr id="4" name="Text 0"/>
-          <p:cNvSpPr/>
-          <p:nvPr>
-            <p:ph idx="102" type="title" hasCustomPrompt="1"/>
-          </p:nvPr>
-        </p:nvSpPr>
-        <p:spPr>
-          <a:xfrm>
-            <a:off x="548640" y="3154680"/>
-            <a:ext cx="9144000" cy="1280160"/>
-          </a:xfrm>
-          <a:prstGeom prst="rect">
-            <a:avLst/>
-          </a:prstGeom>
-          <a:noFill/>
-          <a:ln/>
-        </p:spPr>
-        <p:txBody>
-          <a:bodyPr wrap="square" rtlCol="0"/>
-          <a:lstStyle>
-            <a:lvl1pPr algn="l" indent="0" marL="0">
-              <a:buNone/>
-              <a:defRPr lang="en-US" sz="4000" b="1" spc="-100" kern="0" dirty="0">
-                <a:solidFill>
-                  <a:schemeClr val="tx1"/>
-                </a:solidFill>
-              </a:defRPr>
-            </a:lvl1pPr>
-          </a:lstStyle>
-          <a:p>
-            <a:pPr algn="l" indent="0" marL="0">
-              <a:buNone/>
-            </a:pPr>
-            <a:r>
-              <a:rPr lang="en-US" sz="4000" b="1" spc="-100" kern="0" dirty="0">
-                <a:solidFill>
-                  <a:schemeClr val="tx1"/>
-                </a:solidFill>
-              </a:rPr>
-              <a:t>SECTION TITLE</a:t>
-            </a:r>
-            <a:endParaRPr lang="en-US" sz="4000" dirty="0"/>
-          </a:p>
-        </p:txBody>
-      </p:sp>
-      <p:sp>
-        <p:nvSpPr>
-          <p:cNvPr id="5" name="Text 0"/>
-          <p:cNvSpPr/>
-          <p:nvPr>
-            <p:ph idx="103" type="body" hasCustomPrompt="1"/>
-          </p:nvPr>
-        </p:nvSpPr>
-        <p:spPr>
-          <a:xfrm>
-            <a:off x="548640" y="4480560"/>
-            <a:ext cx="6858000" cy="822960"/>
-          </a:xfrm>
-          <a:prstGeom prst="rect">
-            <a:avLst/>
-          </a:prstGeom>
-          <a:noFill/>
-          <a:ln/>
-        </p:spPr>
-        <p:txBody>
-          <a:bodyPr wrap="square" rtlCol="0"/>
-          <a:lstStyle>
-            <a:lvl1pPr indent="0" marL="0">
-              <a:buNone/>
-              <a:defRPr lang="en-US" sz="1600" dirty="0">
-                <a:solidFill>
-                  <a:schemeClr val="tx2"/>
-                </a:solidFill>
-              </a:defRPr>
-            </a:lvl1pPr>
-          </a:lstStyle>
-          <a:p>
-            <a:pPr indent="0" marL="0">
-              <a:buNone/>
-            </a:pPr>
-            <a:r>
-              <a:rPr lang="en-US" sz="1600" dirty="0">
-                <a:solidFill>
-                  <a:schemeClr val="tx2"/>
-                </a:solidFill>
-              </a:rPr>
-              <a:t>Optional one-line description</a:t>
-            </a:r>
-            <a:endParaRPr lang="en-US" sz="1600" dirty="0"/>
-          </a:p>
-        </p:txBody>
-      </p:sp>
-      <p:pic>
-        <p:nvPicPr>
-          <p:cNvPr id="6" name="Image 1" descr="/tmp/tmp.CzRxgXMluS/logo.png">    </p:cNvPr>
+          <p:cNvPr id="2" name="Image 0" descr="/tmp/tmp.CzRxgXMluS/grid.png"/>
           <p:cNvPicPr>
             <a:picLocks noChangeAspect="1"/>
           </p:cNvPicPr>
@@ -2191,6 +1801,177 @@
         </p:blipFill>
         <p:spPr>
           <a:xfrm>
+            <a:off x="0" y="0"/>
+            <a:ext cx="12191695" cy="6858000"/>
+          </a:xfrm>
+          <a:prstGeom prst="rect">
+            <a:avLst/>
+          </a:prstGeom>
+        </p:spPr>
+      </p:pic>
+      <p:sp>
+        <p:nvSpPr>
+          <p:cNvPr id="3" name="Text 0"/>
+          <p:cNvSpPr>
+            <a:spLocks noGrp="1"/>
+          </p:cNvSpPr>
+          <p:nvPr>
+            <p:ph type="body" idx="101" hasCustomPrompt="1"/>
+          </p:nvPr>
+        </p:nvSpPr>
+        <p:spPr>
+          <a:xfrm>
+            <a:off x="548640" y="1554480"/>
+            <a:ext cx="3657600" cy="1463040"/>
+          </a:xfrm>
+          <a:prstGeom prst="rect">
+            <a:avLst/>
+          </a:prstGeom>
+          <a:noFill/>
+          <a:ln/>
+        </p:spPr>
+        <p:txBody>
+          <a:bodyPr wrap="square" rtlCol="0"/>
+          <a:lstStyle>
+            <a:lvl1pPr marL="0" indent="0">
+              <a:buNone/>
+              <a:defRPr lang="en-US" sz="9600" b="1" kern="0" spc="-300" dirty="0">
+                <a:solidFill>
+                  <a:schemeClr val="accent1"/>
+                </a:solidFill>
+              </a:defRPr>
+            </a:lvl1pPr>
+          </a:lstStyle>
+          <a:p>
+            <a:pPr marL="0" indent="0">
+              <a:buNone/>
+            </a:pPr>
+            <a:r>
+              <a:rPr lang="en-US" sz="9600" b="1" kern="0" spc="-300" dirty="0">
+                <a:solidFill>
+                  <a:schemeClr val="accent1"/>
+                </a:solidFill>
+              </a:rPr>
+              <a:t>01</a:t>
+            </a:r>
+            <a:endParaRPr lang="en-US" sz="9600" dirty="0"/>
+          </a:p>
+        </p:txBody>
+      </p:sp>
+      <p:sp>
+        <p:nvSpPr>
+          <p:cNvPr id="4" name="Text 0"/>
+          <p:cNvSpPr>
+            <a:spLocks noGrp="1"/>
+          </p:cNvSpPr>
+          <p:nvPr>
+            <p:ph type="title" idx="102" hasCustomPrompt="1"/>
+          </p:nvPr>
+        </p:nvSpPr>
+        <p:spPr>
+          <a:xfrm>
+            <a:off x="548640" y="3154680"/>
+            <a:ext cx="9144000" cy="1280160"/>
+          </a:xfrm>
+          <a:prstGeom prst="rect">
+            <a:avLst/>
+          </a:prstGeom>
+          <a:noFill/>
+          <a:ln/>
+        </p:spPr>
+        <p:txBody>
+          <a:bodyPr wrap="square" rtlCol="0"/>
+          <a:lstStyle>
+            <a:lvl1pPr marL="0" indent="0" algn="l">
+              <a:buNone/>
+              <a:defRPr lang="en-US" sz="4000" b="1" kern="0" spc="-100" dirty="0">
+                <a:solidFill>
+                  <a:schemeClr val="tx1"/>
+                </a:solidFill>
+              </a:defRPr>
+            </a:lvl1pPr>
+          </a:lstStyle>
+          <a:p>
+            <a:pPr marL="0" indent="0" algn="l">
+              <a:buNone/>
+            </a:pPr>
+            <a:r>
+              <a:rPr lang="en-US" sz="4000" b="1" kern="0" spc="-100" dirty="0">
+                <a:solidFill>
+                  <a:schemeClr val="tx1"/>
+                </a:solidFill>
+              </a:rPr>
+              <a:t>SECTION TITLE</a:t>
+            </a:r>
+            <a:endParaRPr lang="en-US" sz="4000" dirty="0"/>
+          </a:p>
+        </p:txBody>
+      </p:sp>
+      <p:sp>
+        <p:nvSpPr>
+          <p:cNvPr id="5" name="Text 0"/>
+          <p:cNvSpPr>
+            <a:spLocks noGrp="1"/>
+          </p:cNvSpPr>
+          <p:nvPr>
+            <p:ph type="body" idx="103" hasCustomPrompt="1"/>
+          </p:nvPr>
+        </p:nvSpPr>
+        <p:spPr>
+          <a:xfrm>
+            <a:off x="548640" y="4480560"/>
+            <a:ext cx="6858000" cy="822960"/>
+          </a:xfrm>
+          <a:prstGeom prst="rect">
+            <a:avLst/>
+          </a:prstGeom>
+          <a:noFill/>
+          <a:ln/>
+        </p:spPr>
+        <p:txBody>
+          <a:bodyPr wrap="square" rtlCol="0"/>
+          <a:lstStyle>
+            <a:lvl1pPr marL="0" indent="0">
+              <a:buNone/>
+              <a:defRPr lang="en-US" sz="1600" dirty="0">
+                <a:solidFill>
+                  <a:schemeClr val="tx2"/>
+                </a:solidFill>
+              </a:defRPr>
+            </a:lvl1pPr>
+          </a:lstStyle>
+          <a:p>
+            <a:pPr marL="0" indent="0">
+              <a:buNone/>
+            </a:pPr>
+            <a:r>
+              <a:rPr lang="en-US" sz="1600" dirty="0">
+                <a:solidFill>
+                  <a:schemeClr val="tx2"/>
+                </a:solidFill>
+              </a:rPr>
+              <a:t>Optional one-line description</a:t>
+            </a:r>
+            <a:endParaRPr lang="en-US" sz="1600" dirty="0"/>
+          </a:p>
+        </p:txBody>
+      </p:sp>
+      <p:pic>
+        <p:nvPicPr>
+          <p:cNvPr id="6" name="Image 1" descr="/tmp/tmp.CzRxgXMluS/logo.png"/>
+          <p:cNvPicPr>
+            <a:picLocks noChangeAspect="1"/>
+          </p:cNvPicPr>
+          <p:nvPr/>
+        </p:nvPicPr>
+        <p:blipFill>
+          <a:blip r:embed="rId3"/>
+          <a:stretch>
+            <a:fillRect/>
+          </a:stretch>
+        </p:blipFill>
+        <p:spPr>
+          <a:xfrm>
             <a:off x="548640" y="6327648"/>
             <a:ext cx="237744" cy="237744"/>
           </a:xfrm>
@@ -2220,11 +2001,11 @@
           <a:bodyPr wrap="square" lIns="0" tIns="0" rIns="0" bIns="0" rtlCol="0" anchor="ctr"/>
           <a:lstStyle/>
           <a:p>
-            <a:pPr indent="0" marL="0">
-              <a:buNone/>
-            </a:pPr>
-            <a:r>
-              <a:rPr lang="en-US" sz="1000" b="1" spc="50" kern="0" dirty="0">
+            <a:pPr marL="0" indent="0">
+              <a:buNone/>
+            </a:pPr>
+            <a:r>
+              <a:rPr lang="en-US" sz="1000" b="1" kern="0" spc="50" dirty="0">
                 <a:solidFill>
                   <a:schemeClr val="tx1"/>
                 </a:solidFill>
@@ -2258,7 +2039,7 @@
           </a:prstGeom>
           <a:extLst>
             <a:ext uri="{C572A759-6A51-4108-AA02-DFA0A04FC94B}">
-              <ma14:wrappingTextBoxFlag xmlns:ma14="http://schemas.microsoft.com/office/mac/drawingml/2011/main" val="0"/>
+              <ma14:wrappingTextBoxFlag xmlns:ma14="http://schemas.microsoft.com/office/mac/drawingml/2011/main" xmlns="" val="0"/>
             </a:ext>
           </a:extLst>
         </p:spPr>
@@ -2279,8 +2060,8 @@
           <a:p>
             <a:pPr algn="r"/>
             <a:fld id="{F7021451-1387-4CA6-816F-3879F97B5CBC}" type="slidenum">
-              <a:rPr b="0" lang="en-US"/>
-              <a:t>1003</a:t>
+              <a:rPr lang="en-US" b="0"/>
+              <a:t>‹N›</a:t>
             </a:fld>
             <a:endParaRPr lang="en-US"/>
           </a:p>
@@ -2302,6 +2083,7 @@
         <a:solidFill>
           <a:schemeClr val="bg1"/>
         </a:solidFill>
+        <a:effectLst/>
       </p:bgPr>
     </p:bg>
     <p:spTree>
@@ -2341,9 +2123,11 @@
       <p:sp>
         <p:nvSpPr>
           <p:cNvPr id="3" name="Text 1"/>
-          <p:cNvSpPr/>
-          <p:nvPr>
-            <p:ph idx="101" type="body" hasCustomPrompt="1"/>
+          <p:cNvSpPr>
+            <a:spLocks noGrp="1"/>
+          </p:cNvSpPr>
+          <p:nvPr>
+            <p:ph type="body" idx="101" hasCustomPrompt="1"/>
           </p:nvPr>
         </p:nvSpPr>
         <p:spPr>
@@ -2360,9 +2144,9 @@
         <p:txBody>
           <a:bodyPr wrap="square" rtlCol="0"/>
           <a:lstStyle>
-            <a:lvl1pPr indent="0" marL="0">
-              <a:buNone/>
-              <a:defRPr lang="en-US" sz="1000" spc="300" kern="0" dirty="0">
+            <a:lvl1pPr marL="0" indent="0">
+              <a:buNone/>
+              <a:defRPr lang="en-US" sz="1000" kern="0" spc="300" dirty="0">
                 <a:solidFill>
                   <a:schemeClr val="accent4"/>
                 </a:solidFill>
@@ -2373,11 +2157,11 @@
             </a:lvl1pPr>
           </a:lstStyle>
           <a:p>
-            <a:pPr indent="0" marL="0">
-              <a:buNone/>
-            </a:pPr>
-            <a:r>
-              <a:rPr lang="en-US" sz="1000" spc="300" kern="0" dirty="0">
+            <a:pPr marL="0" indent="0">
+              <a:buNone/>
+            </a:pPr>
+            <a:r>
+              <a:rPr lang="en-US" sz="1000" kern="0" spc="300" dirty="0">
                 <a:solidFill>
                   <a:schemeClr val="accent4"/>
                 </a:solidFill>
@@ -2394,9 +2178,11 @@
       <p:sp>
         <p:nvSpPr>
           <p:cNvPr id="4" name="Text 1"/>
-          <p:cNvSpPr/>
-          <p:nvPr>
-            <p:ph idx="102" type="title" hasCustomPrompt="1"/>
+          <p:cNvSpPr>
+            <a:spLocks noGrp="1"/>
+          </p:cNvSpPr>
+          <p:nvPr>
+            <p:ph type="title" idx="102" hasCustomPrompt="1"/>
           </p:nvPr>
         </p:nvSpPr>
         <p:spPr>
@@ -2413,9 +2199,9 @@
         <p:txBody>
           <a:bodyPr wrap="square" rtlCol="0"/>
           <a:lstStyle>
-            <a:lvl1pPr algn="l" indent="0" marL="0">
-              <a:buNone/>
-              <a:defRPr lang="en-US" sz="3200" b="1" spc="-50" kern="0" dirty="0">
+            <a:lvl1pPr marL="0" indent="0" algn="l">
+              <a:buNone/>
+              <a:defRPr lang="en-US" sz="3200" b="1" kern="0" spc="-50" dirty="0">
                 <a:solidFill>
                   <a:schemeClr val="tx1"/>
                 </a:solidFill>
@@ -2423,11 +2209,11 @@
             </a:lvl1pPr>
           </a:lstStyle>
           <a:p>
-            <a:pPr algn="l" indent="0" marL="0">
-              <a:buNone/>
-            </a:pPr>
-            <a:r>
-              <a:rPr lang="en-US" sz="3200" b="1" spc="-50" kern="0" dirty="0">
+            <a:pPr marL="0" indent="0" algn="l">
+              <a:buNone/>
+            </a:pPr>
+            <a:r>
+              <a:rPr lang="en-US" sz="3200" b="1" kern="0" spc="-50" dirty="0">
                 <a:solidFill>
                   <a:schemeClr val="tx1"/>
                 </a:solidFill>
@@ -2441,9 +2227,11 @@
       <p:sp>
         <p:nvSpPr>
           <p:cNvPr id="5" name="Text 1"/>
-          <p:cNvSpPr/>
-          <p:nvPr>
-            <p:ph idx="103" type="body" hasCustomPrompt="1"/>
+          <p:cNvSpPr>
+            <a:spLocks noGrp="1"/>
+          </p:cNvSpPr>
+          <p:nvPr>
+            <p:ph type="body" idx="103" hasCustomPrompt="1"/>
           </p:nvPr>
         </p:nvSpPr>
         <p:spPr>
@@ -2460,7 +2248,7 @@
         <p:txBody>
           <a:bodyPr wrap="square" rtlCol="0"/>
           <a:lstStyle>
-            <a:lvl1pPr indent="0" marL="0">
+            <a:lvl1pPr marL="0" indent="0">
               <a:spcAft>
                 <a:spcPts val="800"/>
               </a:spcAft>
@@ -2473,7 +2261,7 @@
             </a:lvl1pPr>
           </a:lstStyle>
           <a:p>
-            <a:pPr indent="0" marL="0">
+            <a:pPr marL="0" indent="0">
               <a:spcAft>
                 <a:spcPts val="800"/>
               </a:spcAft>
@@ -2493,14 +2281,14 @@
       </p:sp>
       <p:pic>
         <p:nvPicPr>
-          <p:cNvPr id="6" name="Image 0" descr="/tmp/tmp.CzRxgXMluS/logo.png">    </p:cNvPr>
+          <p:cNvPr id="6" name="Image 0" descr="/tmp/tmp.CzRxgXMluS/logo.png"/>
           <p:cNvPicPr>
             <a:picLocks noChangeAspect="1"/>
           </p:cNvPicPr>
           <p:nvPr/>
         </p:nvPicPr>
         <p:blipFill>
-          <a:blip r:embed="rId1"/>
+          <a:blip r:embed="rId2"/>
           <a:stretch>
             <a:fillRect/>
           </a:stretch>
@@ -2536,11 +2324,11 @@
           <a:bodyPr wrap="square" lIns="0" tIns="0" rIns="0" bIns="0" rtlCol="0" anchor="ctr"/>
           <a:lstStyle/>
           <a:p>
-            <a:pPr indent="0" marL="0">
-              <a:buNone/>
-            </a:pPr>
-            <a:r>
-              <a:rPr lang="en-US" sz="1000" b="1" spc="50" kern="0" dirty="0">
+            <a:pPr marL="0" indent="0">
+              <a:buNone/>
+            </a:pPr>
+            <a:r>
+              <a:rPr lang="en-US" sz="1000" b="1" kern="0" spc="50" dirty="0">
                 <a:solidFill>
                   <a:schemeClr val="tx1"/>
                 </a:solidFill>
@@ -2574,7 +2362,7 @@
           </a:prstGeom>
           <a:extLst>
             <a:ext uri="{C572A759-6A51-4108-AA02-DFA0A04FC94B}">
-              <ma14:wrappingTextBoxFlag xmlns:ma14="http://schemas.microsoft.com/office/mac/drawingml/2011/main" val="0"/>
+              <ma14:wrappingTextBoxFlag xmlns:ma14="http://schemas.microsoft.com/office/mac/drawingml/2011/main" xmlns="" val="0"/>
             </a:ext>
           </a:extLst>
         </p:spPr>
@@ -2595,8 +2383,8 @@
           <a:p>
             <a:pPr algn="r"/>
             <a:fld id="{F7021451-1387-4CA6-816F-3879F97B5CBC}" type="slidenum">
-              <a:rPr b="0" lang="en-US"/>
-              <a:t>1004</a:t>
+              <a:rPr lang="en-US" b="0"/>
+              <a:t>‹N›</a:t>
             </a:fld>
             <a:endParaRPr lang="en-US"/>
           </a:p>
@@ -2618,6 +2406,7 @@
         <a:solidFill>
           <a:schemeClr val="bg1"/>
         </a:solidFill>
+        <a:effectLst/>
       </p:bgPr>
     </p:bg>
     <p:spTree>
@@ -2657,9 +2446,11 @@
       <p:sp>
         <p:nvSpPr>
           <p:cNvPr id="3" name="Text 1"/>
-          <p:cNvSpPr/>
-          <p:nvPr>
-            <p:ph idx="101" type="body" hasCustomPrompt="1"/>
+          <p:cNvSpPr>
+            <a:spLocks noGrp="1"/>
+          </p:cNvSpPr>
+          <p:nvPr>
+            <p:ph type="body" idx="101" hasCustomPrompt="1"/>
           </p:nvPr>
         </p:nvSpPr>
         <p:spPr>
@@ -2676,9 +2467,9 @@
         <p:txBody>
           <a:bodyPr wrap="square" rtlCol="0"/>
           <a:lstStyle>
-            <a:lvl1pPr indent="0" marL="0">
-              <a:buNone/>
-              <a:defRPr lang="en-US" sz="1000" spc="300" kern="0" dirty="0">
+            <a:lvl1pPr marL="0" indent="0">
+              <a:buNone/>
+              <a:defRPr lang="en-US" sz="1000" kern="0" spc="300" dirty="0">
                 <a:solidFill>
                   <a:schemeClr val="accent4"/>
                 </a:solidFill>
@@ -2689,11 +2480,11 @@
             </a:lvl1pPr>
           </a:lstStyle>
           <a:p>
-            <a:pPr indent="0" marL="0">
-              <a:buNone/>
-            </a:pPr>
-            <a:r>
-              <a:rPr lang="en-US" sz="1000" spc="300" kern="0" dirty="0">
+            <a:pPr marL="0" indent="0">
+              <a:buNone/>
+            </a:pPr>
+            <a:r>
+              <a:rPr lang="en-US" sz="1000" kern="0" spc="300" dirty="0">
                 <a:solidFill>
                   <a:schemeClr val="accent4"/>
                 </a:solidFill>
@@ -2710,9 +2501,11 @@
       <p:sp>
         <p:nvSpPr>
           <p:cNvPr id="4" name="Text 1"/>
-          <p:cNvSpPr/>
-          <p:nvPr>
-            <p:ph idx="102" type="title" hasCustomPrompt="1"/>
+          <p:cNvSpPr>
+            <a:spLocks noGrp="1"/>
+          </p:cNvSpPr>
+          <p:nvPr>
+            <p:ph type="title" idx="102" hasCustomPrompt="1"/>
           </p:nvPr>
         </p:nvSpPr>
         <p:spPr>
@@ -2729,9 +2522,9 @@
         <p:txBody>
           <a:bodyPr wrap="square" rtlCol="0"/>
           <a:lstStyle>
-            <a:lvl1pPr algn="l" indent="0" marL="0">
-              <a:buNone/>
-              <a:defRPr lang="en-US" sz="3200" b="1" spc="-50" kern="0" dirty="0">
+            <a:lvl1pPr marL="0" indent="0" algn="l">
+              <a:buNone/>
+              <a:defRPr lang="en-US" sz="3200" b="1" kern="0" spc="-50" dirty="0">
                 <a:solidFill>
                   <a:schemeClr val="tx1"/>
                 </a:solidFill>
@@ -2739,11 +2532,11 @@
             </a:lvl1pPr>
           </a:lstStyle>
           <a:p>
-            <a:pPr algn="l" indent="0" marL="0">
-              <a:buNone/>
-            </a:pPr>
-            <a:r>
-              <a:rPr lang="en-US" sz="3200" b="1" spc="-50" kern="0" dirty="0">
+            <a:pPr marL="0" indent="0" algn="l">
+              <a:buNone/>
+            </a:pPr>
+            <a:r>
+              <a:rPr lang="en-US" sz="3200" b="1" kern="0" spc="-50" dirty="0">
                 <a:solidFill>
                   <a:schemeClr val="tx1"/>
                 </a:solidFill>
@@ -2757,9 +2550,11 @@
       <p:sp>
         <p:nvSpPr>
           <p:cNvPr id="5" name="Text 1"/>
-          <p:cNvSpPr/>
-          <p:nvPr>
-            <p:ph idx="103" type="body" hasCustomPrompt="1"/>
+          <p:cNvSpPr>
+            <a:spLocks noGrp="1"/>
+          </p:cNvSpPr>
+          <p:nvPr>
+            <p:ph type="body" idx="103" hasCustomPrompt="1"/>
           </p:nvPr>
         </p:nvSpPr>
         <p:spPr>
@@ -2776,7 +2571,7 @@
         <p:txBody>
           <a:bodyPr wrap="square" rtlCol="0"/>
           <a:lstStyle>
-            <a:lvl1pPr indent="0" marL="0">
+            <a:lvl1pPr marL="0" indent="0">
               <a:spcAft>
                 <a:spcPts val="800"/>
               </a:spcAft>
@@ -2789,7 +2584,7 @@
             </a:lvl1pPr>
           </a:lstStyle>
           <a:p>
-            <a:pPr indent="0" marL="0">
+            <a:pPr marL="0" indent="0">
               <a:spcAft>
                 <a:spcPts val="800"/>
               </a:spcAft>
@@ -2810,9 +2605,11 @@
       <p:sp>
         <p:nvSpPr>
           <p:cNvPr id="6" name="Text 1"/>
-          <p:cNvSpPr/>
-          <p:nvPr>
-            <p:ph idx="104" type="body" hasCustomPrompt="1"/>
+          <p:cNvSpPr>
+            <a:spLocks noGrp="1"/>
+          </p:cNvSpPr>
+          <p:nvPr>
+            <p:ph type="body" idx="104" hasCustomPrompt="1"/>
           </p:nvPr>
         </p:nvSpPr>
         <p:spPr>
@@ -2829,7 +2626,7 @@
         <p:txBody>
           <a:bodyPr wrap="square" rtlCol="0"/>
           <a:lstStyle>
-            <a:lvl1pPr indent="0" marL="0">
+            <a:lvl1pPr marL="0" indent="0">
               <a:spcAft>
                 <a:spcPts val="800"/>
               </a:spcAft>
@@ -2842,7 +2639,7 @@
             </a:lvl1pPr>
           </a:lstStyle>
           <a:p>
-            <a:pPr indent="0" marL="0">
+            <a:pPr marL="0" indent="0">
               <a:spcAft>
                 <a:spcPts val="800"/>
               </a:spcAft>
@@ -2862,14 +2659,14 @@
       </p:sp>
       <p:pic>
         <p:nvPicPr>
-          <p:cNvPr id="7" name="Image 0" descr="/tmp/tmp.CzRxgXMluS/logo.png">    </p:cNvPr>
+          <p:cNvPr id="7" name="Image 0" descr="/tmp/tmp.CzRxgXMluS/logo.png"/>
           <p:cNvPicPr>
             <a:picLocks noChangeAspect="1"/>
           </p:cNvPicPr>
           <p:nvPr/>
         </p:nvPicPr>
         <p:blipFill>
-          <a:blip r:embed="rId1"/>
+          <a:blip r:embed="rId2"/>
           <a:stretch>
             <a:fillRect/>
           </a:stretch>
@@ -2905,11 +2702,11 @@
           <a:bodyPr wrap="square" lIns="0" tIns="0" rIns="0" bIns="0" rtlCol="0" anchor="ctr"/>
           <a:lstStyle/>
           <a:p>
-            <a:pPr indent="0" marL="0">
-              <a:buNone/>
-            </a:pPr>
-            <a:r>
-              <a:rPr lang="en-US" sz="1000" b="1" spc="50" kern="0" dirty="0">
+            <a:pPr marL="0" indent="0">
+              <a:buNone/>
+            </a:pPr>
+            <a:r>
+              <a:rPr lang="en-US" sz="1000" b="1" kern="0" spc="50" dirty="0">
                 <a:solidFill>
                   <a:schemeClr val="tx1"/>
                 </a:solidFill>
@@ -2943,7 +2740,7 @@
           </a:prstGeom>
           <a:extLst>
             <a:ext uri="{C572A759-6A51-4108-AA02-DFA0A04FC94B}">
-              <ma14:wrappingTextBoxFlag xmlns:ma14="http://schemas.microsoft.com/office/mac/drawingml/2011/main" val="0"/>
+              <ma14:wrappingTextBoxFlag xmlns:ma14="http://schemas.microsoft.com/office/mac/drawingml/2011/main" xmlns="" val="0"/>
             </a:ext>
           </a:extLst>
         </p:spPr>
@@ -2964,8 +2761,8 @@
           <a:p>
             <a:pPr algn="r"/>
             <a:fld id="{F7021451-1387-4CA6-816F-3879F97B5CBC}" type="slidenum">
-              <a:rPr b="0" lang="en-US"/>
-              <a:t>1005</a:t>
+              <a:rPr lang="en-US" b="0"/>
+              <a:t>‹N›</a:t>
             </a:fld>
             <a:endParaRPr lang="en-US"/>
           </a:p>
@@ -2987,6 +2784,7 @@
         <a:solidFill>
           <a:schemeClr val="bg1"/>
         </a:solidFill>
+        <a:effectLst/>
       </p:bgPr>
     </p:bg>
     <p:spTree>
@@ -3026,9 +2824,11 @@
       <p:sp>
         <p:nvSpPr>
           <p:cNvPr id="3" name="Text 1"/>
-          <p:cNvSpPr/>
-          <p:nvPr>
-            <p:ph idx="101" type="body" hasCustomPrompt="1"/>
+          <p:cNvSpPr>
+            <a:spLocks noGrp="1"/>
+          </p:cNvSpPr>
+          <p:nvPr>
+            <p:ph type="body" idx="101" hasCustomPrompt="1"/>
           </p:nvPr>
         </p:nvSpPr>
         <p:spPr>
@@ -3045,9 +2845,9 @@
         <p:txBody>
           <a:bodyPr wrap="square" rtlCol="0"/>
           <a:lstStyle>
-            <a:lvl1pPr indent="0" marL="0">
-              <a:buNone/>
-              <a:defRPr lang="en-US" sz="1000" spc="300" kern="0" dirty="0">
+            <a:lvl1pPr marL="0" indent="0">
+              <a:buNone/>
+              <a:defRPr lang="en-US" sz="1000" kern="0" spc="300" dirty="0">
                 <a:solidFill>
                   <a:schemeClr val="accent4"/>
                 </a:solidFill>
@@ -3058,11 +2858,11 @@
             </a:lvl1pPr>
           </a:lstStyle>
           <a:p>
-            <a:pPr indent="0" marL="0">
-              <a:buNone/>
-            </a:pPr>
-            <a:r>
-              <a:rPr lang="en-US" sz="1000" spc="300" kern="0" dirty="0">
+            <a:pPr marL="0" indent="0">
+              <a:buNone/>
+            </a:pPr>
+            <a:r>
+              <a:rPr lang="en-US" sz="1000" kern="0" spc="300" dirty="0">
                 <a:solidFill>
                   <a:schemeClr val="accent4"/>
                 </a:solidFill>
@@ -3079,9 +2879,11 @@
       <p:sp>
         <p:nvSpPr>
           <p:cNvPr id="4" name="Text 1"/>
-          <p:cNvSpPr/>
-          <p:nvPr>
-            <p:ph idx="102" type="title" hasCustomPrompt="1"/>
+          <p:cNvSpPr>
+            <a:spLocks noGrp="1"/>
+          </p:cNvSpPr>
+          <p:nvPr>
+            <p:ph type="title" idx="102" hasCustomPrompt="1"/>
           </p:nvPr>
         </p:nvSpPr>
         <p:spPr>
@@ -3098,9 +2900,9 @@
         <p:txBody>
           <a:bodyPr wrap="square" rtlCol="0"/>
           <a:lstStyle>
-            <a:lvl1pPr algn="l" indent="0" marL="0">
-              <a:buNone/>
-              <a:defRPr lang="en-US" sz="3200" b="1" spc="-50" kern="0" dirty="0">
+            <a:lvl1pPr marL="0" indent="0" algn="l">
+              <a:buNone/>
+              <a:defRPr lang="en-US" sz="3200" b="1" kern="0" spc="-50" dirty="0">
                 <a:solidFill>
                   <a:schemeClr val="tx1"/>
                 </a:solidFill>
@@ -3108,11 +2910,11 @@
             </a:lvl1pPr>
           </a:lstStyle>
           <a:p>
-            <a:pPr algn="l" indent="0" marL="0">
-              <a:buNone/>
-            </a:pPr>
-            <a:r>
-              <a:rPr lang="en-US" sz="3200" b="1" spc="-50" kern="0" dirty="0">
+            <a:pPr marL="0" indent="0" algn="l">
+              <a:buNone/>
+            </a:pPr>
+            <a:r>
+              <a:rPr lang="en-US" sz="3200" b="1" kern="0" spc="-50" dirty="0">
                 <a:solidFill>
                   <a:schemeClr val="tx1"/>
                 </a:solidFill>
@@ -3125,14 +2927,14 @@
       </p:sp>
       <p:pic>
         <p:nvPicPr>
-          <p:cNvPr id="5" name="Image 0" descr="/tmp/tmp.CzRxgXMluS/logo.png">    </p:cNvPr>
+          <p:cNvPr id="5" name="Image 0" descr="/tmp/tmp.CzRxgXMluS/logo.png"/>
           <p:cNvPicPr>
             <a:picLocks noChangeAspect="1"/>
           </p:cNvPicPr>
           <p:nvPr/>
         </p:nvPicPr>
         <p:blipFill>
-          <a:blip r:embed="rId1"/>
+          <a:blip r:embed="rId2"/>
           <a:stretch>
             <a:fillRect/>
           </a:stretch>
@@ -3168,11 +2970,11 @@
           <a:bodyPr wrap="square" lIns="0" tIns="0" rIns="0" bIns="0" rtlCol="0" anchor="ctr"/>
           <a:lstStyle/>
           <a:p>
-            <a:pPr indent="0" marL="0">
-              <a:buNone/>
-            </a:pPr>
-            <a:r>
-              <a:rPr lang="en-US" sz="1000" b="1" spc="50" kern="0" dirty="0">
+            <a:pPr marL="0" indent="0">
+              <a:buNone/>
+            </a:pPr>
+            <a:r>
+              <a:rPr lang="en-US" sz="1000" b="1" kern="0" spc="50" dirty="0">
                 <a:solidFill>
                   <a:schemeClr val="tx1"/>
                 </a:solidFill>
@@ -3206,7 +3008,7 @@
           </a:prstGeom>
           <a:extLst>
             <a:ext uri="{C572A759-6A51-4108-AA02-DFA0A04FC94B}">
-              <ma14:wrappingTextBoxFlag xmlns:ma14="http://schemas.microsoft.com/office/mac/drawingml/2011/main" val="0"/>
+              <ma14:wrappingTextBoxFlag xmlns:ma14="http://schemas.microsoft.com/office/mac/drawingml/2011/main" xmlns="" val="0"/>
             </a:ext>
           </a:extLst>
         </p:spPr>
@@ -3227,8 +3029,8 @@
           <a:p>
             <a:pPr algn="r"/>
             <a:fld id="{F7021451-1387-4CA6-816F-3879F97B5CBC}" type="slidenum">
-              <a:rPr b="0" lang="en-US"/>
-              <a:t>1006</a:t>
+              <a:rPr lang="en-US" b="0"/>
+              <a:t>‹N›</a:t>
             </a:fld>
             <a:endParaRPr lang="en-US"/>
           </a:p>
@@ -3250,6 +3052,7 @@
         <a:solidFill>
           <a:schemeClr val="tx1"/>
         </a:solidFill>
+        <a:effectLst/>
       </p:bgPr>
     </p:bg>
     <p:spTree>
@@ -3293,137 +3096,7 @@
       </p:sp>
       <p:pic>
         <p:nvPicPr>
-          <p:cNvPr id="3" name="Image 0" descr="/tmp/tmp.CzRxgXMluS/logo.png">    </p:cNvPr>
-          <p:cNvPicPr>
-            <a:picLocks noChangeAspect="1"/>
-          </p:cNvPicPr>
-          <p:nvPr/>
-        </p:nvPicPr>
-        <p:blipFill>
-          <a:blip r:embed="rId1"/>
-          <a:stretch>
-            <a:fillRect/>
-          </a:stretch>
-        </p:blipFill>
-        <p:spPr>
-          <a:xfrm>
-            <a:off x="658368" y="1572768"/>
-            <a:ext cx="786384" cy="786384"/>
-          </a:xfrm>
-          <a:prstGeom prst="rect">
-            <a:avLst/>
-          </a:prstGeom>
-        </p:spPr>
-      </p:pic>
-      <p:sp>
-        <p:nvSpPr>
-          <p:cNvPr id="4" name="Text 1"/>
-          <p:cNvSpPr/>
-          <p:nvPr>
-            <p:ph idx="102" type="title" hasCustomPrompt="1"/>
-          </p:nvPr>
-        </p:nvSpPr>
-        <p:spPr>
-          <a:xfrm>
-            <a:off x="548640" y="2834640"/>
-            <a:ext cx="9144000" cy="1188720"/>
-          </a:xfrm>
-          <a:prstGeom prst="rect">
-            <a:avLst/>
-          </a:prstGeom>
-          <a:noFill/>
-          <a:ln/>
-        </p:spPr>
-        <p:txBody>
-          <a:bodyPr wrap="square" rtlCol="0"/>
-          <a:lstStyle>
-            <a:lvl1pPr algn="l" indent="0" marL="0">
-              <a:buNone/>
-              <a:defRPr lang="en-US" sz="5400" b="1" spc="-150" kern="0" dirty="0">
-                <a:solidFill>
-                  <a:schemeClr val="bg2"/>
-                </a:solidFill>
-              </a:defRPr>
-            </a:lvl1pPr>
-          </a:lstStyle>
-          <a:p>
-            <a:pPr algn="l" indent="0" marL="0">
-              <a:buNone/>
-            </a:pPr>
-            <a:r>
-              <a:rPr lang="en-US" sz="5400" b="1" spc="-150" kern="0" dirty="0">
-                <a:solidFill>
-                  <a:schemeClr val="bg2"/>
-                </a:solidFill>
-              </a:rPr>
-              <a:t>THANK YOU</a:t>
-            </a:r>
-            <a:endParaRPr lang="en-US" sz="5400" dirty="0"/>
-          </a:p>
-        </p:txBody>
-      </p:sp>
-      <p:sp>
-        <p:nvSpPr>
-          <p:cNvPr id="5" name="Text 1"/>
-          <p:cNvSpPr/>
-          <p:nvPr>
-            <p:ph idx="103" type="body" hasCustomPrompt="1"/>
-          </p:nvPr>
-        </p:nvSpPr>
-        <p:spPr>
-          <a:xfrm>
-            <a:off x="548640" y="4114800"/>
-            <a:ext cx="8229600" cy="1280160"/>
-          </a:xfrm>
-          <a:prstGeom prst="rect">
-            <a:avLst/>
-          </a:prstGeom>
-          <a:noFill/>
-          <a:ln/>
-        </p:spPr>
-        <p:txBody>
-          <a:bodyPr wrap="square" rtlCol="0"/>
-          <a:lstStyle>
-            <a:lvl1pPr indent="0" marL="0">
-              <a:spcAft>
-                <a:spcPts val="400"/>
-              </a:spcAft>
-              <a:buNone/>
-              <a:defRPr lang="en-US" sz="1200" dirty="0">
-                <a:solidFill>
-                  <a:schemeClr val="accent1"/>
-                </a:solidFill>
-                <a:latin typeface="JetBrains Mono" pitchFamily="34" charset="0"/>
-                <a:ea typeface="JetBrains Mono" pitchFamily="34" charset="-122"/>
-                <a:cs typeface="JetBrains Mono" pitchFamily="34" charset="-120"/>
-              </a:defRPr>
-            </a:lvl1pPr>
-          </a:lstStyle>
-          <a:p>
-            <a:pPr indent="0" marL="0">
-              <a:spcAft>
-                <a:spcPts val="400"/>
-              </a:spcAft>
-              <a:buNone/>
-            </a:pPr>
-            <a:r>
-              <a:rPr lang="en-US" sz="1200" dirty="0">
-                <a:solidFill>
-                  <a:schemeClr val="accent1"/>
-                </a:solidFill>
-                <a:latin typeface="JetBrains Mono" pitchFamily="34" charset="0"/>
-                <a:ea typeface="JetBrains Mono" pitchFamily="34" charset="-122"/>
-                <a:cs typeface="JetBrains Mono" pitchFamily="34" charset="-120"/>
-              </a:rPr>
-              <a:t>contact@example.org</a:t>
-            </a:r>
-            <a:endParaRPr lang="en-US" sz="1200" dirty="0"/>
-          </a:p>
-        </p:txBody>
-      </p:sp>
-      <p:pic>
-        <p:nvPicPr>
-          <p:cNvPr id="6" name="Image 1" descr="/tmp/tmp.CzRxgXMluS/logo.png">    </p:cNvPr>
+          <p:cNvPr id="3" name="Image 0" descr="/tmp/tmp.CzRxgXMluS/logo.png"/>
           <p:cNvPicPr>
             <a:picLocks noChangeAspect="1"/>
           </p:cNvPicPr>
@@ -3437,6 +3110,140 @@
         </p:blipFill>
         <p:spPr>
           <a:xfrm>
+            <a:off x="658368" y="1572768"/>
+            <a:ext cx="786384" cy="786384"/>
+          </a:xfrm>
+          <a:prstGeom prst="rect">
+            <a:avLst/>
+          </a:prstGeom>
+        </p:spPr>
+      </p:pic>
+      <p:sp>
+        <p:nvSpPr>
+          <p:cNvPr id="4" name="Text 1"/>
+          <p:cNvSpPr>
+            <a:spLocks noGrp="1"/>
+          </p:cNvSpPr>
+          <p:nvPr>
+            <p:ph type="title" idx="102" hasCustomPrompt="1"/>
+          </p:nvPr>
+        </p:nvSpPr>
+        <p:spPr>
+          <a:xfrm>
+            <a:off x="548640" y="2834640"/>
+            <a:ext cx="9144000" cy="1188720"/>
+          </a:xfrm>
+          <a:prstGeom prst="rect">
+            <a:avLst/>
+          </a:prstGeom>
+          <a:noFill/>
+          <a:ln/>
+        </p:spPr>
+        <p:txBody>
+          <a:bodyPr wrap="square" rtlCol="0"/>
+          <a:lstStyle>
+            <a:lvl1pPr marL="0" indent="0" algn="l">
+              <a:buNone/>
+              <a:defRPr lang="en-US" sz="5400" b="1" kern="0" spc="-150" dirty="0">
+                <a:solidFill>
+                  <a:schemeClr val="bg2"/>
+                </a:solidFill>
+              </a:defRPr>
+            </a:lvl1pPr>
+          </a:lstStyle>
+          <a:p>
+            <a:pPr marL="0" indent="0" algn="l">
+              <a:buNone/>
+            </a:pPr>
+            <a:r>
+              <a:rPr lang="en-US" sz="5400" b="1" kern="0" spc="-150" dirty="0">
+                <a:solidFill>
+                  <a:schemeClr val="bg2"/>
+                </a:solidFill>
+              </a:rPr>
+              <a:t>THANK YOU</a:t>
+            </a:r>
+            <a:endParaRPr lang="en-US" sz="5400" dirty="0"/>
+          </a:p>
+        </p:txBody>
+      </p:sp>
+      <p:sp>
+        <p:nvSpPr>
+          <p:cNvPr id="5" name="Text 1"/>
+          <p:cNvSpPr>
+            <a:spLocks noGrp="1"/>
+          </p:cNvSpPr>
+          <p:nvPr>
+            <p:ph type="body" idx="103" hasCustomPrompt="1"/>
+          </p:nvPr>
+        </p:nvSpPr>
+        <p:spPr>
+          <a:xfrm>
+            <a:off x="548640" y="4114800"/>
+            <a:ext cx="8229600" cy="1280160"/>
+          </a:xfrm>
+          <a:prstGeom prst="rect">
+            <a:avLst/>
+          </a:prstGeom>
+          <a:noFill/>
+          <a:ln/>
+        </p:spPr>
+        <p:txBody>
+          <a:bodyPr wrap="square" rtlCol="0"/>
+          <a:lstStyle>
+            <a:lvl1pPr marL="0" indent="0">
+              <a:spcAft>
+                <a:spcPts val="400"/>
+              </a:spcAft>
+              <a:buNone/>
+              <a:defRPr lang="en-US" sz="1200" dirty="0">
+                <a:solidFill>
+                  <a:schemeClr val="accent1"/>
+                </a:solidFill>
+                <a:latin typeface="JetBrains Mono" pitchFamily="34" charset="0"/>
+                <a:ea typeface="JetBrains Mono" pitchFamily="34" charset="-122"/>
+                <a:cs typeface="JetBrains Mono" pitchFamily="34" charset="-120"/>
+              </a:defRPr>
+            </a:lvl1pPr>
+          </a:lstStyle>
+          <a:p>
+            <a:pPr marL="0" indent="0">
+              <a:spcAft>
+                <a:spcPts val="400"/>
+              </a:spcAft>
+              <a:buNone/>
+            </a:pPr>
+            <a:r>
+              <a:rPr lang="en-US" sz="1200" dirty="0">
+                <a:solidFill>
+                  <a:schemeClr val="accent1"/>
+                </a:solidFill>
+                <a:latin typeface="JetBrains Mono" pitchFamily="34" charset="0"/>
+                <a:ea typeface="JetBrains Mono" pitchFamily="34" charset="-122"/>
+                <a:cs typeface="JetBrains Mono" pitchFamily="34" charset="-120"/>
+              </a:rPr>
+              <a:t>contact@example.org</a:t>
+            </a:r>
+            <a:endParaRPr lang="en-US" sz="1200" dirty="0"/>
+          </a:p>
+        </p:txBody>
+      </p:sp>
+      <p:pic>
+        <p:nvPicPr>
+          <p:cNvPr id="6" name="Image 1" descr="/tmp/tmp.CzRxgXMluS/logo.png"/>
+          <p:cNvPicPr>
+            <a:picLocks noChangeAspect="1"/>
+          </p:cNvPicPr>
+          <p:nvPr/>
+        </p:nvPicPr>
+        <p:blipFill>
+          <a:blip r:embed="rId2"/>
+          <a:stretch>
+            <a:fillRect/>
+          </a:stretch>
+        </p:blipFill>
+        <p:spPr>
+          <a:xfrm>
             <a:off x="548640" y="6327648"/>
             <a:ext cx="237744" cy="237744"/>
           </a:xfrm>
@@ -3466,11 +3273,11 @@
           <a:bodyPr wrap="square" lIns="0" tIns="0" rIns="0" bIns="0" rtlCol="0" anchor="ctr"/>
           <a:lstStyle/>
           <a:p>
-            <a:pPr indent="0" marL="0">
-              <a:buNone/>
-            </a:pPr>
-            <a:r>
-              <a:rPr lang="en-US" sz="1000" b="1" spc="50" kern="0" dirty="0">
+            <a:pPr marL="0" indent="0">
+              <a:buNone/>
+            </a:pPr>
+            <a:r>
+              <a:rPr lang="en-US" sz="1000" b="1" kern="0" spc="50" dirty="0">
                 <a:solidFill>
                   <a:schemeClr val="bg2"/>
                 </a:solidFill>
@@ -3504,7 +3311,7 @@
           </a:prstGeom>
           <a:extLst>
             <a:ext uri="{C572A759-6A51-4108-AA02-DFA0A04FC94B}">
-              <ma14:wrappingTextBoxFlag xmlns:ma14="http://schemas.microsoft.com/office/mac/drawingml/2011/main" val="0"/>
+              <ma14:wrappingTextBoxFlag xmlns:ma14="http://schemas.microsoft.com/office/mac/drawingml/2011/main" xmlns="" val="0"/>
             </a:ext>
           </a:extLst>
         </p:spPr>
@@ -3525,8 +3332,8 @@
           <a:p>
             <a:pPr algn="r"/>
             <a:fld id="{F7021451-1387-4CA6-816F-3879F97B5CBC}" type="slidenum">
-              <a:rPr b="0" lang="en-US"/>
-              <a:t>1007</a:t>
+              <a:rPr lang="en-US" b="0"/>
+              <a:t>‹N›</a:t>
             </a:fld>
             <a:endParaRPr lang="en-US"/>
           </a:p>
@@ -3543,6 +3350,11 @@
 <file path=ppt/slideMasters/slideMaster1.xml><?xml version="1.0" encoding="utf-8"?>
 <p:sldMaster xmlns:a="http://schemas.openxmlformats.org/drawingml/2006/main" xmlns:r="http://schemas.openxmlformats.org/officeDocument/2006/relationships" xmlns:p="http://schemas.openxmlformats.org/presentationml/2006/main">
   <p:cSld>
+    <p:bg>
+      <p:bgRef idx="1001">
+        <a:schemeClr val="bg1"/>
+      </p:bgRef>
+    </p:bg>
     <p:spTree>
       <p:nvGrpSpPr>
         <p:cNvPr id="1" name=""/>
@@ -3577,7 +3389,7 @@
           </a:prstGeom>
           <a:extLst>
             <a:ext uri="{C572A759-6A51-4108-AA02-DFA0A04FC94B}">
-              <ma14:wrappingTextBoxFlag xmlns:ma14="http://schemas.microsoft.com/office/mac/drawingml/2011/main" val="0"/>
+              <ma14:wrappingTextBoxFlag xmlns:ma14="http://schemas.microsoft.com/office/mac/drawingml/2011/main" xmlns="" val="0"/>
             </a:ext>
           </a:extLst>
         </p:spPr>
@@ -3598,8 +3410,8 @@
           <a:p>
             <a:pPr algn="r"/>
             <a:fld id="{F7021451-1387-4CA6-816F-3879F97B5CBC}" type="slidenum">
-              <a:rPr b="0" lang="en-US"/>
-              <a:t>null</a:t>
+              <a:rPr lang="en-US" b="0"/>
+              <a:t>‹N›</a:t>
             </a:fld>
             <a:endParaRPr lang="en-US"/>
           </a:p>
@@ -3891,9 +3703,11 @@
       <p:sp>
         <p:nvSpPr>
           <p:cNvPr id="2" name="Text 1"/>
-          <p:cNvSpPr/>
-          <p:nvPr>
-            <p:ph idx="102" type="body" hasCustomPrompt="1"/>
+          <p:cNvSpPr>
+            <a:spLocks noGrp="1"/>
+          </p:cNvSpPr>
+          <p:nvPr>
+            <p:ph type="body" idx="102" hasCustomPrompt="1"/>
           </p:nvPr>
         </p:nvSpPr>
         <p:spPr>
@@ -3911,11 +3725,11 @@
           <a:bodyPr wrap="square" lIns="0" tIns="0" rIns="0" bIns="0" rtlCol="0" anchor="ctr"/>
           <a:lstStyle/>
           <a:p>
-            <a:pPr indent="0" marL="0">
-              <a:buNone/>
-            </a:pPr>
-            <a:r>
-              <a:rPr lang="en-US" sz="1000" spc="300" kern="0" dirty="0">
+            <a:pPr marL="0" indent="0">
+              <a:buNone/>
+            </a:pPr>
+            <a:r>
+              <a:rPr lang="en-US" sz="1000" kern="0" spc="300" dirty="0">
                 <a:solidFill>
                   <a:schemeClr val="accent4"/>
                 </a:solidFill>
@@ -3932,9 +3746,11 @@
       <p:sp>
         <p:nvSpPr>
           <p:cNvPr id="3" name="Text 1"/>
-          <p:cNvSpPr/>
-          <p:nvPr>
-            <p:ph idx="104" type="title" hasCustomPrompt="1"/>
+          <p:cNvSpPr>
+            <a:spLocks noGrp="1"/>
+          </p:cNvSpPr>
+          <p:nvPr>
+            <p:ph type="title" idx="104" hasCustomPrompt="1"/>
           </p:nvPr>
         </p:nvSpPr>
         <p:spPr>
@@ -3952,44 +3768,45 @@
           <a:bodyPr wrap="square" lIns="0" tIns="0" rIns="0" bIns="0" rtlCol="0" anchor="t"/>
           <a:lstStyle/>
           <a:p>
-            <a:pPr algn="l" indent="0" marL="0">
-              <a:lnSpc>
-                <a:spcPct val="85000"/>
-              </a:lnSpc>
-              <a:buNone/>
-            </a:pPr>
-            <a:r>
-              <a:rPr lang="en-US" sz="5400" b="1" spc="-150" kern="0" dirty="0">
+            <a:r>
+              <a:rPr lang="en-US" sz="5400" b="1" kern="0" spc="-150" dirty="0">
                 <a:solidFill>
                   <a:schemeClr val="tx1"/>
                 </a:solidFill>
               </a:rPr>
-              <a:t>TRUSTED AI</a:t>
-            </a:r>
-            <a:pPr algn="l" indent="0" marL="0">
-              <a:lnSpc>
-                <a:spcPct val="85000"/>
-              </a:lnSpc>
-              <a:buNone/>
-            </a:pPr>
-            <a:r>
-              <a:rPr lang="en-US" sz="5400" b="1" spc="-150" kern="0" dirty="0">
+              <a:t>TRUST AI</a:t>
+            </a:r>
+            <a:r>
+              <a:rPr lang="en-US" sz="5400" b="1" kern="0" spc="-150" dirty="0">
                 <a:solidFill>
                   <a:schemeClr val="accent2"/>
                 </a:solidFill>
               </a:rPr>
               <a:t>.</a:t>
             </a:r>
-            <a:endParaRPr lang="en-US" sz="5400" dirty="0"/>
+            <a:br>
+              <a:rPr lang="en-US" sz="5400" b="1" kern="0" spc="-150" dirty="0">
+                <a:solidFill>
+                  <a:schemeClr val="accent2"/>
+                </a:solidFill>
+              </a:rPr>
+            </a:br>
+            <a:r>
+              <a:rPr lang="it-IT" sz="3400" dirty="0"/>
+              <a:t>DESIGN AND BUILD AI WE CAN TRUST.</a:t>
+            </a:r>
+            <a:endParaRPr lang="en-US" sz="3400" dirty="0"/>
           </a:p>
         </p:txBody>
       </p:sp>
       <p:sp>
         <p:nvSpPr>
           <p:cNvPr id="4" name="Text 1"/>
-          <p:cNvSpPr/>
-          <p:nvPr>
-            <p:ph idx="105" type="body" hasCustomPrompt="1"/>
+          <p:cNvSpPr>
+            <a:spLocks noGrp="1"/>
+          </p:cNvSpPr>
+          <p:nvPr>
+            <p:ph type="body" idx="105" hasCustomPrompt="1"/>
           </p:nvPr>
         </p:nvSpPr>
         <p:spPr>
@@ -4007,7 +3824,7 @@
           <a:bodyPr wrap="square" lIns="0" tIns="0" rIns="0" bIns="0" rtlCol="0" anchor="t"/>
           <a:lstStyle/>
           <a:p>
-            <a:pPr indent="0" marL="0">
+            <a:pPr marL="0" indent="0">
               <a:buNone/>
             </a:pPr>
             <a:r>
@@ -4025,9 +3842,11 @@
       <p:sp>
         <p:nvSpPr>
           <p:cNvPr id="5" name="Text 1"/>
-          <p:cNvSpPr/>
-          <p:nvPr>
-            <p:ph idx="106" type="body" hasCustomPrompt="1"/>
+          <p:cNvSpPr>
+            <a:spLocks noGrp="1"/>
+          </p:cNvSpPr>
+          <p:nvPr>
+            <p:ph type="body" idx="106" hasCustomPrompt="1"/>
           </p:nvPr>
         </p:nvSpPr>
         <p:spPr>
@@ -4045,11 +3864,11 @@
           <a:bodyPr wrap="square" lIns="0" tIns="0" rIns="0" bIns="0" rtlCol="0" anchor="b"/>
           <a:lstStyle/>
           <a:p>
-            <a:pPr indent="0" marL="0">
-              <a:buNone/>
-            </a:pPr>
-            <a:r>
-              <a:rPr lang="en-US" sz="1000" spc="200" kern="0" dirty="0">
+            <a:pPr marL="0" indent="0">
+              <a:buNone/>
+            </a:pPr>
+            <a:r>
+              <a:rPr lang="en-US" sz="1000" kern="0" spc="200" dirty="0">
                 <a:solidFill>
                   <a:schemeClr val="tx1"/>
                 </a:solidFill>
@@ -4091,9 +3910,11 @@
       <p:sp>
         <p:nvSpPr>
           <p:cNvPr id="2" name="Text 1"/>
-          <p:cNvSpPr/>
-          <p:nvPr>
-            <p:ph idx="101" type="body" hasCustomPrompt="1"/>
+          <p:cNvSpPr>
+            <a:spLocks noGrp="1"/>
+          </p:cNvSpPr>
+          <p:nvPr>
+            <p:ph type="body" idx="101" hasCustomPrompt="1"/>
           </p:nvPr>
         </p:nvSpPr>
         <p:spPr>
@@ -4111,11 +3932,11 @@
           <a:bodyPr wrap="square" lIns="0" tIns="0" rIns="0" bIns="0" rtlCol="0" anchor="ctr"/>
           <a:lstStyle/>
           <a:p>
-            <a:pPr indent="0" marL="0">
-              <a:buNone/>
-            </a:pPr>
-            <a:r>
-              <a:rPr lang="en-US" sz="1000" spc="300" kern="0" dirty="0">
+            <a:pPr marL="0" indent="0">
+              <a:buNone/>
+            </a:pPr>
+            <a:r>
+              <a:rPr lang="en-US" sz="1000" kern="0" spc="300" dirty="0">
                 <a:solidFill>
                   <a:schemeClr val="accent4"/>
                 </a:solidFill>
@@ -4132,9 +3953,11 @@
       <p:sp>
         <p:nvSpPr>
           <p:cNvPr id="3" name="Text 1"/>
-          <p:cNvSpPr/>
-          <p:nvPr>
-            <p:ph idx="102" type="title" hasCustomPrompt="1"/>
+          <p:cNvSpPr>
+            <a:spLocks noGrp="1"/>
+          </p:cNvSpPr>
+          <p:nvPr>
+            <p:ph type="title" idx="102" hasCustomPrompt="1"/>
           </p:nvPr>
         </p:nvSpPr>
         <p:spPr>
@@ -4152,11 +3975,11 @@
           <a:bodyPr wrap="square" lIns="0" tIns="0" rIns="0" bIns="0" rtlCol="0" anchor="t"/>
           <a:lstStyle/>
           <a:p>
-            <a:pPr algn="l" indent="0" marL="0">
-              <a:buNone/>
-            </a:pPr>
-            <a:r>
-              <a:rPr lang="en-US" sz="3200" b="1" spc="-50" kern="0" dirty="0">
+            <a:pPr marL="0" indent="0" algn="l">
+              <a:buNone/>
+            </a:pPr>
+            <a:r>
+              <a:rPr lang="en-US" sz="3200" b="1" kern="0" spc="-50" dirty="0">
                 <a:solidFill>
                   <a:schemeClr val="tx1"/>
                 </a:solidFill>
@@ -4188,7 +4011,7 @@
           <a:bodyPr wrap="square" lIns="0" tIns="0" rIns="0" bIns="0" rtlCol="0" anchor="ctr"/>
           <a:lstStyle/>
           <a:p>
-            <a:pPr indent="0" marL="0">
+            <a:pPr marL="0" indent="0">
               <a:buNone/>
             </a:pPr>
             <a:r>
@@ -4227,7 +4050,7 @@
           <a:bodyPr wrap="square" lIns="0" tIns="0" rIns="0" bIns="0" rtlCol="0" anchor="ctr"/>
           <a:lstStyle/>
           <a:p>
-            <a:pPr indent="0" marL="0">
+            <a:pPr marL="0" indent="0">
               <a:buNone/>
             </a:pPr>
             <a:r>
@@ -4264,6 +4087,13 @@
             <a:prstDash val="solid"/>
           </a:ln>
         </p:spPr>
+        <p:txBody>
+          <a:bodyPr/>
+          <a:lstStyle/>
+          <a:p>
+            <a:endParaRPr lang="it-IT"/>
+          </a:p>
+        </p:txBody>
       </p:sp>
       <p:sp>
         <p:nvSpPr>
@@ -4286,7 +4116,7 @@
           <a:bodyPr wrap="square" lIns="0" tIns="0" rIns="0" bIns="0" rtlCol="0" anchor="ctr"/>
           <a:lstStyle/>
           <a:p>
-            <a:pPr indent="0" marL="0">
+            <a:pPr marL="0" indent="0">
               <a:buNone/>
             </a:pPr>
             <a:r>
@@ -4325,7 +4155,7 @@
           <a:bodyPr wrap="square" lIns="0" tIns="0" rIns="0" bIns="0" rtlCol="0" anchor="ctr"/>
           <a:lstStyle/>
           <a:p>
-            <a:pPr indent="0" marL="0">
+            <a:pPr marL="0" indent="0">
               <a:buNone/>
             </a:pPr>
             <a:r>
@@ -4362,6 +4192,13 @@
             <a:prstDash val="solid"/>
           </a:ln>
         </p:spPr>
+        <p:txBody>
+          <a:bodyPr/>
+          <a:lstStyle/>
+          <a:p>
+            <a:endParaRPr lang="it-IT"/>
+          </a:p>
+        </p:txBody>
       </p:sp>
       <p:sp>
         <p:nvSpPr>
@@ -4384,7 +4221,7 @@
           <a:bodyPr wrap="square" lIns="0" tIns="0" rIns="0" bIns="0" rtlCol="0" anchor="ctr"/>
           <a:lstStyle/>
           <a:p>
-            <a:pPr indent="0" marL="0">
+            <a:pPr marL="0" indent="0">
               <a:buNone/>
             </a:pPr>
             <a:r>
@@ -4423,7 +4260,7 @@
           <a:bodyPr wrap="square" lIns="0" tIns="0" rIns="0" bIns="0" rtlCol="0" anchor="ctr"/>
           <a:lstStyle/>
           <a:p>
-            <a:pPr indent="0" marL="0">
+            <a:pPr marL="0" indent="0">
               <a:buNone/>
             </a:pPr>
             <a:r>
@@ -4460,6 +4297,13 @@
             <a:prstDash val="solid"/>
           </a:ln>
         </p:spPr>
+        <p:txBody>
+          <a:bodyPr/>
+          <a:lstStyle/>
+          <a:p>
+            <a:endParaRPr lang="it-IT"/>
+          </a:p>
+        </p:txBody>
       </p:sp>
       <p:sp>
         <p:nvSpPr>
@@ -4482,7 +4326,7 @@
           <a:bodyPr wrap="square" lIns="0" tIns="0" rIns="0" bIns="0" rtlCol="0" anchor="ctr"/>
           <a:lstStyle/>
           <a:p>
-            <a:pPr indent="0" marL="0">
+            <a:pPr marL="0" indent="0">
               <a:buNone/>
             </a:pPr>
             <a:r>
@@ -4521,7 +4365,7 @@
           <a:bodyPr wrap="square" lIns="0" tIns="0" rIns="0" bIns="0" rtlCol="0" anchor="ctr"/>
           <a:lstStyle/>
           <a:p>
-            <a:pPr indent="0" marL="0">
+            <a:pPr marL="0" indent="0">
               <a:buNone/>
             </a:pPr>
             <a:r>
@@ -4558,6 +4402,13 @@
             <a:prstDash val="solid"/>
           </a:ln>
         </p:spPr>
+        <p:txBody>
+          <a:bodyPr/>
+          <a:lstStyle/>
+          <a:p>
+            <a:endParaRPr lang="it-IT"/>
+          </a:p>
+        </p:txBody>
       </p:sp>
       <p:sp>
         <p:nvSpPr>
@@ -4579,7 +4430,7 @@
           </a:prstGeom>
           <a:extLst>
             <a:ext uri="{C572A759-6A51-4108-AA02-DFA0A04FC94B}">
-              <ma14:wrappingTextBoxFlag xmlns:ma14="http://schemas.microsoft.com/office/mac/drawingml/2011/main" val="0"/>
+              <ma14:wrappingTextBoxFlag xmlns:ma14="http://schemas.microsoft.com/office/mac/drawingml/2011/main" xmlns="" val="0"/>
             </a:ext>
           </a:extLst>
         </p:spPr>
@@ -4600,7 +4451,7 @@
           <a:p>
             <a:pPr algn="r"/>
             <a:fld id="{F7021451-1387-4CA6-816F-3879F97B5CBC}" type="slidenum">
-              <a:rPr b="0" lang="en-US"/>
+              <a:rPr lang="en-US" b="0"/>
               <a:t>2</a:t>
             </a:fld>
             <a:endParaRPr lang="en-US"/>
@@ -4635,9 +4486,11 @@
       <p:sp>
         <p:nvSpPr>
           <p:cNvPr id="2" name="Text 0"/>
-          <p:cNvSpPr/>
-          <p:nvPr>
-            <p:ph idx="101" type="body" hasCustomPrompt="1"/>
+          <p:cNvSpPr>
+            <a:spLocks noGrp="1"/>
+          </p:cNvSpPr>
+          <p:nvPr>
+            <p:ph type="body" idx="101" hasCustomPrompt="1"/>
           </p:nvPr>
         </p:nvSpPr>
         <p:spPr>
@@ -4655,11 +4508,11 @@
           <a:bodyPr wrap="square" lIns="0" tIns="0" rIns="0" bIns="0" rtlCol="0" anchor="b"/>
           <a:lstStyle/>
           <a:p>
-            <a:pPr indent="0" marL="0">
-              <a:buNone/>
-            </a:pPr>
-            <a:r>
-              <a:rPr lang="en-US" sz="9600" b="1" spc="-300" kern="0" dirty="0">
+            <a:pPr marL="0" indent="0">
+              <a:buNone/>
+            </a:pPr>
+            <a:r>
+              <a:rPr lang="en-US" sz="9600" b="1" kern="0" spc="-300" dirty="0">
                 <a:solidFill>
                   <a:schemeClr val="accent1"/>
                 </a:solidFill>
@@ -4673,9 +4526,11 @@
       <p:sp>
         <p:nvSpPr>
           <p:cNvPr id="3" name="Text 0"/>
-          <p:cNvSpPr/>
-          <p:nvPr>
-            <p:ph idx="102" type="title" hasCustomPrompt="1"/>
+          <p:cNvSpPr>
+            <a:spLocks noGrp="1"/>
+          </p:cNvSpPr>
+          <p:nvPr>
+            <p:ph type="title" idx="102" hasCustomPrompt="1"/>
           </p:nvPr>
         </p:nvSpPr>
         <p:spPr>
@@ -4693,11 +4548,11 @@
           <a:bodyPr wrap="square" lIns="0" tIns="0" rIns="0" bIns="0" rtlCol="0" anchor="t"/>
           <a:lstStyle/>
           <a:p>
-            <a:pPr algn="l" indent="0" marL="0">
-              <a:buNone/>
-            </a:pPr>
-            <a:r>
-              <a:rPr lang="en-US" sz="4000" b="1" spc="-100" kern="0" dirty="0">
+            <a:pPr marL="0" indent="0" algn="l">
+              <a:buNone/>
+            </a:pPr>
+            <a:r>
+              <a:rPr lang="en-US" sz="4000" b="1" kern="0" spc="-100" dirty="0">
                 <a:solidFill>
                   <a:schemeClr val="tx1"/>
                 </a:solidFill>
@@ -4711,9 +4566,11 @@
       <p:sp>
         <p:nvSpPr>
           <p:cNvPr id="4" name="Text 0"/>
-          <p:cNvSpPr/>
-          <p:nvPr>
-            <p:ph idx="103" type="body" hasCustomPrompt="1"/>
+          <p:cNvSpPr>
+            <a:spLocks noGrp="1"/>
+          </p:cNvSpPr>
+          <p:nvPr>
+            <p:ph type="body" idx="103" hasCustomPrompt="1"/>
           </p:nvPr>
         </p:nvSpPr>
         <p:spPr>
@@ -4731,7 +4588,7 @@
           <a:bodyPr wrap="square" lIns="0" tIns="0" rIns="0" bIns="0" rtlCol="0" anchor="t"/>
           <a:lstStyle/>
           <a:p>
-            <a:pPr indent="0" marL="0">
+            <a:pPr marL="0" indent="0">
               <a:buNone/>
             </a:pPr>
             <a:r>
@@ -4766,7 +4623,7 @@
           </a:prstGeom>
           <a:extLst>
             <a:ext uri="{C572A759-6A51-4108-AA02-DFA0A04FC94B}">
-              <ma14:wrappingTextBoxFlag xmlns:ma14="http://schemas.microsoft.com/office/mac/drawingml/2011/main" val="0"/>
+              <ma14:wrappingTextBoxFlag xmlns:ma14="http://schemas.microsoft.com/office/mac/drawingml/2011/main" xmlns="" val="0"/>
             </a:ext>
           </a:extLst>
         </p:spPr>
@@ -4787,7 +4644,7 @@
           <a:p>
             <a:pPr algn="r"/>
             <a:fld id="{F7021451-1387-4CA6-816F-3879F97B5CBC}" type="slidenum">
-              <a:rPr b="0" lang="en-US"/>
+              <a:rPr lang="en-US" b="0"/>
               <a:t>3</a:t>
             </a:fld>
             <a:endParaRPr lang="en-US"/>
@@ -4822,9 +4679,11 @@
       <p:sp>
         <p:nvSpPr>
           <p:cNvPr id="2" name="Text 1"/>
-          <p:cNvSpPr/>
-          <p:nvPr>
-            <p:ph idx="101" type="body" hasCustomPrompt="1"/>
+          <p:cNvSpPr>
+            <a:spLocks noGrp="1"/>
+          </p:cNvSpPr>
+          <p:nvPr>
+            <p:ph type="body" idx="101" hasCustomPrompt="1"/>
           </p:nvPr>
         </p:nvSpPr>
         <p:spPr>
@@ -4842,11 +4701,11 @@
           <a:bodyPr wrap="square" lIns="0" tIns="0" rIns="0" bIns="0" rtlCol="0" anchor="ctr"/>
           <a:lstStyle/>
           <a:p>
-            <a:pPr indent="0" marL="0">
-              <a:buNone/>
-            </a:pPr>
-            <a:r>
-              <a:rPr lang="en-US" sz="1000" spc="300" kern="0" dirty="0">
+            <a:pPr marL="0" indent="0">
+              <a:buNone/>
+            </a:pPr>
+            <a:r>
+              <a:rPr lang="en-US" sz="1000" kern="0" spc="300" dirty="0">
                 <a:solidFill>
                   <a:schemeClr val="accent4"/>
                 </a:solidFill>
@@ -4863,9 +4722,11 @@
       <p:sp>
         <p:nvSpPr>
           <p:cNvPr id="3" name="Text 1"/>
-          <p:cNvSpPr/>
-          <p:nvPr>
-            <p:ph idx="102" type="title" hasCustomPrompt="1"/>
+          <p:cNvSpPr>
+            <a:spLocks noGrp="1"/>
+          </p:cNvSpPr>
+          <p:nvPr>
+            <p:ph type="title" idx="102" hasCustomPrompt="1"/>
           </p:nvPr>
         </p:nvSpPr>
         <p:spPr>
@@ -4883,11 +4744,11 @@
           <a:bodyPr wrap="square" lIns="0" tIns="0" rIns="0" bIns="0" rtlCol="0" anchor="t"/>
           <a:lstStyle/>
           <a:p>
-            <a:pPr algn="l" indent="0" marL="0">
-              <a:buNone/>
-            </a:pPr>
-            <a:r>
-              <a:rPr lang="en-US" sz="3200" b="1" spc="-50" kern="0" dirty="0">
+            <a:pPr marL="0" indent="0" algn="l">
+              <a:buNone/>
+            </a:pPr>
+            <a:r>
+              <a:rPr lang="en-US" sz="3200" b="1" kern="0" spc="-50" dirty="0">
                 <a:solidFill>
                   <a:schemeClr val="tx1"/>
                 </a:solidFill>
@@ -4901,9 +4762,11 @@
       <p:sp>
         <p:nvSpPr>
           <p:cNvPr id="4" name="Text 1"/>
-          <p:cNvSpPr/>
-          <p:nvPr>
-            <p:ph idx="103" type="body" hasCustomPrompt="1"/>
+          <p:cNvSpPr>
+            <a:spLocks noGrp="1"/>
+          </p:cNvSpPr>
+          <p:nvPr>
+            <p:ph type="body" idx="103" hasCustomPrompt="1"/>
           </p:nvPr>
         </p:nvSpPr>
         <p:spPr>
@@ -4975,7 +4838,7 @@
             <a:endParaRPr lang="en-US" sz="1600" dirty="0"/>
           </a:p>
           <a:p>
-            <a:pPr lvl="1" marL="685800" indent="-342900">
+            <a:pPr marL="685800" lvl="1" indent="-342900">
               <a:spcAft>
                 <a:spcPts val="800"/>
               </a:spcAft>
@@ -5014,7 +4877,7 @@
           </a:prstGeom>
           <a:extLst>
             <a:ext uri="{C572A759-6A51-4108-AA02-DFA0A04FC94B}">
-              <ma14:wrappingTextBoxFlag xmlns:ma14="http://schemas.microsoft.com/office/mac/drawingml/2011/main" val="0"/>
+              <ma14:wrappingTextBoxFlag xmlns:ma14="http://schemas.microsoft.com/office/mac/drawingml/2011/main" xmlns="" val="0"/>
             </a:ext>
           </a:extLst>
         </p:spPr>
@@ -5035,7 +4898,7 @@
           <a:p>
             <a:pPr algn="r"/>
             <a:fld id="{F7021451-1387-4CA6-816F-3879F97B5CBC}" type="slidenum">
-              <a:rPr b="0" lang="en-US"/>
+              <a:rPr lang="en-US" b="0"/>
               <a:t>4</a:t>
             </a:fld>
             <a:endParaRPr lang="en-US"/>
@@ -5070,9 +4933,11 @@
       <p:sp>
         <p:nvSpPr>
           <p:cNvPr id="2" name="Text 1"/>
-          <p:cNvSpPr/>
-          <p:nvPr>
-            <p:ph idx="101" type="body" hasCustomPrompt="1"/>
+          <p:cNvSpPr>
+            <a:spLocks noGrp="1"/>
+          </p:cNvSpPr>
+          <p:nvPr>
+            <p:ph type="body" idx="101" hasCustomPrompt="1"/>
           </p:nvPr>
         </p:nvSpPr>
         <p:spPr>
@@ -5090,11 +4955,11 @@
           <a:bodyPr wrap="square" lIns="0" tIns="0" rIns="0" bIns="0" rtlCol="0" anchor="ctr"/>
           <a:lstStyle/>
           <a:p>
-            <a:pPr indent="0" marL="0">
-              <a:buNone/>
-            </a:pPr>
-            <a:r>
-              <a:rPr lang="en-US" sz="1000" spc="300" kern="0" dirty="0">
+            <a:pPr marL="0" indent="0">
+              <a:buNone/>
+            </a:pPr>
+            <a:r>
+              <a:rPr lang="en-US" sz="1000" kern="0" spc="300" dirty="0">
                 <a:solidFill>
                   <a:schemeClr val="accent4"/>
                 </a:solidFill>
@@ -5111,9 +4976,11 @@
       <p:sp>
         <p:nvSpPr>
           <p:cNvPr id="3" name="Text 1"/>
-          <p:cNvSpPr/>
-          <p:nvPr>
-            <p:ph idx="102" type="title" hasCustomPrompt="1"/>
+          <p:cNvSpPr>
+            <a:spLocks noGrp="1"/>
+          </p:cNvSpPr>
+          <p:nvPr>
+            <p:ph type="title" idx="102" hasCustomPrompt="1"/>
           </p:nvPr>
         </p:nvSpPr>
         <p:spPr>
@@ -5131,11 +4998,11 @@
           <a:bodyPr wrap="square" lIns="0" tIns="0" rIns="0" bIns="0" rtlCol="0" anchor="t"/>
           <a:lstStyle/>
           <a:p>
-            <a:pPr algn="l" indent="0" marL="0">
-              <a:buNone/>
-            </a:pPr>
-            <a:r>
-              <a:rPr lang="en-US" sz="3200" b="1" spc="-50" kern="0" dirty="0">
+            <a:pPr marL="0" indent="0" algn="l">
+              <a:buNone/>
+            </a:pPr>
+            <a:r>
+              <a:rPr lang="en-US" sz="3200" b="1" kern="0" spc="-50" dirty="0">
                 <a:solidFill>
                   <a:schemeClr val="tx1"/>
                 </a:solidFill>
@@ -5149,9 +5016,11 @@
       <p:sp>
         <p:nvSpPr>
           <p:cNvPr id="4" name="Text 1"/>
-          <p:cNvSpPr/>
-          <p:nvPr>
-            <p:ph idx="103" type="body" hasCustomPrompt="1"/>
+          <p:cNvSpPr>
+            <a:spLocks noGrp="1"/>
+          </p:cNvSpPr>
+          <p:nvPr>
+            <p:ph type="body" idx="103" hasCustomPrompt="1"/>
           </p:nvPr>
         </p:nvSpPr>
         <p:spPr>
@@ -5169,7 +5038,7 @@
           <a:bodyPr wrap="square" lIns="0" tIns="0" rIns="0" bIns="0" rtlCol="0" anchor="t"/>
           <a:lstStyle/>
           <a:p>
-            <a:pPr indent="0" marL="0">
+            <a:pPr marL="0" indent="0">
               <a:spcAft>
                 <a:spcPts val="800"/>
               </a:spcAft>
@@ -5226,9 +5095,11 @@
       <p:sp>
         <p:nvSpPr>
           <p:cNvPr id="5" name="Text 1"/>
-          <p:cNvSpPr/>
-          <p:nvPr>
-            <p:ph idx="104" type="body" hasCustomPrompt="1"/>
+          <p:cNvSpPr>
+            <a:spLocks noGrp="1"/>
+          </p:cNvSpPr>
+          <p:nvPr>
+            <p:ph type="body" idx="104" hasCustomPrompt="1"/>
           </p:nvPr>
         </p:nvSpPr>
         <p:spPr>
@@ -5246,7 +5117,7 @@
           <a:bodyPr wrap="square" lIns="0" tIns="0" rIns="0" bIns="0" rtlCol="0" anchor="t"/>
           <a:lstStyle/>
           <a:p>
-            <a:pPr indent="0" marL="0">
+            <a:pPr marL="0" indent="0">
               <a:spcAft>
                 <a:spcPts val="800"/>
               </a:spcAft>
@@ -5320,7 +5191,7 @@
           </a:prstGeom>
           <a:extLst>
             <a:ext uri="{C572A759-6A51-4108-AA02-DFA0A04FC94B}">
-              <ma14:wrappingTextBoxFlag xmlns:ma14="http://schemas.microsoft.com/office/mac/drawingml/2011/main" val="0"/>
+              <ma14:wrappingTextBoxFlag xmlns:ma14="http://schemas.microsoft.com/office/mac/drawingml/2011/main" xmlns="" val="0"/>
             </a:ext>
           </a:extLst>
         </p:spPr>
@@ -5341,7 +5212,7 @@
           <a:p>
             <a:pPr algn="r"/>
             <a:fld id="{F7021451-1387-4CA6-816F-3879F97B5CBC}" type="slidenum">
-              <a:rPr b="0" lang="en-US"/>
+              <a:rPr lang="en-US" b="0"/>
               <a:t>5</a:t>
             </a:fld>
             <a:endParaRPr lang="en-US"/>
@@ -5376,9 +5247,11 @@
       <p:sp>
         <p:nvSpPr>
           <p:cNvPr id="2" name="Text 1"/>
-          <p:cNvSpPr/>
-          <p:nvPr>
-            <p:ph idx="101" type="body" hasCustomPrompt="1"/>
+          <p:cNvSpPr>
+            <a:spLocks noGrp="1"/>
+          </p:cNvSpPr>
+          <p:nvPr>
+            <p:ph type="body" idx="101" hasCustomPrompt="1"/>
           </p:nvPr>
         </p:nvSpPr>
         <p:spPr>
@@ -5396,11 +5269,11 @@
           <a:bodyPr wrap="square" lIns="0" tIns="0" rIns="0" bIns="0" rtlCol="0" anchor="ctr"/>
           <a:lstStyle/>
           <a:p>
-            <a:pPr indent="0" marL="0">
-              <a:buNone/>
-            </a:pPr>
-            <a:r>
-              <a:rPr lang="en-US" sz="1000" spc="300" kern="0" dirty="0">
+            <a:pPr marL="0" indent="0">
+              <a:buNone/>
+            </a:pPr>
+            <a:r>
+              <a:rPr lang="en-US" sz="1000" kern="0" spc="300" dirty="0">
                 <a:solidFill>
                   <a:schemeClr val="accent4"/>
                 </a:solidFill>
@@ -5417,9 +5290,11 @@
       <p:sp>
         <p:nvSpPr>
           <p:cNvPr id="3" name="Text 1"/>
-          <p:cNvSpPr/>
-          <p:nvPr>
-            <p:ph idx="102" type="title" hasCustomPrompt="1"/>
+          <p:cNvSpPr>
+            <a:spLocks noGrp="1"/>
+          </p:cNvSpPr>
+          <p:nvPr>
+            <p:ph type="title" idx="102" hasCustomPrompt="1"/>
           </p:nvPr>
         </p:nvSpPr>
         <p:spPr>
@@ -5437,11 +5312,11 @@
           <a:bodyPr wrap="square" lIns="0" tIns="0" rIns="0" bIns="0" rtlCol="0" anchor="t"/>
           <a:lstStyle/>
           <a:p>
-            <a:pPr algn="l" indent="0" marL="0">
-              <a:buNone/>
-            </a:pPr>
-            <a:r>
-              <a:rPr lang="en-US" sz="3200" b="1" spc="-50" kern="0" dirty="0">
+            <a:pPr marL="0" indent="0" algn="l">
+              <a:buNone/>
+            </a:pPr>
+            <a:r>
+              <a:rPr lang="en-US" sz="3200" b="1" kern="0" spc="-50" dirty="0">
                 <a:solidFill>
                   <a:schemeClr val="tx1"/>
                 </a:solidFill>
@@ -5471,6 +5346,13 @@
           </a:solidFill>
           <a:ln/>
         </p:spPr>
+        <p:txBody>
+          <a:bodyPr/>
+          <a:lstStyle/>
+          <a:p>
+            <a:endParaRPr lang="it-IT"/>
+          </a:p>
+        </p:txBody>
       </p:sp>
       <p:sp>
         <p:nvSpPr>
@@ -5496,6 +5378,13 @@
             <a:prstDash val="solid"/>
           </a:ln>
         </p:spPr>
+        <p:txBody>
+          <a:bodyPr/>
+          <a:lstStyle/>
+          <a:p>
+            <a:endParaRPr lang="it-IT"/>
+          </a:p>
+        </p:txBody>
       </p:sp>
       <p:sp>
         <p:nvSpPr>
@@ -5518,7 +5407,7 @@
           <a:bodyPr wrap="square" lIns="0" tIns="0" rIns="0" bIns="0" rtlCol="0" anchor="t"/>
           <a:lstStyle/>
           <a:p>
-            <a:pPr indent="0" marL="0">
+            <a:pPr marL="0" indent="0">
               <a:buNone/>
             </a:pPr>
             <a:r>
@@ -5554,7 +5443,7 @@
           <a:bodyPr wrap="square" lIns="0" tIns="0" rIns="0" bIns="0" rtlCol="0" anchor="b"/>
           <a:lstStyle/>
           <a:p>
-            <a:pPr indent="0" marL="0">
+            <a:pPr marL="0" indent="0">
               <a:buNone/>
             </a:pPr>
             <a:r>
@@ -5568,7 +5457,7 @@
             <a:endParaRPr lang="en-US" sz="1400" dirty="0"/>
           </a:p>
           <a:p>
-            <a:pPr indent="0" marL="0">
+            <a:pPr marL="0" indent="0">
               <a:buNone/>
             </a:pPr>
             <a:r>
@@ -5602,6 +5491,13 @@
           </a:solidFill>
           <a:ln/>
         </p:spPr>
+        <p:txBody>
+          <a:bodyPr/>
+          <a:lstStyle/>
+          <a:p>
+            <a:endParaRPr lang="it-IT"/>
+          </a:p>
+        </p:txBody>
       </p:sp>
       <p:sp>
         <p:nvSpPr>
@@ -5627,6 +5523,13 @@
             <a:prstDash val="solid"/>
           </a:ln>
         </p:spPr>
+        <p:txBody>
+          <a:bodyPr/>
+          <a:lstStyle/>
+          <a:p>
+            <a:endParaRPr lang="it-IT"/>
+          </a:p>
+        </p:txBody>
       </p:sp>
       <p:sp>
         <p:nvSpPr>
@@ -5649,7 +5552,7 @@
           <a:bodyPr wrap="square" lIns="0" tIns="0" rIns="0" bIns="0" rtlCol="0" anchor="t"/>
           <a:lstStyle/>
           <a:p>
-            <a:pPr indent="0" marL="0">
+            <a:pPr marL="0" indent="0">
               <a:buNone/>
             </a:pPr>
             <a:r>
@@ -5685,7 +5588,7 @@
           <a:bodyPr wrap="square" lIns="0" tIns="0" rIns="0" bIns="0" rtlCol="0" anchor="b"/>
           <a:lstStyle/>
           <a:p>
-            <a:pPr indent="0" marL="0">
+            <a:pPr marL="0" indent="0">
               <a:buNone/>
             </a:pPr>
             <a:r>
@@ -5719,6 +5622,13 @@
           </a:solidFill>
           <a:ln/>
         </p:spPr>
+        <p:txBody>
+          <a:bodyPr/>
+          <a:lstStyle/>
+          <a:p>
+            <a:endParaRPr lang="it-IT"/>
+          </a:p>
+        </p:txBody>
       </p:sp>
       <p:sp>
         <p:nvSpPr>
@@ -5744,6 +5654,13 @@
             <a:prstDash val="solid"/>
           </a:ln>
         </p:spPr>
+        <p:txBody>
+          <a:bodyPr/>
+          <a:lstStyle/>
+          <a:p>
+            <a:endParaRPr lang="it-IT"/>
+          </a:p>
+        </p:txBody>
       </p:sp>
       <p:sp>
         <p:nvSpPr>
@@ -5766,7 +5683,7 @@
           <a:bodyPr wrap="square" lIns="0" tIns="0" rIns="0" bIns="0" rtlCol="0" anchor="t"/>
           <a:lstStyle/>
           <a:p>
-            <a:pPr indent="0" marL="0">
+            <a:pPr marL="0" indent="0">
               <a:buNone/>
             </a:pPr>
             <a:r>
@@ -5802,7 +5719,7 @@
           <a:bodyPr wrap="square" lIns="0" tIns="0" rIns="0" bIns="0" rtlCol="0" anchor="b"/>
           <a:lstStyle/>
           <a:p>
-            <a:pPr indent="0" marL="0">
+            <a:pPr marL="0" indent="0">
               <a:buNone/>
             </a:pPr>
             <a:r>
@@ -5836,6 +5753,13 @@
           </a:solidFill>
           <a:ln/>
         </p:spPr>
+        <p:txBody>
+          <a:bodyPr/>
+          <a:lstStyle/>
+          <a:p>
+            <a:endParaRPr lang="it-IT"/>
+          </a:p>
+        </p:txBody>
       </p:sp>
       <p:sp>
         <p:nvSpPr>
@@ -5861,6 +5785,13 @@
             <a:prstDash val="solid"/>
           </a:ln>
         </p:spPr>
+        <p:txBody>
+          <a:bodyPr/>
+          <a:lstStyle/>
+          <a:p>
+            <a:endParaRPr lang="it-IT"/>
+          </a:p>
+        </p:txBody>
       </p:sp>
       <p:sp>
         <p:nvSpPr>
@@ -5883,7 +5814,7 @@
           <a:bodyPr wrap="square" lIns="0" tIns="0" rIns="0" bIns="0" rtlCol="0" anchor="t"/>
           <a:lstStyle/>
           <a:p>
-            <a:pPr indent="0" marL="0">
+            <a:pPr marL="0" indent="0">
               <a:buNone/>
             </a:pPr>
             <a:r>
@@ -5919,7 +5850,7 @@
           <a:bodyPr wrap="square" lIns="0" tIns="0" rIns="0" bIns="0" rtlCol="0" anchor="b"/>
           <a:lstStyle/>
           <a:p>
-            <a:pPr indent="0" marL="0">
+            <a:pPr marL="0" indent="0">
               <a:buNone/>
             </a:pPr>
             <a:r>
@@ -5953,6 +5884,13 @@
           </a:solidFill>
           <a:ln/>
         </p:spPr>
+        <p:txBody>
+          <a:bodyPr/>
+          <a:lstStyle/>
+          <a:p>
+            <a:endParaRPr lang="it-IT"/>
+          </a:p>
+        </p:txBody>
       </p:sp>
       <p:sp>
         <p:nvSpPr>
@@ -5978,6 +5916,13 @@
             <a:prstDash val="solid"/>
           </a:ln>
         </p:spPr>
+        <p:txBody>
+          <a:bodyPr/>
+          <a:lstStyle/>
+          <a:p>
+            <a:endParaRPr lang="it-IT"/>
+          </a:p>
+        </p:txBody>
       </p:sp>
       <p:sp>
         <p:nvSpPr>
@@ -6000,7 +5945,7 @@
           <a:bodyPr wrap="square" lIns="0" tIns="0" rIns="0" bIns="0" rtlCol="0" anchor="t"/>
           <a:lstStyle/>
           <a:p>
-            <a:pPr indent="0" marL="0">
+            <a:pPr marL="0" indent="0">
               <a:buNone/>
             </a:pPr>
             <a:r>
@@ -6036,7 +5981,7 @@
           <a:bodyPr wrap="square" lIns="0" tIns="0" rIns="0" bIns="0" rtlCol="0" anchor="b"/>
           <a:lstStyle/>
           <a:p>
-            <a:pPr indent="0" marL="0">
+            <a:pPr marL="0" indent="0">
               <a:buNone/>
             </a:pPr>
             <a:r>
@@ -6071,7 +6016,7 @@
           </a:prstGeom>
           <a:extLst>
             <a:ext uri="{C572A759-6A51-4108-AA02-DFA0A04FC94B}">
-              <ma14:wrappingTextBoxFlag xmlns:ma14="http://schemas.microsoft.com/office/mac/drawingml/2011/main" val="0"/>
+              <ma14:wrappingTextBoxFlag xmlns:ma14="http://schemas.microsoft.com/office/mac/drawingml/2011/main" xmlns="" val="0"/>
             </a:ext>
           </a:extLst>
         </p:spPr>
@@ -6092,7 +6037,7 @@
           <a:p>
             <a:pPr algn="r"/>
             <a:fld id="{F7021451-1387-4CA6-816F-3879F97B5CBC}" type="slidenum">
-              <a:rPr b="0" lang="en-US"/>
+              <a:rPr lang="en-US" b="0"/>
               <a:t>6</a:t>
             </a:fld>
             <a:endParaRPr lang="en-US"/>
@@ -6127,9 +6072,11 @@
       <p:sp>
         <p:nvSpPr>
           <p:cNvPr id="2" name="Text 1"/>
-          <p:cNvSpPr/>
-          <p:nvPr>
-            <p:ph idx="101" type="body" hasCustomPrompt="1"/>
+          <p:cNvSpPr>
+            <a:spLocks noGrp="1"/>
+          </p:cNvSpPr>
+          <p:nvPr>
+            <p:ph type="body" idx="101" hasCustomPrompt="1"/>
           </p:nvPr>
         </p:nvSpPr>
         <p:spPr>
@@ -6147,11 +6094,11 @@
           <a:bodyPr wrap="square" lIns="0" tIns="0" rIns="0" bIns="0" rtlCol="0" anchor="ctr"/>
           <a:lstStyle/>
           <a:p>
-            <a:pPr indent="0" marL="0">
-              <a:buNone/>
-            </a:pPr>
-            <a:r>
-              <a:rPr lang="en-US" sz="1000" spc="300" kern="0" dirty="0">
+            <a:pPr marL="0" indent="0">
+              <a:buNone/>
+            </a:pPr>
+            <a:r>
+              <a:rPr lang="en-US" sz="1000" kern="0" spc="300" dirty="0">
                 <a:solidFill>
                   <a:schemeClr val="accent4"/>
                 </a:solidFill>
@@ -6168,9 +6115,11 @@
       <p:sp>
         <p:nvSpPr>
           <p:cNvPr id="3" name="Text 1"/>
-          <p:cNvSpPr/>
-          <p:nvPr>
-            <p:ph idx="102" type="title" hasCustomPrompt="1"/>
+          <p:cNvSpPr>
+            <a:spLocks noGrp="1"/>
+          </p:cNvSpPr>
+          <p:nvPr>
+            <p:ph type="title" idx="102" hasCustomPrompt="1"/>
           </p:nvPr>
         </p:nvSpPr>
         <p:spPr>
@@ -6188,11 +6137,11 @@
           <a:bodyPr wrap="square" lIns="0" tIns="0" rIns="0" bIns="0" rtlCol="0" anchor="t"/>
           <a:lstStyle/>
           <a:p>
-            <a:pPr algn="l" indent="0" marL="0">
-              <a:buNone/>
-            </a:pPr>
-            <a:r>
-              <a:rPr lang="en-US" sz="3200" b="1" spc="-50" kern="0" dirty="0">
+            <a:pPr marL="0" indent="0" algn="l">
+              <a:buNone/>
+            </a:pPr>
+            <a:r>
+              <a:rPr lang="en-US" sz="3200" b="1" kern="0" spc="-50" dirty="0">
                 <a:solidFill>
                   <a:schemeClr val="tx1"/>
                 </a:solidFill>
@@ -6222,6 +6171,13 @@
           </a:solidFill>
           <a:ln/>
         </p:spPr>
+        <p:txBody>
+          <a:bodyPr/>
+          <a:lstStyle/>
+          <a:p>
+            <a:endParaRPr lang="it-IT"/>
+          </a:p>
+        </p:txBody>
       </p:sp>
       <p:sp>
         <p:nvSpPr>
@@ -6247,6 +6203,13 @@
             <a:prstDash val="solid"/>
           </a:ln>
         </p:spPr>
+        <p:txBody>
+          <a:bodyPr/>
+          <a:lstStyle/>
+          <a:p>
+            <a:endParaRPr lang="it-IT"/>
+          </a:p>
+        </p:txBody>
       </p:sp>
       <p:sp>
         <p:nvSpPr>
@@ -6269,11 +6232,11 @@
           <a:bodyPr wrap="square" lIns="0" tIns="0" rIns="0" bIns="0" rtlCol="0" anchor="t"/>
           <a:lstStyle/>
           <a:p>
-            <a:pPr indent="0" marL="0">
-              <a:buNone/>
-            </a:pPr>
-            <a:r>
-              <a:rPr lang="en-US" sz="6600" b="1" spc="-200" kern="0" dirty="0">
+            <a:pPr marL="0" indent="0">
+              <a:buNone/>
+            </a:pPr>
+            <a:r>
+              <a:rPr lang="en-US" sz="6600" b="1" kern="0" spc="-200" dirty="0">
                 <a:solidFill>
                   <a:schemeClr val="tx1"/>
                 </a:solidFill>
@@ -6305,11 +6268,11 @@
           <a:bodyPr wrap="square" lIns="0" tIns="0" rIns="0" bIns="0" rtlCol="0" anchor="t"/>
           <a:lstStyle/>
           <a:p>
-            <a:pPr indent="0" marL="0">
-              <a:buNone/>
-            </a:pPr>
-            <a:r>
-              <a:rPr lang="en-US" sz="1100" spc="200" kern="0" dirty="0">
+            <a:pPr marL="0" indent="0">
+              <a:buNone/>
+            </a:pPr>
+            <a:r>
+              <a:rPr lang="en-US" sz="1100" kern="0" spc="200" dirty="0">
                 <a:solidFill>
                   <a:schemeClr val="tx2"/>
                 </a:solidFill>
@@ -6342,6 +6305,13 @@
           </a:solidFill>
           <a:ln/>
         </p:spPr>
+        <p:txBody>
+          <a:bodyPr/>
+          <a:lstStyle/>
+          <a:p>
+            <a:endParaRPr lang="it-IT"/>
+          </a:p>
+        </p:txBody>
       </p:sp>
       <p:sp>
         <p:nvSpPr>
@@ -6367,6 +6337,13 @@
             <a:prstDash val="solid"/>
           </a:ln>
         </p:spPr>
+        <p:txBody>
+          <a:bodyPr/>
+          <a:lstStyle/>
+          <a:p>
+            <a:endParaRPr lang="it-IT"/>
+          </a:p>
+        </p:txBody>
       </p:sp>
       <p:sp>
         <p:nvSpPr>
@@ -6389,11 +6366,11 @@
           <a:bodyPr wrap="square" lIns="0" tIns="0" rIns="0" bIns="0" rtlCol="0" anchor="t"/>
           <a:lstStyle/>
           <a:p>
-            <a:pPr indent="0" marL="0">
-              <a:buNone/>
-            </a:pPr>
-            <a:r>
-              <a:rPr lang="en-US" sz="6600" b="1" spc="-200" kern="0" dirty="0">
+            <a:pPr marL="0" indent="0">
+              <a:buNone/>
+            </a:pPr>
+            <a:r>
+              <a:rPr lang="en-US" sz="6600" b="1" kern="0" spc="-200" dirty="0">
                 <a:solidFill>
                   <a:schemeClr val="tx1"/>
                 </a:solidFill>
@@ -6425,11 +6402,11 @@
           <a:bodyPr wrap="square" lIns="0" tIns="0" rIns="0" bIns="0" rtlCol="0" anchor="t"/>
           <a:lstStyle/>
           <a:p>
-            <a:pPr indent="0" marL="0">
-              <a:buNone/>
-            </a:pPr>
-            <a:r>
-              <a:rPr lang="en-US" sz="1100" spc="200" kern="0" dirty="0">
+            <a:pPr marL="0" indent="0">
+              <a:buNone/>
+            </a:pPr>
+            <a:r>
+              <a:rPr lang="en-US" sz="1100" kern="0" spc="200" dirty="0">
                 <a:solidFill>
                   <a:schemeClr val="tx2"/>
                 </a:solidFill>
@@ -6462,6 +6439,13 @@
           </a:solidFill>
           <a:ln/>
         </p:spPr>
+        <p:txBody>
+          <a:bodyPr/>
+          <a:lstStyle/>
+          <a:p>
+            <a:endParaRPr lang="it-IT"/>
+          </a:p>
+        </p:txBody>
       </p:sp>
       <p:sp>
         <p:nvSpPr>
@@ -6487,6 +6471,13 @@
             <a:prstDash val="solid"/>
           </a:ln>
         </p:spPr>
+        <p:txBody>
+          <a:bodyPr/>
+          <a:lstStyle/>
+          <a:p>
+            <a:endParaRPr lang="it-IT"/>
+          </a:p>
+        </p:txBody>
       </p:sp>
       <p:sp>
         <p:nvSpPr>
@@ -6509,11 +6500,11 @@
           <a:bodyPr wrap="square" lIns="0" tIns="0" rIns="0" bIns="0" rtlCol="0" anchor="t"/>
           <a:lstStyle/>
           <a:p>
-            <a:pPr indent="0" marL="0">
-              <a:buNone/>
-            </a:pPr>
-            <a:r>
-              <a:rPr lang="en-US" sz="6600" b="1" spc="-200" kern="0" dirty="0">
+            <a:pPr marL="0" indent="0">
+              <a:buNone/>
+            </a:pPr>
+            <a:r>
+              <a:rPr lang="en-US" sz="6600" b="1" kern="0" spc="-200" dirty="0">
                 <a:solidFill>
                   <a:schemeClr val="tx1"/>
                 </a:solidFill>
@@ -6545,11 +6536,11 @@
           <a:bodyPr wrap="square" lIns="0" tIns="0" rIns="0" bIns="0" rtlCol="0" anchor="t"/>
           <a:lstStyle/>
           <a:p>
-            <a:pPr indent="0" marL="0">
-              <a:buNone/>
-            </a:pPr>
-            <a:r>
-              <a:rPr lang="en-US" sz="1100" spc="200" kern="0" dirty="0">
+            <a:pPr marL="0" indent="0">
+              <a:buNone/>
+            </a:pPr>
+            <a:r>
+              <a:rPr lang="en-US" sz="1100" kern="0" spc="200" dirty="0">
                 <a:solidFill>
                   <a:schemeClr val="tx2"/>
                 </a:solidFill>
@@ -6584,7 +6575,7 @@
           <a:bodyPr wrap="square" lIns="0" tIns="0" rIns="0" bIns="0" rtlCol="0" anchor="ctr"/>
           <a:lstStyle/>
           <a:p>
-            <a:pPr indent="0" marL="0">
+            <a:pPr marL="0" indent="0">
               <a:buNone/>
             </a:pPr>
             <a:r>
@@ -6619,7 +6610,7 @@
           </a:prstGeom>
           <a:extLst>
             <a:ext uri="{C572A759-6A51-4108-AA02-DFA0A04FC94B}">
-              <ma14:wrappingTextBoxFlag xmlns:ma14="http://schemas.microsoft.com/office/mac/drawingml/2011/main" val="0"/>
+              <ma14:wrappingTextBoxFlag xmlns:ma14="http://schemas.microsoft.com/office/mac/drawingml/2011/main" xmlns="" val="0"/>
             </a:ext>
           </a:extLst>
         </p:spPr>
@@ -6640,7 +6631,7 @@
           <a:p>
             <a:pPr algn="r"/>
             <a:fld id="{F7021451-1387-4CA6-816F-3879F97B5CBC}" type="slidenum">
-              <a:rPr b="0" lang="en-US"/>
+              <a:rPr lang="en-US" b="0"/>
               <a:t>7</a:t>
             </a:fld>
             <a:endParaRPr lang="en-US"/>
@@ -6675,9 +6666,11 @@
       <p:sp>
         <p:nvSpPr>
           <p:cNvPr id="2" name="Text 1"/>
-          <p:cNvSpPr/>
-          <p:nvPr>
-            <p:ph idx="101" type="body" hasCustomPrompt="1"/>
+          <p:cNvSpPr>
+            <a:spLocks noGrp="1"/>
+          </p:cNvSpPr>
+          <p:nvPr>
+            <p:ph type="body" idx="101" hasCustomPrompt="1"/>
           </p:nvPr>
         </p:nvSpPr>
         <p:spPr>
@@ -6695,11 +6688,11 @@
           <a:bodyPr wrap="square" lIns="0" tIns="0" rIns="0" bIns="0" rtlCol="0" anchor="ctr"/>
           <a:lstStyle/>
           <a:p>
-            <a:pPr indent="0" marL="0">
-              <a:buNone/>
-            </a:pPr>
-            <a:r>
-              <a:rPr lang="en-US" sz="1000" spc="300" kern="0" dirty="0">
+            <a:pPr marL="0" indent="0">
+              <a:buNone/>
+            </a:pPr>
+            <a:r>
+              <a:rPr lang="en-US" sz="1000" kern="0" spc="300" dirty="0">
                 <a:solidFill>
                   <a:schemeClr val="accent4"/>
                 </a:solidFill>
@@ -6716,9 +6709,11 @@
       <p:sp>
         <p:nvSpPr>
           <p:cNvPr id="3" name="Text 1"/>
-          <p:cNvSpPr/>
-          <p:nvPr>
-            <p:ph idx="102" type="title" hasCustomPrompt="1"/>
+          <p:cNvSpPr>
+            <a:spLocks noGrp="1"/>
+          </p:cNvSpPr>
+          <p:nvPr>
+            <p:ph type="title" idx="102" hasCustomPrompt="1"/>
           </p:nvPr>
         </p:nvSpPr>
         <p:spPr>
@@ -6736,11 +6731,11 @@
           <a:bodyPr wrap="square" lIns="0" tIns="0" rIns="0" bIns="0" rtlCol="0" anchor="t"/>
           <a:lstStyle/>
           <a:p>
-            <a:pPr algn="l" indent="0" marL="0">
-              <a:buNone/>
-            </a:pPr>
-            <a:r>
-              <a:rPr lang="en-US" sz="3200" b="1" spc="-50" kern="0" dirty="0">
+            <a:pPr marL="0" indent="0" algn="l">
+              <a:buNone/>
+            </a:pPr>
+            <a:r>
+              <a:rPr lang="en-US" sz="3200" b="1" kern="0" spc="-50" dirty="0">
                 <a:solidFill>
                   <a:schemeClr val="tx1"/>
                 </a:solidFill>
@@ -6753,7 +6748,7 @@
       </p:sp>
       <p:graphicFrame>
         <p:nvGraphicFramePr>
-          <p:cNvPr id="4" name="example-chart" descr=""/>
+          <p:cNvPr id="4" name="example-chart"/>
           <p:cNvGraphicFramePr/>
           <p:nvPr/>
         </p:nvGraphicFramePr>
@@ -6761,9 +6756,9 @@
           <a:off x="548640" y="1828800"/>
           <a:ext cx="11094415" cy="4114800"/>
         </p:xfrm>
-        <a:graphic xmlns:a="http://schemas.openxmlformats.org/drawingml/2006/main">
+        <a:graphic>
           <a:graphicData uri="http://schemas.openxmlformats.org/drawingml/2006/chart">
-            <c:chart xmlns:c="http://schemas.openxmlformats.org/drawingml/2006/chart" r:id="rId1"/>
+            <c:chart xmlns:c="http://schemas.openxmlformats.org/drawingml/2006/chart" xmlns:r="http://schemas.openxmlformats.org/officeDocument/2006/relationships" r:id="rId3"/>
           </a:graphicData>
         </a:graphic>
       </p:graphicFrame>
@@ -6787,7 +6782,7 @@
           </a:prstGeom>
           <a:extLst>
             <a:ext uri="{C572A759-6A51-4108-AA02-DFA0A04FC94B}">
-              <ma14:wrappingTextBoxFlag xmlns:ma14="http://schemas.microsoft.com/office/mac/drawingml/2011/main" val="0"/>
+              <ma14:wrappingTextBoxFlag xmlns:ma14="http://schemas.microsoft.com/office/mac/drawingml/2011/main" xmlns="" val="0"/>
             </a:ext>
           </a:extLst>
         </p:spPr>
@@ -6808,7 +6803,7 @@
           <a:p>
             <a:pPr algn="r"/>
             <a:fld id="{F7021451-1387-4CA6-816F-3879F97B5CBC}" type="slidenum">
-              <a:rPr b="0" lang="en-US"/>
+              <a:rPr lang="en-US" b="0"/>
               <a:t>8</a:t>
             </a:fld>
             <a:endParaRPr lang="en-US"/>
@@ -6843,9 +6838,11 @@
       <p:sp>
         <p:nvSpPr>
           <p:cNvPr id="2" name="Text 1"/>
-          <p:cNvSpPr/>
-          <p:nvPr>
-            <p:ph idx="102" type="title" hasCustomPrompt="1"/>
+          <p:cNvSpPr>
+            <a:spLocks noGrp="1"/>
+          </p:cNvSpPr>
+          <p:nvPr>
+            <p:ph type="title" idx="102" hasCustomPrompt="1"/>
           </p:nvPr>
         </p:nvSpPr>
         <p:spPr>
@@ -6863,11 +6860,11 @@
           <a:bodyPr wrap="square" lIns="0" tIns="0" rIns="0" bIns="0" rtlCol="0" anchor="t"/>
           <a:lstStyle/>
           <a:p>
-            <a:pPr algn="l" indent="0" marL="0">
-              <a:buNone/>
-            </a:pPr>
-            <a:r>
-              <a:rPr lang="en-US" sz="5400" b="1" spc="-150" kern="0" dirty="0">
+            <a:pPr marL="0" indent="0" algn="l">
+              <a:buNone/>
+            </a:pPr>
+            <a:r>
+              <a:rPr lang="en-US" sz="5400" b="1" kern="0" spc="-150" dirty="0">
                 <a:solidFill>
                   <a:schemeClr val="bg2"/>
                 </a:solidFill>
@@ -6881,9 +6878,11 @@
       <p:sp>
         <p:nvSpPr>
           <p:cNvPr id="3" name="Text 1"/>
-          <p:cNvSpPr/>
-          <p:nvPr>
-            <p:ph idx="103" type="body" hasCustomPrompt="1"/>
+          <p:cNvSpPr>
+            <a:spLocks noGrp="1"/>
+          </p:cNvSpPr>
+          <p:nvPr>
+            <p:ph type="body" idx="103" hasCustomPrompt="1"/>
           </p:nvPr>
         </p:nvSpPr>
         <p:spPr>
@@ -6901,7 +6900,7 @@
           <a:bodyPr wrap="square" lIns="0" tIns="0" rIns="0" bIns="0" rtlCol="0" anchor="t"/>
           <a:lstStyle/>
           <a:p>
-            <a:pPr indent="0" marL="0">
+            <a:pPr marL="0" indent="0">
               <a:spcAft>
                 <a:spcPts val="400"/>
               </a:spcAft>
@@ -6921,7 +6920,7 @@
             <a:endParaRPr lang="en-US" sz="1200" dirty="0"/>
           </a:p>
           <a:p>
-            <a:pPr indent="0" marL="0">
+            <a:pPr marL="0" indent="0">
               <a:spcAft>
                 <a:spcPts val="400"/>
               </a:spcAft>
@@ -6962,7 +6961,7 @@
           </a:prstGeom>
           <a:extLst>
             <a:ext uri="{C572A759-6A51-4108-AA02-DFA0A04FC94B}">
-              <ma14:wrappingTextBoxFlag xmlns:ma14="http://schemas.microsoft.com/office/mac/drawingml/2011/main" val="0"/>
+              <ma14:wrappingTextBoxFlag xmlns:ma14="http://schemas.microsoft.com/office/mac/drawingml/2011/main" xmlns="" val="0"/>
             </a:ext>
           </a:extLst>
         </p:spPr>
@@ -6983,7 +6982,7 @@
           <a:p>
             <a:pPr algn="r"/>
             <a:fld id="{F7021451-1387-4CA6-816F-3879F97B5CBC}" type="slidenum">
-              <a:rPr b="0" lang="en-US"/>
+              <a:rPr lang="en-US" b="0"/>
               <a:t>9</a:t>
             </a:fld>
             <a:endParaRPr lang="en-US"/>
@@ -7291,4 +7290,319 @@
     </a:ext>
   </a:extLst>
 </a:theme>
+</file>
+
+<file path=ppt/theme/theme2.xml><?xml version="1.0" encoding="utf-8"?>
+<a:theme xmlns:a="http://schemas.openxmlformats.org/drawingml/2006/main" name="Tema di Office">
+  <a:themeElements>
+    <a:clrScheme name="Office">
+      <a:dk1>
+        <a:sysClr val="windowText" lastClr="000000"/>
+      </a:dk1>
+      <a:lt1>
+        <a:sysClr val="window" lastClr="FFFFFF"/>
+      </a:lt1>
+      <a:dk2>
+        <a:srgbClr val="0E2841"/>
+      </a:dk2>
+      <a:lt2>
+        <a:srgbClr val="E8E8E8"/>
+      </a:lt2>
+      <a:accent1>
+        <a:srgbClr val="156082"/>
+      </a:accent1>
+      <a:accent2>
+        <a:srgbClr val="E97132"/>
+      </a:accent2>
+      <a:accent3>
+        <a:srgbClr val="196B24"/>
+      </a:accent3>
+      <a:accent4>
+        <a:srgbClr val="0F9ED5"/>
+      </a:accent4>
+      <a:accent5>
+        <a:srgbClr val="A02B93"/>
+      </a:accent5>
+      <a:accent6>
+        <a:srgbClr val="4EA72E"/>
+      </a:accent6>
+      <a:hlink>
+        <a:srgbClr val="467886"/>
+      </a:hlink>
+      <a:folHlink>
+        <a:srgbClr val="96607D"/>
+      </a:folHlink>
+    </a:clrScheme>
+    <a:fontScheme name="Office">
+      <a:majorFont>
+        <a:latin typeface="Aptos Display" panose="02110004020202020204"/>
+        <a:ea typeface=""/>
+        <a:cs typeface=""/>
+        <a:font script="Jpan" typeface="游ゴシック Light"/>
+        <a:font script="Hang" typeface="맑은 고딕"/>
+        <a:font script="Hans" typeface="等线 Light"/>
+        <a:font script="Hant" typeface="新細明體"/>
+        <a:font script="Arab" typeface="Times New Roman"/>
+        <a:font script="Hebr" typeface="Times New Roman"/>
+        <a:font script="Thai" typeface="Angsana New"/>
+        <a:font script="Ethi" typeface="Nyala"/>
+        <a:font script="Beng" typeface="Vrinda"/>
+        <a:font script="Gujr" typeface="Shruti"/>
+        <a:font script="Khmr" typeface="MoolBoran"/>
+        <a:font script="Knda" typeface="Tunga"/>
+        <a:font script="Guru" typeface="Raavi"/>
+        <a:font script="Cans" typeface="Euphemia"/>
+        <a:font script="Cher" typeface="Plantagenet Cherokee"/>
+        <a:font script="Yiii" typeface="Microsoft Yi Baiti"/>
+        <a:font script="Tibt" typeface="Microsoft Himalaya"/>
+        <a:font script="Thaa" typeface="MV Boli"/>
+        <a:font script="Deva" typeface="Mangal"/>
+        <a:font script="Telu" typeface="Gautami"/>
+        <a:font script="Taml" typeface="Latha"/>
+        <a:font script="Syrc" typeface="Estrangelo Edessa"/>
+        <a:font script="Orya" typeface="Kalinga"/>
+        <a:font script="Mlym" typeface="Kartika"/>
+        <a:font script="Laoo" typeface="DokChampa"/>
+        <a:font script="Sinh" typeface="Iskoola Pota"/>
+        <a:font script="Mong" typeface="Mongolian Baiti"/>
+        <a:font script="Viet" typeface="Times New Roman"/>
+        <a:font script="Uigh" typeface="Microsoft Uighur"/>
+        <a:font script="Geor" typeface="Sylfaen"/>
+        <a:font script="Armn" typeface="Arial"/>
+        <a:font script="Bugi" typeface="Leelawadee UI"/>
+        <a:font script="Bopo" typeface="Microsoft JhengHei"/>
+        <a:font script="Java" typeface="Javanese Text"/>
+        <a:font script="Lisu" typeface="Segoe UI"/>
+        <a:font script="Mymr" typeface="Myanmar Text"/>
+        <a:font script="Nkoo" typeface="Ebrima"/>
+        <a:font script="Olck" typeface="Nirmala UI"/>
+        <a:font script="Osma" typeface="Ebrima"/>
+        <a:font script="Phag" typeface="Phagspa"/>
+        <a:font script="Syrn" typeface="Estrangelo Edessa"/>
+        <a:font script="Syrj" typeface="Estrangelo Edessa"/>
+        <a:font script="Syre" typeface="Estrangelo Edessa"/>
+        <a:font script="Sora" typeface="Nirmala UI"/>
+        <a:font script="Tale" typeface="Microsoft Tai Le"/>
+        <a:font script="Talu" typeface="Microsoft New Tai Lue"/>
+        <a:font script="Tfng" typeface="Ebrima"/>
+      </a:majorFont>
+      <a:minorFont>
+        <a:latin typeface="Aptos" panose="02110004020202020204"/>
+        <a:ea typeface=""/>
+        <a:cs typeface=""/>
+        <a:font script="Jpan" typeface="游ゴシック"/>
+        <a:font script="Hang" typeface="맑은 고딕"/>
+        <a:font script="Hans" typeface="等线"/>
+        <a:font script="Hant" typeface="新細明體"/>
+        <a:font script="Arab" typeface="Arial"/>
+        <a:font script="Hebr" typeface="Arial"/>
+        <a:font script="Thai" typeface="Cordia New"/>
+        <a:font script="Ethi" typeface="Nyala"/>
+        <a:font script="Beng" typeface="Vrinda"/>
+        <a:font script="Gujr" typeface="Shruti"/>
+        <a:font script="Khmr" typeface="DaunPenh"/>
+        <a:font script="Knda" typeface="Tunga"/>
+        <a:font script="Guru" typeface="Raavi"/>
+        <a:font script="Cans" typeface="Euphemia"/>
+        <a:font script="Cher" typeface="Plantagenet Cherokee"/>
+        <a:font script="Yiii" typeface="Microsoft Yi Baiti"/>
+        <a:font script="Tibt" typeface="Microsoft Himalaya"/>
+        <a:font script="Thaa" typeface="MV Boli"/>
+        <a:font script="Deva" typeface="Mangal"/>
+        <a:font script="Telu" typeface="Gautami"/>
+        <a:font script="Taml" typeface="Latha"/>
+        <a:font script="Syrc" typeface="Estrangelo Edessa"/>
+        <a:font script="Orya" typeface="Kalinga"/>
+        <a:font script="Mlym" typeface="Kartika"/>
+        <a:font script="Laoo" typeface="DokChampa"/>
+        <a:font script="Sinh" typeface="Iskoola Pota"/>
+        <a:font script="Mong" typeface="Mongolian Baiti"/>
+        <a:font script="Viet" typeface="Arial"/>
+        <a:font script="Uigh" typeface="Microsoft Uighur"/>
+        <a:font script="Geor" typeface="Sylfaen"/>
+        <a:font script="Armn" typeface="Arial"/>
+        <a:font script="Bugi" typeface="Leelawadee UI"/>
+        <a:font script="Bopo" typeface="Microsoft JhengHei"/>
+        <a:font script="Java" typeface="Javanese Text"/>
+        <a:font script="Lisu" typeface="Segoe UI"/>
+        <a:font script="Mymr" typeface="Myanmar Text"/>
+        <a:font script="Nkoo" typeface="Ebrima"/>
+        <a:font script="Olck" typeface="Nirmala UI"/>
+        <a:font script="Osma" typeface="Ebrima"/>
+        <a:font script="Phag" typeface="Phagspa"/>
+        <a:font script="Syrn" typeface="Estrangelo Edessa"/>
+        <a:font script="Syrj" typeface="Estrangelo Edessa"/>
+        <a:font script="Syre" typeface="Estrangelo Edessa"/>
+        <a:font script="Sora" typeface="Nirmala UI"/>
+        <a:font script="Tale" typeface="Microsoft Tai Le"/>
+        <a:font script="Talu" typeface="Microsoft New Tai Lue"/>
+        <a:font script="Tfng" typeface="Ebrima"/>
+      </a:minorFont>
+    </a:fontScheme>
+    <a:fmtScheme name="Office">
+      <a:fillStyleLst>
+        <a:solidFill>
+          <a:schemeClr val="phClr"/>
+        </a:solidFill>
+        <a:gradFill rotWithShape="1">
+          <a:gsLst>
+            <a:gs pos="0">
+              <a:schemeClr val="phClr">
+                <a:lumMod val="110000"/>
+                <a:satMod val="105000"/>
+                <a:tint val="67000"/>
+              </a:schemeClr>
+            </a:gs>
+            <a:gs pos="50000">
+              <a:schemeClr val="phClr">
+                <a:lumMod val="105000"/>
+                <a:satMod val="103000"/>
+                <a:tint val="73000"/>
+              </a:schemeClr>
+            </a:gs>
+            <a:gs pos="100000">
+              <a:schemeClr val="phClr">
+                <a:lumMod val="105000"/>
+                <a:satMod val="109000"/>
+                <a:tint val="81000"/>
+              </a:schemeClr>
+            </a:gs>
+          </a:gsLst>
+          <a:lin ang="5400000" scaled="0"/>
+        </a:gradFill>
+        <a:gradFill rotWithShape="1">
+          <a:gsLst>
+            <a:gs pos="0">
+              <a:schemeClr val="phClr">
+                <a:satMod val="103000"/>
+                <a:lumMod val="102000"/>
+                <a:tint val="94000"/>
+              </a:schemeClr>
+            </a:gs>
+            <a:gs pos="50000">
+              <a:schemeClr val="phClr">
+                <a:satMod val="110000"/>
+                <a:lumMod val="100000"/>
+                <a:shade val="100000"/>
+              </a:schemeClr>
+            </a:gs>
+            <a:gs pos="100000">
+              <a:schemeClr val="phClr">
+                <a:lumMod val="99000"/>
+                <a:satMod val="120000"/>
+                <a:shade val="78000"/>
+              </a:schemeClr>
+            </a:gs>
+          </a:gsLst>
+          <a:lin ang="5400000" scaled="0"/>
+        </a:gradFill>
+      </a:fillStyleLst>
+      <a:lnStyleLst>
+        <a:ln w="12700" cap="flat" cmpd="sng" algn="ctr">
+          <a:solidFill>
+            <a:schemeClr val="phClr"/>
+          </a:solidFill>
+          <a:prstDash val="solid"/>
+          <a:miter lim="800000"/>
+        </a:ln>
+        <a:ln w="19050" cap="flat" cmpd="sng" algn="ctr">
+          <a:solidFill>
+            <a:schemeClr val="phClr"/>
+          </a:solidFill>
+          <a:prstDash val="solid"/>
+          <a:miter lim="800000"/>
+        </a:ln>
+        <a:ln w="25400" cap="flat" cmpd="sng" algn="ctr">
+          <a:solidFill>
+            <a:schemeClr val="phClr"/>
+          </a:solidFill>
+          <a:prstDash val="solid"/>
+          <a:miter lim="800000"/>
+        </a:ln>
+      </a:lnStyleLst>
+      <a:effectStyleLst>
+        <a:effectStyle>
+          <a:effectLst/>
+        </a:effectStyle>
+        <a:effectStyle>
+          <a:effectLst/>
+        </a:effectStyle>
+        <a:effectStyle>
+          <a:effectLst>
+            <a:outerShdw blurRad="57150" dist="19050" dir="5400000" algn="ctr" rotWithShape="0">
+              <a:srgbClr val="000000">
+                <a:alpha val="63000"/>
+              </a:srgbClr>
+            </a:outerShdw>
+          </a:effectLst>
+        </a:effectStyle>
+      </a:effectStyleLst>
+      <a:bgFillStyleLst>
+        <a:solidFill>
+          <a:schemeClr val="phClr"/>
+        </a:solidFill>
+        <a:solidFill>
+          <a:schemeClr val="phClr">
+            <a:tint val="95000"/>
+            <a:satMod val="170000"/>
+          </a:schemeClr>
+        </a:solidFill>
+        <a:gradFill rotWithShape="1">
+          <a:gsLst>
+            <a:gs pos="0">
+              <a:schemeClr val="phClr">
+                <a:tint val="93000"/>
+                <a:satMod val="150000"/>
+                <a:shade val="98000"/>
+                <a:lumMod val="102000"/>
+              </a:schemeClr>
+            </a:gs>
+            <a:gs pos="50000">
+              <a:schemeClr val="phClr">
+                <a:tint val="98000"/>
+                <a:satMod val="130000"/>
+                <a:shade val="90000"/>
+                <a:lumMod val="103000"/>
+              </a:schemeClr>
+            </a:gs>
+            <a:gs pos="100000">
+              <a:schemeClr val="phClr">
+                <a:shade val="63000"/>
+                <a:satMod val="120000"/>
+              </a:schemeClr>
+            </a:gs>
+          </a:gsLst>
+          <a:lin ang="5400000" scaled="0"/>
+        </a:gradFill>
+      </a:bgFillStyleLst>
+    </a:fmtScheme>
+  </a:themeElements>
+  <a:objectDefaults>
+    <a:lnDef>
+      <a:spPr/>
+      <a:bodyPr/>
+      <a:lstStyle/>
+      <a:style>
+        <a:lnRef idx="2">
+          <a:schemeClr val="accent1"/>
+        </a:lnRef>
+        <a:fillRef idx="0">
+          <a:schemeClr val="accent1"/>
+        </a:fillRef>
+        <a:effectRef idx="1">
+          <a:schemeClr val="accent1"/>
+        </a:effectRef>
+        <a:fontRef idx="minor">
+          <a:schemeClr val="tx1"/>
+        </a:fontRef>
+      </a:style>
+    </a:lnDef>
+  </a:objectDefaults>
+  <a:extraClrSchemeLst/>
+  <a:extLst>
+    <a:ext uri="{05A4C25C-085E-4340-85A3-A5531E510DB2}">
+      <thm15:themeFamily xmlns:thm15="http://schemas.microsoft.com/office/thememl/2012/main" name="Office Theme" id="{2E142A2C-CD16-42D6-873A-C26D2A0506FA}" vid="{1BDDFF52-6CD6-40A5-AB3C-68EB2F1E4D0A}"/>
+    </a:ext>
+  </a:extLst>
+</a:theme>
 </file>
--- a/assets/TRUST-AI-template.pptx
+++ b/assets/TRUST-AI-template.pptx
@@ -4,9 +4,6 @@
   <p:sldMasterIdLst>
     <p:sldMasterId id="2147483648" r:id="rId1"/>
   </p:sldMasterIdLst>
-  <p:notesMasterIdLst>
-    <p:notesMasterId r:id="rId11"/>
-  </p:notesMasterIdLst>
   <p:sldIdLst>
     <p:sldId id="256" r:id="rId2"/>
     <p:sldId id="257" r:id="rId3"/>
@@ -17,18 +14,22 @@
     <p:sldId id="262" r:id="rId8"/>
     <p:sldId id="263" r:id="rId9"/>
     <p:sldId id="264" r:id="rId10"/>
+    <p:sldId id="265" r:id="rId11"/>
   </p:sldIdLst>
+  <p:notesMasterIdLst>
+    <p:notesMasterId r:id="rId12"/>
+  </p:notesMasterIdLst>
   <p:sldSz cx="12192000" cy="6858000"/>
   <p:notesSz cx="6858000" cy="12192000"/>
   <p:embeddedFontLst>
     <p:embeddedFont>
-      <p:font typeface="JetBrains Mono" panose="02000009000000000000" pitchFamily="49" charset="0"/>
-      <p:regular r:id="rId12"/>
+      <p:font typeface="Space Grotesk"/>
+      <p:regular r:id="rId17"/>
+      <p:bold r:id="rId18"/>
     </p:embeddedFont>
     <p:embeddedFont>
-      <p:font typeface="Space Grotesk" pitchFamily="2" charset="77"/>
-      <p:regular r:id="rId13"/>
-      <p:bold r:id="rId14"/>
+      <p:font typeface="JetBrains Mono"/>
+      <p:regular r:id="rId19"/>
     </p:embeddedFont>
   </p:embeddedFontLst>
   <p:defaultTextStyle>
@@ -126,13 +127,13 @@
   <p:extLst>
     <p:ext uri="{521415D9-36F7-43E2-AB2F-B90AF26B5E84}">
       <p14:sectionLst xmlns:p14="http://schemas.microsoft.com/office/powerpoint/2010/main">
-        <p14:section name="Opening" id="{408726C3-65C3-8016-A8C8-40AAA0C794C5}">
+        <p14:section name="Opening" id="{a496f90e-477a-af66-32d1-4b9282e1a56f}">
           <p14:sldIdLst>
             <p14:sldId id="256"/>
             <p14:sldId id="257"/>
           </p14:sldIdLst>
         </p14:section>
-        <p14:section name="Content" id="{29F36C71-1815-ED0B-653F-2F54F9D84468}">
+        <p14:section name="Content" id="{b5b60362-077b-478d-bdec-a039a897fd92}">
           <p14:sldIdLst>
             <p14:sldId id="258"/>
             <p14:sldId id="259"/>
@@ -140,11 +141,12 @@
             <p14:sldId id="261"/>
             <p14:sldId id="262"/>
             <p14:sldId id="263"/>
+            <p14:sldId id="264"/>
           </p14:sldIdLst>
         </p14:section>
-        <p14:section name="Closing" id="{D06208C0-9364-1C16-4148-E7768AC95279}">
+        <p14:section name="Closing" id="{2da7e575-185b-c94a-260c-fe6567a86e28}">
           <p14:sldIdLst>
-            <p14:sldId id="264"/>
+            <p14:sldId id="265"/>
           </p14:sldIdLst>
         </p14:section>
       </p14:sectionLst>
@@ -157,11 +159,9 @@
 </file>
 
 <file path=ppt/charts/chart1.xml><?xml version="1.0" encoding="utf-8"?>
-<c:chartSpace xmlns:c="http://schemas.openxmlformats.org/drawingml/2006/chart" xmlns:a="http://schemas.openxmlformats.org/drawingml/2006/main" xmlns:r="http://schemas.openxmlformats.org/officeDocument/2006/relationships" xmlns:c16r2="http://schemas.microsoft.com/office/drawing/2015/06/chart">
+<c:chartSpace xmlns:c="http://schemas.openxmlformats.org/drawingml/2006/chart" xmlns:a="http://schemas.openxmlformats.org/drawingml/2006/main" xmlns:r="http://schemas.openxmlformats.org/officeDocument/2006/relationships">
   <c:date1904 val="0"/>
-  <c:lang val="it-IT"/>
   <c:roundedCorners val="1"/>
-  <c:style val="2"/>
   <c:chart>
     <c:autoTitleDeleted val="1"/>
     <c:plotArea>
@@ -193,26 +193,18 @@
           <c:invertIfNegative val="0"/>
           <c:dLbls>
             <c:numFmt formatCode="#,##0" sourceLinked="0"/>
-            <c:spPr>
-              <a:noFill/>
-              <a:ln>
-                <a:noFill/>
-              </a:ln>
-              <a:effectLst/>
-            </c:spPr>
             <c:txPr>
               <a:bodyPr/>
               <a:lstStyle/>
               <a:p>
                 <a:pPr>
-                  <a:defRPr sz="1100" b="0" i="0" u="none" strike="noStrike">
+                  <a:defRPr b="0" i="0" strike="noStrike" sz="1100" u="none">
                     <a:solidFill>
                       <a:srgbClr val="262628"/>
                     </a:solidFill>
                     <a:latin typeface="+mn-lt"/>
                   </a:defRPr>
                 </a:pPr>
-                <a:endParaRPr lang="it-IT"/>
               </a:p>
             </c:txPr>
             <c:showLegendKey val="0"/>
@@ -222,31 +214,28 @@
             <c:showPercent val="0"/>
             <c:showBubbleSize val="0"/>
             <c:showLeaderLines val="0"/>
-            <c:extLst>
-              <c:ext xmlns:c15="http://schemas.microsoft.com/office/drawing/2012/chart" uri="{CE6537A1-D6FC-4f65-9D91-7224C49458BB}">
-                <c15:showLeaderLines val="0"/>
-              </c:ext>
-            </c:extLst>
           </c:dLbls>
           <c:cat>
-            <c:strRef>
+            <c:multiLvlStrRef>
               <c:f>Sheet1!$A$2:$A$5</c:f>
-              <c:strCache>
+              <c:multiLvlStrCache>
                 <c:ptCount val="4"/>
-                <c:pt idx="0">
-                  <c:v>Research</c:v>
-                </c:pt>
-                <c:pt idx="1">
-                  <c:v>Training</c:v>
-                </c:pt>
-                <c:pt idx="2">
-                  <c:v>Policy</c:v>
-                </c:pt>
-                <c:pt idx="3">
-                  <c:v>Outreach</c:v>
-                </c:pt>
-              </c:strCache>
-            </c:strRef>
+                <c:lvl>
+                  <c:pt idx="0">
+                    <c:v>Research</c:v>
+                  </c:pt>
+                  <c:pt idx="1">
+                    <c:v>Training</c:v>
+                  </c:pt>
+                  <c:pt idx="2">
+                    <c:v>Policy</c:v>
+                  </c:pt>
+                  <c:pt idx="3">
+                    <c:v>Outreach</c:v>
+                  </c:pt>
+                </c:lvl>
+              </c:multiLvlStrCache>
+            </c:multiLvlStrRef>
           </c:cat>
           <c:val>
             <c:numRef>
@@ -269,11 +258,6 @@
               </c:numCache>
             </c:numRef>
           </c:val>
-          <c:extLst>
-            <c:ext xmlns:c16="http://schemas.microsoft.com/office/drawing/2014/chart" uri="{C3380CC4-5D6E-409C-BE32-E72D297353CC}">
-              <c16:uniqueId val="{00000000-87B4-CE44-AFD5-A90B171C4B6F}"/>
-            </c:ext>
-          </c:extLst>
         </c:ser>
         <c:ser>
           <c:idx val="1"/>
@@ -298,26 +282,18 @@
           <c:invertIfNegative val="0"/>
           <c:dLbls>
             <c:numFmt formatCode="#,##0" sourceLinked="0"/>
-            <c:spPr>
-              <a:noFill/>
-              <a:ln>
-                <a:noFill/>
-              </a:ln>
-              <a:effectLst/>
-            </c:spPr>
             <c:txPr>
               <a:bodyPr/>
               <a:lstStyle/>
               <a:p>
                 <a:pPr>
-                  <a:defRPr sz="1100" b="0" i="0" u="none" strike="noStrike">
+                  <a:defRPr b="0" i="0" strike="noStrike" sz="1100" u="none">
                     <a:solidFill>
                       <a:srgbClr val="262628"/>
                     </a:solidFill>
                     <a:latin typeface="+mn-lt"/>
                   </a:defRPr>
                 </a:pPr>
-                <a:endParaRPr lang="it-IT"/>
               </a:p>
             </c:txPr>
             <c:showLegendKey val="0"/>
@@ -327,31 +303,28 @@
             <c:showPercent val="0"/>
             <c:showBubbleSize val="0"/>
             <c:showLeaderLines val="0"/>
-            <c:extLst>
-              <c:ext xmlns:c15="http://schemas.microsoft.com/office/drawing/2012/chart" uri="{CE6537A1-D6FC-4f65-9D91-7224C49458BB}">
-                <c15:showLeaderLines val="0"/>
-              </c:ext>
-            </c:extLst>
           </c:dLbls>
           <c:cat>
-            <c:strRef>
+            <c:multiLvlStrRef>
               <c:f>Sheet1!$A$2:$A$5</c:f>
-              <c:strCache>
+              <c:multiLvlStrCache>
                 <c:ptCount val="4"/>
-                <c:pt idx="0">
-                  <c:v>Research</c:v>
-                </c:pt>
-                <c:pt idx="1">
-                  <c:v>Training</c:v>
-                </c:pt>
-                <c:pt idx="2">
-                  <c:v>Policy</c:v>
-                </c:pt>
-                <c:pt idx="3">
-                  <c:v>Outreach</c:v>
-                </c:pt>
-              </c:strCache>
-            </c:strRef>
+                <c:lvl>
+                  <c:pt idx="0">
+                    <c:v>Research</c:v>
+                  </c:pt>
+                  <c:pt idx="1">
+                    <c:v>Training</c:v>
+                  </c:pt>
+                  <c:pt idx="2">
+                    <c:v>Policy</c:v>
+                  </c:pt>
+                  <c:pt idx="3">
+                    <c:v>Outreach</c:v>
+                  </c:pt>
+                </c:lvl>
+              </c:multiLvlStrCache>
+            </c:multiLvlStrRef>
           </c:cat>
           <c:val>
             <c:numRef>
@@ -374,23 +347,36 @@
               </c:numCache>
             </c:numRef>
           </c:val>
-          <c:extLst>
-            <c:ext xmlns:c16="http://schemas.microsoft.com/office/drawing/2014/chart" uri="{C3380CC4-5D6E-409C-BE32-E72D297353CC}">
-              <c16:uniqueId val="{00000001-87B4-CE44-AFD5-A90B171C4B6F}"/>
-            </c:ext>
-          </c:extLst>
         </c:ser>
         <c:dLbls>
+          <c:numFmt formatCode="#,##0" sourceLinked="0"/>
+          <c:txPr>
+            <a:bodyPr/>
+            <a:lstStyle/>
+            <a:p>
+              <a:pPr>
+                <a:defRPr b="0" i="0" strike="noStrike" sz="1100" u="none">
+                  <a:solidFill>
+                    <a:srgbClr val="262628"/>
+                  </a:solidFill>
+                  <a:latin typeface="+mn-lt"/>
+                </a:defRPr>
+              </a:pPr>
+            </a:p>
+          </c:txPr>
           <c:showLegendKey val="0"/>
           <c:showVal val="1"/>
           <c:showCatName val="0"/>
           <c:showSerName val="0"/>
           <c:showPercent val="0"/>
           <c:showBubbleSize val="0"/>
+          <c:showLeaderLines val="0"/>
         </c:dLbls>
         <c:gapWidth val="60"/>
+        <c:overlap val="0"/>
         <c:axId val="2094734554"/>
         <c:axId val="2094734552"/>
+        <c:axId val="2094734556"/>
       </c:barChart>
       <c:catAx>
         <c:axId val="2094734554"/>
@@ -431,7 +417,6 @@
         <c:crosses val="autoZero"/>
         <c:auto val="1"/>
         <c:lblAlgn val="ctr"/>
-        <c:lblOffset val="100"/>
         <c:noMultiLvlLbl val="1"/>
       </c:catAx>
       <c:valAx>
@@ -512,7 +497,6 @@
     </c:legend>
     <c:plotVisOnly val="1"/>
     <c:dispBlanksAs val="span"/>
-    <c:showDLblsOverMax val="1"/>
   </c:chart>
   <c:spPr>
     <a:noFill/>
@@ -549,10 +533,234 @@
           <a:chExt cx="0" cy="0"/>
         </a:xfrm>
       </p:grpSpPr>
+      <p:sp>
+        <p:nvSpPr>
+          <p:cNvPr id="2" name="Header Placeholder 1"/>
+          <p:cNvSpPr>
+            <a:spLocks noGrp="1"/>
+          </p:cNvSpPr>
+          <p:nvPr>
+            <p:ph type="hdr" sz="quarter"/>
+          </p:nvPr>
+        </p:nvSpPr>
+        <p:spPr>
+          <a:xfrm>
+            <a:off x="0" y="0"/>
+            <a:ext cx="2971800" cy="458788"/>
+          </a:xfrm>
+          <a:prstGeom prst="rect">
+            <a:avLst/>
+          </a:prstGeom>
+        </p:spPr>
+        <p:txBody>
+          <a:bodyPr vert="horz" lIns="91440" tIns="45720" rIns="91440" bIns="45720" rtlCol="0"/>
+          <a:lstStyle>
+            <a:lvl1pPr algn="l">
+              <a:defRPr sz="1200"/>
+            </a:lvl1pPr>
+          </a:lstStyle>
+          <a:p>
+            <a:endParaRPr lang="en-US"/>
+          </a:p>
+        </p:txBody>
+      </p:sp>
+      <p:sp>
+        <p:nvSpPr>
+          <p:cNvPr id="3" name="Date Placeholder 2"/>
+          <p:cNvSpPr>
+            <a:spLocks noGrp="1"/>
+          </p:cNvSpPr>
+          <p:nvPr>
+            <p:ph type="dt" idx="1"/>
+          </p:nvPr>
+        </p:nvSpPr>
+        <p:spPr>
+          <a:xfrm>
+            <a:off x="3884613" y="0"/>
+            <a:ext cx="2971800" cy="458788"/>
+          </a:xfrm>
+          <a:prstGeom prst="rect">
+            <a:avLst/>
+          </a:prstGeom>
+        </p:spPr>
+        <p:txBody>
+          <a:bodyPr vert="horz" lIns="91440" tIns="45720" rIns="91440" bIns="45720" rtlCol="0"/>
+          <a:lstStyle>
+            <a:lvl1pPr algn="r">
+              <a:defRPr sz="1200"/>
+            </a:lvl1pPr>
+          </a:lstStyle>
+          <a:p>
+            <a:fld id="{5282F153-3F37-0F45-9E97-73ACFA13230C}" type="datetimeFigureOut">
+              <a:rPr lang="en-US"/>
+              <a:t>7/23/19</a:t>
+            </a:fld>
+            <a:endParaRPr lang="en-US"/>
+          </a:p>
+        </p:txBody>
+      </p:sp>
+      <p:sp>
+        <p:nvSpPr>
+          <p:cNvPr id="4" name="Slide Image Placeholder 3"/>
+          <p:cNvSpPr>
+            <a:spLocks noGrp="1" noRot="1" noChangeAspect="1"/>
+          </p:cNvSpPr>
+          <p:nvPr>
+            <p:ph type="sldImg" idx="2"/>
+          </p:nvPr>
+        </p:nvSpPr>
+        <p:spPr>
+          <a:xfrm>
+            <a:off x="685800" y="1143000"/>
+            <a:ext cx="5486400" cy="3086100"/>
+          </a:xfrm>
+          <a:prstGeom prst="rect">
+            <a:avLst/>
+          </a:prstGeom>
+          <a:noFill/>
+          <a:ln w="12700">
+            <a:solidFill>
+              <a:prstClr val="black"/>
+            </a:solidFill>
+          </a:ln>
+        </p:spPr>
+        <p:txBody>
+          <a:bodyPr vert="horz" lIns="91440" tIns="45720" rIns="91440" bIns="45720" rtlCol="0" anchor="ctr"/>
+          <a:lstStyle/>
+          <a:p>
+            <a:endParaRPr lang="en-US"/>
+          </a:p>
+        </p:txBody>
+      </p:sp>
+      <p:sp>
+        <p:nvSpPr>
+          <p:cNvPr id="5" name="Notes Placeholder 4"/>
+          <p:cNvSpPr>
+            <a:spLocks noGrp="1"/>
+          </p:cNvSpPr>
+          <p:nvPr>
+            <p:ph type="body" sz="quarter" idx="3"/>
+          </p:nvPr>
+        </p:nvSpPr>
+        <p:spPr>
+          <a:xfrm>
+            <a:off x="685800" y="4400550"/>
+            <a:ext cx="5486400" cy="3600450"/>
+          </a:xfrm>
+          <a:prstGeom prst="rect">
+            <a:avLst/>
+          </a:prstGeom>
+        </p:spPr>
+        <p:txBody>
+          <a:bodyPr vert="horz" lIns="91440" tIns="45720" rIns="91440" bIns="45720" rtlCol="0"/>
+          <a:lstStyle/>
+          <a:p>
+            <a:pPr lvl="0"/>
+            <a:r>
+              <a:rPr lang="en-US"/>
+              <a:t>Click to edit Master text styles</a:t>
+            </a:r>
+          </a:p>
+          <a:p>
+            <a:pPr lvl="1"/>
+            <a:r>
+              <a:rPr lang="en-US"/>
+              <a:t>Second level</a:t>
+            </a:r>
+          </a:p>
+          <a:p>
+            <a:pPr lvl="2"/>
+            <a:r>
+              <a:rPr lang="en-US"/>
+              <a:t>Third level</a:t>
+            </a:r>
+          </a:p>
+          <a:p>
+            <a:pPr lvl="3"/>
+            <a:r>
+              <a:rPr lang="en-US"/>
+              <a:t>Fourth level</a:t>
+            </a:r>
+          </a:p>
+          <a:p>
+            <a:pPr lvl="4"/>
+            <a:r>
+              <a:rPr lang="en-US"/>
+              <a:t>Fifth level</a:t>
+            </a:r>
+          </a:p>
+        </p:txBody>
+      </p:sp>
+      <p:sp>
+        <p:nvSpPr>
+          <p:cNvPr id="6" name="Footer Placeholder 5"/>
+          <p:cNvSpPr>
+            <a:spLocks noGrp="1"/>
+          </p:cNvSpPr>
+          <p:nvPr>
+            <p:ph type="ftr" sz="quarter" idx="4"/>
+          </p:nvPr>
+        </p:nvSpPr>
+        <p:spPr>
+          <a:xfrm>
+            <a:off x="0" y="8685213"/>
+            <a:ext cx="2971800" cy="458787"/>
+          </a:xfrm>
+          <a:prstGeom prst="rect">
+            <a:avLst/>
+          </a:prstGeom>
+        </p:spPr>
+        <p:txBody>
+          <a:bodyPr vert="horz" lIns="91440" tIns="45720" rIns="91440" bIns="45720" rtlCol="0" anchor="b"/>
+          <a:lstStyle>
+            <a:lvl1pPr algn="l">
+              <a:defRPr sz="1200"/>
+            </a:lvl1pPr>
+          </a:lstStyle>
+          <a:p>
+            <a:endParaRPr lang="en-US"/>
+          </a:p>
+        </p:txBody>
+      </p:sp>
+      <p:sp>
+        <p:nvSpPr>
+          <p:cNvPr id="7" name="Slide Number Placeholder 6"/>
+          <p:cNvSpPr>
+            <a:spLocks noGrp="1"/>
+          </p:cNvSpPr>
+          <p:nvPr>
+            <p:ph type="sldNum" sz="quarter" idx="5"/>
+          </p:nvPr>
+        </p:nvSpPr>
+        <p:spPr>
+          <a:xfrm>
+            <a:off x="3884613" y="8685213"/>
+            <a:ext cx="2971800" cy="458787"/>
+          </a:xfrm>
+          <a:prstGeom prst="rect">
+            <a:avLst/>
+          </a:prstGeom>
+        </p:spPr>
+        <p:txBody>
+          <a:bodyPr vert="horz" lIns="91440" tIns="45720" rIns="91440" bIns="45720" rtlCol="0" anchor="b"/>
+          <a:lstStyle>
+            <a:lvl1pPr algn="r">
+              <a:defRPr sz="1200"/>
+            </a:lvl1pPr>
+          </a:lstStyle>
+          <a:p>
+            <a:fld id="{CE5E9CC1-C706-0F49-92D6-E571CC5EEA8F}" type="slidenum">
+              <a:rPr lang="en-US"/>
+              <a:t>‹#›</a:t>
+            </a:fld>
+            <a:endParaRPr lang="en-US"/>
+          </a:p>
+        </p:txBody>
+      </p:sp>
     </p:spTree>
     <p:extLst>
       <p:ext uri="{BB962C8B-B14F-4D97-AF65-F5344CB8AC3E}">
-        <p14:creationId xmlns:p14="http://schemas.microsoft.com/office/powerpoint/2010/main" val="4195607950"/>
+        <p14:creationId xmlns:p14="http://schemas.microsoft.com/office/powerpoint/2010/main" val="1024086991"/>
       </p:ext>
     </p:extLst>
   </p:cSld>
@@ -696,6 +904,10 @@
           <a:bodyPr/>
           <a:lstStyle/>
           <a:p>
+            <a:r>
+              <a:rPr lang="en-US" dirty="0"/>
+              <a:t/>
+            </a:r>
             <a:endParaRPr lang="en-US" dirty="0"/>
           </a:p>
         </p:txBody>
@@ -718,6 +930,94 @@
             <a:fld id="{F7021451-1387-4CA6-816F-3879F97B5CBC}" type="slidenum">
               <a:rPr lang="en-US"/>
               <a:t>1</a:t>
+            </a:fld>
+            <a:endParaRPr lang="en-US"/>
+          </a:p>
+        </p:txBody>
+      </p:sp>
+    </p:spTree>
+    <p:extLst>
+      <p:ext uri="{BB962C8B-B14F-4D97-AF65-F5344CB8AC3E}">
+        <p14:creationId xmlns:p14="http://schemas.microsoft.com/office/powerpoint/2010/main" val="1024086991"/>
+      </p:ext>
+    </p:extLst>
+  </p:cSld>
+  <p:clrMapOvr>
+    <a:masterClrMapping/>
+  </p:clrMapOvr>
+</p:notes>
+</file>
+
+<file path=ppt/notesSlides/notesSlide10.xml><?xml version="1.0" encoding="utf-8"?>
+<p:notes xmlns:a="http://schemas.openxmlformats.org/drawingml/2006/main" xmlns:r="http://schemas.openxmlformats.org/officeDocument/2006/relationships" xmlns:p="http://schemas.openxmlformats.org/presentationml/2006/main">
+  <p:cSld>
+    <p:spTree>
+      <p:nvGrpSpPr>
+        <p:cNvPr id="1" name=""/>
+        <p:cNvGrpSpPr/>
+        <p:nvPr/>
+      </p:nvGrpSpPr>
+      <p:grpSpPr>
+        <a:xfrm>
+          <a:off x="0" y="0"/>
+          <a:ext cx="0" cy="0"/>
+          <a:chOff x="0" y="0"/>
+          <a:chExt cx="0" cy="0"/>
+        </a:xfrm>
+      </p:grpSpPr>
+      <p:sp>
+        <p:nvSpPr>
+          <p:cNvPr id="2" name="Slide Image Placeholder 1"/>
+          <p:cNvSpPr>
+            <a:spLocks noGrp="1" noRot="1" noChangeAspect="1"/>
+          </p:cNvSpPr>
+          <p:nvPr>
+            <p:ph type="sldImg"/>
+          </p:nvPr>
+        </p:nvSpPr>
+        <p:spPr/>
+      </p:sp>
+      <p:sp>
+        <p:nvSpPr>
+          <p:cNvPr id="3" name="Notes Placeholder 2"/>
+          <p:cNvSpPr>
+            <a:spLocks noGrp="1"/>
+          </p:cNvSpPr>
+          <p:nvPr>
+            <p:ph type="body" idx="1"/>
+          </p:nvPr>
+        </p:nvSpPr>
+        <p:spPr/>
+        <p:txBody>
+          <a:bodyPr/>
+          <a:lstStyle/>
+          <a:p>
+            <a:r>
+              <a:rPr lang="en-US" dirty="0"/>
+              <a:t/>
+            </a:r>
+            <a:endParaRPr lang="en-US" dirty="0"/>
+          </a:p>
+        </p:txBody>
+      </p:sp>
+      <p:sp>
+        <p:nvSpPr>
+          <p:cNvPr id="4" name="Slide Number Placeholder 3"/>
+          <p:cNvSpPr>
+            <a:spLocks noGrp="1"/>
+          </p:cNvSpPr>
+          <p:nvPr>
+            <p:ph type="sldNum" sz="quarter" idx="10"/>
+          </p:nvPr>
+        </p:nvSpPr>
+        <p:spPr/>
+        <p:txBody>
+          <a:bodyPr/>
+          <a:lstStyle/>
+          <a:p>
+            <a:fld id="{F7021451-1387-4CA6-816F-3879F97B5CBC}" type="slidenum">
+              <a:rPr lang="en-US"/>
+              <a:t>10</a:t>
             </a:fld>
             <a:endParaRPr lang="en-US"/>
           </a:p>
@@ -780,6 +1080,10 @@
           <a:bodyPr/>
           <a:lstStyle/>
           <a:p>
+            <a:r>
+              <a:rPr lang="en-US" dirty="0"/>
+              <a:t/>
+            </a:r>
             <a:endParaRPr lang="en-US" dirty="0"/>
           </a:p>
         </p:txBody>
@@ -864,6 +1168,10 @@
           <a:bodyPr/>
           <a:lstStyle/>
           <a:p>
+            <a:r>
+              <a:rPr lang="en-US" dirty="0"/>
+              <a:t/>
+            </a:r>
             <a:endParaRPr lang="en-US" dirty="0"/>
           </a:p>
         </p:txBody>
@@ -948,6 +1256,10 @@
           <a:bodyPr/>
           <a:lstStyle/>
           <a:p>
+            <a:r>
+              <a:rPr lang="en-US" dirty="0"/>
+              <a:t/>
+            </a:r>
             <a:endParaRPr lang="en-US" dirty="0"/>
           </a:p>
         </p:txBody>
@@ -1032,6 +1344,10 @@
           <a:bodyPr/>
           <a:lstStyle/>
           <a:p>
+            <a:r>
+              <a:rPr lang="en-US" dirty="0"/>
+              <a:t/>
+            </a:r>
             <a:endParaRPr lang="en-US" dirty="0"/>
           </a:p>
         </p:txBody>
@@ -1116,6 +1432,10 @@
           <a:bodyPr/>
           <a:lstStyle/>
           <a:p>
+            <a:r>
+              <a:rPr lang="en-US" dirty="0"/>
+              <a:t/>
+            </a:r>
             <a:endParaRPr lang="en-US" dirty="0"/>
           </a:p>
         </p:txBody>
@@ -1200,6 +1520,10 @@
           <a:bodyPr/>
           <a:lstStyle/>
           <a:p>
+            <a:r>
+              <a:rPr lang="en-US" dirty="0"/>
+              <a:t/>
+            </a:r>
             <a:endParaRPr lang="en-US" dirty="0"/>
           </a:p>
         </p:txBody>
@@ -1284,6 +1608,10 @@
           <a:bodyPr/>
           <a:lstStyle/>
           <a:p>
+            <a:r>
+              <a:rPr lang="en-US" dirty="0"/>
+              <a:t/>
+            </a:r>
             <a:endParaRPr lang="en-US" dirty="0"/>
           </a:p>
         </p:txBody>
@@ -1368,6 +1696,10 @@
           <a:bodyPr/>
           <a:lstStyle/>
           <a:p>
+            <a:r>
+              <a:rPr lang="en-US" dirty="0"/>
+              <a:t/>
+            </a:r>
             <a:endParaRPr lang="en-US" dirty="0"/>
           </a:p>
         </p:txBody>
@@ -1446,7 +1778,6 @@
         <a:solidFill>
           <a:schemeClr val="bg2"/>
         </a:solidFill>
-        <a:effectLst/>
       </p:bgPr>
     </p:bg>
     <p:spTree>
@@ -1465,7 +1796,104 @@
       </p:grpSpPr>
       <p:pic>
         <p:nvPicPr>
-          <p:cNvPr id="2" name="Image 0" descr="/tmp/tmp.CzRxgXMluS/grid.png"/>
+          <p:cNvPr id="2" name="Image 0" descr="/tmp/tmp.CzRxgXMluS/grid.png">    </p:cNvPr>
+          <p:cNvPicPr>
+            <a:picLocks noChangeAspect="1"/>
+          </p:cNvPicPr>
+          <p:nvPr/>
+        </p:nvPicPr>
+        <p:blipFill>
+          <a:blip r:embed="rId1"/>
+          <a:stretch>
+            <a:fillRect/>
+          </a:stretch>
+        </p:blipFill>
+        <p:spPr>
+          <a:xfrm>
+            <a:off x="0" y="0"/>
+            <a:ext cx="12191695" cy="6858000"/>
+          </a:xfrm>
+          <a:prstGeom prst="rect">
+            <a:avLst/>
+          </a:prstGeom>
+        </p:spPr>
+      </p:pic>
+      <p:sp>
+        <p:nvSpPr>
+          <p:cNvPr id="3" name="Shape 0"/>
+          <p:cNvSpPr/>
+          <p:nvPr/>
+        </p:nvSpPr>
+        <p:spPr>
+          <a:xfrm>
+            <a:off x="548640" y="1527048"/>
+            <a:ext cx="292608" cy="27432"/>
+          </a:xfrm>
+          <a:prstGeom prst="rect">
+            <a:avLst/>
+          </a:prstGeom>
+          <a:solidFill>
+            <a:schemeClr val="accent1"/>
+          </a:solidFill>
+          <a:ln/>
+        </p:spPr>
+      </p:sp>
+      <p:sp>
+        <p:nvSpPr>
+          <p:cNvPr id="4" name="Text 1"/>
+          <p:cNvSpPr/>
+          <p:nvPr>
+            <p:ph idx="102" type="body" hasCustomPrompt="1"/>
+          </p:nvPr>
+        </p:nvSpPr>
+        <p:spPr>
+          <a:xfrm>
+            <a:off x="960120" y="1417320"/>
+            <a:ext cx="7315200" cy="256032"/>
+          </a:xfrm>
+          <a:prstGeom prst="rect">
+            <a:avLst/>
+          </a:prstGeom>
+          <a:noFill/>
+          <a:ln/>
+        </p:spPr>
+        <p:txBody>
+          <a:bodyPr wrap="square" rtlCol="0"/>
+          <a:lstStyle>
+            <a:lvl1pPr indent="0" marL="0">
+              <a:buNone/>
+              <a:defRPr lang="en-US" sz="1000" spc="300" kern="0" dirty="0">
+                <a:solidFill>
+                  <a:schemeClr val="accent4"/>
+                </a:solidFill>
+                <a:latin typeface="JetBrains Mono" pitchFamily="34" charset="0"/>
+                <a:ea typeface="JetBrains Mono" pitchFamily="34" charset="-122"/>
+                <a:cs typeface="JetBrains Mono" pitchFamily="34" charset="-120"/>
+              </a:defRPr>
+            </a:lvl1pPr>
+          </a:lstStyle>
+          <a:p>
+            <a:pPr indent="0" marL="0">
+              <a:buNone/>
+            </a:pPr>
+            <a:r>
+              <a:rPr lang="en-US" sz="1000" spc="300" kern="0" dirty="0">
+                <a:solidFill>
+                  <a:schemeClr val="accent4"/>
+                </a:solidFill>
+                <a:latin typeface="JetBrains Mono" pitchFamily="34" charset="0"/>
+                <a:ea typeface="JetBrains Mono" pitchFamily="34" charset="-122"/>
+                <a:cs typeface="JetBrains Mono" pitchFamily="34" charset="-120"/>
+              </a:rPr>
+              <a:t>SECTION LABEL</a:t>
+            </a:r>
+            <a:endParaRPr lang="en-US" sz="1000" dirty="0"/>
+          </a:p>
+        </p:txBody>
+      </p:sp>
+      <p:pic>
+        <p:nvPicPr>
+          <p:cNvPr id="5" name="Image 1" descr="/tmp/tmp.CzRxgXMluS/logo.png">    </p:cNvPr>
           <p:cNvPicPr>
             <a:picLocks noChangeAspect="1"/>
           </p:cNvPicPr>
@@ -1479,8 +1907,8 @@
         </p:blipFill>
         <p:spPr>
           <a:xfrm>
-            <a:off x="0" y="0"/>
-            <a:ext cx="12191695" cy="6858000"/>
+            <a:off x="8001000" y="1325880"/>
+            <a:ext cx="3566160" cy="3566160"/>
           </a:xfrm>
           <a:prstGeom prst="rect">
             <a:avLst/>
@@ -1489,45 +1917,16 @@
       </p:pic>
       <p:sp>
         <p:nvSpPr>
-          <p:cNvPr id="3" name="Shape 0"/>
-          <p:cNvSpPr/>
-          <p:nvPr/>
-        </p:nvSpPr>
-        <p:spPr>
-          <a:xfrm>
-            <a:off x="548640" y="1527048"/>
-            <a:ext cx="292608" cy="27432"/>
-          </a:xfrm>
-          <a:prstGeom prst="rect">
-            <a:avLst/>
-          </a:prstGeom>
-          <a:solidFill>
-            <a:schemeClr val="accent1"/>
-          </a:solidFill>
-          <a:ln/>
-        </p:spPr>
-        <p:txBody>
-          <a:bodyPr/>
-          <a:lstStyle/>
-          <a:p>
-            <a:endParaRPr lang="it-IT"/>
-          </a:p>
-        </p:txBody>
-      </p:sp>
-      <p:sp>
-        <p:nvSpPr>
-          <p:cNvPr id="4" name="Text 1"/>
-          <p:cNvSpPr>
-            <a:spLocks noGrp="1"/>
-          </p:cNvSpPr>
-          <p:nvPr>
-            <p:ph type="body" idx="102" hasCustomPrompt="1"/>
-          </p:nvPr>
-        </p:nvSpPr>
-        <p:spPr>
-          <a:xfrm>
-            <a:off x="960120" y="1417320"/>
-            <a:ext cx="7315200" cy="256032"/>
+          <p:cNvPr id="6" name="Text 1"/>
+          <p:cNvSpPr/>
+          <p:nvPr>
+            <p:ph idx="104" type="title" hasCustomPrompt="1"/>
+          </p:nvPr>
+        </p:nvSpPr>
+        <p:spPr>
+          <a:xfrm>
+            <a:off x="548640" y="1874520"/>
+            <a:ext cx="7132320" cy="2194560"/>
           </a:xfrm>
           <a:prstGeom prst="rect">
             <a:avLst/>
@@ -1538,11 +1937,111 @@
         <p:txBody>
           <a:bodyPr wrap="square" rtlCol="0"/>
           <a:lstStyle>
-            <a:lvl1pPr marL="0" indent="0">
-              <a:buNone/>
-              <a:defRPr lang="en-US" sz="1000" kern="0" spc="300" dirty="0">
-                <a:solidFill>
-                  <a:schemeClr val="accent4"/>
+            <a:lvl1pPr algn="l" indent="0" marL="0">
+              <a:lnSpc>
+                <a:spcPct val="85000"/>
+              </a:lnSpc>
+              <a:buNone/>
+              <a:defRPr lang="en-US" sz="5400" b="1" spc="-150" kern="0" dirty="0">
+                <a:solidFill>
+                  <a:schemeClr val="tx1"/>
+                </a:solidFill>
+              </a:defRPr>
+            </a:lvl1pPr>
+          </a:lstStyle>
+          <a:p>
+            <a:pPr algn="l" indent="0" marL="0">
+              <a:lnSpc>
+                <a:spcPct val="85000"/>
+              </a:lnSpc>
+              <a:buNone/>
+            </a:pPr>
+            <a:r>
+              <a:rPr lang="en-US" sz="5400" b="1" spc="-150" kern="0" dirty="0">
+                <a:solidFill>
+                  <a:schemeClr val="tx1"/>
+                </a:solidFill>
+              </a:rPr>
+              <a:t>PRESENTATION TITLE</a:t>
+            </a:r>
+            <a:endParaRPr lang="en-US" sz="5400" dirty="0"/>
+          </a:p>
+        </p:txBody>
+      </p:sp>
+      <p:sp>
+        <p:nvSpPr>
+          <p:cNvPr id="7" name="Text 1"/>
+          <p:cNvSpPr/>
+          <p:nvPr>
+            <p:ph idx="105" type="body" hasCustomPrompt="1"/>
+          </p:nvPr>
+        </p:nvSpPr>
+        <p:spPr>
+          <a:xfrm>
+            <a:off x="548640" y="4206240"/>
+            <a:ext cx="6583680" cy="822960"/>
+          </a:xfrm>
+          <a:prstGeom prst="rect">
+            <a:avLst/>
+          </a:prstGeom>
+          <a:noFill/>
+          <a:ln/>
+        </p:spPr>
+        <p:txBody>
+          <a:bodyPr wrap="square" rtlCol="0"/>
+          <a:lstStyle>
+            <a:lvl1pPr indent="0" marL="0">
+              <a:buNone/>
+              <a:defRPr lang="en-US" sz="1600" dirty="0">
+                <a:solidFill>
+                  <a:schemeClr val="tx2"/>
+                </a:solidFill>
+              </a:defRPr>
+            </a:lvl1pPr>
+          </a:lstStyle>
+          <a:p>
+            <a:pPr indent="0" marL="0">
+              <a:buNone/>
+            </a:pPr>
+            <a:r>
+              <a:rPr lang="en-US" sz="1600" dirty="0">
+                <a:solidFill>
+                  <a:schemeClr val="tx2"/>
+                </a:solidFill>
+              </a:rPr>
+              <a:t>Subtitle or one-line summary</a:t>
+            </a:r>
+            <a:endParaRPr lang="en-US" sz="1600" dirty="0"/>
+          </a:p>
+        </p:txBody>
+      </p:sp>
+      <p:sp>
+        <p:nvSpPr>
+          <p:cNvPr id="8" name="Text 1"/>
+          <p:cNvSpPr/>
+          <p:nvPr>
+            <p:ph idx="106" type="body" hasCustomPrompt="1"/>
+          </p:nvPr>
+        </p:nvSpPr>
+        <p:spPr>
+          <a:xfrm>
+            <a:off x="548640" y="5760720"/>
+            <a:ext cx="7315200" cy="365760"/>
+          </a:xfrm>
+          <a:prstGeom prst="rect">
+            <a:avLst/>
+          </a:prstGeom>
+          <a:noFill/>
+          <a:ln/>
+        </p:spPr>
+        <p:txBody>
+          <a:bodyPr wrap="square" rtlCol="0"/>
+          <a:lstStyle>
+            <a:lvl1pPr indent="0" marL="0">
+              <a:buNone/>
+              <a:defRPr lang="en-US" sz="1000" spc="200" kern="0" dirty="0">
+                <a:solidFill>
+                  <a:schemeClr val="tx1"/>
                 </a:solidFill>
                 <a:latin typeface="JetBrains Mono" pitchFamily="34" charset="0"/>
                 <a:ea typeface="JetBrains Mono" pitchFamily="34" charset="-122"/>
@@ -1551,194 +2050,11 @@
             </a:lvl1pPr>
           </a:lstStyle>
           <a:p>
-            <a:pPr marL="0" indent="0">
-              <a:buNone/>
-            </a:pPr>
-            <a:r>
-              <a:rPr lang="en-US" sz="1000" kern="0" spc="300" dirty="0">
-                <a:solidFill>
-                  <a:schemeClr val="accent4"/>
-                </a:solidFill>
-                <a:latin typeface="JetBrains Mono" pitchFamily="34" charset="0"/>
-                <a:ea typeface="JetBrains Mono" pitchFamily="34" charset="-122"/>
-                <a:cs typeface="JetBrains Mono" pitchFamily="34" charset="-120"/>
-              </a:rPr>
-              <a:t>SECTION LABEL</a:t>
-            </a:r>
-            <a:endParaRPr lang="en-US" sz="1000" dirty="0"/>
-          </a:p>
-        </p:txBody>
-      </p:sp>
-      <p:pic>
-        <p:nvPicPr>
-          <p:cNvPr id="5" name="Image 1" descr="/tmp/tmp.CzRxgXMluS/logo.png"/>
-          <p:cNvPicPr>
-            <a:picLocks noChangeAspect="1"/>
-          </p:cNvPicPr>
-          <p:nvPr/>
-        </p:nvPicPr>
-        <p:blipFill>
-          <a:blip r:embed="rId3"/>
-          <a:stretch>
-            <a:fillRect/>
-          </a:stretch>
-        </p:blipFill>
-        <p:spPr>
-          <a:xfrm>
-            <a:off x="8001000" y="1325880"/>
-            <a:ext cx="3566160" cy="3566160"/>
-          </a:xfrm>
-          <a:prstGeom prst="rect">
-            <a:avLst/>
-          </a:prstGeom>
-        </p:spPr>
-      </p:pic>
-      <p:sp>
-        <p:nvSpPr>
-          <p:cNvPr id="6" name="Text 1"/>
-          <p:cNvSpPr>
-            <a:spLocks noGrp="1"/>
-          </p:cNvSpPr>
-          <p:nvPr>
-            <p:ph type="title" idx="104" hasCustomPrompt="1"/>
-          </p:nvPr>
-        </p:nvSpPr>
-        <p:spPr>
-          <a:xfrm>
-            <a:off x="548640" y="1874520"/>
-            <a:ext cx="7132320" cy="2194560"/>
-          </a:xfrm>
-          <a:prstGeom prst="rect">
-            <a:avLst/>
-          </a:prstGeom>
-          <a:noFill/>
-          <a:ln/>
-        </p:spPr>
-        <p:txBody>
-          <a:bodyPr wrap="square" rtlCol="0"/>
-          <a:lstStyle>
-            <a:lvl1pPr marL="0" indent="0" algn="l">
-              <a:lnSpc>
-                <a:spcPct val="85000"/>
-              </a:lnSpc>
-              <a:buNone/>
-              <a:defRPr lang="en-US" sz="5400" b="1" kern="0" spc="-150" dirty="0">
-                <a:solidFill>
-                  <a:schemeClr val="tx1"/>
-                </a:solidFill>
-              </a:defRPr>
-            </a:lvl1pPr>
-          </a:lstStyle>
-          <a:p>
-            <a:pPr marL="0" indent="0" algn="l">
-              <a:lnSpc>
-                <a:spcPct val="85000"/>
-              </a:lnSpc>
-              <a:buNone/>
-            </a:pPr>
-            <a:r>
-              <a:rPr lang="en-US" sz="5400" b="1" kern="0" spc="-150" dirty="0">
-                <a:solidFill>
-                  <a:schemeClr val="tx1"/>
-                </a:solidFill>
-              </a:rPr>
-              <a:t>PRESENTATION TITLE</a:t>
-            </a:r>
-            <a:endParaRPr lang="en-US" sz="5400" dirty="0"/>
-          </a:p>
-        </p:txBody>
-      </p:sp>
-      <p:sp>
-        <p:nvSpPr>
-          <p:cNvPr id="7" name="Text 1"/>
-          <p:cNvSpPr>
-            <a:spLocks noGrp="1"/>
-          </p:cNvSpPr>
-          <p:nvPr>
-            <p:ph type="body" idx="105" hasCustomPrompt="1"/>
-          </p:nvPr>
-        </p:nvSpPr>
-        <p:spPr>
-          <a:xfrm>
-            <a:off x="548640" y="4206240"/>
-            <a:ext cx="6583680" cy="822960"/>
-          </a:xfrm>
-          <a:prstGeom prst="rect">
-            <a:avLst/>
-          </a:prstGeom>
-          <a:noFill/>
-          <a:ln/>
-        </p:spPr>
-        <p:txBody>
-          <a:bodyPr wrap="square" rtlCol="0"/>
-          <a:lstStyle>
-            <a:lvl1pPr marL="0" indent="0">
-              <a:buNone/>
-              <a:defRPr lang="en-US" sz="1600" dirty="0">
-                <a:solidFill>
-                  <a:schemeClr val="tx2"/>
-                </a:solidFill>
-              </a:defRPr>
-            </a:lvl1pPr>
-          </a:lstStyle>
-          <a:p>
-            <a:pPr marL="0" indent="0">
-              <a:buNone/>
-            </a:pPr>
-            <a:r>
-              <a:rPr lang="en-US" sz="1600" dirty="0">
-                <a:solidFill>
-                  <a:schemeClr val="tx2"/>
-                </a:solidFill>
-              </a:rPr>
-              <a:t>Subtitle or one-line summary</a:t>
-            </a:r>
-            <a:endParaRPr lang="en-US" sz="1600" dirty="0"/>
-          </a:p>
-        </p:txBody>
-      </p:sp>
-      <p:sp>
-        <p:nvSpPr>
-          <p:cNvPr id="8" name="Text 1"/>
-          <p:cNvSpPr>
-            <a:spLocks noGrp="1"/>
-          </p:cNvSpPr>
-          <p:nvPr>
-            <p:ph type="body" idx="106" hasCustomPrompt="1"/>
-          </p:nvPr>
-        </p:nvSpPr>
-        <p:spPr>
-          <a:xfrm>
-            <a:off x="548640" y="5760720"/>
-            <a:ext cx="7315200" cy="365760"/>
-          </a:xfrm>
-          <a:prstGeom prst="rect">
-            <a:avLst/>
-          </a:prstGeom>
-          <a:noFill/>
-          <a:ln/>
-        </p:spPr>
-        <p:txBody>
-          <a:bodyPr wrap="square" rtlCol="0"/>
-          <a:lstStyle>
-            <a:lvl1pPr marL="0" indent="0">
-              <a:buNone/>
-              <a:defRPr lang="en-US" sz="1000" kern="0" spc="200" dirty="0">
-                <a:solidFill>
-                  <a:schemeClr val="tx1"/>
-                </a:solidFill>
-                <a:latin typeface="JetBrains Mono" pitchFamily="34" charset="0"/>
-                <a:ea typeface="JetBrains Mono" pitchFamily="34" charset="-122"/>
-                <a:cs typeface="JetBrains Mono" pitchFamily="34" charset="-120"/>
-              </a:defRPr>
-            </a:lvl1pPr>
-          </a:lstStyle>
-          <a:p>
-            <a:pPr marL="0" indent="0">
-              <a:buNone/>
-            </a:pPr>
-            <a:r>
-              <a:rPr lang="en-US" sz="1000" kern="0" spc="200" dirty="0">
+            <a:pPr indent="0" marL="0">
+              <a:buNone/>
+            </a:pPr>
+            <a:r>
+              <a:rPr lang="en-US" sz="1000" spc="200" kern="0" dirty="0">
                 <a:solidFill>
                   <a:schemeClr val="tx1"/>
                 </a:solidFill>
@@ -1768,7 +2084,6 @@
         <a:solidFill>
           <a:schemeClr val="accent5"/>
         </a:solidFill>
-        <a:effectLst/>
       </p:bgPr>
     </p:bg>
     <p:spTree>
@@ -1787,7 +2102,172 @@
       </p:grpSpPr>
       <p:pic>
         <p:nvPicPr>
-          <p:cNvPr id="2" name="Image 0" descr="/tmp/tmp.CzRxgXMluS/grid.png"/>
+          <p:cNvPr id="2" name="Image 0" descr="/tmp/tmp.CzRxgXMluS/grid.png">    </p:cNvPr>
+          <p:cNvPicPr>
+            <a:picLocks noChangeAspect="1"/>
+          </p:cNvPicPr>
+          <p:nvPr/>
+        </p:nvPicPr>
+        <p:blipFill>
+          <a:blip r:embed="rId1"/>
+          <a:stretch>
+            <a:fillRect/>
+          </a:stretch>
+        </p:blipFill>
+        <p:spPr>
+          <a:xfrm>
+            <a:off x="0" y="0"/>
+            <a:ext cx="12191695" cy="6858000"/>
+          </a:xfrm>
+          <a:prstGeom prst="rect">
+            <a:avLst/>
+          </a:prstGeom>
+        </p:spPr>
+      </p:pic>
+      <p:sp>
+        <p:nvSpPr>
+          <p:cNvPr id="3" name="Text 0"/>
+          <p:cNvSpPr/>
+          <p:nvPr>
+            <p:ph idx="101" type="body" hasCustomPrompt="1"/>
+          </p:nvPr>
+        </p:nvSpPr>
+        <p:spPr>
+          <a:xfrm>
+            <a:off x="548640" y="1554480"/>
+            <a:ext cx="3657600" cy="1463040"/>
+          </a:xfrm>
+          <a:prstGeom prst="rect">
+            <a:avLst/>
+          </a:prstGeom>
+          <a:noFill/>
+          <a:ln/>
+        </p:spPr>
+        <p:txBody>
+          <a:bodyPr wrap="square" rtlCol="0"/>
+          <a:lstStyle>
+            <a:lvl1pPr indent="0" marL="0">
+              <a:buNone/>
+              <a:defRPr lang="en-US" sz="9600" b="1" spc="-300" kern="0" dirty="0">
+                <a:solidFill>
+                  <a:schemeClr val="accent1"/>
+                </a:solidFill>
+              </a:defRPr>
+            </a:lvl1pPr>
+          </a:lstStyle>
+          <a:p>
+            <a:pPr indent="0" marL="0">
+              <a:buNone/>
+            </a:pPr>
+            <a:r>
+              <a:rPr lang="en-US" sz="9600" b="1" spc="-300" kern="0" dirty="0">
+                <a:solidFill>
+                  <a:schemeClr val="accent1"/>
+                </a:solidFill>
+              </a:rPr>
+              <a:t>01</a:t>
+            </a:r>
+            <a:endParaRPr lang="en-US" sz="9600" dirty="0"/>
+          </a:p>
+        </p:txBody>
+      </p:sp>
+      <p:sp>
+        <p:nvSpPr>
+          <p:cNvPr id="4" name="Text 0"/>
+          <p:cNvSpPr/>
+          <p:nvPr>
+            <p:ph idx="102" type="title" hasCustomPrompt="1"/>
+          </p:nvPr>
+        </p:nvSpPr>
+        <p:spPr>
+          <a:xfrm>
+            <a:off x="548640" y="3154680"/>
+            <a:ext cx="9144000" cy="1280160"/>
+          </a:xfrm>
+          <a:prstGeom prst="rect">
+            <a:avLst/>
+          </a:prstGeom>
+          <a:noFill/>
+          <a:ln/>
+        </p:spPr>
+        <p:txBody>
+          <a:bodyPr wrap="square" rtlCol="0"/>
+          <a:lstStyle>
+            <a:lvl1pPr algn="l" indent="0" marL="0">
+              <a:buNone/>
+              <a:defRPr lang="en-US" sz="4000" b="1" spc="-100" kern="0" dirty="0">
+                <a:solidFill>
+                  <a:schemeClr val="tx1"/>
+                </a:solidFill>
+              </a:defRPr>
+            </a:lvl1pPr>
+          </a:lstStyle>
+          <a:p>
+            <a:pPr algn="l" indent="0" marL="0">
+              <a:buNone/>
+            </a:pPr>
+            <a:r>
+              <a:rPr lang="en-US" sz="4000" b="1" spc="-100" kern="0" dirty="0">
+                <a:solidFill>
+                  <a:schemeClr val="tx1"/>
+                </a:solidFill>
+              </a:rPr>
+              <a:t>SECTION TITLE</a:t>
+            </a:r>
+            <a:endParaRPr lang="en-US" sz="4000" dirty="0"/>
+          </a:p>
+        </p:txBody>
+      </p:sp>
+      <p:sp>
+        <p:nvSpPr>
+          <p:cNvPr id="5" name="Text 0"/>
+          <p:cNvSpPr/>
+          <p:nvPr>
+            <p:ph idx="103" type="body" hasCustomPrompt="1"/>
+          </p:nvPr>
+        </p:nvSpPr>
+        <p:spPr>
+          <a:xfrm>
+            <a:off x="548640" y="4480560"/>
+            <a:ext cx="6858000" cy="822960"/>
+          </a:xfrm>
+          <a:prstGeom prst="rect">
+            <a:avLst/>
+          </a:prstGeom>
+          <a:noFill/>
+          <a:ln/>
+        </p:spPr>
+        <p:txBody>
+          <a:bodyPr wrap="square" rtlCol="0"/>
+          <a:lstStyle>
+            <a:lvl1pPr indent="0" marL="0">
+              <a:buNone/>
+              <a:defRPr lang="en-US" sz="1600" dirty="0">
+                <a:solidFill>
+                  <a:schemeClr val="tx2"/>
+                </a:solidFill>
+              </a:defRPr>
+            </a:lvl1pPr>
+          </a:lstStyle>
+          <a:p>
+            <a:pPr indent="0" marL="0">
+              <a:buNone/>
+            </a:pPr>
+            <a:r>
+              <a:rPr lang="en-US" sz="1600" dirty="0">
+                <a:solidFill>
+                  <a:schemeClr val="tx2"/>
+                </a:solidFill>
+              </a:rPr>
+              <a:t>Optional one-line description</a:t>
+            </a:r>
+            <a:endParaRPr lang="en-US" sz="1600" dirty="0"/>
+          </a:p>
+        </p:txBody>
+      </p:sp>
+      <p:pic>
+        <p:nvPicPr>
+          <p:cNvPr id="6" name="Image 1" descr="/tmp/tmp.CzRxgXMluS/logo.png">    </p:cNvPr>
           <p:cNvPicPr>
             <a:picLocks noChangeAspect="1"/>
           </p:cNvPicPr>
@@ -1801,177 +2281,6 @@
         </p:blipFill>
         <p:spPr>
           <a:xfrm>
-            <a:off x="0" y="0"/>
-            <a:ext cx="12191695" cy="6858000"/>
-          </a:xfrm>
-          <a:prstGeom prst="rect">
-            <a:avLst/>
-          </a:prstGeom>
-        </p:spPr>
-      </p:pic>
-      <p:sp>
-        <p:nvSpPr>
-          <p:cNvPr id="3" name="Text 0"/>
-          <p:cNvSpPr>
-            <a:spLocks noGrp="1"/>
-          </p:cNvSpPr>
-          <p:nvPr>
-            <p:ph type="body" idx="101" hasCustomPrompt="1"/>
-          </p:nvPr>
-        </p:nvSpPr>
-        <p:spPr>
-          <a:xfrm>
-            <a:off x="548640" y="1554480"/>
-            <a:ext cx="3657600" cy="1463040"/>
-          </a:xfrm>
-          <a:prstGeom prst="rect">
-            <a:avLst/>
-          </a:prstGeom>
-          <a:noFill/>
-          <a:ln/>
-        </p:spPr>
-        <p:txBody>
-          <a:bodyPr wrap="square" rtlCol="0"/>
-          <a:lstStyle>
-            <a:lvl1pPr marL="0" indent="0">
-              <a:buNone/>
-              <a:defRPr lang="en-US" sz="9600" b="1" kern="0" spc="-300" dirty="0">
-                <a:solidFill>
-                  <a:schemeClr val="accent1"/>
-                </a:solidFill>
-              </a:defRPr>
-            </a:lvl1pPr>
-          </a:lstStyle>
-          <a:p>
-            <a:pPr marL="0" indent="0">
-              <a:buNone/>
-            </a:pPr>
-            <a:r>
-              <a:rPr lang="en-US" sz="9600" b="1" kern="0" spc="-300" dirty="0">
-                <a:solidFill>
-                  <a:schemeClr val="accent1"/>
-                </a:solidFill>
-              </a:rPr>
-              <a:t>01</a:t>
-            </a:r>
-            <a:endParaRPr lang="en-US" sz="9600" dirty="0"/>
-          </a:p>
-        </p:txBody>
-      </p:sp>
-      <p:sp>
-        <p:nvSpPr>
-          <p:cNvPr id="4" name="Text 0"/>
-          <p:cNvSpPr>
-            <a:spLocks noGrp="1"/>
-          </p:cNvSpPr>
-          <p:nvPr>
-            <p:ph type="title" idx="102" hasCustomPrompt="1"/>
-          </p:nvPr>
-        </p:nvSpPr>
-        <p:spPr>
-          <a:xfrm>
-            <a:off x="548640" y="3154680"/>
-            <a:ext cx="9144000" cy="1280160"/>
-          </a:xfrm>
-          <a:prstGeom prst="rect">
-            <a:avLst/>
-          </a:prstGeom>
-          <a:noFill/>
-          <a:ln/>
-        </p:spPr>
-        <p:txBody>
-          <a:bodyPr wrap="square" rtlCol="0"/>
-          <a:lstStyle>
-            <a:lvl1pPr marL="0" indent="0" algn="l">
-              <a:buNone/>
-              <a:defRPr lang="en-US" sz="4000" b="1" kern="0" spc="-100" dirty="0">
-                <a:solidFill>
-                  <a:schemeClr val="tx1"/>
-                </a:solidFill>
-              </a:defRPr>
-            </a:lvl1pPr>
-          </a:lstStyle>
-          <a:p>
-            <a:pPr marL="0" indent="0" algn="l">
-              <a:buNone/>
-            </a:pPr>
-            <a:r>
-              <a:rPr lang="en-US" sz="4000" b="1" kern="0" spc="-100" dirty="0">
-                <a:solidFill>
-                  <a:schemeClr val="tx1"/>
-                </a:solidFill>
-              </a:rPr>
-              <a:t>SECTION TITLE</a:t>
-            </a:r>
-            <a:endParaRPr lang="en-US" sz="4000" dirty="0"/>
-          </a:p>
-        </p:txBody>
-      </p:sp>
-      <p:sp>
-        <p:nvSpPr>
-          <p:cNvPr id="5" name="Text 0"/>
-          <p:cNvSpPr>
-            <a:spLocks noGrp="1"/>
-          </p:cNvSpPr>
-          <p:nvPr>
-            <p:ph type="body" idx="103" hasCustomPrompt="1"/>
-          </p:nvPr>
-        </p:nvSpPr>
-        <p:spPr>
-          <a:xfrm>
-            <a:off x="548640" y="4480560"/>
-            <a:ext cx="6858000" cy="822960"/>
-          </a:xfrm>
-          <a:prstGeom prst="rect">
-            <a:avLst/>
-          </a:prstGeom>
-          <a:noFill/>
-          <a:ln/>
-        </p:spPr>
-        <p:txBody>
-          <a:bodyPr wrap="square" rtlCol="0"/>
-          <a:lstStyle>
-            <a:lvl1pPr marL="0" indent="0">
-              <a:buNone/>
-              <a:defRPr lang="en-US" sz="1600" dirty="0">
-                <a:solidFill>
-                  <a:schemeClr val="tx2"/>
-                </a:solidFill>
-              </a:defRPr>
-            </a:lvl1pPr>
-          </a:lstStyle>
-          <a:p>
-            <a:pPr marL="0" indent="0">
-              <a:buNone/>
-            </a:pPr>
-            <a:r>
-              <a:rPr lang="en-US" sz="1600" dirty="0">
-                <a:solidFill>
-                  <a:schemeClr val="tx2"/>
-                </a:solidFill>
-              </a:rPr>
-              <a:t>Optional one-line description</a:t>
-            </a:r>
-            <a:endParaRPr lang="en-US" sz="1600" dirty="0"/>
-          </a:p>
-        </p:txBody>
-      </p:sp>
-      <p:pic>
-        <p:nvPicPr>
-          <p:cNvPr id="6" name="Image 1" descr="/tmp/tmp.CzRxgXMluS/logo.png"/>
-          <p:cNvPicPr>
-            <a:picLocks noChangeAspect="1"/>
-          </p:cNvPicPr>
-          <p:nvPr/>
-        </p:nvPicPr>
-        <p:blipFill>
-          <a:blip r:embed="rId3"/>
-          <a:stretch>
-            <a:fillRect/>
-          </a:stretch>
-        </p:blipFill>
-        <p:spPr>
-          <a:xfrm>
             <a:off x="548640" y="6327648"/>
             <a:ext cx="237744" cy="237744"/>
           </a:xfrm>
@@ -2001,11 +2310,11 @@
           <a:bodyPr wrap="square" lIns="0" tIns="0" rIns="0" bIns="0" rtlCol="0" anchor="ctr"/>
           <a:lstStyle/>
           <a:p>
-            <a:pPr marL="0" indent="0">
-              <a:buNone/>
-            </a:pPr>
-            <a:r>
-              <a:rPr lang="en-US" sz="1000" b="1" kern="0" spc="50" dirty="0">
+            <a:pPr indent="0" marL="0">
+              <a:buNone/>
+            </a:pPr>
+            <a:r>
+              <a:rPr lang="en-US" sz="1000" b="1" spc="50" kern="0" dirty="0">
                 <a:solidFill>
                   <a:schemeClr val="tx1"/>
                 </a:solidFill>
@@ -2039,7 +2348,7 @@
           </a:prstGeom>
           <a:extLst>
             <a:ext uri="{C572A759-6A51-4108-AA02-DFA0A04FC94B}">
-              <ma14:wrappingTextBoxFlag xmlns:ma14="http://schemas.microsoft.com/office/mac/drawingml/2011/main" xmlns="" val="0"/>
+              <ma14:wrappingTextBoxFlag xmlns:ma14="http://schemas.microsoft.com/office/mac/drawingml/2011/main" val="0"/>
             </a:ext>
           </a:extLst>
         </p:spPr>
@@ -2060,8 +2369,8 @@
           <a:p>
             <a:pPr algn="r"/>
             <a:fld id="{F7021451-1387-4CA6-816F-3879F97B5CBC}" type="slidenum">
-              <a:rPr lang="en-US" b="0"/>
-              <a:t>‹N›</a:t>
+              <a:rPr b="0" lang="en-US"/>
+              <a:t>1003</a:t>
             </a:fld>
             <a:endParaRPr lang="en-US"/>
           </a:p>
@@ -2083,7 +2392,6 @@
         <a:solidFill>
           <a:schemeClr val="bg1"/>
         </a:solidFill>
-        <a:effectLst/>
       </p:bgPr>
     </p:bg>
     <p:spTree>
@@ -2123,11 +2431,9 @@
       <p:sp>
         <p:nvSpPr>
           <p:cNvPr id="3" name="Text 1"/>
-          <p:cNvSpPr>
-            <a:spLocks noGrp="1"/>
-          </p:cNvSpPr>
-          <p:nvPr>
-            <p:ph type="body" idx="101" hasCustomPrompt="1"/>
+          <p:cNvSpPr/>
+          <p:nvPr>
+            <p:ph idx="101" type="body" hasCustomPrompt="1"/>
           </p:nvPr>
         </p:nvSpPr>
         <p:spPr>
@@ -2144,9 +2450,9 @@
         <p:txBody>
           <a:bodyPr wrap="square" rtlCol="0"/>
           <a:lstStyle>
-            <a:lvl1pPr marL="0" indent="0">
-              <a:buNone/>
-              <a:defRPr lang="en-US" sz="1000" kern="0" spc="300" dirty="0">
+            <a:lvl1pPr indent="0" marL="0">
+              <a:buNone/>
+              <a:defRPr lang="en-US" sz="1000" spc="300" kern="0" dirty="0">
                 <a:solidFill>
                   <a:schemeClr val="accent4"/>
                 </a:solidFill>
@@ -2157,11 +2463,11 @@
             </a:lvl1pPr>
           </a:lstStyle>
           <a:p>
-            <a:pPr marL="0" indent="0">
-              <a:buNone/>
-            </a:pPr>
-            <a:r>
-              <a:rPr lang="en-US" sz="1000" kern="0" spc="300" dirty="0">
+            <a:pPr indent="0" marL="0">
+              <a:buNone/>
+            </a:pPr>
+            <a:r>
+              <a:rPr lang="en-US" sz="1000" spc="300" kern="0" dirty="0">
                 <a:solidFill>
                   <a:schemeClr val="accent4"/>
                 </a:solidFill>
@@ -2178,11 +2484,9 @@
       <p:sp>
         <p:nvSpPr>
           <p:cNvPr id="4" name="Text 1"/>
-          <p:cNvSpPr>
-            <a:spLocks noGrp="1"/>
-          </p:cNvSpPr>
-          <p:nvPr>
-            <p:ph type="title" idx="102" hasCustomPrompt="1"/>
+          <p:cNvSpPr/>
+          <p:nvPr>
+            <p:ph idx="102" type="title" hasCustomPrompt="1"/>
           </p:nvPr>
         </p:nvSpPr>
         <p:spPr>
@@ -2199,9 +2503,9 @@
         <p:txBody>
           <a:bodyPr wrap="square" rtlCol="0"/>
           <a:lstStyle>
-            <a:lvl1pPr marL="0" indent="0" algn="l">
-              <a:buNone/>
-              <a:defRPr lang="en-US" sz="3200" b="1" kern="0" spc="-50" dirty="0">
+            <a:lvl1pPr algn="l" indent="0" marL="0">
+              <a:buNone/>
+              <a:defRPr lang="en-US" sz="3200" b="1" spc="-50" kern="0" dirty="0">
                 <a:solidFill>
                   <a:schemeClr val="tx1"/>
                 </a:solidFill>
@@ -2209,11 +2513,11 @@
             </a:lvl1pPr>
           </a:lstStyle>
           <a:p>
-            <a:pPr marL="0" indent="0" algn="l">
-              <a:buNone/>
-            </a:pPr>
-            <a:r>
-              <a:rPr lang="en-US" sz="3200" b="1" kern="0" spc="-50" dirty="0">
+            <a:pPr algn="l" indent="0" marL="0">
+              <a:buNone/>
+            </a:pPr>
+            <a:r>
+              <a:rPr lang="en-US" sz="3200" b="1" spc="-50" kern="0" dirty="0">
                 <a:solidFill>
                   <a:schemeClr val="tx1"/>
                 </a:solidFill>
@@ -2227,11 +2531,9 @@
       <p:sp>
         <p:nvSpPr>
           <p:cNvPr id="5" name="Text 1"/>
-          <p:cNvSpPr>
-            <a:spLocks noGrp="1"/>
-          </p:cNvSpPr>
-          <p:nvPr>
-            <p:ph type="body" idx="103" hasCustomPrompt="1"/>
+          <p:cNvSpPr/>
+          <p:nvPr>
+            <p:ph idx="103" type="body" hasCustomPrompt="1"/>
           </p:nvPr>
         </p:nvSpPr>
         <p:spPr>
@@ -2248,7 +2550,7 @@
         <p:txBody>
           <a:bodyPr wrap="square" rtlCol="0"/>
           <a:lstStyle>
-            <a:lvl1pPr marL="0" indent="0">
+            <a:lvl1pPr indent="0" marL="0">
               <a:spcAft>
                 <a:spcPts val="800"/>
               </a:spcAft>
@@ -2261,7 +2563,7 @@
             </a:lvl1pPr>
           </a:lstStyle>
           <a:p>
-            <a:pPr marL="0" indent="0">
+            <a:pPr indent="0" marL="0">
               <a:spcAft>
                 <a:spcPts val="800"/>
               </a:spcAft>
@@ -2281,14 +2583,14 @@
       </p:sp>
       <p:pic>
         <p:nvPicPr>
-          <p:cNvPr id="6" name="Image 0" descr="/tmp/tmp.CzRxgXMluS/logo.png"/>
+          <p:cNvPr id="6" name="Image 0" descr="/tmp/tmp.CzRxgXMluS/logo.png">    </p:cNvPr>
           <p:cNvPicPr>
             <a:picLocks noChangeAspect="1"/>
           </p:cNvPicPr>
           <p:nvPr/>
         </p:nvPicPr>
         <p:blipFill>
-          <a:blip r:embed="rId2"/>
+          <a:blip r:embed="rId1"/>
           <a:stretch>
             <a:fillRect/>
           </a:stretch>
@@ -2324,11 +2626,11 @@
           <a:bodyPr wrap="square" lIns="0" tIns="0" rIns="0" bIns="0" rtlCol="0" anchor="ctr"/>
           <a:lstStyle/>
           <a:p>
-            <a:pPr marL="0" indent="0">
-              <a:buNone/>
-            </a:pPr>
-            <a:r>
-              <a:rPr lang="en-US" sz="1000" b="1" kern="0" spc="50" dirty="0">
+            <a:pPr indent="0" marL="0">
+              <a:buNone/>
+            </a:pPr>
+            <a:r>
+              <a:rPr lang="en-US" sz="1000" b="1" spc="50" kern="0" dirty="0">
                 <a:solidFill>
                   <a:schemeClr val="tx1"/>
                 </a:solidFill>
@@ -2362,7 +2664,7 @@
           </a:prstGeom>
           <a:extLst>
             <a:ext uri="{C572A759-6A51-4108-AA02-DFA0A04FC94B}">
-              <ma14:wrappingTextBoxFlag xmlns:ma14="http://schemas.microsoft.com/office/mac/drawingml/2011/main" xmlns="" val="0"/>
+              <ma14:wrappingTextBoxFlag xmlns:ma14="http://schemas.microsoft.com/office/mac/drawingml/2011/main" val="0"/>
             </a:ext>
           </a:extLst>
         </p:spPr>
@@ -2383,8 +2685,8 @@
           <a:p>
             <a:pPr algn="r"/>
             <a:fld id="{F7021451-1387-4CA6-816F-3879F97B5CBC}" type="slidenum">
-              <a:rPr lang="en-US" b="0"/>
-              <a:t>‹N›</a:t>
+              <a:rPr b="0" lang="en-US"/>
+              <a:t>1004</a:t>
             </a:fld>
             <a:endParaRPr lang="en-US"/>
           </a:p>
@@ -2406,7 +2708,6 @@
         <a:solidFill>
           <a:schemeClr val="bg1"/>
         </a:solidFill>
-        <a:effectLst/>
       </p:bgPr>
     </p:bg>
     <p:spTree>
@@ -2446,11 +2747,9 @@
       <p:sp>
         <p:nvSpPr>
           <p:cNvPr id="3" name="Text 1"/>
-          <p:cNvSpPr>
-            <a:spLocks noGrp="1"/>
-          </p:cNvSpPr>
-          <p:nvPr>
-            <p:ph type="body" idx="101" hasCustomPrompt="1"/>
+          <p:cNvSpPr/>
+          <p:nvPr>
+            <p:ph idx="101" type="body" hasCustomPrompt="1"/>
           </p:nvPr>
         </p:nvSpPr>
         <p:spPr>
@@ -2467,9 +2766,9 @@
         <p:txBody>
           <a:bodyPr wrap="square" rtlCol="0"/>
           <a:lstStyle>
-            <a:lvl1pPr marL="0" indent="0">
-              <a:buNone/>
-              <a:defRPr lang="en-US" sz="1000" kern="0" spc="300" dirty="0">
+            <a:lvl1pPr indent="0" marL="0">
+              <a:buNone/>
+              <a:defRPr lang="en-US" sz="1000" spc="300" kern="0" dirty="0">
                 <a:solidFill>
                   <a:schemeClr val="accent4"/>
                 </a:solidFill>
@@ -2480,11 +2779,11 @@
             </a:lvl1pPr>
           </a:lstStyle>
           <a:p>
-            <a:pPr marL="0" indent="0">
-              <a:buNone/>
-            </a:pPr>
-            <a:r>
-              <a:rPr lang="en-US" sz="1000" kern="0" spc="300" dirty="0">
+            <a:pPr indent="0" marL="0">
+              <a:buNone/>
+            </a:pPr>
+            <a:r>
+              <a:rPr lang="en-US" sz="1000" spc="300" kern="0" dirty="0">
                 <a:solidFill>
                   <a:schemeClr val="accent4"/>
                 </a:solidFill>
@@ -2501,11 +2800,9 @@
       <p:sp>
         <p:nvSpPr>
           <p:cNvPr id="4" name="Text 1"/>
-          <p:cNvSpPr>
-            <a:spLocks noGrp="1"/>
-          </p:cNvSpPr>
-          <p:nvPr>
-            <p:ph type="title" idx="102" hasCustomPrompt="1"/>
+          <p:cNvSpPr/>
+          <p:nvPr>
+            <p:ph idx="102" type="title" hasCustomPrompt="1"/>
           </p:nvPr>
         </p:nvSpPr>
         <p:spPr>
@@ -2522,9 +2819,9 @@
         <p:txBody>
           <a:bodyPr wrap="square" rtlCol="0"/>
           <a:lstStyle>
-            <a:lvl1pPr marL="0" indent="0" algn="l">
-              <a:buNone/>
-              <a:defRPr lang="en-US" sz="3200" b="1" kern="0" spc="-50" dirty="0">
+            <a:lvl1pPr algn="l" indent="0" marL="0">
+              <a:buNone/>
+              <a:defRPr lang="en-US" sz="3200" b="1" spc="-50" kern="0" dirty="0">
                 <a:solidFill>
                   <a:schemeClr val="tx1"/>
                 </a:solidFill>
@@ -2532,11 +2829,11 @@
             </a:lvl1pPr>
           </a:lstStyle>
           <a:p>
-            <a:pPr marL="0" indent="0" algn="l">
-              <a:buNone/>
-            </a:pPr>
-            <a:r>
-              <a:rPr lang="en-US" sz="3200" b="1" kern="0" spc="-50" dirty="0">
+            <a:pPr algn="l" indent="0" marL="0">
+              <a:buNone/>
+            </a:pPr>
+            <a:r>
+              <a:rPr lang="en-US" sz="3200" b="1" spc="-50" kern="0" dirty="0">
                 <a:solidFill>
                   <a:schemeClr val="tx1"/>
                 </a:solidFill>
@@ -2550,11 +2847,9 @@
       <p:sp>
         <p:nvSpPr>
           <p:cNvPr id="5" name="Text 1"/>
-          <p:cNvSpPr>
-            <a:spLocks noGrp="1"/>
-          </p:cNvSpPr>
-          <p:nvPr>
-            <p:ph type="body" idx="103" hasCustomPrompt="1"/>
+          <p:cNvSpPr/>
+          <p:nvPr>
+            <p:ph idx="103" type="body" hasCustomPrompt="1"/>
           </p:nvPr>
         </p:nvSpPr>
         <p:spPr>
@@ -2571,7 +2866,7 @@
         <p:txBody>
           <a:bodyPr wrap="square" rtlCol="0"/>
           <a:lstStyle>
-            <a:lvl1pPr marL="0" indent="0">
+            <a:lvl1pPr indent="0" marL="0">
               <a:spcAft>
                 <a:spcPts val="800"/>
               </a:spcAft>
@@ -2584,7 +2879,7 @@
             </a:lvl1pPr>
           </a:lstStyle>
           <a:p>
-            <a:pPr marL="0" indent="0">
+            <a:pPr indent="0" marL="0">
               <a:spcAft>
                 <a:spcPts val="800"/>
               </a:spcAft>
@@ -2605,11 +2900,9 @@
       <p:sp>
         <p:nvSpPr>
           <p:cNvPr id="6" name="Text 1"/>
-          <p:cNvSpPr>
-            <a:spLocks noGrp="1"/>
-          </p:cNvSpPr>
-          <p:nvPr>
-            <p:ph type="body" idx="104" hasCustomPrompt="1"/>
+          <p:cNvSpPr/>
+          <p:nvPr>
+            <p:ph idx="104" type="body" hasCustomPrompt="1"/>
           </p:nvPr>
         </p:nvSpPr>
         <p:spPr>
@@ -2626,7 +2919,7 @@
         <p:txBody>
           <a:bodyPr wrap="square" rtlCol="0"/>
           <a:lstStyle>
-            <a:lvl1pPr marL="0" indent="0">
+            <a:lvl1pPr indent="0" marL="0">
               <a:spcAft>
                 <a:spcPts val="800"/>
               </a:spcAft>
@@ -2639,7 +2932,7 @@
             </a:lvl1pPr>
           </a:lstStyle>
           <a:p>
-            <a:pPr marL="0" indent="0">
+            <a:pPr indent="0" marL="0">
               <a:spcAft>
                 <a:spcPts val="800"/>
               </a:spcAft>
@@ -2659,14 +2952,14 @@
       </p:sp>
       <p:pic>
         <p:nvPicPr>
-          <p:cNvPr id="7" name="Image 0" descr="/tmp/tmp.CzRxgXMluS/logo.png"/>
+          <p:cNvPr id="7" name="Image 0" descr="/tmp/tmp.CzRxgXMluS/logo.png">    </p:cNvPr>
           <p:cNvPicPr>
             <a:picLocks noChangeAspect="1"/>
           </p:cNvPicPr>
           <p:nvPr/>
         </p:nvPicPr>
         <p:blipFill>
-          <a:blip r:embed="rId2"/>
+          <a:blip r:embed="rId1"/>
           <a:stretch>
             <a:fillRect/>
           </a:stretch>
@@ -2702,11 +2995,11 @@
           <a:bodyPr wrap="square" lIns="0" tIns="0" rIns="0" bIns="0" rtlCol="0" anchor="ctr"/>
           <a:lstStyle/>
           <a:p>
-            <a:pPr marL="0" indent="0">
-              <a:buNone/>
-            </a:pPr>
-            <a:r>
-              <a:rPr lang="en-US" sz="1000" b="1" kern="0" spc="50" dirty="0">
+            <a:pPr indent="0" marL="0">
+              <a:buNone/>
+            </a:pPr>
+            <a:r>
+              <a:rPr lang="en-US" sz="1000" b="1" spc="50" kern="0" dirty="0">
                 <a:solidFill>
                   <a:schemeClr val="tx1"/>
                 </a:solidFill>
@@ -2740,7 +3033,7 @@
           </a:prstGeom>
           <a:extLst>
             <a:ext uri="{C572A759-6A51-4108-AA02-DFA0A04FC94B}">
-              <ma14:wrappingTextBoxFlag xmlns:ma14="http://schemas.microsoft.com/office/mac/drawingml/2011/main" xmlns="" val="0"/>
+              <ma14:wrappingTextBoxFlag xmlns:ma14="http://schemas.microsoft.com/office/mac/drawingml/2011/main" val="0"/>
             </a:ext>
           </a:extLst>
         </p:spPr>
@@ -2761,8 +3054,8 @@
           <a:p>
             <a:pPr algn="r"/>
             <a:fld id="{F7021451-1387-4CA6-816F-3879F97B5CBC}" type="slidenum">
-              <a:rPr lang="en-US" b="0"/>
-              <a:t>‹N›</a:t>
+              <a:rPr b="0" lang="en-US"/>
+              <a:t>1005</a:t>
             </a:fld>
             <a:endParaRPr lang="en-US"/>
           </a:p>
@@ -2784,7 +3077,6 @@
         <a:solidFill>
           <a:schemeClr val="bg1"/>
         </a:solidFill>
-        <a:effectLst/>
       </p:bgPr>
     </p:bg>
     <p:spTree>
@@ -2824,11 +3116,9 @@
       <p:sp>
         <p:nvSpPr>
           <p:cNvPr id="3" name="Text 1"/>
-          <p:cNvSpPr>
-            <a:spLocks noGrp="1"/>
-          </p:cNvSpPr>
-          <p:nvPr>
-            <p:ph type="body" idx="101" hasCustomPrompt="1"/>
+          <p:cNvSpPr/>
+          <p:nvPr>
+            <p:ph idx="101" type="body" hasCustomPrompt="1"/>
           </p:nvPr>
         </p:nvSpPr>
         <p:spPr>
@@ -2845,9 +3135,9 @@
         <p:txBody>
           <a:bodyPr wrap="square" rtlCol="0"/>
           <a:lstStyle>
-            <a:lvl1pPr marL="0" indent="0">
-              <a:buNone/>
-              <a:defRPr lang="en-US" sz="1000" kern="0" spc="300" dirty="0">
+            <a:lvl1pPr indent="0" marL="0">
+              <a:buNone/>
+              <a:defRPr lang="en-US" sz="1000" spc="300" kern="0" dirty="0">
                 <a:solidFill>
                   <a:schemeClr val="accent4"/>
                 </a:solidFill>
@@ -2858,11 +3148,11 @@
             </a:lvl1pPr>
           </a:lstStyle>
           <a:p>
-            <a:pPr marL="0" indent="0">
-              <a:buNone/>
-            </a:pPr>
-            <a:r>
-              <a:rPr lang="en-US" sz="1000" kern="0" spc="300" dirty="0">
+            <a:pPr indent="0" marL="0">
+              <a:buNone/>
+            </a:pPr>
+            <a:r>
+              <a:rPr lang="en-US" sz="1000" spc="300" kern="0" dirty="0">
                 <a:solidFill>
                   <a:schemeClr val="accent4"/>
                 </a:solidFill>
@@ -2879,11 +3169,9 @@
       <p:sp>
         <p:nvSpPr>
           <p:cNvPr id="4" name="Text 1"/>
-          <p:cNvSpPr>
-            <a:spLocks noGrp="1"/>
-          </p:cNvSpPr>
-          <p:nvPr>
-            <p:ph type="title" idx="102" hasCustomPrompt="1"/>
+          <p:cNvSpPr/>
+          <p:nvPr>
+            <p:ph idx="102" type="title" hasCustomPrompt="1"/>
           </p:nvPr>
         </p:nvSpPr>
         <p:spPr>
@@ -2900,9 +3188,9 @@
         <p:txBody>
           <a:bodyPr wrap="square" rtlCol="0"/>
           <a:lstStyle>
-            <a:lvl1pPr marL="0" indent="0" algn="l">
-              <a:buNone/>
-              <a:defRPr lang="en-US" sz="3200" b="1" kern="0" spc="-50" dirty="0">
+            <a:lvl1pPr algn="l" indent="0" marL="0">
+              <a:buNone/>
+              <a:defRPr lang="en-US" sz="3200" b="1" spc="-50" kern="0" dirty="0">
                 <a:solidFill>
                   <a:schemeClr val="tx1"/>
                 </a:solidFill>
@@ -2910,11 +3198,11 @@
             </a:lvl1pPr>
           </a:lstStyle>
           <a:p>
-            <a:pPr marL="0" indent="0" algn="l">
-              <a:buNone/>
-            </a:pPr>
-            <a:r>
-              <a:rPr lang="en-US" sz="3200" b="1" kern="0" spc="-50" dirty="0">
+            <a:pPr algn="l" indent="0" marL="0">
+              <a:buNone/>
+            </a:pPr>
+            <a:r>
+              <a:rPr lang="en-US" sz="3200" b="1" spc="-50" kern="0" dirty="0">
                 <a:solidFill>
                   <a:schemeClr val="tx1"/>
                 </a:solidFill>
@@ -2927,14 +3215,14 @@
       </p:sp>
       <p:pic>
         <p:nvPicPr>
-          <p:cNvPr id="5" name="Image 0" descr="/tmp/tmp.CzRxgXMluS/logo.png"/>
+          <p:cNvPr id="5" name="Image 0" descr="/tmp/tmp.CzRxgXMluS/logo.png">    </p:cNvPr>
           <p:cNvPicPr>
             <a:picLocks noChangeAspect="1"/>
           </p:cNvPicPr>
           <p:nvPr/>
         </p:nvPicPr>
         <p:blipFill>
-          <a:blip r:embed="rId2"/>
+          <a:blip r:embed="rId1"/>
           <a:stretch>
             <a:fillRect/>
           </a:stretch>
@@ -2970,11 +3258,11 @@
           <a:bodyPr wrap="square" lIns="0" tIns="0" rIns="0" bIns="0" rtlCol="0" anchor="ctr"/>
           <a:lstStyle/>
           <a:p>
-            <a:pPr marL="0" indent="0">
-              <a:buNone/>
-            </a:pPr>
-            <a:r>
-              <a:rPr lang="en-US" sz="1000" b="1" kern="0" spc="50" dirty="0">
+            <a:pPr indent="0" marL="0">
+              <a:buNone/>
+            </a:pPr>
+            <a:r>
+              <a:rPr lang="en-US" sz="1000" b="1" spc="50" kern="0" dirty="0">
                 <a:solidFill>
                   <a:schemeClr val="tx1"/>
                 </a:solidFill>
@@ -3008,7 +3296,7 @@
           </a:prstGeom>
           <a:extLst>
             <a:ext uri="{C572A759-6A51-4108-AA02-DFA0A04FC94B}">
-              <ma14:wrappingTextBoxFlag xmlns:ma14="http://schemas.microsoft.com/office/mac/drawingml/2011/main" xmlns="" val="0"/>
+              <ma14:wrappingTextBoxFlag xmlns:ma14="http://schemas.microsoft.com/office/mac/drawingml/2011/main" val="0"/>
             </a:ext>
           </a:extLst>
         </p:spPr>
@@ -3029,8 +3317,8 @@
           <a:p>
             <a:pPr algn="r"/>
             <a:fld id="{F7021451-1387-4CA6-816F-3879F97B5CBC}" type="slidenum">
-              <a:rPr lang="en-US" b="0"/>
-              <a:t>‹N›</a:t>
+              <a:rPr b="0" lang="en-US"/>
+              <a:t>1006</a:t>
             </a:fld>
             <a:endParaRPr lang="en-US"/>
           </a:p>
@@ -3052,7 +3340,6 @@
         <a:solidFill>
           <a:schemeClr val="tx1"/>
         </a:solidFill>
-        <a:effectLst/>
       </p:bgPr>
     </p:bg>
     <p:spTree>
@@ -3096,7 +3383,137 @@
       </p:sp>
       <p:pic>
         <p:nvPicPr>
-          <p:cNvPr id="3" name="Image 0" descr="/tmp/tmp.CzRxgXMluS/logo.png"/>
+          <p:cNvPr id="3" name="Image 0" descr="/tmp/tmp.CzRxgXMluS/logo.png">    </p:cNvPr>
+          <p:cNvPicPr>
+            <a:picLocks noChangeAspect="1"/>
+          </p:cNvPicPr>
+          <p:nvPr/>
+        </p:nvPicPr>
+        <p:blipFill>
+          <a:blip r:embed="rId1"/>
+          <a:stretch>
+            <a:fillRect/>
+          </a:stretch>
+        </p:blipFill>
+        <p:spPr>
+          <a:xfrm>
+            <a:off x="658368" y="1572768"/>
+            <a:ext cx="786384" cy="786384"/>
+          </a:xfrm>
+          <a:prstGeom prst="rect">
+            <a:avLst/>
+          </a:prstGeom>
+        </p:spPr>
+      </p:pic>
+      <p:sp>
+        <p:nvSpPr>
+          <p:cNvPr id="4" name="Text 1"/>
+          <p:cNvSpPr/>
+          <p:nvPr>
+            <p:ph idx="102" type="title" hasCustomPrompt="1"/>
+          </p:nvPr>
+        </p:nvSpPr>
+        <p:spPr>
+          <a:xfrm>
+            <a:off x="548640" y="2834640"/>
+            <a:ext cx="9144000" cy="1188720"/>
+          </a:xfrm>
+          <a:prstGeom prst="rect">
+            <a:avLst/>
+          </a:prstGeom>
+          <a:noFill/>
+          <a:ln/>
+        </p:spPr>
+        <p:txBody>
+          <a:bodyPr wrap="square" rtlCol="0"/>
+          <a:lstStyle>
+            <a:lvl1pPr algn="l" indent="0" marL="0">
+              <a:buNone/>
+              <a:defRPr lang="en-US" sz="5400" b="1" spc="-150" kern="0" dirty="0">
+                <a:solidFill>
+                  <a:schemeClr val="bg2"/>
+                </a:solidFill>
+              </a:defRPr>
+            </a:lvl1pPr>
+          </a:lstStyle>
+          <a:p>
+            <a:pPr algn="l" indent="0" marL="0">
+              <a:buNone/>
+            </a:pPr>
+            <a:r>
+              <a:rPr lang="en-US" sz="5400" b="1" spc="-150" kern="0" dirty="0">
+                <a:solidFill>
+                  <a:schemeClr val="bg2"/>
+                </a:solidFill>
+              </a:rPr>
+              <a:t>THANK YOU</a:t>
+            </a:r>
+            <a:endParaRPr lang="en-US" sz="5400" dirty="0"/>
+          </a:p>
+        </p:txBody>
+      </p:sp>
+      <p:sp>
+        <p:nvSpPr>
+          <p:cNvPr id="5" name="Text 1"/>
+          <p:cNvSpPr/>
+          <p:nvPr>
+            <p:ph idx="103" type="body" hasCustomPrompt="1"/>
+          </p:nvPr>
+        </p:nvSpPr>
+        <p:spPr>
+          <a:xfrm>
+            <a:off x="548640" y="4114800"/>
+            <a:ext cx="8229600" cy="1280160"/>
+          </a:xfrm>
+          <a:prstGeom prst="rect">
+            <a:avLst/>
+          </a:prstGeom>
+          <a:noFill/>
+          <a:ln/>
+        </p:spPr>
+        <p:txBody>
+          <a:bodyPr wrap="square" rtlCol="0"/>
+          <a:lstStyle>
+            <a:lvl1pPr indent="0" marL="0">
+              <a:spcAft>
+                <a:spcPts val="400"/>
+              </a:spcAft>
+              <a:buNone/>
+              <a:defRPr lang="en-US" sz="1200" dirty="0">
+                <a:solidFill>
+                  <a:schemeClr val="accent1"/>
+                </a:solidFill>
+                <a:latin typeface="JetBrains Mono" pitchFamily="34" charset="0"/>
+                <a:ea typeface="JetBrains Mono" pitchFamily="34" charset="-122"/>
+                <a:cs typeface="JetBrains Mono" pitchFamily="34" charset="-120"/>
+              </a:defRPr>
+            </a:lvl1pPr>
+          </a:lstStyle>
+          <a:p>
+            <a:pPr indent="0" marL="0">
+              <a:spcAft>
+                <a:spcPts val="400"/>
+              </a:spcAft>
+              <a:buNone/>
+            </a:pPr>
+            <a:r>
+              <a:rPr lang="en-US" sz="1200" dirty="0">
+                <a:solidFill>
+                  <a:schemeClr val="accent1"/>
+                </a:solidFill>
+                <a:latin typeface="JetBrains Mono" pitchFamily="34" charset="0"/>
+                <a:ea typeface="JetBrains Mono" pitchFamily="34" charset="-122"/>
+                <a:cs typeface="JetBrains Mono" pitchFamily="34" charset="-120"/>
+              </a:rPr>
+              <a:t>contact@example.org</a:t>
+            </a:r>
+            <a:endParaRPr lang="en-US" sz="1200" dirty="0"/>
+          </a:p>
+        </p:txBody>
+      </p:sp>
+      <p:pic>
+        <p:nvPicPr>
+          <p:cNvPr id="6" name="Image 1" descr="/tmp/tmp.CzRxgXMluS/logo.png">    </p:cNvPr>
           <p:cNvPicPr>
             <a:picLocks noChangeAspect="1"/>
           </p:cNvPicPr>
@@ -3110,140 +3527,6 @@
         </p:blipFill>
         <p:spPr>
           <a:xfrm>
-            <a:off x="658368" y="1572768"/>
-            <a:ext cx="786384" cy="786384"/>
-          </a:xfrm>
-          <a:prstGeom prst="rect">
-            <a:avLst/>
-          </a:prstGeom>
-        </p:spPr>
-      </p:pic>
-      <p:sp>
-        <p:nvSpPr>
-          <p:cNvPr id="4" name="Text 1"/>
-          <p:cNvSpPr>
-            <a:spLocks noGrp="1"/>
-          </p:cNvSpPr>
-          <p:nvPr>
-            <p:ph type="title" idx="102" hasCustomPrompt="1"/>
-          </p:nvPr>
-        </p:nvSpPr>
-        <p:spPr>
-          <a:xfrm>
-            <a:off x="548640" y="2834640"/>
-            <a:ext cx="9144000" cy="1188720"/>
-          </a:xfrm>
-          <a:prstGeom prst="rect">
-            <a:avLst/>
-          </a:prstGeom>
-          <a:noFill/>
-          <a:ln/>
-        </p:spPr>
-        <p:txBody>
-          <a:bodyPr wrap="square" rtlCol="0"/>
-          <a:lstStyle>
-            <a:lvl1pPr marL="0" indent="0" algn="l">
-              <a:buNone/>
-              <a:defRPr lang="en-US" sz="5400" b="1" kern="0" spc="-150" dirty="0">
-                <a:solidFill>
-                  <a:schemeClr val="bg2"/>
-                </a:solidFill>
-              </a:defRPr>
-            </a:lvl1pPr>
-          </a:lstStyle>
-          <a:p>
-            <a:pPr marL="0" indent="0" algn="l">
-              <a:buNone/>
-            </a:pPr>
-            <a:r>
-              <a:rPr lang="en-US" sz="5400" b="1" kern="0" spc="-150" dirty="0">
-                <a:solidFill>
-                  <a:schemeClr val="bg2"/>
-                </a:solidFill>
-              </a:rPr>
-              <a:t>THANK YOU</a:t>
-            </a:r>
-            <a:endParaRPr lang="en-US" sz="5400" dirty="0"/>
-          </a:p>
-        </p:txBody>
-      </p:sp>
-      <p:sp>
-        <p:nvSpPr>
-          <p:cNvPr id="5" name="Text 1"/>
-          <p:cNvSpPr>
-            <a:spLocks noGrp="1"/>
-          </p:cNvSpPr>
-          <p:nvPr>
-            <p:ph type="body" idx="103" hasCustomPrompt="1"/>
-          </p:nvPr>
-        </p:nvSpPr>
-        <p:spPr>
-          <a:xfrm>
-            <a:off x="548640" y="4114800"/>
-            <a:ext cx="8229600" cy="1280160"/>
-          </a:xfrm>
-          <a:prstGeom prst="rect">
-            <a:avLst/>
-          </a:prstGeom>
-          <a:noFill/>
-          <a:ln/>
-        </p:spPr>
-        <p:txBody>
-          <a:bodyPr wrap="square" rtlCol="0"/>
-          <a:lstStyle>
-            <a:lvl1pPr marL="0" indent="0">
-              <a:spcAft>
-                <a:spcPts val="400"/>
-              </a:spcAft>
-              <a:buNone/>
-              <a:defRPr lang="en-US" sz="1200" dirty="0">
-                <a:solidFill>
-                  <a:schemeClr val="accent1"/>
-                </a:solidFill>
-                <a:latin typeface="JetBrains Mono" pitchFamily="34" charset="0"/>
-                <a:ea typeface="JetBrains Mono" pitchFamily="34" charset="-122"/>
-                <a:cs typeface="JetBrains Mono" pitchFamily="34" charset="-120"/>
-              </a:defRPr>
-            </a:lvl1pPr>
-          </a:lstStyle>
-          <a:p>
-            <a:pPr marL="0" indent="0">
-              <a:spcAft>
-                <a:spcPts val="400"/>
-              </a:spcAft>
-              <a:buNone/>
-            </a:pPr>
-            <a:r>
-              <a:rPr lang="en-US" sz="1200" dirty="0">
-                <a:solidFill>
-                  <a:schemeClr val="accent1"/>
-                </a:solidFill>
-                <a:latin typeface="JetBrains Mono" pitchFamily="34" charset="0"/>
-                <a:ea typeface="JetBrains Mono" pitchFamily="34" charset="-122"/>
-                <a:cs typeface="JetBrains Mono" pitchFamily="34" charset="-120"/>
-              </a:rPr>
-              <a:t>contact@example.org</a:t>
-            </a:r>
-            <a:endParaRPr lang="en-US" sz="1200" dirty="0"/>
-          </a:p>
-        </p:txBody>
-      </p:sp>
-      <p:pic>
-        <p:nvPicPr>
-          <p:cNvPr id="6" name="Image 1" descr="/tmp/tmp.CzRxgXMluS/logo.png"/>
-          <p:cNvPicPr>
-            <a:picLocks noChangeAspect="1"/>
-          </p:cNvPicPr>
-          <p:nvPr/>
-        </p:nvPicPr>
-        <p:blipFill>
-          <a:blip r:embed="rId2"/>
-          <a:stretch>
-            <a:fillRect/>
-          </a:stretch>
-        </p:blipFill>
-        <p:spPr>
-          <a:xfrm>
             <a:off x="548640" y="6327648"/>
             <a:ext cx="237744" cy="237744"/>
           </a:xfrm>
@@ -3273,11 +3556,11 @@
           <a:bodyPr wrap="square" lIns="0" tIns="0" rIns="0" bIns="0" rtlCol="0" anchor="ctr"/>
           <a:lstStyle/>
           <a:p>
-            <a:pPr marL="0" indent="0">
-              <a:buNone/>
-            </a:pPr>
-            <a:r>
-              <a:rPr lang="en-US" sz="1000" b="1" kern="0" spc="50" dirty="0">
+            <a:pPr indent="0" marL="0">
+              <a:buNone/>
+            </a:pPr>
+            <a:r>
+              <a:rPr lang="en-US" sz="1000" b="1" spc="50" kern="0" dirty="0">
                 <a:solidFill>
                   <a:schemeClr val="bg2"/>
                 </a:solidFill>
@@ -3311,7 +3594,7 @@
           </a:prstGeom>
           <a:extLst>
             <a:ext uri="{C572A759-6A51-4108-AA02-DFA0A04FC94B}">
-              <ma14:wrappingTextBoxFlag xmlns:ma14="http://schemas.microsoft.com/office/mac/drawingml/2011/main" xmlns="" val="0"/>
+              <ma14:wrappingTextBoxFlag xmlns:ma14="http://schemas.microsoft.com/office/mac/drawingml/2011/main" val="0"/>
             </a:ext>
           </a:extLst>
         </p:spPr>
@@ -3332,8 +3615,8 @@
           <a:p>
             <a:pPr algn="r"/>
             <a:fld id="{F7021451-1387-4CA6-816F-3879F97B5CBC}" type="slidenum">
-              <a:rPr lang="en-US" b="0"/>
-              <a:t>‹N›</a:t>
+              <a:rPr b="0" lang="en-US"/>
+              <a:t>1007</a:t>
             </a:fld>
             <a:endParaRPr lang="en-US"/>
           </a:p>
@@ -3350,11 +3633,6 @@
 <file path=ppt/slideMasters/slideMaster1.xml><?xml version="1.0" encoding="utf-8"?>
 <p:sldMaster xmlns:a="http://schemas.openxmlformats.org/drawingml/2006/main" xmlns:r="http://schemas.openxmlformats.org/officeDocument/2006/relationships" xmlns:p="http://schemas.openxmlformats.org/presentationml/2006/main">
   <p:cSld>
-    <p:bg>
-      <p:bgRef idx="1001">
-        <a:schemeClr val="bg1"/>
-      </p:bgRef>
-    </p:bg>
     <p:spTree>
       <p:nvGrpSpPr>
         <p:cNvPr id="1" name=""/>
@@ -3389,7 +3667,7 @@
           </a:prstGeom>
           <a:extLst>
             <a:ext uri="{C572A759-6A51-4108-AA02-DFA0A04FC94B}">
-              <ma14:wrappingTextBoxFlag xmlns:ma14="http://schemas.microsoft.com/office/mac/drawingml/2011/main" xmlns="" val="0"/>
+              <ma14:wrappingTextBoxFlag xmlns:ma14="http://schemas.microsoft.com/office/mac/drawingml/2011/main" val="0"/>
             </a:ext>
           </a:extLst>
         </p:spPr>
@@ -3410,8 +3688,8 @@
           <a:p>
             <a:pPr algn="r"/>
             <a:fld id="{F7021451-1387-4CA6-816F-3879F97B5CBC}" type="slidenum">
-              <a:rPr lang="en-US" b="0"/>
-              <a:t>‹N›</a:t>
+              <a:rPr b="0" lang="en-US"/>
+              <a:t>null</a:t>
             </a:fld>
             <a:endParaRPr lang="en-US"/>
           </a:p>
@@ -3703,182 +3981,350 @@
       <p:sp>
         <p:nvSpPr>
           <p:cNvPr id="2" name="Text 1"/>
+          <p:cNvSpPr/>
+          <p:nvPr>
+            <p:ph idx="102" type="body" hasCustomPrompt="1"/>
+          </p:nvPr>
+        </p:nvSpPr>
+        <p:spPr>
+          <a:xfrm>
+            <a:off x="960120" y="1417320"/>
+            <a:ext cx="7315200" cy="256032"/>
+          </a:xfrm>
+          <a:prstGeom prst="rect">
+            <a:avLst/>
+          </a:prstGeom>
+          <a:noFill/>
+          <a:ln/>
+        </p:spPr>
+        <p:txBody>
+          <a:bodyPr wrap="square" lIns="0" tIns="0" rIns="0" bIns="0" rtlCol="0" anchor="ctr"/>
+          <a:lstStyle/>
+          <a:p>
+            <a:pPr indent="0" marL="0">
+              <a:buNone/>
+            </a:pPr>
+            <a:r>
+              <a:rPr lang="en-US" sz="1000" spc="300" kern="0" dirty="0">
+                <a:solidFill>
+                  <a:schemeClr val="accent4"/>
+                </a:solidFill>
+                <a:latin typeface="JetBrains Mono" pitchFamily="34" charset="0"/>
+                <a:ea typeface="JetBrains Mono" pitchFamily="34" charset="-122"/>
+                <a:cs typeface="JetBrains Mono" pitchFamily="34" charset="-120"/>
+              </a:rPr>
+              <a:t>INTERNATIONAL JOINT INITIATIVE</a:t>
+            </a:r>
+            <a:endParaRPr lang="en-US" sz="1000" dirty="0"/>
+          </a:p>
+        </p:txBody>
+      </p:sp>
+      <p:sp>
+        <p:nvSpPr>
+          <p:cNvPr id="3" name="Text 1"/>
+          <p:cNvSpPr/>
+          <p:nvPr>
+            <p:ph idx="104" type="title" hasCustomPrompt="1"/>
+          </p:nvPr>
+        </p:nvSpPr>
+        <p:spPr>
+          <a:xfrm>
+            <a:off x="548640" y="1874520"/>
+            <a:ext cx="7132320" cy="2194560"/>
+          </a:xfrm>
+          <a:prstGeom prst="rect">
+            <a:avLst/>
+          </a:prstGeom>
+          <a:noFill/>
+          <a:ln/>
+        </p:spPr>
+        <p:txBody>
+          <a:bodyPr wrap="square" lIns="0" tIns="0" rIns="0" bIns="0" rtlCol="0" anchor="t"/>
+          <a:lstStyle/>
+          <a:p>
+            <a:pPr algn="l" indent="0" marL="0">
+              <a:lnSpc>
+                <a:spcPct val="85000"/>
+              </a:lnSpc>
+              <a:buNone/>
+            </a:pPr>
+            <a:r>
+              <a:rPr lang="en-US" sz="5400" b="1" spc="-150" kern="0" dirty="0">
+                <a:solidFill>
+                  <a:schemeClr val="tx1"/>
+                </a:solidFill>
+              </a:rPr>
+              <a:t>TRUSTED AI</a:t>
+            </a:r>
+            <a:pPr algn="l" indent="0" marL="0">
+              <a:lnSpc>
+                <a:spcPct val="85000"/>
+              </a:lnSpc>
+              <a:buNone/>
+            </a:pPr>
+            <a:r>
+              <a:rPr lang="en-US" sz="5400" b="1" spc="-150" kern="0" dirty="0">
+                <a:solidFill>
+                  <a:schemeClr val="accent2"/>
+                </a:solidFill>
+              </a:rPr>
+              <a:t>.</a:t>
+            </a:r>
+            <a:endParaRPr lang="en-US" sz="5400" dirty="0"/>
+          </a:p>
+        </p:txBody>
+      </p:sp>
+      <p:sp>
+        <p:nvSpPr>
+          <p:cNvPr id="4" name="Text 1"/>
+          <p:cNvSpPr/>
+          <p:nvPr>
+            <p:ph idx="105" type="body" hasCustomPrompt="1"/>
+          </p:nvPr>
+        </p:nvSpPr>
+        <p:spPr>
+          <a:xfrm>
+            <a:off x="548640" y="4206240"/>
+            <a:ext cx="6583680" cy="822960"/>
+          </a:xfrm>
+          <a:prstGeom prst="rect">
+            <a:avLst/>
+          </a:prstGeom>
+          <a:noFill/>
+          <a:ln/>
+        </p:spPr>
+        <p:txBody>
+          <a:bodyPr wrap="square" lIns="0" tIns="0" rIns="0" bIns="0" rtlCol="0" anchor="t"/>
+          <a:lstStyle/>
+          <a:p>
+            <a:pPr indent="0" marL="0">
+              <a:buNone/>
+            </a:pPr>
+            <a:r>
+              <a:rPr lang="en-US" sz="1600" dirty="0">
+                <a:solidFill>
+                  <a:schemeClr val="tx2"/>
+                </a:solidFill>
+              </a:rPr>
+              <a:t>Advancing AI that is trustworthy, inclusive, sustainable and compliant</a:t>
+            </a:r>
+            <a:endParaRPr lang="en-US" sz="1600" dirty="0"/>
+          </a:p>
+        </p:txBody>
+      </p:sp>
+      <p:sp>
+        <p:nvSpPr>
+          <p:cNvPr id="5" name="Text 1"/>
+          <p:cNvSpPr/>
+          <p:nvPr>
+            <p:ph idx="106" type="body" hasCustomPrompt="1"/>
+          </p:nvPr>
+        </p:nvSpPr>
+        <p:spPr>
+          <a:xfrm>
+            <a:off x="548640" y="5760720"/>
+            <a:ext cx="7315200" cy="365760"/>
+          </a:xfrm>
+          <a:prstGeom prst="rect">
+            <a:avLst/>
+          </a:prstGeom>
+          <a:noFill/>
+          <a:ln/>
+        </p:spPr>
+        <p:txBody>
+          <a:bodyPr wrap="square" lIns="0" tIns="0" rIns="0" bIns="0" rtlCol="0" anchor="b"/>
+          <a:lstStyle/>
+          <a:p>
+            <a:pPr indent="0" marL="0">
+              <a:buNone/>
+            </a:pPr>
+            <a:r>
+              <a:rPr lang="en-US" sz="1000" spc="200" kern="0" dirty="0">
+                <a:solidFill>
+                  <a:schemeClr val="tx1"/>
+                </a:solidFill>
+                <a:latin typeface="JetBrains Mono" pitchFamily="34" charset="0"/>
+                <a:ea typeface="JetBrains Mono" pitchFamily="34" charset="-122"/>
+                <a:cs typeface="JetBrains Mono" pitchFamily="34" charset="-120"/>
+              </a:rPr>
+              <a:t>NAME SURNAME · EVENT NAME · DATE</a:t>
+            </a:r>
+            <a:endParaRPr lang="en-US" sz="1000" dirty="0"/>
+          </a:p>
+        </p:txBody>
+      </p:sp>
+    </p:spTree>
+  </p:cSld>
+  <p:clrMapOvr>
+    <a:masterClrMapping/>
+  </p:clrMapOvr>
+</p:sld>
+</file>
+
+<file path=ppt/slides/slide10.xml><?xml version="1.0" encoding="utf-8"?>
+<p:sld xmlns:a="http://schemas.openxmlformats.org/drawingml/2006/main" xmlns:r="http://schemas.openxmlformats.org/officeDocument/2006/relationships" xmlns:p="http://schemas.openxmlformats.org/presentationml/2006/main">
+  <p:cSld name="Slide 10">
+    <p:spTree>
+      <p:nvGrpSpPr>
+        <p:cNvPr id="1" name=""/>
+        <p:cNvGrpSpPr/>
+        <p:nvPr/>
+      </p:nvGrpSpPr>
+      <p:grpSpPr>
+        <a:xfrm>
+          <a:off x="0" y="0"/>
+          <a:ext cx="0" cy="0"/>
+          <a:chOff x="0" y="0"/>
+          <a:chExt cx="0" cy="0"/>
+        </a:xfrm>
+      </p:grpSpPr>
+      <p:sp>
+        <p:nvSpPr>
+          <p:cNvPr id="2" name="Text 1"/>
+          <p:cNvSpPr/>
+          <p:nvPr>
+            <p:ph idx="102" type="title" hasCustomPrompt="1"/>
+          </p:nvPr>
+        </p:nvSpPr>
+        <p:spPr>
+          <a:xfrm>
+            <a:off x="548640" y="2834640"/>
+            <a:ext cx="9144000" cy="1188720"/>
+          </a:xfrm>
+          <a:prstGeom prst="rect">
+            <a:avLst/>
+          </a:prstGeom>
+          <a:noFill/>
+          <a:ln/>
+        </p:spPr>
+        <p:txBody>
+          <a:bodyPr wrap="square" lIns="0" tIns="0" rIns="0" bIns="0" rtlCol="0" anchor="t"/>
+          <a:lstStyle/>
+          <a:p>
+            <a:pPr algn="l" indent="0" marL="0">
+              <a:buNone/>
+            </a:pPr>
+            <a:r>
+              <a:rPr lang="en-US" sz="5400" b="1" spc="-150" kern="0" dirty="0">
+                <a:solidFill>
+                  <a:schemeClr val="bg2"/>
+                </a:solidFill>
+              </a:rPr>
+              <a:t>THANK YOU.</a:t>
+            </a:r>
+            <a:endParaRPr lang="en-US" sz="5400" dirty="0"/>
+          </a:p>
+        </p:txBody>
+      </p:sp>
+      <p:sp>
+        <p:nvSpPr>
+          <p:cNvPr id="3" name="Text 1"/>
+          <p:cNvSpPr/>
+          <p:nvPr>
+            <p:ph idx="103" type="body" hasCustomPrompt="1"/>
+          </p:nvPr>
+        </p:nvSpPr>
+        <p:spPr>
+          <a:xfrm>
+            <a:off x="548640" y="4114800"/>
+            <a:ext cx="8229600" cy="1280160"/>
+          </a:xfrm>
+          <a:prstGeom prst="rect">
+            <a:avLst/>
+          </a:prstGeom>
+          <a:noFill/>
+          <a:ln/>
+        </p:spPr>
+        <p:txBody>
+          <a:bodyPr wrap="square" lIns="0" tIns="0" rIns="0" bIns="0" rtlCol="0" anchor="t"/>
+          <a:lstStyle/>
+          <a:p>
+            <a:pPr indent="0" marL="0">
+              <a:spcAft>
+                <a:spcPts val="400"/>
+              </a:spcAft>
+              <a:buNone/>
+            </a:pPr>
+            <a:r>
+              <a:rPr lang="en-US" sz="1200" dirty="0">
+                <a:solidFill>
+                  <a:schemeClr val="accent1"/>
+                </a:solidFill>
+                <a:latin typeface="JetBrains Mono" pitchFamily="34" charset="0"/>
+                <a:ea typeface="JetBrains Mono" pitchFamily="34" charset="-122"/>
+                <a:cs typeface="JetBrains Mono" pitchFamily="34" charset="-120"/>
+              </a:rPr>
+              <a:t>name.surname@example.org</a:t>
+            </a:r>
+            <a:endParaRPr lang="en-US" sz="1200" dirty="0"/>
+          </a:p>
+          <a:p>
+            <a:pPr indent="0" marL="0">
+              <a:spcAft>
+                <a:spcPts val="400"/>
+              </a:spcAft>
+              <a:buNone/>
+            </a:pPr>
+            <a:r>
+              <a:rPr lang="en-US" sz="1200" dirty="0">
+                <a:solidFill>
+                  <a:schemeClr val="accent1"/>
+                </a:solidFill>
+                <a:latin typeface="JetBrains Mono" pitchFamily="34" charset="0"/>
+                <a:ea typeface="JetBrains Mono" pitchFamily="34" charset="-122"/>
+                <a:cs typeface="JetBrains Mono" pitchFamily="34" charset="-120"/>
+              </a:rPr>
+              <a:t>trust-ai.example.org</a:t>
+            </a:r>
+            <a:endParaRPr lang="en-US" sz="1200" dirty="0"/>
+          </a:p>
+        </p:txBody>
+      </p:sp>
+      <p:sp>
+        <p:nvSpPr>
+          <p:cNvPr id="25" name="Slide Number Placeholder 0"/>
           <p:cNvSpPr>
             <a:spLocks noGrp="1"/>
           </p:cNvSpPr>
           <p:nvPr>
-            <p:ph type="body" idx="102" hasCustomPrompt="1"/>
-          </p:nvPr>
-        </p:nvSpPr>
-        <p:spPr>
-          <a:xfrm>
-            <a:off x="960120" y="1417320"/>
-            <a:ext cx="7315200" cy="256032"/>
-          </a:xfrm>
-          <a:prstGeom prst="rect">
-            <a:avLst/>
-          </a:prstGeom>
-          <a:noFill/>
-          <a:ln/>
-        </p:spPr>
-        <p:txBody>
-          <a:bodyPr wrap="square" lIns="0" tIns="0" rIns="0" bIns="0" rtlCol="0" anchor="ctr"/>
-          <a:lstStyle/>
-          <a:p>
-            <a:pPr marL="0" indent="0">
-              <a:buNone/>
-            </a:pPr>
-            <a:r>
-              <a:rPr lang="en-US" sz="1000" kern="0" spc="300" dirty="0">
-                <a:solidFill>
-                  <a:schemeClr val="accent4"/>
-                </a:solidFill>
-                <a:latin typeface="JetBrains Mono" pitchFamily="34" charset="0"/>
-                <a:ea typeface="JetBrains Mono" pitchFamily="34" charset="-122"/>
-                <a:cs typeface="JetBrains Mono" pitchFamily="34" charset="-120"/>
-              </a:rPr>
-              <a:t>INTERNATIONAL JOINT INITIATIVE</a:t>
-            </a:r>
-            <a:endParaRPr lang="en-US" sz="1000" dirty="0"/>
-          </a:p>
-        </p:txBody>
-      </p:sp>
-      <p:sp>
-        <p:nvSpPr>
-          <p:cNvPr id="3" name="Text 1"/>
-          <p:cNvSpPr>
-            <a:spLocks noGrp="1"/>
-          </p:cNvSpPr>
-          <p:nvPr>
-            <p:ph type="title" idx="104" hasCustomPrompt="1"/>
-          </p:nvPr>
-        </p:nvSpPr>
-        <p:spPr>
-          <a:xfrm>
-            <a:off x="548640" y="1874520"/>
-            <a:ext cx="7132320" cy="2194560"/>
-          </a:xfrm>
-          <a:prstGeom prst="rect">
-            <a:avLst/>
-          </a:prstGeom>
-          <a:noFill/>
-          <a:ln/>
-        </p:spPr>
-        <p:txBody>
-          <a:bodyPr wrap="square" lIns="0" tIns="0" rIns="0" bIns="0" rtlCol="0" anchor="t"/>
-          <a:lstStyle/>
-          <a:p>
-            <a:r>
-              <a:rPr lang="en-US" sz="5400" b="1" kern="0" spc="-150" dirty="0">
-                <a:solidFill>
-                  <a:schemeClr val="tx1"/>
-                </a:solidFill>
-              </a:rPr>
-              <a:t>TRUST AI</a:t>
-            </a:r>
-            <a:r>
-              <a:rPr lang="en-US" sz="5400" b="1" kern="0" spc="-150" dirty="0">
-                <a:solidFill>
-                  <a:schemeClr val="accent2"/>
-                </a:solidFill>
-              </a:rPr>
-              <a:t>.</a:t>
-            </a:r>
-            <a:br>
-              <a:rPr lang="en-US" sz="5400" b="1" kern="0" spc="-150" dirty="0">
-                <a:solidFill>
-                  <a:schemeClr val="accent2"/>
-                </a:solidFill>
-              </a:rPr>
-            </a:br>
-            <a:r>
-              <a:rPr lang="it-IT" sz="3400" dirty="0"/>
-              <a:t>DESIGN AND BUILD AI WE CAN TRUST.</a:t>
-            </a:r>
-            <a:endParaRPr lang="en-US" sz="3400" dirty="0"/>
-          </a:p>
-        </p:txBody>
-      </p:sp>
-      <p:sp>
-        <p:nvSpPr>
-          <p:cNvPr id="4" name="Text 1"/>
-          <p:cNvSpPr>
-            <a:spLocks noGrp="1"/>
-          </p:cNvSpPr>
-          <p:nvPr>
-            <p:ph type="body" idx="105" hasCustomPrompt="1"/>
-          </p:nvPr>
-        </p:nvSpPr>
-        <p:spPr>
-          <a:xfrm>
-            <a:off x="548640" y="4206240"/>
-            <a:ext cx="6583680" cy="822960"/>
-          </a:xfrm>
-          <a:prstGeom prst="rect">
-            <a:avLst/>
-          </a:prstGeom>
-          <a:noFill/>
-          <a:ln/>
-        </p:spPr>
-        <p:txBody>
-          <a:bodyPr wrap="square" lIns="0" tIns="0" rIns="0" bIns="0" rtlCol="0" anchor="t"/>
-          <a:lstStyle/>
-          <a:p>
-            <a:pPr marL="0" indent="0">
-              <a:buNone/>
-            </a:pPr>
-            <a:r>
-              <a:rPr lang="en-US" sz="1600" dirty="0">
-                <a:solidFill>
-                  <a:schemeClr val="tx2"/>
-                </a:solidFill>
-              </a:rPr>
-              <a:t>Advancing AI that is trustworthy, inclusive, sustainable and compliant</a:t>
-            </a:r>
-            <a:endParaRPr lang="en-US" sz="1600" dirty="0"/>
-          </a:p>
-        </p:txBody>
-      </p:sp>
-      <p:sp>
-        <p:nvSpPr>
-          <p:cNvPr id="5" name="Text 1"/>
-          <p:cNvSpPr>
-            <a:spLocks noGrp="1"/>
-          </p:cNvSpPr>
-          <p:nvPr>
-            <p:ph type="body" idx="106" hasCustomPrompt="1"/>
-          </p:nvPr>
-        </p:nvSpPr>
-        <p:spPr>
-          <a:xfrm>
-            <a:off x="548640" y="5760720"/>
-            <a:ext cx="7315200" cy="365760"/>
-          </a:xfrm>
-          <a:prstGeom prst="rect">
-            <a:avLst/>
-          </a:prstGeom>
-          <a:noFill/>
-          <a:ln/>
-        </p:spPr>
-        <p:txBody>
-          <a:bodyPr wrap="square" lIns="0" tIns="0" rIns="0" bIns="0" rtlCol="0" anchor="b"/>
-          <a:lstStyle/>
-          <a:p>
-            <a:pPr marL="0" indent="0">
-              <a:buNone/>
-            </a:pPr>
-            <a:r>
-              <a:rPr lang="en-US" sz="1000" kern="0" spc="200" dirty="0">
-                <a:solidFill>
-                  <a:schemeClr val="tx1"/>
-                </a:solidFill>
-                <a:latin typeface="JetBrains Mono" pitchFamily="34" charset="0"/>
-                <a:ea typeface="JetBrains Mono" pitchFamily="34" charset="-122"/>
-                <a:cs typeface="JetBrains Mono" pitchFamily="34" charset="-120"/>
-              </a:rPr>
-              <a:t>NAME SURNAME · EVENT NAME · DATE</a:t>
-            </a:r>
-            <a:endParaRPr lang="en-US" sz="1000" dirty="0"/>
+            <p:ph type="sldNum" sz="quarter" idx="4294967295"/>
+          </p:nvPr>
+        </p:nvSpPr>
+        <p:spPr>
+          <a:xfrm>
+            <a:off x="11094415" y="6327648"/>
+            <a:ext cx="548640" cy="237744"/>
+          </a:xfrm>
+          <a:prstGeom prst="rect">
+            <a:avLst/>
+          </a:prstGeom>
+          <a:extLst>
+            <a:ext uri="{C572A759-6A51-4108-AA02-DFA0A04FC94B}">
+              <ma14:wrappingTextBoxFlag xmlns:ma14="http://schemas.microsoft.com/office/mac/drawingml/2011/main" val="0"/>
+            </a:ext>
+          </a:extLst>
+        </p:spPr>
+        <p:txBody>
+          <a:bodyPr anchor="ctr"/>
+          <a:lstStyle>
+            <a:lvl1pPr>
+              <a:defRPr sz="900">
+                <a:solidFill>
+                  <a:srgbClr val="FFF6EF"/>
+                </a:solidFill>
+                <a:latin typeface="JetBrains Mono"/>
+                <a:ea typeface="JetBrains Mono"/>
+                <a:cs typeface="JetBrains Mono"/>
+              </a:defRPr>
+            </a:lvl1pPr>
+          </a:lstStyle>
+          <a:p>
+            <a:pPr algn="r"/>
+            <a:fld id="{F7021451-1387-4CA6-816F-3879F97B5CBC}" type="slidenum">
+              <a:rPr b="0" lang="en-US"/>
+              <a:t>10</a:t>
+            </a:fld>
+            <a:endParaRPr lang="en-US"/>
           </a:p>
         </p:txBody>
       </p:sp>
@@ -3910,11 +4356,9 @@
       <p:sp>
         <p:nvSpPr>
           <p:cNvPr id="2" name="Text 1"/>
-          <p:cNvSpPr>
-            <a:spLocks noGrp="1"/>
-          </p:cNvSpPr>
-          <p:nvPr>
-            <p:ph type="body" idx="101" hasCustomPrompt="1"/>
+          <p:cNvSpPr/>
+          <p:nvPr>
+            <p:ph idx="101" type="body" hasCustomPrompt="1"/>
           </p:nvPr>
         </p:nvSpPr>
         <p:spPr>
@@ -3932,11 +4376,11 @@
           <a:bodyPr wrap="square" lIns="0" tIns="0" rIns="0" bIns="0" rtlCol="0" anchor="ctr"/>
           <a:lstStyle/>
           <a:p>
-            <a:pPr marL="0" indent="0">
-              <a:buNone/>
-            </a:pPr>
-            <a:r>
-              <a:rPr lang="en-US" sz="1000" kern="0" spc="300" dirty="0">
+            <a:pPr indent="0" marL="0">
+              <a:buNone/>
+            </a:pPr>
+            <a:r>
+              <a:rPr lang="en-US" sz="1000" spc="300" kern="0" dirty="0">
                 <a:solidFill>
                   <a:schemeClr val="accent4"/>
                 </a:solidFill>
@@ -3953,11 +4397,9 @@
       <p:sp>
         <p:nvSpPr>
           <p:cNvPr id="3" name="Text 1"/>
-          <p:cNvSpPr>
-            <a:spLocks noGrp="1"/>
-          </p:cNvSpPr>
-          <p:nvPr>
-            <p:ph type="title" idx="102" hasCustomPrompt="1"/>
+          <p:cNvSpPr/>
+          <p:nvPr>
+            <p:ph idx="102" type="title" hasCustomPrompt="1"/>
           </p:nvPr>
         </p:nvSpPr>
         <p:spPr>
@@ -3975,11 +4417,11 @@
           <a:bodyPr wrap="square" lIns="0" tIns="0" rIns="0" bIns="0" rtlCol="0" anchor="t"/>
           <a:lstStyle/>
           <a:p>
-            <a:pPr marL="0" indent="0" algn="l">
-              <a:buNone/>
-            </a:pPr>
-            <a:r>
-              <a:rPr lang="en-US" sz="3200" b="1" kern="0" spc="-50" dirty="0">
+            <a:pPr algn="l" indent="0" marL="0">
+              <a:buNone/>
+            </a:pPr>
+            <a:r>
+              <a:rPr lang="en-US" sz="3200" b="1" spc="-50" kern="0" dirty="0">
                 <a:solidFill>
                   <a:schemeClr val="tx1"/>
                 </a:solidFill>
@@ -4011,7 +4453,7 @@
           <a:bodyPr wrap="square" lIns="0" tIns="0" rIns="0" bIns="0" rtlCol="0" anchor="ctr"/>
           <a:lstStyle/>
           <a:p>
-            <a:pPr marL="0" indent="0">
+            <a:pPr indent="0" marL="0">
               <a:buNone/>
             </a:pPr>
             <a:r>
@@ -4050,7 +4492,7 @@
           <a:bodyPr wrap="square" lIns="0" tIns="0" rIns="0" bIns="0" rtlCol="0" anchor="ctr"/>
           <a:lstStyle/>
           <a:p>
-            <a:pPr marL="0" indent="0">
+            <a:pPr indent="0" marL="0">
               <a:buNone/>
             </a:pPr>
             <a:r>
@@ -4087,13 +4529,6 @@
             <a:prstDash val="solid"/>
           </a:ln>
         </p:spPr>
-        <p:txBody>
-          <a:bodyPr/>
-          <a:lstStyle/>
-          <a:p>
-            <a:endParaRPr lang="it-IT"/>
-          </a:p>
-        </p:txBody>
       </p:sp>
       <p:sp>
         <p:nvSpPr>
@@ -4116,7 +4551,7 @@
           <a:bodyPr wrap="square" lIns="0" tIns="0" rIns="0" bIns="0" rtlCol="0" anchor="ctr"/>
           <a:lstStyle/>
           <a:p>
-            <a:pPr marL="0" indent="0">
+            <a:pPr indent="0" marL="0">
               <a:buNone/>
             </a:pPr>
             <a:r>
@@ -4155,7 +4590,7 @@
           <a:bodyPr wrap="square" lIns="0" tIns="0" rIns="0" bIns="0" rtlCol="0" anchor="ctr"/>
           <a:lstStyle/>
           <a:p>
-            <a:pPr marL="0" indent="0">
+            <a:pPr indent="0" marL="0">
               <a:buNone/>
             </a:pPr>
             <a:r>
@@ -4192,13 +4627,6 @@
             <a:prstDash val="solid"/>
           </a:ln>
         </p:spPr>
-        <p:txBody>
-          <a:bodyPr/>
-          <a:lstStyle/>
-          <a:p>
-            <a:endParaRPr lang="it-IT"/>
-          </a:p>
-        </p:txBody>
       </p:sp>
       <p:sp>
         <p:nvSpPr>
@@ -4221,7 +4649,7 @@
           <a:bodyPr wrap="square" lIns="0" tIns="0" rIns="0" bIns="0" rtlCol="0" anchor="ctr"/>
           <a:lstStyle/>
           <a:p>
-            <a:pPr marL="0" indent="0">
+            <a:pPr indent="0" marL="0">
               <a:buNone/>
             </a:pPr>
             <a:r>
@@ -4260,7 +4688,7 @@
           <a:bodyPr wrap="square" lIns="0" tIns="0" rIns="0" bIns="0" rtlCol="0" anchor="ctr"/>
           <a:lstStyle/>
           <a:p>
-            <a:pPr marL="0" indent="0">
+            <a:pPr indent="0" marL="0">
               <a:buNone/>
             </a:pPr>
             <a:r>
@@ -4297,13 +4725,6 @@
             <a:prstDash val="solid"/>
           </a:ln>
         </p:spPr>
-        <p:txBody>
-          <a:bodyPr/>
-          <a:lstStyle/>
-          <a:p>
-            <a:endParaRPr lang="it-IT"/>
-          </a:p>
-        </p:txBody>
       </p:sp>
       <p:sp>
         <p:nvSpPr>
@@ -4326,7 +4747,7 @@
           <a:bodyPr wrap="square" lIns="0" tIns="0" rIns="0" bIns="0" rtlCol="0" anchor="ctr"/>
           <a:lstStyle/>
           <a:p>
-            <a:pPr marL="0" indent="0">
+            <a:pPr indent="0" marL="0">
               <a:buNone/>
             </a:pPr>
             <a:r>
@@ -4365,7 +4786,7 @@
           <a:bodyPr wrap="square" lIns="0" tIns="0" rIns="0" bIns="0" rtlCol="0" anchor="ctr"/>
           <a:lstStyle/>
           <a:p>
-            <a:pPr marL="0" indent="0">
+            <a:pPr indent="0" marL="0">
               <a:buNone/>
             </a:pPr>
             <a:r>
@@ -4402,13 +4823,6 @@
             <a:prstDash val="solid"/>
           </a:ln>
         </p:spPr>
-        <p:txBody>
-          <a:bodyPr/>
-          <a:lstStyle/>
-          <a:p>
-            <a:endParaRPr lang="it-IT"/>
-          </a:p>
-        </p:txBody>
       </p:sp>
       <p:sp>
         <p:nvSpPr>
@@ -4430,7 +4844,7 @@
           </a:prstGeom>
           <a:extLst>
             <a:ext uri="{C572A759-6A51-4108-AA02-DFA0A04FC94B}">
-              <ma14:wrappingTextBoxFlag xmlns:ma14="http://schemas.microsoft.com/office/mac/drawingml/2011/main" xmlns="" val="0"/>
+              <ma14:wrappingTextBoxFlag xmlns:ma14="http://schemas.microsoft.com/office/mac/drawingml/2011/main" val="0"/>
             </a:ext>
           </a:extLst>
         </p:spPr>
@@ -4451,7 +4865,7 @@
           <a:p>
             <a:pPr algn="r"/>
             <a:fld id="{F7021451-1387-4CA6-816F-3879F97B5CBC}" type="slidenum">
-              <a:rPr lang="en-US" b="0"/>
+              <a:rPr b="0" lang="en-US"/>
               <a:t>2</a:t>
             </a:fld>
             <a:endParaRPr lang="en-US"/>
@@ -4486,11 +4900,9 @@
       <p:sp>
         <p:nvSpPr>
           <p:cNvPr id="2" name="Text 0"/>
-          <p:cNvSpPr>
-            <a:spLocks noGrp="1"/>
-          </p:cNvSpPr>
-          <p:nvPr>
-            <p:ph type="body" idx="101" hasCustomPrompt="1"/>
+          <p:cNvSpPr/>
+          <p:nvPr>
+            <p:ph idx="101" type="body" hasCustomPrompt="1"/>
           </p:nvPr>
         </p:nvSpPr>
         <p:spPr>
@@ -4508,11 +4920,11 @@
           <a:bodyPr wrap="square" lIns="0" tIns="0" rIns="0" bIns="0" rtlCol="0" anchor="b"/>
           <a:lstStyle/>
           <a:p>
-            <a:pPr marL="0" indent="0">
-              <a:buNone/>
-            </a:pPr>
-            <a:r>
-              <a:rPr lang="en-US" sz="9600" b="1" kern="0" spc="-300" dirty="0">
+            <a:pPr indent="0" marL="0">
+              <a:buNone/>
+            </a:pPr>
+            <a:r>
+              <a:rPr lang="en-US" sz="9600" b="1" spc="-300" kern="0" dirty="0">
                 <a:solidFill>
                   <a:schemeClr val="accent1"/>
                 </a:solidFill>
@@ -4526,11 +4938,9 @@
       <p:sp>
         <p:nvSpPr>
           <p:cNvPr id="3" name="Text 0"/>
-          <p:cNvSpPr>
-            <a:spLocks noGrp="1"/>
-          </p:cNvSpPr>
-          <p:nvPr>
-            <p:ph type="title" idx="102" hasCustomPrompt="1"/>
+          <p:cNvSpPr/>
+          <p:nvPr>
+            <p:ph idx="102" type="title" hasCustomPrompt="1"/>
           </p:nvPr>
         </p:nvSpPr>
         <p:spPr>
@@ -4548,11 +4958,11 @@
           <a:bodyPr wrap="square" lIns="0" tIns="0" rIns="0" bIns="0" rtlCol="0" anchor="t"/>
           <a:lstStyle/>
           <a:p>
-            <a:pPr marL="0" indent="0" algn="l">
-              <a:buNone/>
-            </a:pPr>
-            <a:r>
-              <a:rPr lang="en-US" sz="4000" b="1" kern="0" spc="-100" dirty="0">
+            <a:pPr algn="l" indent="0" marL="0">
+              <a:buNone/>
+            </a:pPr>
+            <a:r>
+              <a:rPr lang="en-US" sz="4000" b="1" spc="-100" kern="0" dirty="0">
                 <a:solidFill>
                   <a:schemeClr val="tx1"/>
                 </a:solidFill>
@@ -4566,11 +4976,9 @@
       <p:sp>
         <p:nvSpPr>
           <p:cNvPr id="4" name="Text 0"/>
-          <p:cNvSpPr>
-            <a:spLocks noGrp="1"/>
-          </p:cNvSpPr>
-          <p:nvPr>
-            <p:ph type="body" idx="103" hasCustomPrompt="1"/>
+          <p:cNvSpPr/>
+          <p:nvPr>
+            <p:ph idx="103" type="body" hasCustomPrompt="1"/>
           </p:nvPr>
         </p:nvSpPr>
         <p:spPr>
@@ -4588,7 +4996,7 @@
           <a:bodyPr wrap="square" lIns="0" tIns="0" rIns="0" bIns="0" rtlCol="0" anchor="t"/>
           <a:lstStyle/>
           <a:p>
-            <a:pPr marL="0" indent="0">
+            <a:pPr indent="0" marL="0">
               <a:buNone/>
             </a:pPr>
             <a:r>
@@ -4623,7 +5031,7 @@
           </a:prstGeom>
           <a:extLst>
             <a:ext uri="{C572A759-6A51-4108-AA02-DFA0A04FC94B}">
-              <ma14:wrappingTextBoxFlag xmlns:ma14="http://schemas.microsoft.com/office/mac/drawingml/2011/main" xmlns="" val="0"/>
+              <ma14:wrappingTextBoxFlag xmlns:ma14="http://schemas.microsoft.com/office/mac/drawingml/2011/main" val="0"/>
             </a:ext>
           </a:extLst>
         </p:spPr>
@@ -4644,7 +5052,7 @@
           <a:p>
             <a:pPr algn="r"/>
             <a:fld id="{F7021451-1387-4CA6-816F-3879F97B5CBC}" type="slidenum">
-              <a:rPr lang="en-US" b="0"/>
+              <a:rPr b="0" lang="en-US"/>
               <a:t>3</a:t>
             </a:fld>
             <a:endParaRPr lang="en-US"/>
@@ -4679,11 +5087,9 @@
       <p:sp>
         <p:nvSpPr>
           <p:cNvPr id="2" name="Text 1"/>
-          <p:cNvSpPr>
-            <a:spLocks noGrp="1"/>
-          </p:cNvSpPr>
-          <p:nvPr>
-            <p:ph type="body" idx="101" hasCustomPrompt="1"/>
+          <p:cNvSpPr/>
+          <p:nvPr>
+            <p:ph idx="101" type="body" hasCustomPrompt="1"/>
           </p:nvPr>
         </p:nvSpPr>
         <p:spPr>
@@ -4701,11 +5107,11 @@
           <a:bodyPr wrap="square" lIns="0" tIns="0" rIns="0" bIns="0" rtlCol="0" anchor="ctr"/>
           <a:lstStyle/>
           <a:p>
-            <a:pPr marL="0" indent="0">
-              <a:buNone/>
-            </a:pPr>
-            <a:r>
-              <a:rPr lang="en-US" sz="1000" kern="0" spc="300" dirty="0">
+            <a:pPr indent="0" marL="0">
+              <a:buNone/>
+            </a:pPr>
+            <a:r>
+              <a:rPr lang="en-US" sz="1000" spc="300" kern="0" dirty="0">
                 <a:solidFill>
                   <a:schemeClr val="accent4"/>
                 </a:solidFill>
@@ -4722,11 +5128,9 @@
       <p:sp>
         <p:nvSpPr>
           <p:cNvPr id="3" name="Text 1"/>
-          <p:cNvSpPr>
-            <a:spLocks noGrp="1"/>
-          </p:cNvSpPr>
-          <p:nvPr>
-            <p:ph type="title" idx="102" hasCustomPrompt="1"/>
+          <p:cNvSpPr/>
+          <p:nvPr>
+            <p:ph idx="102" type="title" hasCustomPrompt="1"/>
           </p:nvPr>
         </p:nvSpPr>
         <p:spPr>
@@ -4744,11 +5148,11 @@
           <a:bodyPr wrap="square" lIns="0" tIns="0" rIns="0" bIns="0" rtlCol="0" anchor="t"/>
           <a:lstStyle/>
           <a:p>
-            <a:pPr marL="0" indent="0" algn="l">
-              <a:buNone/>
-            </a:pPr>
-            <a:r>
-              <a:rPr lang="en-US" sz="3200" b="1" kern="0" spc="-50" dirty="0">
+            <a:pPr algn="l" indent="0" marL="0">
+              <a:buNone/>
+            </a:pPr>
+            <a:r>
+              <a:rPr lang="en-US" sz="3200" b="1" spc="-50" kern="0" dirty="0">
                 <a:solidFill>
                   <a:schemeClr val="tx1"/>
                 </a:solidFill>
@@ -4762,11 +5166,9 @@
       <p:sp>
         <p:nvSpPr>
           <p:cNvPr id="4" name="Text 1"/>
-          <p:cNvSpPr>
-            <a:spLocks noGrp="1"/>
-          </p:cNvSpPr>
-          <p:nvPr>
-            <p:ph type="body" idx="103" hasCustomPrompt="1"/>
+          <p:cNvSpPr/>
+          <p:nvPr>
+            <p:ph idx="103" type="body" hasCustomPrompt="1"/>
           </p:nvPr>
         </p:nvSpPr>
         <p:spPr>
@@ -4838,7 +5240,7 @@
             <a:endParaRPr lang="en-US" sz="1600" dirty="0"/>
           </a:p>
           <a:p>
-            <a:pPr marL="685800" lvl="1" indent="-342900">
+            <a:pPr lvl="1" marL="685800" indent="-342900">
               <a:spcAft>
                 <a:spcPts val="800"/>
               </a:spcAft>
@@ -4877,7 +5279,7 @@
           </a:prstGeom>
           <a:extLst>
             <a:ext uri="{C572A759-6A51-4108-AA02-DFA0A04FC94B}">
-              <ma14:wrappingTextBoxFlag xmlns:ma14="http://schemas.microsoft.com/office/mac/drawingml/2011/main" xmlns="" val="0"/>
+              <ma14:wrappingTextBoxFlag xmlns:ma14="http://schemas.microsoft.com/office/mac/drawingml/2011/main" val="0"/>
             </a:ext>
           </a:extLst>
         </p:spPr>
@@ -4898,7 +5300,7 @@
           <a:p>
             <a:pPr algn="r"/>
             <a:fld id="{F7021451-1387-4CA6-816F-3879F97B5CBC}" type="slidenum">
-              <a:rPr lang="en-US" b="0"/>
+              <a:rPr b="0" lang="en-US"/>
               <a:t>4</a:t>
             </a:fld>
             <a:endParaRPr lang="en-US"/>
@@ -4933,11 +5335,9 @@
       <p:sp>
         <p:nvSpPr>
           <p:cNvPr id="2" name="Text 1"/>
-          <p:cNvSpPr>
-            <a:spLocks noGrp="1"/>
-          </p:cNvSpPr>
-          <p:nvPr>
-            <p:ph type="body" idx="101" hasCustomPrompt="1"/>
+          <p:cNvSpPr/>
+          <p:nvPr>
+            <p:ph idx="101" type="body" hasCustomPrompt="1"/>
           </p:nvPr>
         </p:nvSpPr>
         <p:spPr>
@@ -4955,11 +5355,11 @@
           <a:bodyPr wrap="square" lIns="0" tIns="0" rIns="0" bIns="0" rtlCol="0" anchor="ctr"/>
           <a:lstStyle/>
           <a:p>
-            <a:pPr marL="0" indent="0">
-              <a:buNone/>
-            </a:pPr>
-            <a:r>
-              <a:rPr lang="en-US" sz="1000" kern="0" spc="300" dirty="0">
+            <a:pPr indent="0" marL="0">
+              <a:buNone/>
+            </a:pPr>
+            <a:r>
+              <a:rPr lang="en-US" sz="1000" spc="300" kern="0" dirty="0">
                 <a:solidFill>
                   <a:schemeClr val="accent4"/>
                 </a:solidFill>
@@ -4976,11 +5376,9 @@
       <p:sp>
         <p:nvSpPr>
           <p:cNvPr id="3" name="Text 1"/>
-          <p:cNvSpPr>
-            <a:spLocks noGrp="1"/>
-          </p:cNvSpPr>
-          <p:nvPr>
-            <p:ph type="title" idx="102" hasCustomPrompt="1"/>
+          <p:cNvSpPr/>
+          <p:nvPr>
+            <p:ph idx="102" type="title" hasCustomPrompt="1"/>
           </p:nvPr>
         </p:nvSpPr>
         <p:spPr>
@@ -4998,11 +5396,11 @@
           <a:bodyPr wrap="square" lIns="0" tIns="0" rIns="0" bIns="0" rtlCol="0" anchor="t"/>
           <a:lstStyle/>
           <a:p>
-            <a:pPr marL="0" indent="0" algn="l">
-              <a:buNone/>
-            </a:pPr>
-            <a:r>
-              <a:rPr lang="en-US" sz="3200" b="1" kern="0" spc="-50" dirty="0">
+            <a:pPr algn="l" indent="0" marL="0">
+              <a:buNone/>
+            </a:pPr>
+            <a:r>
+              <a:rPr lang="en-US" sz="3200" b="1" spc="-50" kern="0" dirty="0">
                 <a:solidFill>
                   <a:schemeClr val="tx1"/>
                 </a:solidFill>
@@ -5016,11 +5414,9 @@
       <p:sp>
         <p:nvSpPr>
           <p:cNvPr id="4" name="Text 1"/>
-          <p:cNvSpPr>
-            <a:spLocks noGrp="1"/>
-          </p:cNvSpPr>
-          <p:nvPr>
-            <p:ph type="body" idx="103" hasCustomPrompt="1"/>
+          <p:cNvSpPr/>
+          <p:nvPr>
+            <p:ph idx="103" type="body" hasCustomPrompt="1"/>
           </p:nvPr>
         </p:nvSpPr>
         <p:spPr>
@@ -5038,7 +5434,7 @@
           <a:bodyPr wrap="square" lIns="0" tIns="0" rIns="0" bIns="0" rtlCol="0" anchor="t"/>
           <a:lstStyle/>
           <a:p>
-            <a:pPr marL="0" indent="0">
+            <a:pPr indent="0" marL="0">
               <a:spcAft>
                 <a:spcPts val="800"/>
               </a:spcAft>
@@ -5095,11 +5491,9 @@
       <p:sp>
         <p:nvSpPr>
           <p:cNvPr id="5" name="Text 1"/>
-          <p:cNvSpPr>
-            <a:spLocks noGrp="1"/>
-          </p:cNvSpPr>
-          <p:nvPr>
-            <p:ph type="body" idx="104" hasCustomPrompt="1"/>
+          <p:cNvSpPr/>
+          <p:nvPr>
+            <p:ph idx="104" type="body" hasCustomPrompt="1"/>
           </p:nvPr>
         </p:nvSpPr>
         <p:spPr>
@@ -5117,7 +5511,7 @@
           <a:bodyPr wrap="square" lIns="0" tIns="0" rIns="0" bIns="0" rtlCol="0" anchor="t"/>
           <a:lstStyle/>
           <a:p>
-            <a:pPr marL="0" indent="0">
+            <a:pPr indent="0" marL="0">
               <a:spcAft>
                 <a:spcPts val="800"/>
               </a:spcAft>
@@ -5191,7 +5585,7 @@
           </a:prstGeom>
           <a:extLst>
             <a:ext uri="{C572A759-6A51-4108-AA02-DFA0A04FC94B}">
-              <ma14:wrappingTextBoxFlag xmlns:ma14="http://schemas.microsoft.com/office/mac/drawingml/2011/main" xmlns="" val="0"/>
+              <ma14:wrappingTextBoxFlag xmlns:ma14="http://schemas.microsoft.com/office/mac/drawingml/2011/main" val="0"/>
             </a:ext>
           </a:extLst>
         </p:spPr>
@@ -5212,7 +5606,7 @@
           <a:p>
             <a:pPr algn="r"/>
             <a:fld id="{F7021451-1387-4CA6-816F-3879F97B5CBC}" type="slidenum">
-              <a:rPr lang="en-US" b="0"/>
+              <a:rPr b="0" lang="en-US"/>
               <a:t>5</a:t>
             </a:fld>
             <a:endParaRPr lang="en-US"/>
@@ -5247,11 +5641,9 @@
       <p:sp>
         <p:nvSpPr>
           <p:cNvPr id="2" name="Text 1"/>
-          <p:cNvSpPr>
-            <a:spLocks noGrp="1"/>
-          </p:cNvSpPr>
-          <p:nvPr>
-            <p:ph type="body" idx="101" hasCustomPrompt="1"/>
+          <p:cNvSpPr/>
+          <p:nvPr>
+            <p:ph idx="101" type="body" hasCustomPrompt="1"/>
           </p:nvPr>
         </p:nvSpPr>
         <p:spPr>
@@ -5269,11 +5661,11 @@
           <a:bodyPr wrap="square" lIns="0" tIns="0" rIns="0" bIns="0" rtlCol="0" anchor="ctr"/>
           <a:lstStyle/>
           <a:p>
-            <a:pPr marL="0" indent="0">
-              <a:buNone/>
-            </a:pPr>
-            <a:r>
-              <a:rPr lang="en-US" sz="1000" kern="0" spc="300" dirty="0">
+            <a:pPr indent="0" marL="0">
+              <a:buNone/>
+            </a:pPr>
+            <a:r>
+              <a:rPr lang="en-US" sz="1000" spc="300" kern="0" dirty="0">
                 <a:solidFill>
                   <a:schemeClr val="accent4"/>
                 </a:solidFill>
@@ -5290,11 +5682,9 @@
       <p:sp>
         <p:nvSpPr>
           <p:cNvPr id="3" name="Text 1"/>
-          <p:cNvSpPr>
-            <a:spLocks noGrp="1"/>
-          </p:cNvSpPr>
-          <p:nvPr>
-            <p:ph type="title" idx="102" hasCustomPrompt="1"/>
+          <p:cNvSpPr/>
+          <p:nvPr>
+            <p:ph idx="102" type="title" hasCustomPrompt="1"/>
           </p:nvPr>
         </p:nvSpPr>
         <p:spPr>
@@ -5312,11 +5702,11 @@
           <a:bodyPr wrap="square" lIns="0" tIns="0" rIns="0" bIns="0" rtlCol="0" anchor="t"/>
           <a:lstStyle/>
           <a:p>
-            <a:pPr marL="0" indent="0" algn="l">
-              <a:buNone/>
-            </a:pPr>
-            <a:r>
-              <a:rPr lang="en-US" sz="3200" b="1" kern="0" spc="-50" dirty="0">
+            <a:pPr algn="l" indent="0" marL="0">
+              <a:buNone/>
+            </a:pPr>
+            <a:r>
+              <a:rPr lang="en-US" sz="3200" b="1" spc="-50" kern="0" dirty="0">
                 <a:solidFill>
                   <a:schemeClr val="tx1"/>
                 </a:solidFill>
@@ -5346,13 +5736,6 @@
           </a:solidFill>
           <a:ln/>
         </p:spPr>
-        <p:txBody>
-          <a:bodyPr/>
-          <a:lstStyle/>
-          <a:p>
-            <a:endParaRPr lang="it-IT"/>
-          </a:p>
-        </p:txBody>
       </p:sp>
       <p:sp>
         <p:nvSpPr>
@@ -5378,13 +5761,6 @@
             <a:prstDash val="solid"/>
           </a:ln>
         </p:spPr>
-        <p:txBody>
-          <a:bodyPr/>
-          <a:lstStyle/>
-          <a:p>
-            <a:endParaRPr lang="it-IT"/>
-          </a:p>
-        </p:txBody>
       </p:sp>
       <p:sp>
         <p:nvSpPr>
@@ -5407,7 +5783,7 @@
           <a:bodyPr wrap="square" lIns="0" tIns="0" rIns="0" bIns="0" rtlCol="0" anchor="t"/>
           <a:lstStyle/>
           <a:p>
-            <a:pPr marL="0" indent="0">
+            <a:pPr indent="0" marL="0">
               <a:buNone/>
             </a:pPr>
             <a:r>
@@ -5443,7 +5819,7 @@
           <a:bodyPr wrap="square" lIns="0" tIns="0" rIns="0" bIns="0" rtlCol="0" anchor="b"/>
           <a:lstStyle/>
           <a:p>
-            <a:pPr marL="0" indent="0">
+            <a:pPr indent="0" marL="0">
               <a:buNone/>
             </a:pPr>
             <a:r>
@@ -5457,7 +5833,7 @@
             <a:endParaRPr lang="en-US" sz="1400" dirty="0"/>
           </a:p>
           <a:p>
-            <a:pPr marL="0" indent="0">
+            <a:pPr indent="0" marL="0">
               <a:buNone/>
             </a:pPr>
             <a:r>
@@ -5491,13 +5867,6 @@
           </a:solidFill>
           <a:ln/>
         </p:spPr>
-        <p:txBody>
-          <a:bodyPr/>
-          <a:lstStyle/>
-          <a:p>
-            <a:endParaRPr lang="it-IT"/>
-          </a:p>
-        </p:txBody>
       </p:sp>
       <p:sp>
         <p:nvSpPr>
@@ -5523,13 +5892,6 @@
             <a:prstDash val="solid"/>
           </a:ln>
         </p:spPr>
-        <p:txBody>
-          <a:bodyPr/>
-          <a:lstStyle/>
-          <a:p>
-            <a:endParaRPr lang="it-IT"/>
-          </a:p>
-        </p:txBody>
       </p:sp>
       <p:sp>
         <p:nvSpPr>
@@ -5552,7 +5914,7 @@
           <a:bodyPr wrap="square" lIns="0" tIns="0" rIns="0" bIns="0" rtlCol="0" anchor="t"/>
           <a:lstStyle/>
           <a:p>
-            <a:pPr marL="0" indent="0">
+            <a:pPr indent="0" marL="0">
               <a:buNone/>
             </a:pPr>
             <a:r>
@@ -5588,7 +5950,7 @@
           <a:bodyPr wrap="square" lIns="0" tIns="0" rIns="0" bIns="0" rtlCol="0" anchor="b"/>
           <a:lstStyle/>
           <a:p>
-            <a:pPr marL="0" indent="0">
+            <a:pPr indent="0" marL="0">
               <a:buNone/>
             </a:pPr>
             <a:r>
@@ -5622,13 +5984,6 @@
           </a:solidFill>
           <a:ln/>
         </p:spPr>
-        <p:txBody>
-          <a:bodyPr/>
-          <a:lstStyle/>
-          <a:p>
-            <a:endParaRPr lang="it-IT"/>
-          </a:p>
-        </p:txBody>
       </p:sp>
       <p:sp>
         <p:nvSpPr>
@@ -5654,13 +6009,6 @@
             <a:prstDash val="solid"/>
           </a:ln>
         </p:spPr>
-        <p:txBody>
-          <a:bodyPr/>
-          <a:lstStyle/>
-          <a:p>
-            <a:endParaRPr lang="it-IT"/>
-          </a:p>
-        </p:txBody>
       </p:sp>
       <p:sp>
         <p:nvSpPr>
@@ -5683,7 +6031,7 @@
           <a:bodyPr wrap="square" lIns="0" tIns="0" rIns="0" bIns="0" rtlCol="0" anchor="t"/>
           <a:lstStyle/>
           <a:p>
-            <a:pPr marL="0" indent="0">
+            <a:pPr indent="0" marL="0">
               <a:buNone/>
             </a:pPr>
             <a:r>
@@ -5719,7 +6067,7 @@
           <a:bodyPr wrap="square" lIns="0" tIns="0" rIns="0" bIns="0" rtlCol="0" anchor="b"/>
           <a:lstStyle/>
           <a:p>
-            <a:pPr marL="0" indent="0">
+            <a:pPr indent="0" marL="0">
               <a:buNone/>
             </a:pPr>
             <a:r>
@@ -5753,13 +6101,6 @@
           </a:solidFill>
           <a:ln/>
         </p:spPr>
-        <p:txBody>
-          <a:bodyPr/>
-          <a:lstStyle/>
-          <a:p>
-            <a:endParaRPr lang="it-IT"/>
-          </a:p>
-        </p:txBody>
       </p:sp>
       <p:sp>
         <p:nvSpPr>
@@ -5785,13 +6126,6 @@
             <a:prstDash val="solid"/>
           </a:ln>
         </p:spPr>
-        <p:txBody>
-          <a:bodyPr/>
-          <a:lstStyle/>
-          <a:p>
-            <a:endParaRPr lang="it-IT"/>
-          </a:p>
-        </p:txBody>
       </p:sp>
       <p:sp>
         <p:nvSpPr>
@@ -5814,7 +6148,7 @@
           <a:bodyPr wrap="square" lIns="0" tIns="0" rIns="0" bIns="0" rtlCol="0" anchor="t"/>
           <a:lstStyle/>
           <a:p>
-            <a:pPr marL="0" indent="0">
+            <a:pPr indent="0" marL="0">
               <a:buNone/>
             </a:pPr>
             <a:r>
@@ -5850,7 +6184,7 @@
           <a:bodyPr wrap="square" lIns="0" tIns="0" rIns="0" bIns="0" rtlCol="0" anchor="b"/>
           <a:lstStyle/>
           <a:p>
-            <a:pPr marL="0" indent="0">
+            <a:pPr indent="0" marL="0">
               <a:buNone/>
             </a:pPr>
             <a:r>
@@ -5884,13 +6218,6 @@
           </a:solidFill>
           <a:ln/>
         </p:spPr>
-        <p:txBody>
-          <a:bodyPr/>
-          <a:lstStyle/>
-          <a:p>
-            <a:endParaRPr lang="it-IT"/>
-          </a:p>
-        </p:txBody>
       </p:sp>
       <p:sp>
         <p:nvSpPr>
@@ -5916,13 +6243,6 @@
             <a:prstDash val="solid"/>
           </a:ln>
         </p:spPr>
-        <p:txBody>
-          <a:bodyPr/>
-          <a:lstStyle/>
-          <a:p>
-            <a:endParaRPr lang="it-IT"/>
-          </a:p>
-        </p:txBody>
       </p:sp>
       <p:sp>
         <p:nvSpPr>
@@ -5945,7 +6265,7 @@
           <a:bodyPr wrap="square" lIns="0" tIns="0" rIns="0" bIns="0" rtlCol="0" anchor="t"/>
           <a:lstStyle/>
           <a:p>
-            <a:pPr marL="0" indent="0">
+            <a:pPr indent="0" marL="0">
               <a:buNone/>
             </a:pPr>
             <a:r>
@@ -5981,7 +6301,7 @@
           <a:bodyPr wrap="square" lIns="0" tIns="0" rIns="0" bIns="0" rtlCol="0" anchor="b"/>
           <a:lstStyle/>
           <a:p>
-            <a:pPr marL="0" indent="0">
+            <a:pPr indent="0" marL="0">
               <a:buNone/>
             </a:pPr>
             <a:r>
@@ -6016,7 +6336,7 @@
           </a:prstGeom>
           <a:extLst>
             <a:ext uri="{C572A759-6A51-4108-AA02-DFA0A04FC94B}">
-              <ma14:wrappingTextBoxFlag xmlns:ma14="http://schemas.microsoft.com/office/mac/drawingml/2011/main" xmlns="" val="0"/>
+              <ma14:wrappingTextBoxFlag xmlns:ma14="http://schemas.microsoft.com/office/mac/drawingml/2011/main" val="0"/>
             </a:ext>
           </a:extLst>
         </p:spPr>
@@ -6037,7 +6357,7 @@
           <a:p>
             <a:pPr algn="r"/>
             <a:fld id="{F7021451-1387-4CA6-816F-3879F97B5CBC}" type="slidenum">
-              <a:rPr lang="en-US" b="0"/>
+              <a:rPr b="0" lang="en-US"/>
               <a:t>6</a:t>
             </a:fld>
             <a:endParaRPr lang="en-US"/>
@@ -6072,11 +6392,9 @@
       <p:sp>
         <p:nvSpPr>
           <p:cNvPr id="2" name="Text 1"/>
-          <p:cNvSpPr>
-            <a:spLocks noGrp="1"/>
-          </p:cNvSpPr>
-          <p:nvPr>
-            <p:ph type="body" idx="101" hasCustomPrompt="1"/>
+          <p:cNvSpPr/>
+          <p:nvPr>
+            <p:ph idx="101" type="body" hasCustomPrompt="1"/>
           </p:nvPr>
         </p:nvSpPr>
         <p:spPr>
@@ -6094,11 +6412,11 @@
           <a:bodyPr wrap="square" lIns="0" tIns="0" rIns="0" bIns="0" rtlCol="0" anchor="ctr"/>
           <a:lstStyle/>
           <a:p>
-            <a:pPr marL="0" indent="0">
-              <a:buNone/>
-            </a:pPr>
-            <a:r>
-              <a:rPr lang="en-US" sz="1000" kern="0" spc="300" dirty="0">
+            <a:pPr indent="0" marL="0">
+              <a:buNone/>
+            </a:pPr>
+            <a:r>
+              <a:rPr lang="en-US" sz="1000" spc="300" kern="0" dirty="0">
                 <a:solidFill>
                   <a:schemeClr val="accent4"/>
                 </a:solidFill>
@@ -6106,7 +6424,7 @@
                 <a:ea typeface="JetBrains Mono" pitchFamily="34" charset="-122"/>
                 <a:cs typeface="JetBrains Mono" pitchFamily="34" charset="-120"/>
               </a:rPr>
-              <a:t>KEY FIGURES</a:t>
+              <a:t>FOUNDERS</a:t>
             </a:r>
             <a:endParaRPr lang="en-US" sz="1000" dirty="0"/>
           </a:p>
@@ -6115,11 +6433,9 @@
       <p:sp>
         <p:nvSpPr>
           <p:cNvPr id="3" name="Text 1"/>
-          <p:cNvSpPr>
-            <a:spLocks noGrp="1"/>
-          </p:cNvSpPr>
-          <p:nvPr>
-            <p:ph type="title" idx="102" hasCustomPrompt="1"/>
+          <p:cNvSpPr/>
+          <p:nvPr>
+            <p:ph idx="102" type="title" hasCustomPrompt="1"/>
           </p:nvPr>
         </p:nvSpPr>
         <p:spPr>
@@ -6137,16 +6453,16 @@
           <a:bodyPr wrap="square" lIns="0" tIns="0" rIns="0" bIns="0" rtlCol="0" anchor="t"/>
           <a:lstStyle/>
           <a:p>
-            <a:pPr marL="0" indent="0" algn="l">
-              <a:buNone/>
-            </a:pPr>
-            <a:r>
-              <a:rPr lang="en-US" sz="3200" b="1" kern="0" spc="-50" dirty="0">
+            <a:pPr algn="l" indent="0" marL="0">
+              <a:buNone/>
+            </a:pPr>
+            <a:r>
+              <a:rPr lang="en-US" sz="3200" b="1" spc="-50" kern="0" dirty="0">
                 <a:solidFill>
                   <a:schemeClr val="tx1"/>
                 </a:solidFill>
               </a:rPr>
-              <a:t>Three numbers worth remembering</a:t>
+              <a:t>Five institutions, one initiative</a:t>
             </a:r>
             <a:endParaRPr lang="en-US" sz="3200" dirty="0"/>
           </a:p>
@@ -6154,48 +6470,67 @@
       </p:sp>
       <p:sp>
         <p:nvSpPr>
-          <p:cNvPr id="4" name="stat-card-1-shadow"/>
-          <p:cNvSpPr/>
-          <p:nvPr/>
-        </p:nvSpPr>
-        <p:spPr>
-          <a:xfrm>
-            <a:off x="612648" y="2258568"/>
-            <a:ext cx="3372002" cy="2377440"/>
+          <p:cNvPr id="4" name="founder-photo-shadow-1"/>
+          <p:cNvSpPr/>
+          <p:nvPr/>
+        </p:nvSpPr>
+        <p:spPr>
+          <a:xfrm>
+            <a:off x="612648" y="1847088"/>
+            <a:ext cx="1417320" cy="1417320"/>
           </a:xfrm>
           <a:prstGeom prst="rect">
             <a:avLst/>
           </a:prstGeom>
           <a:solidFill>
-            <a:schemeClr val="tx1"/>
+            <a:schemeClr val="bg2"/>
           </a:solidFill>
-          <a:ln/>
-        </p:spPr>
-        <p:txBody>
-          <a:bodyPr/>
-          <a:lstStyle/>
-          <a:p>
-            <a:endParaRPr lang="it-IT"/>
-          </a:p>
-        </p:txBody>
-      </p:sp>
-      <p:sp>
-        <p:nvSpPr>
-          <p:cNvPr id="5" name="stat-card-1"/>
-          <p:cNvSpPr/>
-          <p:nvPr/>
-        </p:nvSpPr>
-        <p:spPr>
-          <a:xfrm>
-            <a:off x="548640" y="2194560"/>
-            <a:ext cx="3372002" cy="2377440"/>
-          </a:xfrm>
-          <a:prstGeom prst="rect">
-            <a:avLst/>
-          </a:prstGeom>
-          <a:solidFill>
-            <a:schemeClr val="bg1"/>
-          </a:solidFill>
+          <a:ln w="12700">
+            <a:solidFill>
+              <a:schemeClr val="tx1"/>
+            </a:solidFill>
+            <a:prstDash val="solid"/>
+          </a:ln>
+        </p:spPr>
+      </p:sp>
+      <p:pic>
+        <p:nvPicPr>
+          <p:cNvPr id="5" name="founder-photo-1" descr="Roberta Calegari">    </p:cNvPr>
+          <p:cNvPicPr>
+            <a:picLocks noChangeAspect="1"/>
+          </p:cNvPicPr>
+          <p:nvPr/>
+        </p:nvPicPr>
+        <p:blipFill>
+          <a:blip r:embed="rId1"/>
+          <a:stretch>
+            <a:fillRect/>
+          </a:stretch>
+        </p:blipFill>
+        <p:spPr>
+          <a:xfrm>
+            <a:off x="548640" y="1783080"/>
+            <a:ext cx="1417320" cy="1417320"/>
+          </a:xfrm>
+          <a:prstGeom prst="rect">
+            <a:avLst/>
+          </a:prstGeom>
+        </p:spPr>
+      </p:pic>
+      <p:sp>
+        <p:nvSpPr>
+          <p:cNvPr id="6" name="founder-photo-frame-1"/>
+          <p:cNvSpPr/>
+          <p:nvPr/>
+        </p:nvSpPr>
+        <p:spPr>
+          <a:xfrm>
+            <a:off x="548640" y="1783080"/>
+            <a:ext cx="1417320" cy="1417320"/>
+          </a:xfrm>
+          <a:prstGeom prst="rect">
+            <a:avLst/>
+          </a:prstGeom>
           <a:ln w="25400">
             <a:solidFill>
               <a:schemeClr val="tx1"/>
@@ -6203,24 +6538,17 @@
             <a:prstDash val="solid"/>
           </a:ln>
         </p:spPr>
-        <p:txBody>
-          <a:bodyPr/>
-          <a:lstStyle/>
-          <a:p>
-            <a:endParaRPr lang="it-IT"/>
-          </a:p>
-        </p:txBody>
-      </p:sp>
-      <p:sp>
-        <p:nvSpPr>
-          <p:cNvPr id="6" name="stat-value-1"/>
+      </p:sp>
+      <p:sp>
+        <p:nvSpPr>
+          <p:cNvPr id="7" name="founder-name-1"/>
           <p:cNvSpPr txBox="1"/>
           <p:nvPr/>
         </p:nvSpPr>
         <p:spPr>
           <a:xfrm>
-            <a:off x="868680" y="2468880"/>
-            <a:ext cx="2731922" cy="1188720"/>
+            <a:off x="548640" y="3383280"/>
+            <a:ext cx="1962851" cy="292608"/>
           </a:xfrm>
           <a:prstGeom prst="rect">
             <a:avLst/>
@@ -6232,31 +6560,31 @@
           <a:bodyPr wrap="square" lIns="0" tIns="0" rIns="0" bIns="0" rtlCol="0" anchor="t"/>
           <a:lstStyle/>
           <a:p>
-            <a:pPr marL="0" indent="0">
-              <a:buNone/>
-            </a:pPr>
-            <a:r>
-              <a:rPr lang="en-US" sz="6600" b="1" kern="0" spc="-200" dirty="0">
+            <a:pPr indent="0" marL="0">
+              <a:buNone/>
+            </a:pPr>
+            <a:r>
+              <a:rPr lang="en-US" sz="1600" b="1" dirty="0">
                 <a:solidFill>
                   <a:schemeClr val="tx1"/>
                 </a:solidFill>
               </a:rPr>
-              <a:t>12</a:t>
-            </a:r>
-            <a:endParaRPr lang="en-US" sz="6600" dirty="0"/>
-          </a:p>
-        </p:txBody>
-      </p:sp>
-      <p:sp>
-        <p:nvSpPr>
-          <p:cNvPr id="7" name="stat-label-1"/>
+              <a:t>Roberta Calegari</a:t>
+            </a:r>
+            <a:endParaRPr lang="en-US" sz="1600" dirty="0"/>
+          </a:p>
+        </p:txBody>
+      </p:sp>
+      <p:sp>
+        <p:nvSpPr>
+          <p:cNvPr id="8" name="founder-inst-1"/>
           <p:cNvSpPr txBox="1"/>
           <p:nvPr/>
         </p:nvSpPr>
         <p:spPr>
           <a:xfrm>
-            <a:off x="868680" y="3794760"/>
-            <a:ext cx="2731922" cy="457200"/>
+            <a:off x="548640" y="3703320"/>
+            <a:ext cx="1962851" cy="457200"/>
           </a:xfrm>
           <a:prstGeom prst="rect">
             <a:avLst/>
@@ -6268,19 +6596,81 @@
           <a:bodyPr wrap="square" lIns="0" tIns="0" rIns="0" bIns="0" rtlCol="0" anchor="t"/>
           <a:lstStyle/>
           <a:p>
-            <a:pPr marL="0" indent="0">
-              <a:buNone/>
-            </a:pPr>
-            <a:r>
-              <a:rPr lang="en-US" sz="1100" kern="0" spc="200" dirty="0">
-                <a:solidFill>
-                  <a:schemeClr val="tx2"/>
+            <a:pPr indent="0" marL="0">
+              <a:spcAft>
+                <a:spcPts val="200"/>
+              </a:spcAft>
+              <a:buNone/>
+            </a:pPr>
+            <a:r>
+              <a:rPr lang="en-US" sz="800" spc="100" kern="0" dirty="0">
+                <a:solidFill>
+                  <a:schemeClr val="accent4"/>
                 </a:solidFill>
                 <a:latin typeface="JetBrains Mono" pitchFamily="34" charset="0"/>
                 <a:ea typeface="JetBrains Mono" pitchFamily="34" charset="-122"/>
                 <a:cs typeface="JetBrains Mono" pitchFamily="34" charset="-120"/>
               </a:rPr>
-              <a:t>PARTNER INSTITUTIONS</a:t>
+              <a:t>UNIVERSITY OF BOLOGNA</a:t>
+            </a:r>
+            <a:endParaRPr lang="en-US" sz="800" dirty="0"/>
+          </a:p>
+          <a:p>
+            <a:pPr indent="0" marL="0">
+              <a:spcAft>
+                <a:spcPts val="200"/>
+              </a:spcAft>
+              <a:buNone/>
+            </a:pPr>
+            <a:r>
+              <a:rPr lang="en-US" sz="800" spc="100" kern="0" dirty="0">
+                <a:solidFill>
+                  <a:schemeClr val="tx2"/>
+                </a:solidFill>
+                <a:latin typeface="JetBrains Mono" pitchFamily="34" charset="0"/>
+                <a:ea typeface="JetBrains Mono" pitchFamily="34" charset="-122"/>
+                <a:cs typeface="JetBrains Mono" pitchFamily="34" charset="-120"/>
+              </a:rPr>
+              <a:t>ALMA AI</a:t>
+            </a:r>
+            <a:endParaRPr lang="en-US" sz="800" dirty="0"/>
+          </a:p>
+        </p:txBody>
+      </p:sp>
+      <p:sp>
+        <p:nvSpPr>
+          <p:cNvPr id="9" name="founder-skills-1"/>
+          <p:cNvSpPr txBox="1"/>
+          <p:nvPr/>
+        </p:nvSpPr>
+        <p:spPr>
+          <a:xfrm>
+            <a:off x="548640" y="4206240"/>
+            <a:ext cx="1962851" cy="548640"/>
+          </a:xfrm>
+          <a:prstGeom prst="rect">
+            <a:avLst/>
+          </a:prstGeom>
+          <a:noFill/>
+          <a:ln/>
+        </p:spPr>
+        <p:txBody>
+          <a:bodyPr wrap="square" lIns="0" tIns="0" rIns="0" bIns="0" rtlCol="0" anchor="t"/>
+          <a:lstStyle/>
+          <a:p>
+            <a:pPr indent="0" marL="0">
+              <a:lnSpc>
+                <a:spcPct val="110000"/>
+              </a:lnSpc>
+              <a:buNone/>
+            </a:pPr>
+            <a:r>
+              <a:rPr lang="en-US" sz="1100" dirty="0">
+                <a:solidFill>
+                  <a:schemeClr val="tx1"/>
+                </a:solidFill>
+              </a:rPr>
+              <a:t>Trustworthy AI, fairness and AI compliance</a:t>
             </a:r>
             <a:endParaRPr lang="en-US" sz="1100" dirty="0"/>
           </a:p>
@@ -6288,48 +6678,109 @@
       </p:sp>
       <p:sp>
         <p:nvSpPr>
-          <p:cNvPr id="8" name="stat-card-2-shadow"/>
-          <p:cNvSpPr/>
-          <p:nvPr/>
-        </p:nvSpPr>
-        <p:spPr>
-          <a:xfrm>
-            <a:off x="4441850" y="2258568"/>
-            <a:ext cx="3372002" cy="2377440"/>
+          <p:cNvPr id="10" name="founder-rule-1"/>
+          <p:cNvSpPr/>
+          <p:nvPr/>
+        </p:nvSpPr>
+        <p:spPr>
+          <a:xfrm>
+            <a:off x="548640" y="4892040"/>
+            <a:ext cx="1962851" cy="0"/>
+          </a:xfrm>
+          <a:prstGeom prst="line">
+            <a:avLst/>
+          </a:prstGeom>
+          <a:noFill/>
+          <a:ln w="9525">
+            <a:solidFill>
+              <a:srgbClr val="E6E1DD"/>
+            </a:solidFill>
+            <a:prstDash val="solid"/>
+          </a:ln>
+        </p:spPr>
+      </p:sp>
+      <p:pic>
+        <p:nvPicPr>
+          <p:cNvPr id="11" name="founder-logo-1" descr="University of Bologna logo">    </p:cNvPr>
+          <p:cNvPicPr>
+            <a:picLocks noChangeAspect="1"/>
+          </p:cNvPicPr>
+          <p:nvPr/>
+        </p:nvPicPr>
+        <p:blipFill>
+          <a:blip r:embed="rId2"/>
+          <a:stretch>
+            <a:fillRect/>
+          </a:stretch>
+        </p:blipFill>
+        <p:spPr>
+          <a:xfrm>
+            <a:off x="548640" y="5029200"/>
+            <a:ext cx="992323" cy="731520"/>
+          </a:xfrm>
+          <a:prstGeom prst="rect">
+            <a:avLst/>
+          </a:prstGeom>
+        </p:spPr>
+      </p:pic>
+      <p:sp>
+        <p:nvSpPr>
+          <p:cNvPr id="12" name="founder-photo-shadow-2"/>
+          <p:cNvSpPr/>
+          <p:nvPr/>
+        </p:nvSpPr>
+        <p:spPr>
+          <a:xfrm>
+            <a:off x="2895539" y="1847088"/>
+            <a:ext cx="1417320" cy="1417320"/>
           </a:xfrm>
           <a:prstGeom prst="rect">
             <a:avLst/>
           </a:prstGeom>
           <a:solidFill>
-            <a:schemeClr val="accent1"/>
+            <a:schemeClr val="tx1"/>
           </a:solidFill>
           <a:ln/>
         </p:spPr>
-        <p:txBody>
-          <a:bodyPr/>
-          <a:lstStyle/>
-          <a:p>
-            <a:endParaRPr lang="it-IT"/>
-          </a:p>
-        </p:txBody>
-      </p:sp>
-      <p:sp>
-        <p:nvSpPr>
-          <p:cNvPr id="9" name="stat-card-2"/>
-          <p:cNvSpPr/>
-          <p:nvPr/>
-        </p:nvSpPr>
-        <p:spPr>
-          <a:xfrm>
-            <a:off x="4377842" y="2194560"/>
-            <a:ext cx="3372002" cy="2377440"/>
-          </a:xfrm>
-          <a:prstGeom prst="rect">
-            <a:avLst/>
-          </a:prstGeom>
-          <a:solidFill>
-            <a:schemeClr val="bg1"/>
-          </a:solidFill>
+      </p:sp>
+      <p:pic>
+        <p:nvPicPr>
+          <p:cNvPr id="13" name="founder-photo-2" descr="Michela Milano">    </p:cNvPr>
+          <p:cNvPicPr>
+            <a:picLocks noChangeAspect="1"/>
+          </p:cNvPicPr>
+          <p:nvPr/>
+        </p:nvPicPr>
+        <p:blipFill>
+          <a:blip r:embed="rId3"/>
+          <a:stretch>
+            <a:fillRect/>
+          </a:stretch>
+        </p:blipFill>
+        <p:spPr>
+          <a:xfrm>
+            <a:off x="2831531" y="1783080"/>
+            <a:ext cx="1417320" cy="1417320"/>
+          </a:xfrm>
+          <a:prstGeom prst="rect">
+            <a:avLst/>
+          </a:prstGeom>
+        </p:spPr>
+      </p:pic>
+      <p:sp>
+        <p:nvSpPr>
+          <p:cNvPr id="14" name="founder-photo-frame-2"/>
+          <p:cNvSpPr/>
+          <p:nvPr/>
+        </p:nvSpPr>
+        <p:spPr>
+          <a:xfrm>
+            <a:off x="2831531" y="1783080"/>
+            <a:ext cx="1417320" cy="1417320"/>
+          </a:xfrm>
+          <a:prstGeom prst="rect">
+            <a:avLst/>
+          </a:prstGeom>
           <a:ln w="25400">
             <a:solidFill>
               <a:schemeClr val="tx1"/>
@@ -6337,24 +6788,17 @@
             <a:prstDash val="solid"/>
           </a:ln>
         </p:spPr>
-        <p:txBody>
-          <a:bodyPr/>
-          <a:lstStyle/>
-          <a:p>
-            <a:endParaRPr lang="it-IT"/>
-          </a:p>
-        </p:txBody>
-      </p:sp>
-      <p:sp>
-        <p:nvSpPr>
-          <p:cNvPr id="10" name="stat-value-2"/>
+      </p:sp>
+      <p:sp>
+        <p:nvSpPr>
+          <p:cNvPr id="15" name="founder-name-2"/>
           <p:cNvSpPr txBox="1"/>
           <p:nvPr/>
         </p:nvSpPr>
         <p:spPr>
           <a:xfrm>
-            <a:off x="4697882" y="2468880"/>
-            <a:ext cx="2731922" cy="1188720"/>
+            <a:off x="2831531" y="3383280"/>
+            <a:ext cx="1962851" cy="292608"/>
           </a:xfrm>
           <a:prstGeom prst="rect">
             <a:avLst/>
@@ -6366,31 +6810,31 @@
           <a:bodyPr wrap="square" lIns="0" tIns="0" rIns="0" bIns="0" rtlCol="0" anchor="t"/>
           <a:lstStyle/>
           <a:p>
-            <a:pPr marL="0" indent="0">
-              <a:buNone/>
-            </a:pPr>
-            <a:r>
-              <a:rPr lang="en-US" sz="6600" b="1" kern="0" spc="-200" dirty="0">
+            <a:pPr indent="0" marL="0">
+              <a:buNone/>
+            </a:pPr>
+            <a:r>
+              <a:rPr lang="en-US" sz="1600" b="1" dirty="0">
                 <a:solidFill>
                   <a:schemeClr val="tx1"/>
                 </a:solidFill>
               </a:rPr>
-              <a:t>5</a:t>
-            </a:r>
-            <a:endParaRPr lang="en-US" sz="6600" dirty="0"/>
-          </a:p>
-        </p:txBody>
-      </p:sp>
-      <p:sp>
-        <p:nvSpPr>
-          <p:cNvPr id="11" name="stat-label-2"/>
+              <a:t>Michela Milano</a:t>
+            </a:r>
+            <a:endParaRPr lang="en-US" sz="1600" dirty="0"/>
+          </a:p>
+        </p:txBody>
+      </p:sp>
+      <p:sp>
+        <p:nvSpPr>
+          <p:cNvPr id="16" name="founder-inst-2"/>
           <p:cNvSpPr txBox="1"/>
           <p:nvPr/>
         </p:nvSpPr>
         <p:spPr>
           <a:xfrm>
-            <a:off x="4697882" y="3794760"/>
-            <a:ext cx="2731922" cy="457200"/>
+            <a:off x="2831531" y="3703320"/>
+            <a:ext cx="1962851" cy="457200"/>
           </a:xfrm>
           <a:prstGeom prst="rect">
             <a:avLst/>
@@ -6402,19 +6846,81 @@
           <a:bodyPr wrap="square" lIns="0" tIns="0" rIns="0" bIns="0" rtlCol="0" anchor="t"/>
           <a:lstStyle/>
           <a:p>
-            <a:pPr marL="0" indent="0">
-              <a:buNone/>
-            </a:pPr>
-            <a:r>
-              <a:rPr lang="en-US" sz="1100" kern="0" spc="200" dirty="0">
-                <a:solidFill>
-                  <a:schemeClr val="tx2"/>
+            <a:pPr indent="0" marL="0">
+              <a:spcAft>
+                <a:spcPts val="200"/>
+              </a:spcAft>
+              <a:buNone/>
+            </a:pPr>
+            <a:r>
+              <a:rPr lang="en-US" sz="800" spc="100" kern="0" dirty="0">
+                <a:solidFill>
+                  <a:schemeClr val="accent4"/>
                 </a:solidFill>
                 <a:latin typeface="JetBrains Mono" pitchFamily="34" charset="0"/>
                 <a:ea typeface="JetBrains Mono" pitchFamily="34" charset="-122"/>
                 <a:cs typeface="JetBrains Mono" pitchFamily="34" charset="-120"/>
               </a:rPr>
-              <a:t>RESEARCH PILLARS</a:t>
+              <a:t>FONDAZIONE BRUNO KESSLER</a:t>
+            </a:r>
+            <a:endParaRPr lang="en-US" sz="800" dirty="0"/>
+          </a:p>
+          <a:p>
+            <a:pPr indent="0" marL="0">
+              <a:spcAft>
+                <a:spcPts val="200"/>
+              </a:spcAft>
+              <a:buNone/>
+            </a:pPr>
+            <a:r>
+              <a:rPr lang="en-US" sz="800" spc="100" kern="0" dirty="0">
+                <a:solidFill>
+                  <a:schemeClr val="tx2"/>
+                </a:solidFill>
+                <a:latin typeface="JetBrains Mono" pitchFamily="34" charset="0"/>
+                <a:ea typeface="JetBrains Mono" pitchFamily="34" charset="-122"/>
+                <a:cs typeface="JetBrains Mono" pitchFamily="34" charset="-120"/>
+              </a:rPr>
+              <a:t>DIGITAL SOCIETY CENTER</a:t>
+            </a:r>
+            <a:endParaRPr lang="en-US" sz="800" dirty="0"/>
+          </a:p>
+        </p:txBody>
+      </p:sp>
+      <p:sp>
+        <p:nvSpPr>
+          <p:cNvPr id="17" name="founder-skills-2"/>
+          <p:cNvSpPr txBox="1"/>
+          <p:nvPr/>
+        </p:nvSpPr>
+        <p:spPr>
+          <a:xfrm>
+            <a:off x="2831531" y="4206240"/>
+            <a:ext cx="1962851" cy="548640"/>
+          </a:xfrm>
+          <a:prstGeom prst="rect">
+            <a:avLst/>
+          </a:prstGeom>
+          <a:noFill/>
+          <a:ln/>
+        </p:spPr>
+        <p:txBody>
+          <a:bodyPr wrap="square" lIns="0" tIns="0" rIns="0" bIns="0" rtlCol="0" anchor="t"/>
+          <a:lstStyle/>
+          <a:p>
+            <a:pPr indent="0" marL="0">
+              <a:lnSpc>
+                <a:spcPct val="110000"/>
+              </a:lnSpc>
+              <a:buNone/>
+            </a:pPr>
+            <a:r>
+              <a:rPr lang="en-US" sz="1100" dirty="0">
+                <a:solidFill>
+                  <a:schemeClr val="tx1"/>
+                </a:solidFill>
+              </a:rPr>
+              <a:t>Responsible AI engineering across the AI lifecycle</a:t>
             </a:r>
             <a:endParaRPr lang="en-US" sz="1100" dirty="0"/>
           </a:p>
@@ -6422,48 +6928,109 @@
       </p:sp>
       <p:sp>
         <p:nvSpPr>
-          <p:cNvPr id="12" name="stat-card-3-shadow"/>
-          <p:cNvSpPr/>
-          <p:nvPr/>
-        </p:nvSpPr>
-        <p:spPr>
-          <a:xfrm>
-            <a:off x="8271053" y="2258568"/>
-            <a:ext cx="3372002" cy="2377440"/>
+          <p:cNvPr id="18" name="founder-rule-2"/>
+          <p:cNvSpPr/>
+          <p:nvPr/>
+        </p:nvSpPr>
+        <p:spPr>
+          <a:xfrm>
+            <a:off x="2831531" y="4892040"/>
+            <a:ext cx="1962851" cy="0"/>
+          </a:xfrm>
+          <a:prstGeom prst="line">
+            <a:avLst/>
+          </a:prstGeom>
+          <a:noFill/>
+          <a:ln w="9525">
+            <a:solidFill>
+              <a:srgbClr val="E6E1DD"/>
+            </a:solidFill>
+            <a:prstDash val="solid"/>
+          </a:ln>
+        </p:spPr>
+      </p:sp>
+      <p:pic>
+        <p:nvPicPr>
+          <p:cNvPr id="19" name="founder-logo-2" descr="Fondazione Bruno Kessler logo">    </p:cNvPr>
+          <p:cNvPicPr>
+            <a:picLocks noChangeAspect="1"/>
+          </p:cNvPicPr>
+          <p:nvPr/>
+        </p:nvPicPr>
+        <p:blipFill>
+          <a:blip r:embed="rId4"/>
+          <a:stretch>
+            <a:fillRect/>
+          </a:stretch>
+        </p:blipFill>
+        <p:spPr>
+          <a:xfrm>
+            <a:off x="2831531" y="5257952"/>
+            <a:ext cx="1417320" cy="274015"/>
+          </a:xfrm>
+          <a:prstGeom prst="rect">
+            <a:avLst/>
+          </a:prstGeom>
+        </p:spPr>
+      </p:pic>
+      <p:sp>
+        <p:nvSpPr>
+          <p:cNvPr id="20" name="founder-photo-shadow-3"/>
+          <p:cNvSpPr/>
+          <p:nvPr/>
+        </p:nvSpPr>
+        <p:spPr>
+          <a:xfrm>
+            <a:off x="5178430" y="1847088"/>
+            <a:ext cx="1417320" cy="1417320"/>
           </a:xfrm>
           <a:prstGeom prst="rect">
             <a:avLst/>
           </a:prstGeom>
           <a:solidFill>
-            <a:schemeClr val="tx1"/>
+            <a:schemeClr val="accent3"/>
           </a:solidFill>
           <a:ln/>
         </p:spPr>
-        <p:txBody>
-          <a:bodyPr/>
-          <a:lstStyle/>
-          <a:p>
-            <a:endParaRPr lang="it-IT"/>
-          </a:p>
-        </p:txBody>
-      </p:sp>
-      <p:sp>
-        <p:nvSpPr>
-          <p:cNvPr id="13" name="stat-card-3"/>
-          <p:cNvSpPr/>
-          <p:nvPr/>
-        </p:nvSpPr>
-        <p:spPr>
-          <a:xfrm>
-            <a:off x="8207045" y="2194560"/>
-            <a:ext cx="3372002" cy="2377440"/>
-          </a:xfrm>
-          <a:prstGeom prst="rect">
-            <a:avLst/>
-          </a:prstGeom>
-          <a:solidFill>
-            <a:schemeClr val="bg1"/>
-          </a:solidFill>
+      </p:sp>
+      <p:pic>
+        <p:nvPicPr>
+          <p:cNvPr id="21" name="founder-photo-3" descr="Virginia Dignum">    </p:cNvPr>
+          <p:cNvPicPr>
+            <a:picLocks noChangeAspect="1"/>
+          </p:cNvPicPr>
+          <p:nvPr/>
+        </p:nvPicPr>
+        <p:blipFill>
+          <a:blip r:embed="rId5"/>
+          <a:stretch>
+            <a:fillRect/>
+          </a:stretch>
+        </p:blipFill>
+        <p:spPr>
+          <a:xfrm>
+            <a:off x="5114422" y="1783080"/>
+            <a:ext cx="1417320" cy="1417320"/>
+          </a:xfrm>
+          <a:prstGeom prst="rect">
+            <a:avLst/>
+          </a:prstGeom>
+        </p:spPr>
+      </p:pic>
+      <p:sp>
+        <p:nvSpPr>
+          <p:cNvPr id="22" name="founder-photo-frame-3"/>
+          <p:cNvSpPr/>
+          <p:nvPr/>
+        </p:nvSpPr>
+        <p:spPr>
+          <a:xfrm>
+            <a:off x="5114422" y="1783080"/>
+            <a:ext cx="1417320" cy="1417320"/>
+          </a:xfrm>
+          <a:prstGeom prst="rect">
+            <a:avLst/>
+          </a:prstGeom>
           <a:ln w="25400">
             <a:solidFill>
               <a:schemeClr val="tx1"/>
@@ -6471,24 +7038,17 @@
             <a:prstDash val="solid"/>
           </a:ln>
         </p:spPr>
-        <p:txBody>
-          <a:bodyPr/>
-          <a:lstStyle/>
-          <a:p>
-            <a:endParaRPr lang="it-IT"/>
-          </a:p>
-        </p:txBody>
-      </p:sp>
-      <p:sp>
-        <p:nvSpPr>
-          <p:cNvPr id="14" name="stat-value-3"/>
+      </p:sp>
+      <p:sp>
+        <p:nvSpPr>
+          <p:cNvPr id="23" name="founder-name-3"/>
           <p:cNvSpPr txBox="1"/>
           <p:nvPr/>
         </p:nvSpPr>
         <p:spPr>
           <a:xfrm>
-            <a:off x="8527085" y="2468880"/>
-            <a:ext cx="2731922" cy="1188720"/>
+            <a:off x="5114422" y="3383280"/>
+            <a:ext cx="1962851" cy="292608"/>
           </a:xfrm>
           <a:prstGeom prst="rect">
             <a:avLst/>
@@ -6500,31 +7060,31 @@
           <a:bodyPr wrap="square" lIns="0" tIns="0" rIns="0" bIns="0" rtlCol="0" anchor="t"/>
           <a:lstStyle/>
           <a:p>
-            <a:pPr marL="0" indent="0">
-              <a:buNone/>
-            </a:pPr>
-            <a:r>
-              <a:rPr lang="en-US" sz="6600" b="1" kern="0" spc="-200" dirty="0">
+            <a:pPr indent="0" marL="0">
+              <a:buNone/>
+            </a:pPr>
+            <a:r>
+              <a:rPr lang="en-US" sz="1600" b="1" dirty="0">
                 <a:solidFill>
                   <a:schemeClr val="tx1"/>
                 </a:solidFill>
               </a:rPr>
-              <a:t>30+</a:t>
-            </a:r>
-            <a:endParaRPr lang="en-US" sz="6600" dirty="0"/>
-          </a:p>
-        </p:txBody>
-      </p:sp>
-      <p:sp>
-        <p:nvSpPr>
-          <p:cNvPr id="15" name="stat-label-3"/>
+              <a:t>Virginia Dignum</a:t>
+            </a:r>
+            <a:endParaRPr lang="en-US" sz="1600" dirty="0"/>
+          </a:p>
+        </p:txBody>
+      </p:sp>
+      <p:sp>
+        <p:nvSpPr>
+          <p:cNvPr id="24" name="founder-inst-3"/>
           <p:cNvSpPr txBox="1"/>
           <p:nvPr/>
         </p:nvSpPr>
         <p:spPr>
           <a:xfrm>
-            <a:off x="8527085" y="3794760"/>
-            <a:ext cx="2731922" cy="457200"/>
+            <a:off x="5114422" y="3703320"/>
+            <a:ext cx="1962851" cy="457200"/>
           </a:xfrm>
           <a:prstGeom prst="rect">
             <a:avLst/>
@@ -6536,19 +7096,81 @@
           <a:bodyPr wrap="square" lIns="0" tIns="0" rIns="0" bIns="0" rtlCol="0" anchor="t"/>
           <a:lstStyle/>
           <a:p>
-            <a:pPr marL="0" indent="0">
-              <a:buNone/>
-            </a:pPr>
-            <a:r>
-              <a:rPr lang="en-US" sz="1100" kern="0" spc="200" dirty="0">
-                <a:solidFill>
-                  <a:schemeClr val="tx2"/>
+            <a:pPr indent="0" marL="0">
+              <a:spcAft>
+                <a:spcPts val="200"/>
+              </a:spcAft>
+              <a:buNone/>
+            </a:pPr>
+            <a:r>
+              <a:rPr lang="en-US" sz="800" spc="100" kern="0" dirty="0">
+                <a:solidFill>
+                  <a:schemeClr val="accent4"/>
                 </a:solidFill>
                 <a:latin typeface="JetBrains Mono" pitchFamily="34" charset="0"/>
                 <a:ea typeface="JetBrains Mono" pitchFamily="34" charset="-122"/>
                 <a:cs typeface="JetBrains Mono" pitchFamily="34" charset="-120"/>
               </a:rPr>
-              <a:t>EVENTS PLANNED FOR 2027</a:t>
+              <a:t>UMEÅ UNIVERSITY</a:t>
+            </a:r>
+            <a:endParaRPr lang="en-US" sz="800" dirty="0"/>
+          </a:p>
+          <a:p>
+            <a:pPr indent="0" marL="0">
+              <a:spcAft>
+                <a:spcPts val="200"/>
+              </a:spcAft>
+              <a:buNone/>
+            </a:pPr>
+            <a:r>
+              <a:rPr lang="en-US" sz="800" spc="100" kern="0" dirty="0">
+                <a:solidFill>
+                  <a:schemeClr val="tx2"/>
+                </a:solidFill>
+                <a:latin typeface="JetBrains Mono" pitchFamily="34" charset="0"/>
+                <a:ea typeface="JetBrains Mono" pitchFamily="34" charset="-122"/>
+                <a:cs typeface="JetBrains Mono" pitchFamily="34" charset="-120"/>
+              </a:rPr>
+              <a:t>AI POLICY LAB</a:t>
+            </a:r>
+            <a:endParaRPr lang="en-US" sz="800" dirty="0"/>
+          </a:p>
+        </p:txBody>
+      </p:sp>
+      <p:sp>
+        <p:nvSpPr>
+          <p:cNvPr id="25" name="founder-skills-3"/>
+          <p:cNvSpPr txBox="1"/>
+          <p:nvPr/>
+        </p:nvSpPr>
+        <p:spPr>
+          <a:xfrm>
+            <a:off x="5114422" y="4206240"/>
+            <a:ext cx="1962851" cy="548640"/>
+          </a:xfrm>
+          <a:prstGeom prst="rect">
+            <a:avLst/>
+          </a:prstGeom>
+          <a:noFill/>
+          <a:ln/>
+        </p:spPr>
+        <p:txBody>
+          <a:bodyPr wrap="square" lIns="0" tIns="0" rIns="0" bIns="0" rtlCol="0" anchor="t"/>
+          <a:lstStyle/>
+          <a:p>
+            <a:pPr indent="0" marL="0">
+              <a:lnSpc>
+                <a:spcPct val="110000"/>
+              </a:lnSpc>
+              <a:buNone/>
+            </a:pPr>
+            <a:r>
+              <a:rPr lang="en-US" sz="1100" dirty="0">
+                <a:solidFill>
+                  <a:schemeClr val="tx1"/>
+                </a:solidFill>
+              </a:rPr>
+              <a:t>Responsible AI governance, ethics and policy</a:t>
             </a:r>
             <a:endParaRPr lang="en-US" sz="1100" dirty="0"/>
           </a:p>
@@ -6556,40 +7178,551 @@
       </p:sp>
       <p:sp>
         <p:nvSpPr>
-          <p:cNvPr id="16" name="stat-note"/>
+          <p:cNvPr id="26" name="founder-rule-3"/>
+          <p:cNvSpPr/>
+          <p:nvPr/>
+        </p:nvSpPr>
+        <p:spPr>
+          <a:xfrm>
+            <a:off x="5114422" y="4892040"/>
+            <a:ext cx="1962851" cy="0"/>
+          </a:xfrm>
+          <a:prstGeom prst="line">
+            <a:avLst/>
+          </a:prstGeom>
+          <a:noFill/>
+          <a:ln w="9525">
+            <a:solidFill>
+              <a:srgbClr val="E6E1DD"/>
+            </a:solidFill>
+            <a:prstDash val="solid"/>
+          </a:ln>
+        </p:spPr>
+      </p:sp>
+      <p:pic>
+        <p:nvPicPr>
+          <p:cNvPr id="27" name="founder-logo-3" descr="Umeå University logo">    </p:cNvPr>
+          <p:cNvPicPr>
+            <a:picLocks noChangeAspect="1"/>
+          </p:cNvPicPr>
+          <p:nvPr/>
+        </p:nvPicPr>
+        <p:blipFill>
+          <a:blip r:embed="rId6"/>
+          <a:stretch>
+            <a:fillRect/>
+          </a:stretch>
+        </p:blipFill>
+        <p:spPr>
+          <a:xfrm>
+            <a:off x="5114422" y="5215088"/>
+            <a:ext cx="1417320" cy="359744"/>
+          </a:xfrm>
+          <a:prstGeom prst="rect">
+            <a:avLst/>
+          </a:prstGeom>
+        </p:spPr>
+      </p:pic>
+      <p:sp>
+        <p:nvSpPr>
+          <p:cNvPr id="28" name="founder-photo-shadow-4"/>
+          <p:cNvSpPr/>
+          <p:nvPr/>
+        </p:nvSpPr>
+        <p:spPr>
+          <a:xfrm>
+            <a:off x="7461321" y="1847088"/>
+            <a:ext cx="1417320" cy="1417320"/>
+          </a:xfrm>
+          <a:prstGeom prst="rect">
+            <a:avLst/>
+          </a:prstGeom>
+          <a:solidFill>
+            <a:schemeClr val="accent2"/>
+          </a:solidFill>
+          <a:ln/>
+        </p:spPr>
+      </p:sp>
+      <p:pic>
+        <p:nvPicPr>
+          <p:cNvPr id="29" name="founder-photo-4" descr="Payal Arora">    </p:cNvPr>
+          <p:cNvPicPr>
+            <a:picLocks noChangeAspect="1"/>
+          </p:cNvPicPr>
+          <p:nvPr/>
+        </p:nvPicPr>
+        <p:blipFill>
+          <a:blip r:embed="rId7"/>
+          <a:stretch>
+            <a:fillRect/>
+          </a:stretch>
+        </p:blipFill>
+        <p:spPr>
+          <a:xfrm>
+            <a:off x="7397313" y="1783080"/>
+            <a:ext cx="1417320" cy="1417320"/>
+          </a:xfrm>
+          <a:prstGeom prst="rect">
+            <a:avLst/>
+          </a:prstGeom>
+        </p:spPr>
+      </p:pic>
+      <p:sp>
+        <p:nvSpPr>
+          <p:cNvPr id="30" name="founder-photo-frame-4"/>
+          <p:cNvSpPr/>
+          <p:nvPr/>
+        </p:nvSpPr>
+        <p:spPr>
+          <a:xfrm>
+            <a:off x="7397313" y="1783080"/>
+            <a:ext cx="1417320" cy="1417320"/>
+          </a:xfrm>
+          <a:prstGeom prst="rect">
+            <a:avLst/>
+          </a:prstGeom>
+          <a:ln w="25400">
+            <a:solidFill>
+              <a:schemeClr val="tx1"/>
+            </a:solidFill>
+            <a:prstDash val="solid"/>
+          </a:ln>
+        </p:spPr>
+      </p:sp>
+      <p:sp>
+        <p:nvSpPr>
+          <p:cNvPr id="31" name="founder-name-4"/>
           <p:cNvSpPr txBox="1"/>
           <p:nvPr/>
         </p:nvSpPr>
         <p:spPr>
           <a:xfrm>
-            <a:off x="548640" y="5120640"/>
-            <a:ext cx="7315200" cy="365760"/>
-          </a:xfrm>
-          <a:prstGeom prst="rect">
-            <a:avLst/>
-          </a:prstGeom>
-          <a:noFill/>
-          <a:ln/>
-        </p:spPr>
-        <p:txBody>
-          <a:bodyPr wrap="square" lIns="0" tIns="0" rIns="0" bIns="0" rtlCol="0" anchor="ctr"/>
-          <a:lstStyle/>
-          <a:p>
-            <a:pPr marL="0" indent="0">
-              <a:buNone/>
-            </a:pPr>
-            <a:r>
-              <a:rPr lang="en-US" sz="1100" i="1" dirty="0">
+            <a:off x="7397313" y="3383280"/>
+            <a:ext cx="1962851" cy="292608"/>
+          </a:xfrm>
+          <a:prstGeom prst="rect">
+            <a:avLst/>
+          </a:prstGeom>
+          <a:noFill/>
+          <a:ln/>
+        </p:spPr>
+        <p:txBody>
+          <a:bodyPr wrap="square" lIns="0" tIns="0" rIns="0" bIns="0" rtlCol="0" anchor="t"/>
+          <a:lstStyle/>
+          <a:p>
+            <a:pPr indent="0" marL="0">
+              <a:buNone/>
+            </a:pPr>
+            <a:r>
+              <a:rPr lang="en-US" sz="1600" b="1" dirty="0">
+                <a:solidFill>
+                  <a:schemeClr val="tx1"/>
+                </a:solidFill>
+              </a:rPr>
+              <a:t>Payal Arora</a:t>
+            </a:r>
+            <a:endParaRPr lang="en-US" sz="1600" dirty="0"/>
+          </a:p>
+        </p:txBody>
+      </p:sp>
+      <p:sp>
+        <p:nvSpPr>
+          <p:cNvPr id="32" name="founder-inst-4"/>
+          <p:cNvSpPr txBox="1"/>
+          <p:nvPr/>
+        </p:nvSpPr>
+        <p:spPr>
+          <a:xfrm>
+            <a:off x="7397313" y="3703320"/>
+            <a:ext cx="1962851" cy="457200"/>
+          </a:xfrm>
+          <a:prstGeom prst="rect">
+            <a:avLst/>
+          </a:prstGeom>
+          <a:noFill/>
+          <a:ln/>
+        </p:spPr>
+        <p:txBody>
+          <a:bodyPr wrap="square" lIns="0" tIns="0" rIns="0" bIns="0" rtlCol="0" anchor="t"/>
+          <a:lstStyle/>
+          <a:p>
+            <a:pPr indent="0" marL="0">
+              <a:spcAft>
+                <a:spcPts val="200"/>
+              </a:spcAft>
+              <a:buNone/>
+            </a:pPr>
+            <a:r>
+              <a:rPr lang="en-US" sz="800" spc="100" kern="0" dirty="0">
+                <a:solidFill>
+                  <a:schemeClr val="accent4"/>
+                </a:solidFill>
+                <a:latin typeface="JetBrains Mono" pitchFamily="34" charset="0"/>
+                <a:ea typeface="JetBrains Mono" pitchFamily="34" charset="-122"/>
+                <a:cs typeface="JetBrains Mono" pitchFamily="34" charset="-120"/>
+              </a:rPr>
+              <a:t>UTRECHT UNIVERSITY</a:t>
+            </a:r>
+            <a:endParaRPr lang="en-US" sz="800" dirty="0"/>
+          </a:p>
+          <a:p>
+            <a:pPr indent="0" marL="0">
+              <a:spcAft>
+                <a:spcPts val="200"/>
+              </a:spcAft>
+              <a:buNone/>
+            </a:pPr>
+            <a:r>
+              <a:rPr lang="en-US" sz="800" spc="100" kern="0" dirty="0">
                 <a:solidFill>
                   <a:schemeClr val="tx2"/>
                 </a:solidFill>
-              </a:rPr>
-              <a:t>Placeholder figures, replace with real ones.</a:t>
+                <a:latin typeface="JetBrains Mono" pitchFamily="34" charset="0"/>
+                <a:ea typeface="JetBrains Mono" pitchFamily="34" charset="-122"/>
+                <a:cs typeface="JetBrains Mono" pitchFamily="34" charset="-120"/>
+              </a:rPr>
+              <a:t>INCLUSIVE AI LAB</a:t>
+            </a:r>
+            <a:endParaRPr lang="en-US" sz="800" dirty="0"/>
+          </a:p>
+        </p:txBody>
+      </p:sp>
+      <p:sp>
+        <p:nvSpPr>
+          <p:cNvPr id="33" name="founder-skills-4"/>
+          <p:cNvSpPr txBox="1"/>
+          <p:nvPr/>
+        </p:nvSpPr>
+        <p:spPr>
+          <a:xfrm>
+            <a:off x="7397313" y="4206240"/>
+            <a:ext cx="1962851" cy="548640"/>
+          </a:xfrm>
+          <a:prstGeom prst="rect">
+            <a:avLst/>
+          </a:prstGeom>
+          <a:noFill/>
+          <a:ln/>
+        </p:spPr>
+        <p:txBody>
+          <a:bodyPr wrap="square" lIns="0" tIns="0" rIns="0" bIns="0" rtlCol="0" anchor="t"/>
+          <a:lstStyle/>
+          <a:p>
+            <a:pPr indent="0" marL="0">
+              <a:lnSpc>
+                <a:spcPct val="110000"/>
+              </a:lnSpc>
+              <a:buNone/>
+            </a:pPr>
+            <a:r>
+              <a:rPr lang="en-US" sz="1100" dirty="0">
+                <a:solidFill>
+                  <a:schemeClr val="tx1"/>
+                </a:solidFill>
+              </a:rPr>
+              <a:t>Inclusive AI, digital inclusion and global perspectives</a:t>
             </a:r>
             <a:endParaRPr lang="en-US" sz="1100" dirty="0"/>
           </a:p>
         </p:txBody>
       </p:sp>
+      <p:sp>
+        <p:nvSpPr>
+          <p:cNvPr id="34" name="founder-rule-4"/>
+          <p:cNvSpPr/>
+          <p:nvPr/>
+        </p:nvSpPr>
+        <p:spPr>
+          <a:xfrm>
+            <a:off x="7397313" y="4892040"/>
+            <a:ext cx="1962851" cy="0"/>
+          </a:xfrm>
+          <a:prstGeom prst="line">
+            <a:avLst/>
+          </a:prstGeom>
+          <a:noFill/>
+          <a:ln w="9525">
+            <a:solidFill>
+              <a:srgbClr val="E6E1DD"/>
+            </a:solidFill>
+            <a:prstDash val="solid"/>
+          </a:ln>
+        </p:spPr>
+      </p:sp>
+      <p:pic>
+        <p:nvPicPr>
+          <p:cNvPr id="35" name="founder-logo-4" descr="Utrecht University logo">    </p:cNvPr>
+          <p:cNvPicPr>
+            <a:picLocks noChangeAspect="1"/>
+          </p:cNvPicPr>
+          <p:nvPr/>
+        </p:nvPicPr>
+        <p:blipFill>
+          <a:blip r:embed="rId8"/>
+          <a:stretch>
+            <a:fillRect/>
+          </a:stretch>
+        </p:blipFill>
+        <p:spPr>
+          <a:xfrm>
+            <a:off x="7397313" y="5029200"/>
+            <a:ext cx="666496" cy="731520"/>
+          </a:xfrm>
+          <a:prstGeom prst="rect">
+            <a:avLst/>
+          </a:prstGeom>
+        </p:spPr>
+      </p:pic>
+      <p:sp>
+        <p:nvSpPr>
+          <p:cNvPr id="36" name="founder-photo-shadow-5"/>
+          <p:cNvSpPr/>
+          <p:nvPr/>
+        </p:nvSpPr>
+        <p:spPr>
+          <a:xfrm>
+            <a:off x="9744212" y="1847088"/>
+            <a:ext cx="1417320" cy="1417320"/>
+          </a:xfrm>
+          <a:prstGeom prst="rect">
+            <a:avLst/>
+          </a:prstGeom>
+          <a:solidFill>
+            <a:schemeClr val="accent1"/>
+          </a:solidFill>
+          <a:ln/>
+        </p:spPr>
+      </p:sp>
+      <p:pic>
+        <p:nvPicPr>
+          <p:cNvPr id="37" name="founder-photo-5" descr="Catherine Régis">    </p:cNvPr>
+          <p:cNvPicPr>
+            <a:picLocks noChangeAspect="1"/>
+          </p:cNvPicPr>
+          <p:nvPr/>
+        </p:nvPicPr>
+        <p:blipFill>
+          <a:blip r:embed="rId9"/>
+          <a:stretch>
+            <a:fillRect/>
+          </a:stretch>
+        </p:blipFill>
+        <p:spPr>
+          <a:xfrm>
+            <a:off x="9680204" y="1783080"/>
+            <a:ext cx="1417320" cy="1417320"/>
+          </a:xfrm>
+          <a:prstGeom prst="rect">
+            <a:avLst/>
+          </a:prstGeom>
+        </p:spPr>
+      </p:pic>
+      <p:sp>
+        <p:nvSpPr>
+          <p:cNvPr id="38" name="founder-photo-frame-5"/>
+          <p:cNvSpPr/>
+          <p:nvPr/>
+        </p:nvSpPr>
+        <p:spPr>
+          <a:xfrm>
+            <a:off x="9680204" y="1783080"/>
+            <a:ext cx="1417320" cy="1417320"/>
+          </a:xfrm>
+          <a:prstGeom prst="rect">
+            <a:avLst/>
+          </a:prstGeom>
+          <a:ln w="25400">
+            <a:solidFill>
+              <a:schemeClr val="tx1"/>
+            </a:solidFill>
+            <a:prstDash val="solid"/>
+          </a:ln>
+        </p:spPr>
+      </p:sp>
+      <p:sp>
+        <p:nvSpPr>
+          <p:cNvPr id="39" name="founder-name-5"/>
+          <p:cNvSpPr txBox="1"/>
+          <p:nvPr/>
+        </p:nvSpPr>
+        <p:spPr>
+          <a:xfrm>
+            <a:off x="9680204" y="3383280"/>
+            <a:ext cx="1962851" cy="292608"/>
+          </a:xfrm>
+          <a:prstGeom prst="rect">
+            <a:avLst/>
+          </a:prstGeom>
+          <a:noFill/>
+          <a:ln/>
+        </p:spPr>
+        <p:txBody>
+          <a:bodyPr wrap="square" lIns="0" tIns="0" rIns="0" bIns="0" rtlCol="0" anchor="t"/>
+          <a:lstStyle/>
+          <a:p>
+            <a:pPr indent="0" marL="0">
+              <a:buNone/>
+            </a:pPr>
+            <a:r>
+              <a:rPr lang="en-US" sz="1600" b="1" dirty="0">
+                <a:solidFill>
+                  <a:schemeClr val="tx1"/>
+                </a:solidFill>
+              </a:rPr>
+              <a:t>Catherine Régis</a:t>
+            </a:r>
+            <a:endParaRPr lang="en-US" sz="1600" dirty="0"/>
+          </a:p>
+        </p:txBody>
+      </p:sp>
+      <p:sp>
+        <p:nvSpPr>
+          <p:cNvPr id="40" name="founder-inst-5"/>
+          <p:cNvSpPr txBox="1"/>
+          <p:nvPr/>
+        </p:nvSpPr>
+        <p:spPr>
+          <a:xfrm>
+            <a:off x="9680204" y="3703320"/>
+            <a:ext cx="1962851" cy="457200"/>
+          </a:xfrm>
+          <a:prstGeom prst="rect">
+            <a:avLst/>
+          </a:prstGeom>
+          <a:noFill/>
+          <a:ln/>
+        </p:spPr>
+        <p:txBody>
+          <a:bodyPr wrap="square" lIns="0" tIns="0" rIns="0" bIns="0" rtlCol="0" anchor="t"/>
+          <a:lstStyle/>
+          <a:p>
+            <a:pPr indent="0" marL="0">
+              <a:spcAft>
+                <a:spcPts val="200"/>
+              </a:spcAft>
+              <a:buNone/>
+            </a:pPr>
+            <a:r>
+              <a:rPr lang="en-US" sz="800" spc="100" kern="0" dirty="0">
+                <a:solidFill>
+                  <a:schemeClr val="accent4"/>
+                </a:solidFill>
+                <a:latin typeface="JetBrains Mono" pitchFamily="34" charset="0"/>
+                <a:ea typeface="JetBrains Mono" pitchFamily="34" charset="-122"/>
+                <a:cs typeface="JetBrains Mono" pitchFamily="34" charset="-120"/>
+              </a:rPr>
+              <a:t>UNIVERSITÉ DE MONTRÉAL</a:t>
+            </a:r>
+            <a:endParaRPr lang="en-US" sz="800" dirty="0"/>
+          </a:p>
+          <a:p>
+            <a:pPr indent="0" marL="0">
+              <a:spcAft>
+                <a:spcPts val="200"/>
+              </a:spcAft>
+              <a:buNone/>
+            </a:pPr>
+            <a:r>
+              <a:rPr lang="en-US" sz="800" spc="100" kern="0" dirty="0">
+                <a:solidFill>
+                  <a:schemeClr val="tx2"/>
+                </a:solidFill>
+                <a:latin typeface="JetBrains Mono" pitchFamily="34" charset="0"/>
+                <a:ea typeface="JetBrains Mono" pitchFamily="34" charset="-122"/>
+                <a:cs typeface="JetBrains Mono" pitchFamily="34" charset="-120"/>
+              </a:rPr>
+              <a:t>CENTRE DE RECHERCHE EN DROIT PUBLIC</a:t>
+            </a:r>
+            <a:endParaRPr lang="en-US" sz="800" dirty="0"/>
+          </a:p>
+        </p:txBody>
+      </p:sp>
+      <p:sp>
+        <p:nvSpPr>
+          <p:cNvPr id="41" name="founder-skills-5"/>
+          <p:cNvSpPr txBox="1"/>
+          <p:nvPr/>
+        </p:nvSpPr>
+        <p:spPr>
+          <a:xfrm>
+            <a:off x="9680204" y="4206240"/>
+            <a:ext cx="1962851" cy="548640"/>
+          </a:xfrm>
+          <a:prstGeom prst="rect">
+            <a:avLst/>
+          </a:prstGeom>
+          <a:noFill/>
+          <a:ln/>
+        </p:spPr>
+        <p:txBody>
+          <a:bodyPr wrap="square" lIns="0" tIns="0" rIns="0" bIns="0" rtlCol="0" anchor="t"/>
+          <a:lstStyle/>
+          <a:p>
+            <a:pPr indent="0" marL="0">
+              <a:lnSpc>
+                <a:spcPct val="110000"/>
+              </a:lnSpc>
+              <a:buNone/>
+            </a:pPr>
+            <a:r>
+              <a:rPr lang="en-US" sz="1100" dirty="0">
+                <a:solidFill>
+                  <a:schemeClr val="tx1"/>
+                </a:solidFill>
+              </a:rPr>
+              <a:t>AI regulation, policy and health-AI governance</a:t>
+            </a:r>
+            <a:endParaRPr lang="en-US" sz="1100" dirty="0"/>
+          </a:p>
+        </p:txBody>
+      </p:sp>
+      <p:sp>
+        <p:nvSpPr>
+          <p:cNvPr id="42" name="founder-rule-5"/>
+          <p:cNvSpPr/>
+          <p:nvPr/>
+        </p:nvSpPr>
+        <p:spPr>
+          <a:xfrm>
+            <a:off x="9680204" y="4892040"/>
+            <a:ext cx="1962851" cy="0"/>
+          </a:xfrm>
+          <a:prstGeom prst="line">
+            <a:avLst/>
+          </a:prstGeom>
+          <a:noFill/>
+          <a:ln w="9525">
+            <a:solidFill>
+              <a:srgbClr val="E6E1DD"/>
+            </a:solidFill>
+            <a:prstDash val="solid"/>
+          </a:ln>
+        </p:spPr>
+      </p:sp>
+      <p:pic>
+        <p:nvPicPr>
+          <p:cNvPr id="43" name="founder-logo-5" descr="Université de Montréal logo">    </p:cNvPr>
+          <p:cNvPicPr>
+            <a:picLocks noChangeAspect="1"/>
+          </p:cNvPicPr>
+          <p:nvPr/>
+        </p:nvPicPr>
+        <p:blipFill>
+          <a:blip r:embed="rId10"/>
+          <a:stretch>
+            <a:fillRect/>
+          </a:stretch>
+        </p:blipFill>
+        <p:spPr>
+          <a:xfrm>
+            <a:off x="9680204" y="5029200"/>
+            <a:ext cx="731520" cy="731520"/>
+          </a:xfrm>
+          <a:prstGeom prst="rect">
+            <a:avLst/>
+          </a:prstGeom>
+        </p:spPr>
+      </p:pic>
       <p:sp>
         <p:nvSpPr>
           <p:cNvPr id="25" name="Slide Number Placeholder 0"/>
@@ -6610,7 +7743,7 @@
           </a:prstGeom>
           <a:extLst>
             <a:ext uri="{C572A759-6A51-4108-AA02-DFA0A04FC94B}">
-              <ma14:wrappingTextBoxFlag xmlns:ma14="http://schemas.microsoft.com/office/mac/drawingml/2011/main" xmlns="" val="0"/>
+              <ma14:wrappingTextBoxFlag xmlns:ma14="http://schemas.microsoft.com/office/mac/drawingml/2011/main" val="0"/>
             </a:ext>
           </a:extLst>
         </p:spPr>
@@ -6631,7 +7764,7 @@
           <a:p>
             <a:pPr algn="r"/>
             <a:fld id="{F7021451-1387-4CA6-816F-3879F97B5CBC}" type="slidenum">
-              <a:rPr lang="en-US" b="0"/>
+              <a:rPr b="0" lang="en-US"/>
               <a:t>7</a:t>
             </a:fld>
             <a:endParaRPr lang="en-US"/>
@@ -6666,11 +7799,9 @@
       <p:sp>
         <p:nvSpPr>
           <p:cNvPr id="2" name="Text 1"/>
-          <p:cNvSpPr>
-            <a:spLocks noGrp="1"/>
-          </p:cNvSpPr>
-          <p:nvPr>
-            <p:ph type="body" idx="101" hasCustomPrompt="1"/>
+          <p:cNvSpPr/>
+          <p:nvPr>
+            <p:ph idx="101" type="body" hasCustomPrompt="1"/>
           </p:nvPr>
         </p:nvSpPr>
         <p:spPr>
@@ -6688,11 +7819,11 @@
           <a:bodyPr wrap="square" lIns="0" tIns="0" rIns="0" bIns="0" rtlCol="0" anchor="ctr"/>
           <a:lstStyle/>
           <a:p>
-            <a:pPr marL="0" indent="0">
-              <a:buNone/>
-            </a:pPr>
-            <a:r>
-              <a:rPr lang="en-US" sz="1000" kern="0" spc="300" dirty="0">
+            <a:pPr indent="0" marL="0">
+              <a:buNone/>
+            </a:pPr>
+            <a:r>
+              <a:rPr lang="en-US" sz="1000" spc="300" kern="0" dirty="0">
                 <a:solidFill>
                   <a:schemeClr val="accent4"/>
                 </a:solidFill>
@@ -6700,7 +7831,7 @@
                 <a:ea typeface="JetBrains Mono" pitchFamily="34" charset="-122"/>
                 <a:cs typeface="JetBrains Mono" pitchFamily="34" charset="-120"/>
               </a:rPr>
-              <a:t>DATA</a:t>
+              <a:t>KEY FIGURES</a:t>
             </a:r>
             <a:endParaRPr lang="en-US" sz="1000" dirty="0"/>
           </a:p>
@@ -6709,11 +7840,9 @@
       <p:sp>
         <p:nvSpPr>
           <p:cNvPr id="3" name="Text 1"/>
-          <p:cNvSpPr>
-            <a:spLocks noGrp="1"/>
-          </p:cNvSpPr>
-          <p:nvPr>
-            <p:ph type="title" idx="102" hasCustomPrompt="1"/>
+          <p:cNvSpPr/>
+          <p:nvPr>
+            <p:ph idx="102" type="title" hasCustomPrompt="1"/>
           </p:nvPr>
         </p:nvSpPr>
         <p:spPr>
@@ -6731,37 +7860,417 @@
           <a:bodyPr wrap="square" lIns="0" tIns="0" rIns="0" bIns="0" rtlCol="0" anchor="t"/>
           <a:lstStyle/>
           <a:p>
-            <a:pPr marL="0" indent="0" algn="l">
-              <a:buNone/>
-            </a:pPr>
-            <a:r>
-              <a:rPr lang="en-US" sz="3200" b="1" kern="0" spc="-50" dirty="0">
+            <a:pPr algn="l" indent="0" marL="0">
+              <a:buNone/>
+            </a:pPr>
+            <a:r>
+              <a:rPr lang="en-US" sz="3200" b="1" spc="-50" kern="0" dirty="0">
                 <a:solidFill>
                   <a:schemeClr val="tx1"/>
                 </a:solidFill>
               </a:rPr>
-              <a:t>Native charts in the site palette</a:t>
+              <a:t>Three numbers worth remembering</a:t>
             </a:r>
             <a:endParaRPr lang="en-US" sz="3200" dirty="0"/>
           </a:p>
         </p:txBody>
       </p:sp>
-      <p:graphicFrame>
-        <p:nvGraphicFramePr>
-          <p:cNvPr id="4" name="example-chart"/>
-          <p:cNvGraphicFramePr/>
-          <p:nvPr/>
-        </p:nvGraphicFramePr>
-        <p:xfrm>
-          <a:off x="548640" y="1828800"/>
-          <a:ext cx="11094415" cy="4114800"/>
-        </p:xfrm>
-        <a:graphic>
-          <a:graphicData uri="http://schemas.openxmlformats.org/drawingml/2006/chart">
-            <c:chart xmlns:c="http://schemas.openxmlformats.org/drawingml/2006/chart" xmlns:r="http://schemas.openxmlformats.org/officeDocument/2006/relationships" r:id="rId3"/>
-          </a:graphicData>
-        </a:graphic>
-      </p:graphicFrame>
+      <p:sp>
+        <p:nvSpPr>
+          <p:cNvPr id="4" name="stat-card-1-shadow"/>
+          <p:cNvSpPr/>
+          <p:nvPr/>
+        </p:nvSpPr>
+        <p:spPr>
+          <a:xfrm>
+            <a:off x="612648" y="2258568"/>
+            <a:ext cx="3372002" cy="2377440"/>
+          </a:xfrm>
+          <a:prstGeom prst="rect">
+            <a:avLst/>
+          </a:prstGeom>
+          <a:solidFill>
+            <a:schemeClr val="tx1"/>
+          </a:solidFill>
+          <a:ln/>
+        </p:spPr>
+      </p:sp>
+      <p:sp>
+        <p:nvSpPr>
+          <p:cNvPr id="5" name="stat-card-1"/>
+          <p:cNvSpPr/>
+          <p:nvPr/>
+        </p:nvSpPr>
+        <p:spPr>
+          <a:xfrm>
+            <a:off x="548640" y="2194560"/>
+            <a:ext cx="3372002" cy="2377440"/>
+          </a:xfrm>
+          <a:prstGeom prst="rect">
+            <a:avLst/>
+          </a:prstGeom>
+          <a:solidFill>
+            <a:schemeClr val="bg1"/>
+          </a:solidFill>
+          <a:ln w="25400">
+            <a:solidFill>
+              <a:schemeClr val="tx1"/>
+            </a:solidFill>
+            <a:prstDash val="solid"/>
+          </a:ln>
+        </p:spPr>
+      </p:sp>
+      <p:sp>
+        <p:nvSpPr>
+          <p:cNvPr id="6" name="stat-value-1"/>
+          <p:cNvSpPr txBox="1"/>
+          <p:nvPr/>
+        </p:nvSpPr>
+        <p:spPr>
+          <a:xfrm>
+            <a:off x="868680" y="2468880"/>
+            <a:ext cx="2731922" cy="1188720"/>
+          </a:xfrm>
+          <a:prstGeom prst="rect">
+            <a:avLst/>
+          </a:prstGeom>
+          <a:noFill/>
+          <a:ln/>
+        </p:spPr>
+        <p:txBody>
+          <a:bodyPr wrap="square" lIns="0" tIns="0" rIns="0" bIns="0" rtlCol="0" anchor="t"/>
+          <a:lstStyle/>
+          <a:p>
+            <a:pPr indent="0" marL="0">
+              <a:buNone/>
+            </a:pPr>
+            <a:r>
+              <a:rPr lang="en-US" sz="6600" b="1" spc="-200" kern="0" dirty="0">
+                <a:solidFill>
+                  <a:schemeClr val="tx1"/>
+                </a:solidFill>
+              </a:rPr>
+              <a:t>12</a:t>
+            </a:r>
+            <a:endParaRPr lang="en-US" sz="6600" dirty="0"/>
+          </a:p>
+        </p:txBody>
+      </p:sp>
+      <p:sp>
+        <p:nvSpPr>
+          <p:cNvPr id="7" name="stat-label-1"/>
+          <p:cNvSpPr txBox="1"/>
+          <p:nvPr/>
+        </p:nvSpPr>
+        <p:spPr>
+          <a:xfrm>
+            <a:off x="868680" y="3794760"/>
+            <a:ext cx="2731922" cy="457200"/>
+          </a:xfrm>
+          <a:prstGeom prst="rect">
+            <a:avLst/>
+          </a:prstGeom>
+          <a:noFill/>
+          <a:ln/>
+        </p:spPr>
+        <p:txBody>
+          <a:bodyPr wrap="square" lIns="0" tIns="0" rIns="0" bIns="0" rtlCol="0" anchor="t"/>
+          <a:lstStyle/>
+          <a:p>
+            <a:pPr indent="0" marL="0">
+              <a:buNone/>
+            </a:pPr>
+            <a:r>
+              <a:rPr lang="en-US" sz="1100" spc="200" kern="0" dirty="0">
+                <a:solidFill>
+                  <a:schemeClr val="tx2"/>
+                </a:solidFill>
+                <a:latin typeface="JetBrains Mono" pitchFamily="34" charset="0"/>
+                <a:ea typeface="JetBrains Mono" pitchFamily="34" charset="-122"/>
+                <a:cs typeface="JetBrains Mono" pitchFamily="34" charset="-120"/>
+              </a:rPr>
+              <a:t>PARTNER INSTITUTIONS</a:t>
+            </a:r>
+            <a:endParaRPr lang="en-US" sz="1100" dirty="0"/>
+          </a:p>
+        </p:txBody>
+      </p:sp>
+      <p:sp>
+        <p:nvSpPr>
+          <p:cNvPr id="8" name="stat-card-2-shadow"/>
+          <p:cNvSpPr/>
+          <p:nvPr/>
+        </p:nvSpPr>
+        <p:spPr>
+          <a:xfrm>
+            <a:off x="4441850" y="2258568"/>
+            <a:ext cx="3372002" cy="2377440"/>
+          </a:xfrm>
+          <a:prstGeom prst="rect">
+            <a:avLst/>
+          </a:prstGeom>
+          <a:solidFill>
+            <a:schemeClr val="accent1"/>
+          </a:solidFill>
+          <a:ln/>
+        </p:spPr>
+      </p:sp>
+      <p:sp>
+        <p:nvSpPr>
+          <p:cNvPr id="9" name="stat-card-2"/>
+          <p:cNvSpPr/>
+          <p:nvPr/>
+        </p:nvSpPr>
+        <p:spPr>
+          <a:xfrm>
+            <a:off x="4377842" y="2194560"/>
+            <a:ext cx="3372002" cy="2377440"/>
+          </a:xfrm>
+          <a:prstGeom prst="rect">
+            <a:avLst/>
+          </a:prstGeom>
+          <a:solidFill>
+            <a:schemeClr val="bg1"/>
+          </a:solidFill>
+          <a:ln w="25400">
+            <a:solidFill>
+              <a:schemeClr val="tx1"/>
+            </a:solidFill>
+            <a:prstDash val="solid"/>
+          </a:ln>
+        </p:spPr>
+      </p:sp>
+      <p:sp>
+        <p:nvSpPr>
+          <p:cNvPr id="10" name="stat-value-2"/>
+          <p:cNvSpPr txBox="1"/>
+          <p:nvPr/>
+        </p:nvSpPr>
+        <p:spPr>
+          <a:xfrm>
+            <a:off x="4697882" y="2468880"/>
+            <a:ext cx="2731922" cy="1188720"/>
+          </a:xfrm>
+          <a:prstGeom prst="rect">
+            <a:avLst/>
+          </a:prstGeom>
+          <a:noFill/>
+          <a:ln/>
+        </p:spPr>
+        <p:txBody>
+          <a:bodyPr wrap="square" lIns="0" tIns="0" rIns="0" bIns="0" rtlCol="0" anchor="t"/>
+          <a:lstStyle/>
+          <a:p>
+            <a:pPr indent="0" marL="0">
+              <a:buNone/>
+            </a:pPr>
+            <a:r>
+              <a:rPr lang="en-US" sz="6600" b="1" spc="-200" kern="0" dirty="0">
+                <a:solidFill>
+                  <a:schemeClr val="tx1"/>
+                </a:solidFill>
+              </a:rPr>
+              <a:t>5</a:t>
+            </a:r>
+            <a:endParaRPr lang="en-US" sz="6600" dirty="0"/>
+          </a:p>
+        </p:txBody>
+      </p:sp>
+      <p:sp>
+        <p:nvSpPr>
+          <p:cNvPr id="11" name="stat-label-2"/>
+          <p:cNvSpPr txBox="1"/>
+          <p:nvPr/>
+        </p:nvSpPr>
+        <p:spPr>
+          <a:xfrm>
+            <a:off x="4697882" y="3794760"/>
+            <a:ext cx="2731922" cy="457200"/>
+          </a:xfrm>
+          <a:prstGeom prst="rect">
+            <a:avLst/>
+          </a:prstGeom>
+          <a:noFill/>
+          <a:ln/>
+        </p:spPr>
+        <p:txBody>
+          <a:bodyPr wrap="square" lIns="0" tIns="0" rIns="0" bIns="0" rtlCol="0" anchor="t"/>
+          <a:lstStyle/>
+          <a:p>
+            <a:pPr indent="0" marL="0">
+              <a:buNone/>
+            </a:pPr>
+            <a:r>
+              <a:rPr lang="en-US" sz="1100" spc="200" kern="0" dirty="0">
+                <a:solidFill>
+                  <a:schemeClr val="tx2"/>
+                </a:solidFill>
+                <a:latin typeface="JetBrains Mono" pitchFamily="34" charset="0"/>
+                <a:ea typeface="JetBrains Mono" pitchFamily="34" charset="-122"/>
+                <a:cs typeface="JetBrains Mono" pitchFamily="34" charset="-120"/>
+              </a:rPr>
+              <a:t>RESEARCH PILLARS</a:t>
+            </a:r>
+            <a:endParaRPr lang="en-US" sz="1100" dirty="0"/>
+          </a:p>
+        </p:txBody>
+      </p:sp>
+      <p:sp>
+        <p:nvSpPr>
+          <p:cNvPr id="12" name="stat-card-3-shadow"/>
+          <p:cNvSpPr/>
+          <p:nvPr/>
+        </p:nvSpPr>
+        <p:spPr>
+          <a:xfrm>
+            <a:off x="8271053" y="2258568"/>
+            <a:ext cx="3372002" cy="2377440"/>
+          </a:xfrm>
+          <a:prstGeom prst="rect">
+            <a:avLst/>
+          </a:prstGeom>
+          <a:solidFill>
+            <a:schemeClr val="tx1"/>
+          </a:solidFill>
+          <a:ln/>
+        </p:spPr>
+      </p:sp>
+      <p:sp>
+        <p:nvSpPr>
+          <p:cNvPr id="13" name="stat-card-3"/>
+          <p:cNvSpPr/>
+          <p:nvPr/>
+        </p:nvSpPr>
+        <p:spPr>
+          <a:xfrm>
+            <a:off x="8207045" y="2194560"/>
+            <a:ext cx="3372002" cy="2377440"/>
+          </a:xfrm>
+          <a:prstGeom prst="rect">
+            <a:avLst/>
+          </a:prstGeom>
+          <a:solidFill>
+            <a:schemeClr val="bg1"/>
+          </a:solidFill>
+          <a:ln w="25400">
+            <a:solidFill>
+              <a:schemeClr val="tx1"/>
+            </a:solidFill>
+            <a:prstDash val="solid"/>
+          </a:ln>
+        </p:spPr>
+      </p:sp>
+      <p:sp>
+        <p:nvSpPr>
+          <p:cNvPr id="14" name="stat-value-3"/>
+          <p:cNvSpPr txBox="1"/>
+          <p:nvPr/>
+        </p:nvSpPr>
+        <p:spPr>
+          <a:xfrm>
+            <a:off x="8527085" y="2468880"/>
+            <a:ext cx="2731922" cy="1188720"/>
+          </a:xfrm>
+          <a:prstGeom prst="rect">
+            <a:avLst/>
+          </a:prstGeom>
+          <a:noFill/>
+          <a:ln/>
+        </p:spPr>
+        <p:txBody>
+          <a:bodyPr wrap="square" lIns="0" tIns="0" rIns="0" bIns="0" rtlCol="0" anchor="t"/>
+          <a:lstStyle/>
+          <a:p>
+            <a:pPr indent="0" marL="0">
+              <a:buNone/>
+            </a:pPr>
+            <a:r>
+              <a:rPr lang="en-US" sz="6600" b="1" spc="-200" kern="0" dirty="0">
+                <a:solidFill>
+                  <a:schemeClr val="tx1"/>
+                </a:solidFill>
+              </a:rPr>
+              <a:t>30+</a:t>
+            </a:r>
+            <a:endParaRPr lang="en-US" sz="6600" dirty="0"/>
+          </a:p>
+        </p:txBody>
+      </p:sp>
+      <p:sp>
+        <p:nvSpPr>
+          <p:cNvPr id="15" name="stat-label-3"/>
+          <p:cNvSpPr txBox="1"/>
+          <p:nvPr/>
+        </p:nvSpPr>
+        <p:spPr>
+          <a:xfrm>
+            <a:off x="8527085" y="3794760"/>
+            <a:ext cx="2731922" cy="457200"/>
+          </a:xfrm>
+          <a:prstGeom prst="rect">
+            <a:avLst/>
+          </a:prstGeom>
+          <a:noFill/>
+          <a:ln/>
+        </p:spPr>
+        <p:txBody>
+          <a:bodyPr wrap="square" lIns="0" tIns="0" rIns="0" bIns="0" rtlCol="0" anchor="t"/>
+          <a:lstStyle/>
+          <a:p>
+            <a:pPr indent="0" marL="0">
+              <a:buNone/>
+            </a:pPr>
+            <a:r>
+              <a:rPr lang="en-US" sz="1100" spc="200" kern="0" dirty="0">
+                <a:solidFill>
+                  <a:schemeClr val="tx2"/>
+                </a:solidFill>
+                <a:latin typeface="JetBrains Mono" pitchFamily="34" charset="0"/>
+                <a:ea typeface="JetBrains Mono" pitchFamily="34" charset="-122"/>
+                <a:cs typeface="JetBrains Mono" pitchFamily="34" charset="-120"/>
+              </a:rPr>
+              <a:t>EVENTS PLANNED FOR 2027</a:t>
+            </a:r>
+            <a:endParaRPr lang="en-US" sz="1100" dirty="0"/>
+          </a:p>
+        </p:txBody>
+      </p:sp>
+      <p:sp>
+        <p:nvSpPr>
+          <p:cNvPr id="16" name="stat-note"/>
+          <p:cNvSpPr txBox="1"/>
+          <p:nvPr/>
+        </p:nvSpPr>
+        <p:spPr>
+          <a:xfrm>
+            <a:off x="548640" y="5120640"/>
+            <a:ext cx="7315200" cy="365760"/>
+          </a:xfrm>
+          <a:prstGeom prst="rect">
+            <a:avLst/>
+          </a:prstGeom>
+          <a:noFill/>
+          <a:ln/>
+        </p:spPr>
+        <p:txBody>
+          <a:bodyPr wrap="square" lIns="0" tIns="0" rIns="0" bIns="0" rtlCol="0" anchor="ctr"/>
+          <a:lstStyle/>
+          <a:p>
+            <a:pPr indent="0" marL="0">
+              <a:buNone/>
+            </a:pPr>
+            <a:r>
+              <a:rPr lang="en-US" sz="1100" i="1" dirty="0">
+                <a:solidFill>
+                  <a:schemeClr val="tx2"/>
+                </a:solidFill>
+              </a:rPr>
+              <a:t>Placeholder figures, replace with real ones.</a:t>
+            </a:r>
+            <a:endParaRPr lang="en-US" sz="1100" dirty="0"/>
+          </a:p>
+        </p:txBody>
+      </p:sp>
       <p:sp>
         <p:nvSpPr>
           <p:cNvPr id="25" name="Slide Number Placeholder 0"/>
@@ -6782,7 +8291,7 @@
           </a:prstGeom>
           <a:extLst>
             <a:ext uri="{C572A759-6A51-4108-AA02-DFA0A04FC94B}">
-              <ma14:wrappingTextBoxFlag xmlns:ma14="http://schemas.microsoft.com/office/mac/drawingml/2011/main" xmlns="" val="0"/>
+              <ma14:wrappingTextBoxFlag xmlns:ma14="http://schemas.microsoft.com/office/mac/drawingml/2011/main" val="0"/>
             </a:ext>
           </a:extLst>
         </p:spPr>
@@ -6803,7 +8312,7 @@
           <a:p>
             <a:pPr algn="r"/>
             <a:fld id="{F7021451-1387-4CA6-816F-3879F97B5CBC}" type="slidenum">
-              <a:rPr lang="en-US" b="0"/>
+              <a:rPr b="0" lang="en-US"/>
               <a:t>8</a:t>
             </a:fld>
             <a:endParaRPr lang="en-US"/>
@@ -6838,109 +8347,98 @@
       <p:sp>
         <p:nvSpPr>
           <p:cNvPr id="2" name="Text 1"/>
-          <p:cNvSpPr>
-            <a:spLocks noGrp="1"/>
-          </p:cNvSpPr>
-          <p:nvPr>
-            <p:ph type="title" idx="102" hasCustomPrompt="1"/>
-          </p:nvPr>
-        </p:nvSpPr>
-        <p:spPr>
-          <a:xfrm>
-            <a:off x="548640" y="2834640"/>
-            <a:ext cx="9144000" cy="1188720"/>
-          </a:xfrm>
-          <a:prstGeom prst="rect">
-            <a:avLst/>
-          </a:prstGeom>
-          <a:noFill/>
-          <a:ln/>
-        </p:spPr>
-        <p:txBody>
-          <a:bodyPr wrap="square" lIns="0" tIns="0" rIns="0" bIns="0" rtlCol="0" anchor="t"/>
-          <a:lstStyle/>
-          <a:p>
-            <a:pPr marL="0" indent="0" algn="l">
-              <a:buNone/>
-            </a:pPr>
-            <a:r>
-              <a:rPr lang="en-US" sz="5400" b="1" kern="0" spc="-150" dirty="0">
-                <a:solidFill>
-                  <a:schemeClr val="bg2"/>
-                </a:solidFill>
-              </a:rPr>
-              <a:t>THANK YOU.</a:t>
-            </a:r>
-            <a:endParaRPr lang="en-US" sz="5400" dirty="0"/>
-          </a:p>
-        </p:txBody>
-      </p:sp>
-      <p:sp>
-        <p:nvSpPr>
-          <p:cNvPr id="3" name="Text 1"/>
-          <p:cNvSpPr>
-            <a:spLocks noGrp="1"/>
-          </p:cNvSpPr>
-          <p:nvPr>
-            <p:ph type="body" idx="103" hasCustomPrompt="1"/>
-          </p:nvPr>
-        </p:nvSpPr>
-        <p:spPr>
-          <a:xfrm>
-            <a:off x="548640" y="4114800"/>
-            <a:ext cx="8229600" cy="1280160"/>
-          </a:xfrm>
-          <a:prstGeom prst="rect">
-            <a:avLst/>
-          </a:prstGeom>
-          <a:noFill/>
-          <a:ln/>
-        </p:spPr>
-        <p:txBody>
-          <a:bodyPr wrap="square" lIns="0" tIns="0" rIns="0" bIns="0" rtlCol="0" anchor="t"/>
-          <a:lstStyle/>
-          <a:p>
-            <a:pPr marL="0" indent="0">
-              <a:spcAft>
-                <a:spcPts val="400"/>
-              </a:spcAft>
-              <a:buNone/>
-            </a:pPr>
-            <a:r>
-              <a:rPr lang="en-US" sz="1200" dirty="0">
-                <a:solidFill>
-                  <a:schemeClr val="accent1"/>
+          <p:cNvSpPr/>
+          <p:nvPr>
+            <p:ph idx="101" type="body" hasCustomPrompt="1"/>
+          </p:nvPr>
+        </p:nvSpPr>
+        <p:spPr>
+          <a:xfrm>
+            <a:off x="960120" y="411480"/>
+            <a:ext cx="7315200" cy="256032"/>
+          </a:xfrm>
+          <a:prstGeom prst="rect">
+            <a:avLst/>
+          </a:prstGeom>
+          <a:noFill/>
+          <a:ln/>
+        </p:spPr>
+        <p:txBody>
+          <a:bodyPr wrap="square" lIns="0" tIns="0" rIns="0" bIns="0" rtlCol="0" anchor="ctr"/>
+          <a:lstStyle/>
+          <a:p>
+            <a:pPr indent="0" marL="0">
+              <a:buNone/>
+            </a:pPr>
+            <a:r>
+              <a:rPr lang="en-US" sz="1000" spc="300" kern="0" dirty="0">
+                <a:solidFill>
+                  <a:schemeClr val="accent4"/>
                 </a:solidFill>
                 <a:latin typeface="JetBrains Mono" pitchFamily="34" charset="0"/>
                 <a:ea typeface="JetBrains Mono" pitchFamily="34" charset="-122"/>
                 <a:cs typeface="JetBrains Mono" pitchFamily="34" charset="-120"/>
               </a:rPr>
-              <a:t>name.surname@example.org</a:t>
-            </a:r>
-            <a:endParaRPr lang="en-US" sz="1200" dirty="0"/>
-          </a:p>
-          <a:p>
-            <a:pPr marL="0" indent="0">
-              <a:spcAft>
-                <a:spcPts val="400"/>
-              </a:spcAft>
-              <a:buNone/>
-            </a:pPr>
-            <a:r>
-              <a:rPr lang="en-US" sz="1200" dirty="0">
-                <a:solidFill>
-                  <a:schemeClr val="accent1"/>
-                </a:solidFill>
-                <a:latin typeface="JetBrains Mono" pitchFamily="34" charset="0"/>
-                <a:ea typeface="JetBrains Mono" pitchFamily="34" charset="-122"/>
-                <a:cs typeface="JetBrains Mono" pitchFamily="34" charset="-120"/>
-              </a:rPr>
-              <a:t>trust-ai.example.org</a:t>
-            </a:r>
-            <a:endParaRPr lang="en-US" sz="1200" dirty="0"/>
-          </a:p>
-        </p:txBody>
-      </p:sp>
+              <a:t>DATA</a:t>
+            </a:r>
+            <a:endParaRPr lang="en-US" sz="1000" dirty="0"/>
+          </a:p>
+        </p:txBody>
+      </p:sp>
+      <p:sp>
+        <p:nvSpPr>
+          <p:cNvPr id="3" name="Text 1"/>
+          <p:cNvSpPr/>
+          <p:nvPr>
+            <p:ph idx="102" type="title" hasCustomPrompt="1"/>
+          </p:nvPr>
+        </p:nvSpPr>
+        <p:spPr>
+          <a:xfrm>
+            <a:off x="548640" y="777240"/>
+            <a:ext cx="11094415" cy="822960"/>
+          </a:xfrm>
+          <a:prstGeom prst="rect">
+            <a:avLst/>
+          </a:prstGeom>
+          <a:noFill/>
+          <a:ln/>
+        </p:spPr>
+        <p:txBody>
+          <a:bodyPr wrap="square" lIns="0" tIns="0" rIns="0" bIns="0" rtlCol="0" anchor="t"/>
+          <a:lstStyle/>
+          <a:p>
+            <a:pPr algn="l" indent="0" marL="0">
+              <a:buNone/>
+            </a:pPr>
+            <a:r>
+              <a:rPr lang="en-US" sz="3200" b="1" spc="-50" kern="0" dirty="0">
+                <a:solidFill>
+                  <a:schemeClr val="tx1"/>
+                </a:solidFill>
+              </a:rPr>
+              <a:t>Native charts in the site palette</a:t>
+            </a:r>
+            <a:endParaRPr lang="en-US" sz="3200" dirty="0"/>
+          </a:p>
+        </p:txBody>
+      </p:sp>
+      <p:graphicFrame>
+        <p:nvGraphicFramePr>
+          <p:cNvPr id="4" name="example-chart" descr=""/>
+          <p:cNvGraphicFramePr/>
+          <p:nvPr/>
+        </p:nvGraphicFramePr>
+        <p:xfrm>
+          <a:off x="548640" y="1828800"/>
+          <a:ext cx="11094415" cy="4114800"/>
+        </p:xfrm>
+        <a:graphic xmlns:a="http://schemas.openxmlformats.org/drawingml/2006/main">
+          <a:graphicData uri="http://schemas.openxmlformats.org/drawingml/2006/chart">
+            <c:chart xmlns:c="http://schemas.openxmlformats.org/drawingml/2006/chart" r:id="rId1"/>
+          </a:graphicData>
+        </a:graphic>
+      </p:graphicFrame>
       <p:sp>
         <p:nvSpPr>
           <p:cNvPr id="25" name="Slide Number Placeholder 0"/>
@@ -6961,7 +8459,7 @@
           </a:prstGeom>
           <a:extLst>
             <a:ext uri="{C572A759-6A51-4108-AA02-DFA0A04FC94B}">
-              <ma14:wrappingTextBoxFlag xmlns:ma14="http://schemas.microsoft.com/office/mac/drawingml/2011/main" xmlns="" val="0"/>
+              <ma14:wrappingTextBoxFlag xmlns:ma14="http://schemas.microsoft.com/office/mac/drawingml/2011/main" val="0"/>
             </a:ext>
           </a:extLst>
         </p:spPr>
@@ -6971,7 +8469,7 @@
             <a:lvl1pPr>
               <a:defRPr sz="900">
                 <a:solidFill>
-                  <a:srgbClr val="FFF6EF"/>
+                  <a:srgbClr val="6B6668"/>
                 </a:solidFill>
                 <a:latin typeface="JetBrains Mono"/>
                 <a:ea typeface="JetBrains Mono"/>
@@ -6982,7 +8480,7 @@
           <a:p>
             <a:pPr algn="r"/>
             <a:fld id="{F7021451-1387-4CA6-816F-3879F97B5CBC}" type="slidenum">
-              <a:rPr lang="en-US" b="0"/>
+              <a:rPr b="0" lang="en-US"/>
               <a:t>9</a:t>
             </a:fld>
             <a:endParaRPr lang="en-US"/>
@@ -7290,319 +8788,4 @@
     </a:ext>
   </a:extLst>
 </a:theme>
-</file>
-
-<file path=ppt/theme/theme2.xml><?xml version="1.0" encoding="utf-8"?>
-<a:theme xmlns:a="http://schemas.openxmlformats.org/drawingml/2006/main" name="Tema di Office">
-  <a:themeElements>
-    <a:clrScheme name="Office">
-      <a:dk1>
-        <a:sysClr val="windowText" lastClr="000000"/>
-      </a:dk1>
-      <a:lt1>
-        <a:sysClr val="window" lastClr="FFFFFF"/>
-      </a:lt1>
-      <a:dk2>
-        <a:srgbClr val="0E2841"/>
-      </a:dk2>
-      <a:lt2>
-        <a:srgbClr val="E8E8E8"/>
-      </a:lt2>
-      <a:accent1>
-        <a:srgbClr val="156082"/>
-      </a:accent1>
-      <a:accent2>
-        <a:srgbClr val="E97132"/>
-      </a:accent2>
-      <a:accent3>
-        <a:srgbClr val="196B24"/>
-      </a:accent3>
-      <a:accent4>
-        <a:srgbClr val="0F9ED5"/>
-      </a:accent4>
-      <a:accent5>
-        <a:srgbClr val="A02B93"/>
-      </a:accent5>
-      <a:accent6>
-        <a:srgbClr val="4EA72E"/>
-      </a:accent6>
-      <a:hlink>
-        <a:srgbClr val="467886"/>
-      </a:hlink>
-      <a:folHlink>
-        <a:srgbClr val="96607D"/>
-      </a:folHlink>
-    </a:clrScheme>
-    <a:fontScheme name="Office">
-      <a:majorFont>
-        <a:latin typeface="Aptos Display" panose="02110004020202020204"/>
-        <a:ea typeface=""/>
-        <a:cs typeface=""/>
-        <a:font script="Jpan" typeface="游ゴシック Light"/>
-        <a:font script="Hang" typeface="맑은 고딕"/>
-        <a:font script="Hans" typeface="等线 Light"/>
-        <a:font script="Hant" typeface="新細明體"/>
-        <a:font script="Arab" typeface="Times New Roman"/>
-        <a:font script="Hebr" typeface="Times New Roman"/>
-        <a:font script="Thai" typeface="Angsana New"/>
-        <a:font script="Ethi" typeface="Nyala"/>
-        <a:font script="Beng" typeface="Vrinda"/>
-        <a:font script="Gujr" typeface="Shruti"/>
-        <a:font script="Khmr" typeface="MoolBoran"/>
-        <a:font script="Knda" typeface="Tunga"/>
-        <a:font script="Guru" typeface="Raavi"/>
-        <a:font script="Cans" typeface="Euphemia"/>
-        <a:font script="Cher" typeface="Plantagenet Cherokee"/>
-        <a:font script="Yiii" typeface="Microsoft Yi Baiti"/>
-        <a:font script="Tibt" typeface="Microsoft Himalaya"/>
-        <a:font script="Thaa" typeface="MV Boli"/>
-        <a:font script="Deva" typeface="Mangal"/>
-        <a:font script="Telu" typeface="Gautami"/>
-        <a:font script="Taml" typeface="Latha"/>
-        <a:font script="Syrc" typeface="Estrangelo Edessa"/>
-        <a:font script="Orya" typeface="Kalinga"/>
-        <a:font script="Mlym" typeface="Kartika"/>
-        <a:font script="Laoo" typeface="DokChampa"/>
-        <a:font script="Sinh" typeface="Iskoola Pota"/>
-        <a:font script="Mong" typeface="Mongolian Baiti"/>
-        <a:font script="Viet" typeface="Times New Roman"/>
-        <a:font script="Uigh" typeface="Microsoft Uighur"/>
-        <a:font script="Geor" typeface="Sylfaen"/>
-        <a:font script="Armn" typeface="Arial"/>
-        <a:font script="Bugi" typeface="Leelawadee UI"/>
-        <a:font script="Bopo" typeface="Microsoft JhengHei"/>
-        <a:font script="Java" typeface="Javanese Text"/>
-        <a:font script="Lisu" typeface="Segoe UI"/>
-        <a:font script="Mymr" typeface="Myanmar Text"/>
-        <a:font script="Nkoo" typeface="Ebrima"/>
-        <a:font script="Olck" typeface="Nirmala UI"/>
-        <a:font script="Osma" typeface="Ebrima"/>
-        <a:font script="Phag" typeface="Phagspa"/>
-        <a:font script="Syrn" typeface="Estrangelo Edessa"/>
-        <a:font script="Syrj" typeface="Estrangelo Edessa"/>
-        <a:font script="Syre" typeface="Estrangelo Edessa"/>
-        <a:font script="Sora" typeface="Nirmala UI"/>
-        <a:font script="Tale" typeface="Microsoft Tai Le"/>
-        <a:font script="Talu" typeface="Microsoft New Tai Lue"/>
-        <a:font script="Tfng" typeface="Ebrima"/>
-      </a:majorFont>
-      <a:minorFont>
-        <a:latin typeface="Aptos" panose="02110004020202020204"/>
-        <a:ea typeface=""/>
-        <a:cs typeface=""/>
-        <a:font script="Jpan" typeface="游ゴシック"/>
-        <a:font script="Hang" typeface="맑은 고딕"/>
-        <a:font script="Hans" typeface="等线"/>
-        <a:font script="Hant" typeface="新細明體"/>
-        <a:font script="Arab" typeface="Arial"/>
-        <a:font script="Hebr" typeface="Arial"/>
-        <a:font script="Thai" typeface="Cordia New"/>
-        <a:font script="Ethi" typeface="Nyala"/>
-        <a:font script="Beng" typeface="Vrinda"/>
-        <a:font script="Gujr" typeface="Shruti"/>
-        <a:font script="Khmr" typeface="DaunPenh"/>
-        <a:font script="Knda" typeface="Tunga"/>
-        <a:font script="Guru" typeface="Raavi"/>
-        <a:font script="Cans" typeface="Euphemia"/>
-        <a:font script="Cher" typeface="Plantagenet Cherokee"/>
-        <a:font script="Yiii" typeface="Microsoft Yi Baiti"/>
-        <a:font script="Tibt" typeface="Microsoft Himalaya"/>
-        <a:font script="Thaa" typeface="MV Boli"/>
-        <a:font script="Deva" typeface="Mangal"/>
-        <a:font script="Telu" typeface="Gautami"/>
-        <a:font script="Taml" typeface="Latha"/>
-        <a:font script="Syrc" typeface="Estrangelo Edessa"/>
-        <a:font script="Orya" typeface="Kalinga"/>
-        <a:font script="Mlym" typeface="Kartika"/>
-        <a:font script="Laoo" typeface="DokChampa"/>
-        <a:font script="Sinh" typeface="Iskoola Pota"/>
-        <a:font script="Mong" typeface="Mongolian Baiti"/>
-        <a:font script="Viet" typeface="Arial"/>
-        <a:font script="Uigh" typeface="Microsoft Uighur"/>
-        <a:font script="Geor" typeface="Sylfaen"/>
-        <a:font script="Armn" typeface="Arial"/>
-        <a:font script="Bugi" typeface="Leelawadee UI"/>
-        <a:font script="Bopo" typeface="Microsoft JhengHei"/>
-        <a:font script="Java" typeface="Javanese Text"/>
-        <a:font script="Lisu" typeface="Segoe UI"/>
-        <a:font script="Mymr" typeface="Myanmar Text"/>
-        <a:font script="Nkoo" typeface="Ebrima"/>
-        <a:font script="Olck" typeface="Nirmala UI"/>
-        <a:font script="Osma" typeface="Ebrima"/>
-        <a:font script="Phag" typeface="Phagspa"/>
-        <a:font script="Syrn" typeface="Estrangelo Edessa"/>
-        <a:font script="Syrj" typeface="Estrangelo Edessa"/>
-        <a:font script="Syre" typeface="Estrangelo Edessa"/>
-        <a:font script="Sora" typeface="Nirmala UI"/>
-        <a:font script="Tale" typeface="Microsoft Tai Le"/>
-        <a:font script="Talu" typeface="Microsoft New Tai Lue"/>
-        <a:font script="Tfng" typeface="Ebrima"/>
-      </a:minorFont>
-    </a:fontScheme>
-    <a:fmtScheme name="Office">
-      <a:fillStyleLst>
-        <a:solidFill>
-          <a:schemeClr val="phClr"/>
-        </a:solidFill>
-        <a:gradFill rotWithShape="1">
-          <a:gsLst>
-            <a:gs pos="0">
-              <a:schemeClr val="phClr">
-                <a:lumMod val="110000"/>
-                <a:satMod val="105000"/>
-                <a:tint val="67000"/>
-              </a:schemeClr>
-            </a:gs>
-            <a:gs pos="50000">
-              <a:schemeClr val="phClr">
-                <a:lumMod val="105000"/>
-                <a:satMod val="103000"/>
-                <a:tint val="73000"/>
-              </a:schemeClr>
-            </a:gs>
-            <a:gs pos="100000">
-              <a:schemeClr val="phClr">
-                <a:lumMod val="105000"/>
-                <a:satMod val="109000"/>
-                <a:tint val="81000"/>
-              </a:schemeClr>
-            </a:gs>
-          </a:gsLst>
-          <a:lin ang="5400000" scaled="0"/>
-        </a:gradFill>
-        <a:gradFill rotWithShape="1">
-          <a:gsLst>
-            <a:gs pos="0">
-              <a:schemeClr val="phClr">
-                <a:satMod val="103000"/>
-                <a:lumMod val="102000"/>
-                <a:tint val="94000"/>
-              </a:schemeClr>
-            </a:gs>
-            <a:gs pos="50000">
-              <a:schemeClr val="phClr">
-                <a:satMod val="110000"/>
-                <a:lumMod val="100000"/>
-                <a:shade val="100000"/>
-              </a:schemeClr>
-            </a:gs>
-            <a:gs pos="100000">
-              <a:schemeClr val="phClr">
-                <a:lumMod val="99000"/>
-                <a:satMod val="120000"/>
-                <a:shade val="78000"/>
-              </a:schemeClr>
-            </a:gs>
-          </a:gsLst>
-          <a:lin ang="5400000" scaled="0"/>
-        </a:gradFill>
-      </a:fillStyleLst>
-      <a:lnStyleLst>
-        <a:ln w="12700" cap="flat" cmpd="sng" algn="ctr">
-          <a:solidFill>
-            <a:schemeClr val="phClr"/>
-          </a:solidFill>
-          <a:prstDash val="solid"/>
-          <a:miter lim="800000"/>
-        </a:ln>
-        <a:ln w="19050" cap="flat" cmpd="sng" algn="ctr">
-          <a:solidFill>
-            <a:schemeClr val="phClr"/>
-          </a:solidFill>
-          <a:prstDash val="solid"/>
-          <a:miter lim="800000"/>
-        </a:ln>
-        <a:ln w="25400" cap="flat" cmpd="sng" algn="ctr">
-          <a:solidFill>
-            <a:schemeClr val="phClr"/>
-          </a:solidFill>
-          <a:prstDash val="solid"/>
-          <a:miter lim="800000"/>
-        </a:ln>
-      </a:lnStyleLst>
-      <a:effectStyleLst>
-        <a:effectStyle>
-          <a:effectLst/>
-        </a:effectStyle>
-        <a:effectStyle>
-          <a:effectLst/>
-        </a:effectStyle>
-        <a:effectStyle>
-          <a:effectLst>
-            <a:outerShdw blurRad="57150" dist="19050" dir="5400000" algn="ctr" rotWithShape="0">
-              <a:srgbClr val="000000">
-                <a:alpha val="63000"/>
-              </a:srgbClr>
-            </a:outerShdw>
-          </a:effectLst>
-        </a:effectStyle>
-      </a:effectStyleLst>
-      <a:bgFillStyleLst>
-        <a:solidFill>
-          <a:schemeClr val="phClr"/>
-        </a:solidFill>
-        <a:solidFill>
-          <a:schemeClr val="phClr">
-            <a:tint val="95000"/>
-            <a:satMod val="170000"/>
-          </a:schemeClr>
-        </a:solidFill>
-        <a:gradFill rotWithShape="1">
-          <a:gsLst>
-            <a:gs pos="0">
-              <a:schemeClr val="phClr">
-                <a:tint val="93000"/>
-                <a:satMod val="150000"/>
-                <a:shade val="98000"/>
-                <a:lumMod val="102000"/>
-              </a:schemeClr>
-            </a:gs>
-            <a:gs pos="50000">
-              <a:schemeClr val="phClr">
-                <a:tint val="98000"/>
-                <a:satMod val="130000"/>
-                <a:shade val="90000"/>
-                <a:lumMod val="103000"/>
-              </a:schemeClr>
-            </a:gs>
-            <a:gs pos="100000">
-              <a:schemeClr val="phClr">
-                <a:shade val="63000"/>
-                <a:satMod val="120000"/>
-              </a:schemeClr>
-            </a:gs>
-          </a:gsLst>
-          <a:lin ang="5400000" scaled="0"/>
-        </a:gradFill>
-      </a:bgFillStyleLst>
-    </a:fmtScheme>
-  </a:themeElements>
-  <a:objectDefaults>
-    <a:lnDef>
-      <a:spPr/>
-      <a:bodyPr/>
-      <a:lstStyle/>
-      <a:style>
-        <a:lnRef idx="2">
-          <a:schemeClr val="accent1"/>
-        </a:lnRef>
-        <a:fillRef idx="0">
-          <a:schemeClr val="accent1"/>
-        </a:fillRef>
-        <a:effectRef idx="1">
-          <a:schemeClr val="accent1"/>
-        </a:effectRef>
-        <a:fontRef idx="minor">
-          <a:schemeClr val="tx1"/>
-        </a:fontRef>
-      </a:style>
-    </a:lnDef>
-  </a:objectDefaults>
-  <a:extraClrSchemeLst/>
-  <a:extLst>
-    <a:ext uri="{05A4C25C-085E-4340-85A3-A5531E510DB2}">
-      <thm15:themeFamily xmlns:thm15="http://schemas.microsoft.com/office/thememl/2012/main" name="Office Theme" id="{2E142A2C-CD16-42D6-873A-C26D2A0506FA}" vid="{1BDDFF52-6CD6-40A5-AB3C-68EB2F1E4D0A}"/>
-    </a:ext>
-  </a:extLst>
-</a:theme>
 </file>